--- a/docs/项目讲解.pptx
+++ b/docs/项目讲解.pptx
@@ -3587,7 +3587,7 @@
               </a:defRPr>
             </a:pPr>
             <a:r>
-              <a:t>■ 高德地图(1 key 4接口)</a:t>
+              <a:t>■ 高德地图(1 key 6能力)</a:t>
             </a:r>
           </a:p>
           <a:p>
@@ -3602,7 +3602,7 @@
               </a:defRPr>
             </a:pPr>
             <a:r>
-              <a:t>    地理编码/POI搜索/路径规划/天气，真实数据</a:t>
+              <a:t>    地理编码/POI搜索/路径规划/天气/营业时间/景点图片，全真实</a:t>
             </a:r>
           </a:p>
           <a:p>
@@ -3632,7 +3632,7 @@
               </a:defRPr>
             </a:pPr>
             <a:r>
-              <a:t>    qwen3.7-plus，8 Agent 推理 + 记忆抽取</a:t>
+              <a:t>    qwen3.7-flash，8 Agent 推理 + 记忆抽取</a:t>
             </a:r>
           </a:p>
           <a:p>
@@ -3844,7 +3844,7 @@
               <a:spcAft>
                 <a:spcPts val="200"/>
               </a:spcAft>
-              <a:defRPr b="1" sz="1400">
+              <a:defRPr b="1" sz="1300">
                 <a:solidFill>
                   <a:srgbClr val="1677FF"/>
                 </a:solidFill>
@@ -3859,7 +3859,7 @@
               <a:spcAft>
                 <a:spcPts val="800"/>
               </a:spcAft>
-              <a:defRPr sz="1200">
+              <a:defRPr sz="1100">
                 <a:solidFill>
                   <a:srgbClr val="1F2D3D"/>
                 </a:solidFill>
@@ -3874,7 +3874,7 @@
               <a:spcAft>
                 <a:spcPts val="200"/>
               </a:spcAft>
-              <a:defRPr b="1" sz="1400">
+              <a:defRPr b="1" sz="1300">
                 <a:solidFill>
                   <a:srgbClr val="1677FF"/>
                 </a:solidFill>
@@ -3889,7 +3889,7 @@
               <a:spcAft>
                 <a:spcPts val="800"/>
               </a:spcAft>
-              <a:defRPr sz="1200">
+              <a:defRPr sz="1100">
                 <a:solidFill>
                   <a:srgbClr val="1F2D3D"/>
                 </a:solidFill>
@@ -3904,7 +3904,7 @@
               <a:spcAft>
                 <a:spcPts val="200"/>
               </a:spcAft>
-              <a:defRPr b="1" sz="1400">
+              <a:defRPr b="1" sz="1300">
                 <a:solidFill>
                   <a:srgbClr val="1677FF"/>
                 </a:solidFill>
@@ -3919,7 +3919,7 @@
               <a:spcAft>
                 <a:spcPts val="800"/>
               </a:spcAft>
-              <a:defRPr sz="1200">
+              <a:defRPr sz="1100">
                 <a:solidFill>
                   <a:srgbClr val="1F2D3D"/>
                 </a:solidFill>
@@ -3934,7 +3934,7 @@
               <a:spcAft>
                 <a:spcPts val="200"/>
               </a:spcAft>
-              <a:defRPr b="1" sz="1400">
+              <a:defRPr b="1" sz="1300">
                 <a:solidFill>
                   <a:srgbClr val="1677FF"/>
                 </a:solidFill>
@@ -3949,22 +3949,22 @@
               <a:spcAft>
                 <a:spcPts val="800"/>
               </a:spcAft>
-              <a:defRPr sz="1200">
-                <a:solidFill>
-                  <a:srgbClr val="1F2D3D"/>
-                </a:solidFill>
-              </a:defRPr>
-            </a:pPr>
-            <a:r>
-              <a:t>    Agent流程可视化 + 每日行程时间线 + 报告Markdown渲染</a:t>
-            </a:r>
-          </a:p>
-          <a:p>
-            <a:pPr>
-              <a:spcAft>
-                <a:spcPts val="200"/>
-              </a:spcAft>
-              <a:defRPr b="1" sz="1400">
+              <a:defRPr sz="1100">
+                <a:solidFill>
+                  <a:srgbClr val="1F2D3D"/>
+                </a:solidFill>
+              </a:defRPr>
+            </a:pPr>
+            <a:r>
+              <a:t>    景点图片(可放大) + 三餐餐饮 + 营业时间 + 日期 + 状态看板友好化</a:t>
+            </a:r>
+          </a:p>
+          <a:p>
+            <a:pPr>
+              <a:spcAft>
+                <a:spcPts val="200"/>
+              </a:spcAft>
+              <a:defRPr b="1" sz="1300">
                 <a:solidFill>
                   <a:srgbClr val="1677FF"/>
                 </a:solidFill>
@@ -3979,7 +3979,7 @@
               <a:spcAft>
                 <a:spcPts val="800"/>
               </a:spcAft>
-              <a:defRPr sz="1200">
+              <a:defRPr sz="1100">
                 <a:solidFill>
                   <a:srgbClr val="1F2D3D"/>
                 </a:solidFill>
@@ -3994,7 +3994,7 @@
               <a:spcAft>
                 <a:spcPts val="200"/>
               </a:spcAft>
-              <a:defRPr b="1" sz="1400">
+              <a:defRPr b="1" sz="1300">
                 <a:solidFill>
                   <a:srgbClr val="1677FF"/>
                 </a:solidFill>
@@ -4009,7 +4009,7 @@
               <a:spcAft>
                 <a:spcPts val="800"/>
               </a:spcAft>
-              <a:defRPr sz="1200">
+              <a:defRPr sz="1100">
                 <a:solidFill>
                   <a:srgbClr val="1F2D3D"/>
                 </a:solidFill>
@@ -4017,6 +4017,36 @@
             </a:pPr>
             <a:r>
               <a:t>    实体卡片 + 检索 + 干预弹窗 + 干预历史</a:t>
+            </a:r>
+          </a:p>
+          <a:p>
+            <a:pPr>
+              <a:spcAft>
+                <a:spcPts val="200"/>
+              </a:spcAft>
+              <a:defRPr b="1" sz="1300">
+                <a:solidFill>
+                  <a:srgbClr val="1677FF"/>
+                </a:solidFill>
+              </a:defRPr>
+            </a:pPr>
+            <a:r>
+              <a:t>■ 视觉</a:t>
+            </a:r>
+          </a:p>
+          <a:p>
+            <a:pPr>
+              <a:spcAft>
+                <a:spcPts val="800"/>
+              </a:spcAft>
+              <a:defRPr sz="1100">
+                <a:solidFill>
+                  <a:srgbClr val="1F2D3D"/>
+                </a:solidFill>
+              </a:defRPr>
+            </a:pPr>
+            <a:r>
+              <a:t>    登录页真实风景壁纸 + 内容区图片背景 + 卡片圆角阴影</a:t>
             </a:r>
           </a:p>
         </p:txBody>
@@ -6673,7 +6703,7 @@
               <a:spcAft>
                 <a:spcPts val="200"/>
               </a:spcAft>
-              <a:defRPr b="1" sz="1400">
+              <a:defRPr b="1" sz="1300">
                 <a:solidFill>
                   <a:srgbClr val="1677FF"/>
                 </a:solidFill>
@@ -6688,22 +6718,52 @@
               <a:spcAft>
                 <a:spcPts val="800"/>
               </a:spcAft>
-              <a:defRPr sz="1200">
-                <a:solidFill>
-                  <a:srgbClr val="1F2D3D"/>
-                </a:solidFill>
-              </a:defRPr>
-            </a:pPr>
-            <a:r>
-              <a:t>    高德(景点/路线/天气) + 百炼LLM(8Agent+记忆) + 虚拟房价，无假数据</a:t>
-            </a:r>
-          </a:p>
-          <a:p>
-            <a:pPr>
-              <a:spcAft>
-                <a:spcPts val="200"/>
-              </a:spcAft>
-              <a:defRPr b="1" sz="1400">
+              <a:defRPr sz="1100">
+                <a:solidFill>
+                  <a:srgbClr val="1F2D3D"/>
+                </a:solidFill>
+              </a:defRPr>
+            </a:pPr>
+            <a:r>
+              <a:t>    高德(景点/路线/天气/营业时间/评分/图片) + 百炼LLM(8Agent+记忆) + 虚拟房价</a:t>
+            </a:r>
+          </a:p>
+          <a:p>
+            <a:pPr>
+              <a:spcAft>
+                <a:spcPts val="200"/>
+              </a:spcAft>
+              <a:defRPr b="1" sz="1300">
+                <a:solidFill>
+                  <a:srgbClr val="1677FF"/>
+                </a:solidFill>
+              </a:defRPr>
+            </a:pPr>
+            <a:r>
+              <a:t>■ 完整行程规划</a:t>
+            </a:r>
+          </a:p>
+          <a:p>
+            <a:pPr>
+              <a:spcAft>
+                <a:spcPts val="800"/>
+              </a:spcAft>
+              <a:defRPr sz="1100">
+                <a:solidFill>
+                  <a:srgbClr val="1F2D3D"/>
+                </a:solidFill>
+              </a:defRPr>
+            </a:pPr>
+            <a:r>
+              <a:t>    每日三餐餐饮推荐 + 景点图片(可放大) + 营业时间 + 出发/返程日期自动算天数</a:t>
+            </a:r>
+          </a:p>
+          <a:p>
+            <a:pPr>
+              <a:spcAft>
+                <a:spcPts val="200"/>
+              </a:spcAft>
+              <a:defRPr b="1" sz="1300">
                 <a:solidFill>
                   <a:srgbClr val="1677FF"/>
                 </a:solidFill>
@@ -6718,7 +6778,7 @@
               <a:spcAft>
                 <a:spcPts val="800"/>
               </a:spcAft>
-              <a:defRPr sz="1200">
+              <a:defRPr sz="1100">
                 <a:solidFill>
                   <a:srgbClr val="1F2D3D"/>
                 </a:solidFill>
@@ -6733,7 +6793,7 @@
               <a:spcAft>
                 <a:spcPts val="200"/>
               </a:spcAft>
-              <a:defRPr b="1" sz="1400">
+              <a:defRPr b="1" sz="1300">
                 <a:solidFill>
                   <a:srgbClr val="1677FF"/>
                 </a:solidFill>
@@ -6748,7 +6808,7 @@
               <a:spcAft>
                 <a:spcPts val="800"/>
               </a:spcAft>
-              <a:defRPr sz="1200">
+              <a:defRPr sz="1100">
                 <a:solidFill>
                   <a:srgbClr val="1F2D3D"/>
                 </a:solidFill>
@@ -6763,7 +6823,7 @@
               <a:spcAft>
                 <a:spcPts val="200"/>
               </a:spcAft>
-              <a:defRPr b="1" sz="1400">
+              <a:defRPr b="1" sz="1300">
                 <a:solidFill>
                   <a:srgbClr val="1677FF"/>
                 </a:solidFill>
@@ -6778,7 +6838,7 @@
               <a:spcAft>
                 <a:spcPts val="800"/>
               </a:spcAft>
-              <a:defRPr sz="1200">
+              <a:defRPr sz="1100">
                 <a:solidFill>
                   <a:srgbClr val="1F2D3D"/>
                 </a:solidFill>
@@ -6793,7 +6853,7 @@
               <a:spcAft>
                 <a:spcPts val="200"/>
               </a:spcAft>
-              <a:defRPr b="1" sz="1400">
+              <a:defRPr b="1" sz="1300">
                 <a:solidFill>
                   <a:srgbClr val="1677FF"/>
                 </a:solidFill>
@@ -6808,7 +6868,7 @@
               <a:spcAft>
                 <a:spcPts val="800"/>
               </a:spcAft>
-              <a:defRPr sz="1200">
+              <a:defRPr sz="1100">
                 <a:solidFill>
                   <a:srgbClr val="1F2D3D"/>
                 </a:solidFill>
@@ -6823,7 +6883,7 @@
               <a:spcAft>
                 <a:spcPts val="200"/>
               </a:spcAft>
-              <a:defRPr b="1" sz="1400">
+              <a:defRPr b="1" sz="1300">
                 <a:solidFill>
                   <a:srgbClr val="1677FF"/>
                 </a:solidFill>
@@ -6838,7 +6898,7 @@
               <a:spcAft>
                 <a:spcPts val="800"/>
               </a:spcAft>
-              <a:defRPr sz="1200">
+              <a:defRPr sz="1100">
                 <a:solidFill>
                   <a:srgbClr val="1F2D3D"/>
                 </a:solidFill>
@@ -6846,6 +6906,36 @@
             </a:pPr>
             <a:r>
               <a:t>    图记忆+强干预，数据模型/引擎/API/前端/测试/文档完整闭环</a:t>
+            </a:r>
+          </a:p>
+          <a:p>
+            <a:pPr>
+              <a:spcAft>
+                <a:spcPts val="200"/>
+              </a:spcAft>
+              <a:defRPr b="1" sz="1300">
+                <a:solidFill>
+                  <a:srgbClr val="1677FF"/>
+                </a:solidFill>
+              </a:defRPr>
+            </a:pPr>
+            <a:r>
+              <a:t>■ 精致前端</a:t>
+            </a:r>
+          </a:p>
+          <a:p>
+            <a:pPr>
+              <a:spcAft>
+                <a:spcPts val="800"/>
+              </a:spcAft>
+              <a:defRPr sz="1100">
+                <a:solidFill>
+                  <a:srgbClr val="1F2D3D"/>
+                </a:solidFill>
+              </a:defRPr>
+            </a:pPr>
+            <a:r>
+              <a:t>    真实风景壁纸 + 状态看板友好化(进度条+步骤卡片)</a:t>
             </a:r>
           </a:p>
         </p:txBody>
@@ -7109,7 +7199,7 @@
               </a:defRPr>
             </a:pPr>
             <a:r>
-              <a:t>    高德地图(4接口) + 阿里云百炼LLM(qwen3.7-plus)</a:t>
+              <a:t>    高德地图(地理编码/POI/路径/天气/营业时间/图片) + 阿里云百炼LLM(qwen3.7-flash)</a:t>
             </a:r>
           </a:p>
         </p:txBody>

--- a/docs/项目讲解.pptx
+++ b/docs/项目讲解.pptx
@@ -3493,7 +3493,7 @@
         <p:spPr>
           <a:xfrm>
             <a:off x="457200" y="1417320"/>
-            <a:ext cx="11247120" cy="746759"/>
+            <a:ext cx="11247120" cy="629629"/>
           </a:xfrm>
           <a:prstGeom prst="rect">
             <a:avLst/>
@@ -3537,7 +3537,7 @@
         <p:spPr>
           <a:xfrm>
             <a:off x="457200" y="1417320"/>
-            <a:ext cx="73152" cy="746759"/>
+            <a:ext cx="73152" cy="629629"/>
           </a:xfrm>
           <a:prstGeom prst="rect">
             <a:avLst/>
@@ -3619,7 +3619,7 @@
         <p:spPr>
           <a:xfrm>
             <a:off x="777240" y="1874520"/>
-            <a:ext cx="10789920" cy="222966381600"/>
+            <a:ext cx="10789920" cy="115862709600"/>
           </a:xfrm>
           <a:prstGeom prst="rect">
             <a:avLst/>
@@ -3656,8 +3656,8 @@
         </p:nvSpPr>
         <p:spPr>
           <a:xfrm>
-            <a:off x="457200" y="2237231"/>
-            <a:ext cx="11247120" cy="746759"/>
+            <a:off x="457200" y="2120101"/>
+            <a:ext cx="11247120" cy="629629"/>
           </a:xfrm>
           <a:prstGeom prst="rect">
             <a:avLst/>
@@ -3700,8 +3700,8 @@
         </p:nvSpPr>
         <p:spPr>
           <a:xfrm>
-            <a:off x="457200" y="2237231"/>
-            <a:ext cx="73152" cy="746759"/>
+            <a:off x="457200" y="2120101"/>
+            <a:ext cx="73152" cy="629629"/>
           </a:xfrm>
           <a:prstGeom prst="rect">
             <a:avLst/>
@@ -3744,7 +3744,7 @@
         </p:nvSpPr>
         <p:spPr>
           <a:xfrm>
-            <a:off x="777240" y="2346959"/>
+            <a:off x="777240" y="2229829"/>
             <a:ext cx="10789920" cy="365760"/>
           </a:xfrm>
           <a:prstGeom prst="rect">
@@ -3782,8 +3782,8 @@
         </p:nvSpPr>
         <p:spPr>
           <a:xfrm>
-            <a:off x="777240" y="2694431"/>
-            <a:ext cx="10789920" cy="222966381600"/>
+            <a:off x="777240" y="2577301"/>
+            <a:ext cx="10789920" cy="115862709600"/>
           </a:xfrm>
           <a:prstGeom prst="rect">
             <a:avLst/>
@@ -3820,8 +3820,8 @@
         </p:nvSpPr>
         <p:spPr>
           <a:xfrm>
-            <a:off x="457200" y="3057142"/>
-            <a:ext cx="11247120" cy="746759"/>
+            <a:off x="457200" y="2822882"/>
+            <a:ext cx="11247120" cy="629629"/>
           </a:xfrm>
           <a:prstGeom prst="rect">
             <a:avLst/>
@@ -3864,8 +3864,8 @@
         </p:nvSpPr>
         <p:spPr>
           <a:xfrm>
-            <a:off x="457200" y="3057142"/>
-            <a:ext cx="73152" cy="746759"/>
+            <a:off x="457200" y="2822882"/>
+            <a:ext cx="73152" cy="629629"/>
           </a:xfrm>
           <a:prstGeom prst="rect">
             <a:avLst/>
@@ -3908,7 +3908,7 @@
         </p:nvSpPr>
         <p:spPr>
           <a:xfrm>
-            <a:off x="777240" y="3166870"/>
+            <a:off x="777240" y="2932610"/>
             <a:ext cx="10789920" cy="365760"/>
           </a:xfrm>
           <a:prstGeom prst="rect">
@@ -3946,8 +3946,8 @@
         </p:nvSpPr>
         <p:spPr>
           <a:xfrm>
-            <a:off x="777240" y="3514342"/>
-            <a:ext cx="10789920" cy="222966381600"/>
+            <a:off x="777240" y="3280082"/>
+            <a:ext cx="10789920" cy="115862709600"/>
           </a:xfrm>
           <a:prstGeom prst="rect">
             <a:avLst/>
@@ -3984,8 +3984,8 @@
         </p:nvSpPr>
         <p:spPr>
           <a:xfrm>
-            <a:off x="457200" y="3877053"/>
-            <a:ext cx="11247120" cy="746759"/>
+            <a:off x="457200" y="3525663"/>
+            <a:ext cx="11247120" cy="629629"/>
           </a:xfrm>
           <a:prstGeom prst="rect">
             <a:avLst/>
@@ -4028,8 +4028,8 @@
         </p:nvSpPr>
         <p:spPr>
           <a:xfrm>
-            <a:off x="457200" y="3877053"/>
-            <a:ext cx="73152" cy="746759"/>
+            <a:off x="457200" y="3525663"/>
+            <a:ext cx="73152" cy="629629"/>
           </a:xfrm>
           <a:prstGeom prst="rect">
             <a:avLst/>
@@ -4072,7 +4072,7 @@
         </p:nvSpPr>
         <p:spPr>
           <a:xfrm>
-            <a:off x="777240" y="3986781"/>
+            <a:off x="777240" y="3635391"/>
             <a:ext cx="10789920" cy="365760"/>
           </a:xfrm>
           <a:prstGeom prst="rect">
@@ -4110,8 +4110,8 @@
         </p:nvSpPr>
         <p:spPr>
           <a:xfrm>
-            <a:off x="777240" y="4334253"/>
-            <a:ext cx="10789920" cy="222966381600"/>
+            <a:off x="777240" y="3982863"/>
+            <a:ext cx="10789920" cy="115862709600"/>
           </a:xfrm>
           <a:prstGeom prst="rect">
             <a:avLst/>
@@ -4148,8 +4148,8 @@
         </p:nvSpPr>
         <p:spPr>
           <a:xfrm>
-            <a:off x="457200" y="4696964"/>
-            <a:ext cx="11247120" cy="746759"/>
+            <a:off x="457200" y="4228444"/>
+            <a:ext cx="11247120" cy="629629"/>
           </a:xfrm>
           <a:prstGeom prst="rect">
             <a:avLst/>
@@ -4192,8 +4192,8 @@
         </p:nvSpPr>
         <p:spPr>
           <a:xfrm>
-            <a:off x="457200" y="4696964"/>
-            <a:ext cx="73152" cy="746759"/>
+            <a:off x="457200" y="4228444"/>
+            <a:ext cx="73152" cy="629629"/>
           </a:xfrm>
           <a:prstGeom prst="rect">
             <a:avLst/>
@@ -4236,7 +4236,7 @@
         </p:nvSpPr>
         <p:spPr>
           <a:xfrm>
-            <a:off x="777240" y="4806692"/>
+            <a:off x="777240" y="4338172"/>
             <a:ext cx="10789920" cy="365760"/>
           </a:xfrm>
           <a:prstGeom prst="rect">
@@ -4274,8 +4274,8 @@
         </p:nvSpPr>
         <p:spPr>
           <a:xfrm>
-            <a:off x="777240" y="5154164"/>
-            <a:ext cx="10789920" cy="222966381600"/>
+            <a:off x="777240" y="4685644"/>
+            <a:ext cx="10789920" cy="115862709600"/>
           </a:xfrm>
           <a:prstGeom prst="rect">
             <a:avLst/>
@@ -4312,8 +4312,8 @@
         </p:nvSpPr>
         <p:spPr>
           <a:xfrm>
-            <a:off x="457200" y="5516875"/>
-            <a:ext cx="11247120" cy="746759"/>
+            <a:off x="457200" y="4931225"/>
+            <a:ext cx="11247120" cy="629629"/>
           </a:xfrm>
           <a:prstGeom prst="rect">
             <a:avLst/>
@@ -4356,8 +4356,8 @@
         </p:nvSpPr>
         <p:spPr>
           <a:xfrm>
-            <a:off x="457200" y="5516875"/>
-            <a:ext cx="73152" cy="746759"/>
+            <a:off x="457200" y="4931225"/>
+            <a:ext cx="73152" cy="629629"/>
           </a:xfrm>
           <a:prstGeom prst="rect">
             <a:avLst/>
@@ -4400,7 +4400,7 @@
         </p:nvSpPr>
         <p:spPr>
           <a:xfrm>
-            <a:off x="777240" y="5626603"/>
+            <a:off x="777240" y="5040953"/>
             <a:ext cx="10789920" cy="365760"/>
           </a:xfrm>
           <a:prstGeom prst="rect">
@@ -4425,6 +4425,170 @@
               </a:defRPr>
             </a:pPr>
             <a:r>
+              <a:t>城市规范化</a:t>
+            </a:r>
+          </a:p>
+        </p:txBody>
+      </p:sp>
+      <p:sp>
+        <p:nvSpPr>
+          <p:cNvPr id="28" name="TextBox 27"/>
+          <p:cNvSpPr txBox="1"/>
+          <p:nvPr/>
+        </p:nvSpPr>
+        <p:spPr>
+          <a:xfrm>
+            <a:off x="777240" y="5388425"/>
+            <a:ext cx="10789920" cy="115862709600"/>
+          </a:xfrm>
+          <a:prstGeom prst="rect">
+            <a:avLst/>
+          </a:prstGeom>
+          <a:noFill/>
+        </p:spPr>
+        <p:txBody>
+          <a:bodyPr wrap="square" anchor="t">
+            <a:spAutoFit/>
+          </a:bodyPr>
+          <a:lstStyle/>
+          <a:p>
+            <a:pPr algn="l">
+              <a:spcAft>
+                <a:spcPts val="300"/>
+              </a:spcAft>
+              <a:defRPr sz="1200" b="0">
+                <a:solidFill>
+                  <a:srgbClr val="1F2D3D"/>
+                </a:solidFill>
+              </a:defRPr>
+            </a:pPr>
+            <a:r>
+              <a:t>高德 geocode 把「河北沧州」规范为「沧州」，修复 POI 搜索误搜到省一级</a:t>
+            </a:r>
+          </a:p>
+        </p:txBody>
+      </p:sp>
+      <p:sp>
+        <p:nvSpPr>
+          <p:cNvPr id="29" name="Rectangle 28"/>
+          <p:cNvSpPr/>
+          <p:nvPr/>
+        </p:nvSpPr>
+        <p:spPr>
+          <a:xfrm>
+            <a:off x="457200" y="5634006"/>
+            <a:ext cx="11247120" cy="629629"/>
+          </a:xfrm>
+          <a:prstGeom prst="rect">
+            <a:avLst/>
+          </a:prstGeom>
+          <a:solidFill>
+            <a:srgbClr val="F7FAFC"/>
+          </a:solidFill>
+          <a:ln>
+            <a:noFill/>
+          </a:ln>
+          <a:effectLst/>
+        </p:spPr>
+        <p:style>
+          <a:lnRef idx="1">
+            <a:schemeClr val="accent1"/>
+          </a:lnRef>
+          <a:fillRef idx="3">
+            <a:schemeClr val="accent1"/>
+          </a:fillRef>
+          <a:effectRef idx="2">
+            <a:schemeClr val="accent1"/>
+          </a:effectRef>
+          <a:fontRef idx="minor">
+            <a:schemeClr val="lt1"/>
+          </a:fontRef>
+        </p:style>
+        <p:txBody>
+          <a:bodyPr rtlCol="0" anchor="ctr"/>
+          <a:lstStyle/>
+          <a:p>
+            <a:pPr algn="ctr"/>
+          </a:p>
+        </p:txBody>
+      </p:sp>
+      <p:sp>
+        <p:nvSpPr>
+          <p:cNvPr id="30" name="Rectangle 29"/>
+          <p:cNvSpPr/>
+          <p:nvPr/>
+        </p:nvSpPr>
+        <p:spPr>
+          <a:xfrm>
+            <a:off x="457200" y="5634006"/>
+            <a:ext cx="73152" cy="629629"/>
+          </a:xfrm>
+          <a:prstGeom prst="rect">
+            <a:avLst/>
+          </a:prstGeom>
+          <a:solidFill>
+            <a:srgbClr val="1677FF"/>
+          </a:solidFill>
+          <a:ln>
+            <a:noFill/>
+          </a:ln>
+          <a:effectLst/>
+        </p:spPr>
+        <p:style>
+          <a:lnRef idx="1">
+            <a:schemeClr val="accent1"/>
+          </a:lnRef>
+          <a:fillRef idx="3">
+            <a:schemeClr val="accent1"/>
+          </a:fillRef>
+          <a:effectRef idx="2">
+            <a:schemeClr val="accent1"/>
+          </a:effectRef>
+          <a:fontRef idx="minor">
+            <a:schemeClr val="lt1"/>
+          </a:fontRef>
+        </p:style>
+        <p:txBody>
+          <a:bodyPr rtlCol="0" anchor="ctr"/>
+          <a:lstStyle/>
+          <a:p>
+            <a:pPr algn="ctr"/>
+          </a:p>
+        </p:txBody>
+      </p:sp>
+      <p:sp>
+        <p:nvSpPr>
+          <p:cNvPr id="31" name="TextBox 30"/>
+          <p:cNvSpPr txBox="1"/>
+          <p:nvPr/>
+        </p:nvSpPr>
+        <p:spPr>
+          <a:xfrm>
+            <a:off x="777240" y="5743734"/>
+            <a:ext cx="10789920" cy="365760"/>
+          </a:xfrm>
+          <a:prstGeom prst="rect">
+            <a:avLst/>
+          </a:prstGeom>
+          <a:noFill/>
+        </p:spPr>
+        <p:txBody>
+          <a:bodyPr wrap="square" anchor="t">
+            <a:spAutoFit/>
+          </a:bodyPr>
+          <a:lstStyle/>
+          <a:p>
+            <a:pPr algn="l">
+              <a:spcAft>
+                <a:spcPts val="300"/>
+              </a:spcAft>
+              <a:defRPr sz="1400" b="1">
+                <a:solidFill>
+                  <a:srgbClr val="0A3D91"/>
+                </a:solidFill>
+              </a:defRPr>
+            </a:pPr>
+            <a:r>
               <a:t>安全</a:t>
             </a:r>
           </a:p>
@@ -4432,14 +4596,14 @@
       </p:sp>
       <p:sp>
         <p:nvSpPr>
-          <p:cNvPr id="28" name="TextBox 27"/>
-          <p:cNvSpPr txBox="1"/>
-          <p:nvPr/>
-        </p:nvSpPr>
-        <p:spPr>
-          <a:xfrm>
-            <a:off x="777240" y="5974075"/>
-            <a:ext cx="10789920" cy="222966381600"/>
+          <p:cNvPr id="32" name="TextBox 31"/>
+          <p:cNvSpPr txBox="1"/>
+          <p:nvPr/>
+        </p:nvSpPr>
+        <p:spPr>
+          <a:xfrm>
+            <a:off x="777240" y="6091206"/>
+            <a:ext cx="10789920" cy="115862709600"/>
           </a:xfrm>
           <a:prstGeom prst="rect">
             <a:avLst/>
@@ -4463,14 +4627,14 @@
               </a:defRPr>
             </a:pPr>
             <a:r>
-              <a:t>JWT+RBAC(advisor/supervisor) + 注入检测 + 内容过滤 + 工具白名单</a:t>
-            </a:r>
-          </a:p>
-        </p:txBody>
-      </p:sp>
-      <p:sp>
-        <p:nvSpPr>
-          <p:cNvPr id="29" name="TextBox 28"/>
+              <a:t>JWT+RBAC(游客/顾问/主管) + 注入检测 + 内容过滤 + 工具白名单</a:t>
+            </a:r>
+          </a:p>
+        </p:txBody>
+      </p:sp>
+      <p:sp>
+        <p:nvSpPr>
+          <p:cNvPr id="33" name="TextBox 32"/>
           <p:cNvSpPr txBox="1"/>
           <p:nvPr/>
         </p:nvSpPr>
@@ -4508,7 +4672,7 @@
       </p:sp>
       <p:sp>
         <p:nvSpPr>
-          <p:cNvPr id="30" name="TextBox 29"/>
+          <p:cNvPr id="34" name="TextBox 33"/>
           <p:cNvSpPr txBox="1"/>
           <p:nvPr/>
         </p:nvSpPr>
@@ -4705,7 +4869,7 @@
         <p:spPr>
           <a:xfrm>
             <a:off x="457200" y="1417320"/>
-            <a:ext cx="11247120" cy="746759"/>
+            <a:ext cx="11247120" cy="629629"/>
           </a:xfrm>
           <a:prstGeom prst="rect">
             <a:avLst/>
@@ -4749,7 +4913,7 @@
         <p:spPr>
           <a:xfrm>
             <a:off x="457200" y="1417320"/>
-            <a:ext cx="73152" cy="746759"/>
+            <a:ext cx="73152" cy="629629"/>
           </a:xfrm>
           <a:prstGeom prst="rect">
             <a:avLst/>
@@ -4831,7 +4995,7 @@
         <p:spPr>
           <a:xfrm>
             <a:off x="777240" y="1874520"/>
-            <a:ext cx="10789920" cy="222966381600"/>
+            <a:ext cx="10789920" cy="115862709600"/>
           </a:xfrm>
           <a:prstGeom prst="rect">
             <a:avLst/>
@@ -4868,8 +5032,8 @@
         </p:nvSpPr>
         <p:spPr>
           <a:xfrm>
-            <a:off x="457200" y="2237231"/>
-            <a:ext cx="11247120" cy="746759"/>
+            <a:off x="457200" y="2120101"/>
+            <a:ext cx="11247120" cy="629629"/>
           </a:xfrm>
           <a:prstGeom prst="rect">
             <a:avLst/>
@@ -4912,8 +5076,8 @@
         </p:nvSpPr>
         <p:spPr>
           <a:xfrm>
-            <a:off x="457200" y="2237231"/>
-            <a:ext cx="73152" cy="746759"/>
+            <a:off x="457200" y="2120101"/>
+            <a:ext cx="73152" cy="629629"/>
           </a:xfrm>
           <a:prstGeom prst="rect">
             <a:avLst/>
@@ -4956,7 +5120,7 @@
         </p:nvSpPr>
         <p:spPr>
           <a:xfrm>
-            <a:off x="777240" y="2346959"/>
+            <a:off x="777240" y="2229829"/>
             <a:ext cx="10789920" cy="365760"/>
           </a:xfrm>
           <a:prstGeom prst="rect">
@@ -4994,8 +5158,8 @@
         </p:nvSpPr>
         <p:spPr>
           <a:xfrm>
-            <a:off x="777240" y="2694431"/>
-            <a:ext cx="10789920" cy="222966381600"/>
+            <a:off x="777240" y="2577301"/>
+            <a:ext cx="10789920" cy="115862709600"/>
           </a:xfrm>
           <a:prstGeom prst="rect">
             <a:avLst/>
@@ -5019,7 +5183,7 @@
               </a:defRPr>
             </a:pPr>
             <a:r>
-              <a:t>qwen3.7-flash，8 Agent 推理 + 记忆抽取（Mock 可切真实，压测不烧钱）</a:t>
+              <a:t>qwen3.7-flash，出发地/目的地解析 + 交通票价估算 + 记忆抽取（Mock 可切真实）</a:t>
             </a:r>
           </a:p>
         </p:txBody>
@@ -5032,8 +5196,8 @@
         </p:nvSpPr>
         <p:spPr>
           <a:xfrm>
-            <a:off x="457200" y="3057142"/>
-            <a:ext cx="11247120" cy="746759"/>
+            <a:off x="457200" y="2822882"/>
+            <a:ext cx="11247120" cy="629629"/>
           </a:xfrm>
           <a:prstGeom prst="rect">
             <a:avLst/>
@@ -5076,8 +5240,8 @@
         </p:nvSpPr>
         <p:spPr>
           <a:xfrm>
-            <a:off x="457200" y="3057142"/>
-            <a:ext cx="73152" cy="746759"/>
+            <a:off x="457200" y="2822882"/>
+            <a:ext cx="73152" cy="629629"/>
           </a:xfrm>
           <a:prstGeom prst="rect">
             <a:avLst/>
@@ -5120,7 +5284,7 @@
         </p:nvSpPr>
         <p:spPr>
           <a:xfrm>
-            <a:off x="777240" y="3166870"/>
+            <a:off x="777240" y="2932610"/>
             <a:ext cx="10789920" cy="365760"/>
           </a:xfrm>
           <a:prstGeom prst="rect">
@@ -5158,8 +5322,8 @@
         </p:nvSpPr>
         <p:spPr>
           <a:xfrm>
-            <a:off x="777240" y="3514342"/>
-            <a:ext cx="10789920" cy="222966381600"/>
+            <a:off x="777240" y="3280082"/>
+            <a:ext cx="10789920" cy="115862709600"/>
           </a:xfrm>
           <a:prstGeom prst="rect">
             <a:avLst/>
@@ -5196,8 +5360,8 @@
         </p:nvSpPr>
         <p:spPr>
           <a:xfrm>
-            <a:off x="457200" y="3877053"/>
-            <a:ext cx="11247120" cy="746759"/>
+            <a:off x="457200" y="3525663"/>
+            <a:ext cx="11247120" cy="629629"/>
           </a:xfrm>
           <a:prstGeom prst="rect">
             <a:avLst/>
@@ -5240,8 +5404,8 @@
         </p:nvSpPr>
         <p:spPr>
           <a:xfrm>
-            <a:off x="457200" y="3877053"/>
-            <a:ext cx="73152" cy="746759"/>
+            <a:off x="457200" y="3525663"/>
+            <a:ext cx="73152" cy="629629"/>
           </a:xfrm>
           <a:prstGeom prst="rect">
             <a:avLst/>
@@ -5284,7 +5448,7 @@
         </p:nvSpPr>
         <p:spPr>
           <a:xfrm>
-            <a:off x="777240" y="3986781"/>
+            <a:off x="777240" y="3635391"/>
             <a:ext cx="10789920" cy="365760"/>
           </a:xfrm>
           <a:prstGeom prst="rect">
@@ -5309,7 +5473,7 @@
               </a:defRPr>
             </a:pPr>
             <a:r>
-              <a:t>业务表(6张)</a:t>
+              <a:t>虚拟门票/人均</a:t>
             </a:r>
           </a:p>
         </p:txBody>
@@ -5322,8 +5486,8 @@
         </p:nvSpPr>
         <p:spPr>
           <a:xfrm>
-            <a:off x="777240" y="4334253"/>
-            <a:ext cx="10789920" cy="222966381600"/>
+            <a:off x="777240" y="3982863"/>
+            <a:ext cx="10789920" cy="115862709600"/>
           </a:xfrm>
           <a:prstGeom prst="rect">
             <a:avLst/>
@@ -5347,7 +5511,7 @@
               </a:defRPr>
             </a:pPr>
             <a:r>
-              <a:t>users / travel_plans / agent_tasks / review_records / budget_records / audit_logs</a:t>
+              <a:t>景点门票 + 餐厅人均 参考价（按类型生成，标注参考价）</a:t>
             </a:r>
           </a:p>
         </p:txBody>
@@ -5360,8 +5524,8 @@
         </p:nvSpPr>
         <p:spPr>
           <a:xfrm>
-            <a:off x="457200" y="4696964"/>
-            <a:ext cx="11247120" cy="746759"/>
+            <a:off x="457200" y="4228444"/>
+            <a:ext cx="11247120" cy="629629"/>
           </a:xfrm>
           <a:prstGeom prst="rect">
             <a:avLst/>
@@ -5404,8 +5568,8 @@
         </p:nvSpPr>
         <p:spPr>
           <a:xfrm>
-            <a:off x="457200" y="4696964"/>
-            <a:ext cx="73152" cy="746759"/>
+            <a:off x="457200" y="4228444"/>
+            <a:ext cx="73152" cy="629629"/>
           </a:xfrm>
           <a:prstGeom prst="rect">
             <a:avLst/>
@@ -5448,7 +5612,7 @@
         </p:nvSpPr>
         <p:spPr>
           <a:xfrm>
-            <a:off x="777240" y="4806692"/>
+            <a:off x="777240" y="4338172"/>
             <a:ext cx="10789920" cy="365760"/>
           </a:xfrm>
           <a:prstGeom prst="rect">
@@ -5473,7 +5637,7 @@
               </a:defRPr>
             </a:pPr>
             <a:r>
-              <a:t>图记忆表(4张)</a:t>
+              <a:t>业务表(6张)</a:t>
             </a:r>
           </a:p>
         </p:txBody>
@@ -5486,8 +5650,8 @@
         </p:nvSpPr>
         <p:spPr>
           <a:xfrm>
-            <a:off x="777240" y="5154164"/>
-            <a:ext cx="10789920" cy="222966381600"/>
+            <a:off x="777240" y="4685644"/>
+            <a:ext cx="10789920" cy="115862709600"/>
           </a:xfrm>
           <a:prstGeom prst="rect">
             <a:avLst/>
@@ -5511,7 +5675,7 @@
               </a:defRPr>
             </a:pPr>
             <a:r>
-              <a:t>graph_nodes / graph_edges / memory_events / interventions</a:t>
+              <a:t>users / travel_plans / agent_tasks / review_records / budget_records / audit_logs</a:t>
             </a:r>
           </a:p>
         </p:txBody>
@@ -5524,8 +5688,8 @@
         </p:nvSpPr>
         <p:spPr>
           <a:xfrm>
-            <a:off x="457200" y="5516875"/>
-            <a:ext cx="11247120" cy="746759"/>
+            <a:off x="457200" y="4931225"/>
+            <a:ext cx="11247120" cy="629629"/>
           </a:xfrm>
           <a:prstGeom prst="rect">
             <a:avLst/>
@@ -5568,8 +5732,8 @@
         </p:nvSpPr>
         <p:spPr>
           <a:xfrm>
-            <a:off x="457200" y="5516875"/>
-            <a:ext cx="73152" cy="746759"/>
+            <a:off x="457200" y="4931225"/>
+            <a:ext cx="73152" cy="629629"/>
           </a:xfrm>
           <a:prstGeom prst="rect">
             <a:avLst/>
@@ -5612,7 +5776,7 @@
         </p:nvSpPr>
         <p:spPr>
           <a:xfrm>
-            <a:off x="777240" y="5626603"/>
+            <a:off x="777240" y="5040953"/>
             <a:ext cx="10789920" cy="365760"/>
           </a:xfrm>
           <a:prstGeom prst="rect">
@@ -5637,6 +5801,170 @@
               </a:defRPr>
             </a:pPr>
             <a:r>
+              <a:t>图记忆表(4张)</a:t>
+            </a:r>
+          </a:p>
+        </p:txBody>
+      </p:sp>
+      <p:sp>
+        <p:nvSpPr>
+          <p:cNvPr id="28" name="TextBox 27"/>
+          <p:cNvSpPr txBox="1"/>
+          <p:nvPr/>
+        </p:nvSpPr>
+        <p:spPr>
+          <a:xfrm>
+            <a:off x="777240" y="5388425"/>
+            <a:ext cx="10789920" cy="115862709600"/>
+          </a:xfrm>
+          <a:prstGeom prst="rect">
+            <a:avLst/>
+          </a:prstGeom>
+          <a:noFill/>
+        </p:spPr>
+        <p:txBody>
+          <a:bodyPr wrap="square" anchor="t">
+            <a:spAutoFit/>
+          </a:bodyPr>
+          <a:lstStyle/>
+          <a:p>
+            <a:pPr algn="l">
+              <a:spcAft>
+                <a:spcPts val="300"/>
+              </a:spcAft>
+              <a:defRPr sz="1200" b="0">
+                <a:solidFill>
+                  <a:srgbClr val="1F2D3D"/>
+                </a:solidFill>
+              </a:defRPr>
+            </a:pPr>
+            <a:r>
+              <a:t>graph_nodes / graph_edges / memory_events / interventions</a:t>
+            </a:r>
+          </a:p>
+        </p:txBody>
+      </p:sp>
+      <p:sp>
+        <p:nvSpPr>
+          <p:cNvPr id="29" name="Rectangle 28"/>
+          <p:cNvSpPr/>
+          <p:nvPr/>
+        </p:nvSpPr>
+        <p:spPr>
+          <a:xfrm>
+            <a:off x="457200" y="5634006"/>
+            <a:ext cx="11247120" cy="629629"/>
+          </a:xfrm>
+          <a:prstGeom prst="rect">
+            <a:avLst/>
+          </a:prstGeom>
+          <a:solidFill>
+            <a:srgbClr val="F7FAFC"/>
+          </a:solidFill>
+          <a:ln>
+            <a:noFill/>
+          </a:ln>
+          <a:effectLst/>
+        </p:spPr>
+        <p:style>
+          <a:lnRef idx="1">
+            <a:schemeClr val="accent1"/>
+          </a:lnRef>
+          <a:fillRef idx="3">
+            <a:schemeClr val="accent1"/>
+          </a:fillRef>
+          <a:effectRef idx="2">
+            <a:schemeClr val="accent1"/>
+          </a:effectRef>
+          <a:fontRef idx="minor">
+            <a:schemeClr val="lt1"/>
+          </a:fontRef>
+        </p:style>
+        <p:txBody>
+          <a:bodyPr rtlCol="0" anchor="ctr"/>
+          <a:lstStyle/>
+          <a:p>
+            <a:pPr algn="ctr"/>
+          </a:p>
+        </p:txBody>
+      </p:sp>
+      <p:sp>
+        <p:nvSpPr>
+          <p:cNvPr id="30" name="Rectangle 29"/>
+          <p:cNvSpPr/>
+          <p:nvPr/>
+        </p:nvSpPr>
+        <p:spPr>
+          <a:xfrm>
+            <a:off x="457200" y="5634006"/>
+            <a:ext cx="73152" cy="629629"/>
+          </a:xfrm>
+          <a:prstGeom prst="rect">
+            <a:avLst/>
+          </a:prstGeom>
+          <a:solidFill>
+            <a:srgbClr val="1677FF"/>
+          </a:solidFill>
+          <a:ln>
+            <a:noFill/>
+          </a:ln>
+          <a:effectLst/>
+        </p:spPr>
+        <p:style>
+          <a:lnRef idx="1">
+            <a:schemeClr val="accent1"/>
+          </a:lnRef>
+          <a:fillRef idx="3">
+            <a:schemeClr val="accent1"/>
+          </a:fillRef>
+          <a:effectRef idx="2">
+            <a:schemeClr val="accent1"/>
+          </a:effectRef>
+          <a:fontRef idx="minor">
+            <a:schemeClr val="lt1"/>
+          </a:fontRef>
+        </p:style>
+        <p:txBody>
+          <a:bodyPr rtlCol="0" anchor="ctr"/>
+          <a:lstStyle/>
+          <a:p>
+            <a:pPr algn="ctr"/>
+          </a:p>
+        </p:txBody>
+      </p:sp>
+      <p:sp>
+        <p:nvSpPr>
+          <p:cNvPr id="31" name="TextBox 30"/>
+          <p:cNvSpPr txBox="1"/>
+          <p:nvPr/>
+        </p:nvSpPr>
+        <p:spPr>
+          <a:xfrm>
+            <a:off x="777240" y="5743734"/>
+            <a:ext cx="10789920" cy="365760"/>
+          </a:xfrm>
+          <a:prstGeom prst="rect">
+            <a:avLst/>
+          </a:prstGeom>
+          <a:noFill/>
+        </p:spPr>
+        <p:txBody>
+          <a:bodyPr wrap="square" anchor="t">
+            <a:spAutoFit/>
+          </a:bodyPr>
+          <a:lstStyle/>
+          <a:p>
+            <a:pPr algn="l">
+              <a:spcAft>
+                <a:spcPts val="300"/>
+              </a:spcAft>
+              <a:defRPr sz="1400" b="1">
+                <a:solidFill>
+                  <a:srgbClr val="0A3D91"/>
+                </a:solidFill>
+              </a:defRPr>
+            </a:pPr>
+            <a:r>
               <a:t>密钥安全</a:t>
             </a:r>
           </a:p>
@@ -5644,14 +5972,14 @@
       </p:sp>
       <p:sp>
         <p:nvSpPr>
-          <p:cNvPr id="28" name="TextBox 27"/>
-          <p:cNvSpPr txBox="1"/>
-          <p:nvPr/>
-        </p:nvSpPr>
-        <p:spPr>
-          <a:xfrm>
-            <a:off x="777240" y="5974075"/>
-            <a:ext cx="10789920" cy="222966381600"/>
+          <p:cNvPr id="32" name="TextBox 31"/>
+          <p:cNvSpPr txBox="1"/>
+          <p:nvPr/>
+        </p:nvSpPr>
+        <p:spPr>
+          <a:xfrm>
+            <a:off x="777240" y="6091206"/>
+            <a:ext cx="10789920" cy="115862709600"/>
           </a:xfrm>
           <a:prstGeom prst="rect">
             <a:avLst/>
@@ -5682,7 +6010,7 @@
       </p:sp>
       <p:sp>
         <p:nvSpPr>
-          <p:cNvPr id="29" name="TextBox 28"/>
+          <p:cNvPr id="33" name="TextBox 32"/>
           <p:cNvSpPr txBox="1"/>
           <p:nvPr/>
         </p:nvSpPr>
@@ -5720,7 +6048,7 @@
       </p:sp>
       <p:sp>
         <p:nvSpPr>
-          <p:cNvPr id="30" name="TextBox 29"/>
+          <p:cNvPr id="34" name="TextBox 33"/>
           <p:cNvSpPr txBox="1"/>
           <p:nvPr/>
         </p:nvSpPr>
@@ -6067,7 +6395,7 @@
               </a:defRPr>
             </a:pPr>
             <a:r>
-              <a:t>认证(register/login) / 行程(create/list/detail/status/agents/plan-file/report/cancel) / 审核(pending/claim/decision) / 记忆(工单7) / 运维(health/metrics)</a:t>
+              <a:t>认证(register含角色/login) / 行程(create/list/detail/status/agents/plan-file/report/cancel/delete/PATCH itinerary) / 审核 / 记忆(工单7) / 运维</a:t>
             </a:r>
           </a:p>
         </p:txBody>
@@ -6559,7 +6887,7 @@
               </a:defRPr>
             </a:pPr>
             <a:r>
-              <a:t>景点图片(可放大) + 三餐餐饮 + 营业时间 + 日期 + 状态看板友好化(进度条+步骤卡片)</a:t>
+              <a:t>出发地交通方式+票价 + 景点图片(可放大) + 三餐餐饮 + 门票/人均价 + 营业时间 + 编辑行程</a:t>
             </a:r>
           </a:p>
         </p:txBody>
@@ -6965,7 +7293,7 @@
         <p:spPr>
           <a:xfrm>
             <a:off x="457200" y="1417320"/>
-            <a:ext cx="11247120" cy="910742"/>
+            <a:ext cx="11247120" cy="746759"/>
           </a:xfrm>
           <a:prstGeom prst="rect">
             <a:avLst/>
@@ -7009,7 +7337,7 @@
         <p:spPr>
           <a:xfrm>
             <a:off x="457200" y="1417320"/>
-            <a:ext cx="73152" cy="910742"/>
+            <a:ext cx="73152" cy="746759"/>
           </a:xfrm>
           <a:prstGeom prst="rect">
             <a:avLst/>
@@ -7091,7 +7419,7 @@
         <p:spPr>
           <a:xfrm>
             <a:off x="777240" y="1874520"/>
-            <a:ext cx="10789920" cy="372912436800"/>
+            <a:ext cx="10789920" cy="222966381600"/>
           </a:xfrm>
           <a:prstGeom prst="rect">
             <a:avLst/>
@@ -7128,8 +7456,8 @@
         </p:nvSpPr>
         <p:spPr>
           <a:xfrm>
-            <a:off x="457200" y="2401214"/>
-            <a:ext cx="11247120" cy="910742"/>
+            <a:off x="457200" y="2237231"/>
+            <a:ext cx="11247120" cy="746759"/>
           </a:xfrm>
           <a:prstGeom prst="rect">
             <a:avLst/>
@@ -7172,8 +7500,8 @@
         </p:nvSpPr>
         <p:spPr>
           <a:xfrm>
-            <a:off x="457200" y="2401214"/>
-            <a:ext cx="73152" cy="910742"/>
+            <a:off x="457200" y="2237231"/>
+            <a:ext cx="73152" cy="746759"/>
           </a:xfrm>
           <a:prstGeom prst="rect">
             <a:avLst/>
@@ -7216,7 +7544,7 @@
         </p:nvSpPr>
         <p:spPr>
           <a:xfrm>
-            <a:off x="777240" y="2510942"/>
+            <a:off x="777240" y="2346959"/>
             <a:ext cx="10789920" cy="365760"/>
           </a:xfrm>
           <a:prstGeom prst="rect">
@@ -7254,8 +7582,8 @@
         </p:nvSpPr>
         <p:spPr>
           <a:xfrm>
-            <a:off x="777240" y="2858414"/>
-            <a:ext cx="10789920" cy="372912436800"/>
+            <a:off x="777240" y="2694431"/>
+            <a:ext cx="10789920" cy="222966381600"/>
           </a:xfrm>
           <a:prstGeom prst="rect">
             <a:avLst/>
@@ -7292,8 +7620,8 @@
         </p:nvSpPr>
         <p:spPr>
           <a:xfrm>
-            <a:off x="457200" y="3385108"/>
-            <a:ext cx="11247120" cy="910742"/>
+            <a:off x="457200" y="3057142"/>
+            <a:ext cx="11247120" cy="746759"/>
           </a:xfrm>
           <a:prstGeom prst="rect">
             <a:avLst/>
@@ -7336,8 +7664,8 @@
         </p:nvSpPr>
         <p:spPr>
           <a:xfrm>
-            <a:off x="457200" y="3385108"/>
-            <a:ext cx="73152" cy="910742"/>
+            <a:off x="457200" y="3057142"/>
+            <a:ext cx="73152" cy="746759"/>
           </a:xfrm>
           <a:prstGeom prst="rect">
             <a:avLst/>
@@ -7380,7 +7708,7 @@
         </p:nvSpPr>
         <p:spPr>
           <a:xfrm>
-            <a:off x="777240" y="3494836"/>
+            <a:off x="777240" y="3166870"/>
             <a:ext cx="10789920" cy="365760"/>
           </a:xfrm>
           <a:prstGeom prst="rect">
@@ -7418,8 +7746,8 @@
         </p:nvSpPr>
         <p:spPr>
           <a:xfrm>
-            <a:off x="777240" y="3842308"/>
-            <a:ext cx="10789920" cy="372912436800"/>
+            <a:off x="777240" y="3514342"/>
+            <a:ext cx="10789920" cy="222966381600"/>
           </a:xfrm>
           <a:prstGeom prst="rect">
             <a:avLst/>
@@ -7456,8 +7784,8 @@
         </p:nvSpPr>
         <p:spPr>
           <a:xfrm>
-            <a:off x="457200" y="4369002"/>
-            <a:ext cx="11247120" cy="910742"/>
+            <a:off x="457200" y="3877053"/>
+            <a:ext cx="11247120" cy="746759"/>
           </a:xfrm>
           <a:prstGeom prst="rect">
             <a:avLst/>
@@ -7500,8 +7828,8 @@
         </p:nvSpPr>
         <p:spPr>
           <a:xfrm>
-            <a:off x="457200" y="4369002"/>
-            <a:ext cx="73152" cy="910742"/>
+            <a:off x="457200" y="3877053"/>
+            <a:ext cx="73152" cy="746759"/>
           </a:xfrm>
           <a:prstGeom prst="rect">
             <a:avLst/>
@@ -7544,7 +7872,7 @@
         </p:nvSpPr>
         <p:spPr>
           <a:xfrm>
-            <a:off x="777240" y="4478730"/>
+            <a:off x="777240" y="3986781"/>
             <a:ext cx="10789920" cy="365760"/>
           </a:xfrm>
           <a:prstGeom prst="rect">
@@ -7582,8 +7910,8 @@
         </p:nvSpPr>
         <p:spPr>
           <a:xfrm>
-            <a:off x="777240" y="4826202"/>
-            <a:ext cx="10789920" cy="372912436800"/>
+            <a:off x="777240" y="4334253"/>
+            <a:ext cx="10789920" cy="222966381600"/>
           </a:xfrm>
           <a:prstGeom prst="rect">
             <a:avLst/>
@@ -7607,7 +7935,7 @@
               </a:defRPr>
             </a:pPr>
             <a:r>
-              <a:t>advisor_demo(顾问) / supervisor_demo(主管)，密码 wenlv123</a:t>
+              <a:t>advisor_demo(顾问) / supervisor_demo(主管)，密码 wenlv123；注册可自选游客/顾问身份</a:t>
             </a:r>
           </a:p>
         </p:txBody>
@@ -7620,8 +7948,8 @@
         </p:nvSpPr>
         <p:spPr>
           <a:xfrm>
-            <a:off x="457200" y="5352896"/>
-            <a:ext cx="11247120" cy="910742"/>
+            <a:off x="457200" y="4696964"/>
+            <a:ext cx="11247120" cy="746759"/>
           </a:xfrm>
           <a:prstGeom prst="rect">
             <a:avLst/>
@@ -7664,8 +7992,8 @@
         </p:nvSpPr>
         <p:spPr>
           <a:xfrm>
-            <a:off x="457200" y="5352896"/>
-            <a:ext cx="73152" cy="910742"/>
+            <a:off x="457200" y="4696964"/>
+            <a:ext cx="73152" cy="746759"/>
           </a:xfrm>
           <a:prstGeom prst="rect">
             <a:avLst/>
@@ -7708,7 +8036,7 @@
         </p:nvSpPr>
         <p:spPr>
           <a:xfrm>
-            <a:off x="777240" y="5462624"/>
+            <a:off x="777240" y="4806692"/>
             <a:ext cx="10789920" cy="365760"/>
           </a:xfrm>
           <a:prstGeom prst="rect">
@@ -7733,6 +8061,170 @@
               </a:defRPr>
             </a:pPr>
             <a:r>
+              <a:t>多国语言</a:t>
+            </a:r>
+          </a:p>
+        </p:txBody>
+      </p:sp>
+      <p:sp>
+        <p:nvSpPr>
+          <p:cNvPr id="24" name="TextBox 23"/>
+          <p:cNvSpPr txBox="1"/>
+          <p:nvPr/>
+        </p:nvSpPr>
+        <p:spPr>
+          <a:xfrm>
+            <a:off x="777240" y="5154164"/>
+            <a:ext cx="10789920" cy="222966381600"/>
+          </a:xfrm>
+          <a:prstGeom prst="rect">
+            <a:avLst/>
+          </a:prstGeom>
+          <a:noFill/>
+        </p:spPr>
+        <p:txBody>
+          <a:bodyPr wrap="square" anchor="t">
+            <a:spAutoFit/>
+          </a:bodyPr>
+          <a:lstStyle/>
+          <a:p>
+            <a:pPr algn="l">
+              <a:spcAft>
+                <a:spcPts val="300"/>
+              </a:spcAft>
+              <a:defRPr sz="1200" b="0">
+                <a:solidFill>
+                  <a:srgbClr val="1F2D3D"/>
+                </a:solidFill>
+              </a:defRPr>
+            </a:pPr>
+            <a:r>
+              <a:t>左下角切换 11 种语言（中/英/日/韩/法/德/西/俄/葡/意/阿）</a:t>
+            </a:r>
+          </a:p>
+        </p:txBody>
+      </p:sp>
+      <p:sp>
+        <p:nvSpPr>
+          <p:cNvPr id="25" name="Rectangle 24"/>
+          <p:cNvSpPr/>
+          <p:nvPr/>
+        </p:nvSpPr>
+        <p:spPr>
+          <a:xfrm>
+            <a:off x="457200" y="5516875"/>
+            <a:ext cx="11247120" cy="746759"/>
+          </a:xfrm>
+          <a:prstGeom prst="rect">
+            <a:avLst/>
+          </a:prstGeom>
+          <a:solidFill>
+            <a:srgbClr val="F7FAFC"/>
+          </a:solidFill>
+          <a:ln>
+            <a:noFill/>
+          </a:ln>
+          <a:effectLst/>
+        </p:spPr>
+        <p:style>
+          <a:lnRef idx="1">
+            <a:schemeClr val="accent1"/>
+          </a:lnRef>
+          <a:fillRef idx="3">
+            <a:schemeClr val="accent1"/>
+          </a:fillRef>
+          <a:effectRef idx="2">
+            <a:schemeClr val="accent1"/>
+          </a:effectRef>
+          <a:fontRef idx="minor">
+            <a:schemeClr val="lt1"/>
+          </a:fontRef>
+        </p:style>
+        <p:txBody>
+          <a:bodyPr rtlCol="0" anchor="ctr"/>
+          <a:lstStyle/>
+          <a:p>
+            <a:pPr algn="ctr"/>
+          </a:p>
+        </p:txBody>
+      </p:sp>
+      <p:sp>
+        <p:nvSpPr>
+          <p:cNvPr id="26" name="Rectangle 25"/>
+          <p:cNvSpPr/>
+          <p:nvPr/>
+        </p:nvSpPr>
+        <p:spPr>
+          <a:xfrm>
+            <a:off x="457200" y="5516875"/>
+            <a:ext cx="73152" cy="746759"/>
+          </a:xfrm>
+          <a:prstGeom prst="rect">
+            <a:avLst/>
+          </a:prstGeom>
+          <a:solidFill>
+            <a:srgbClr val="1677FF"/>
+          </a:solidFill>
+          <a:ln>
+            <a:noFill/>
+          </a:ln>
+          <a:effectLst/>
+        </p:spPr>
+        <p:style>
+          <a:lnRef idx="1">
+            <a:schemeClr val="accent1"/>
+          </a:lnRef>
+          <a:fillRef idx="3">
+            <a:schemeClr val="accent1"/>
+          </a:fillRef>
+          <a:effectRef idx="2">
+            <a:schemeClr val="accent1"/>
+          </a:effectRef>
+          <a:fontRef idx="minor">
+            <a:schemeClr val="lt1"/>
+          </a:fontRef>
+        </p:style>
+        <p:txBody>
+          <a:bodyPr rtlCol="0" anchor="ctr"/>
+          <a:lstStyle/>
+          <a:p>
+            <a:pPr algn="ctr"/>
+          </a:p>
+        </p:txBody>
+      </p:sp>
+      <p:sp>
+        <p:nvSpPr>
+          <p:cNvPr id="27" name="TextBox 26"/>
+          <p:cNvSpPr txBox="1"/>
+          <p:nvPr/>
+        </p:nvSpPr>
+        <p:spPr>
+          <a:xfrm>
+            <a:off x="777240" y="5626603"/>
+            <a:ext cx="10789920" cy="365760"/>
+          </a:xfrm>
+          <a:prstGeom prst="rect">
+            <a:avLst/>
+          </a:prstGeom>
+          <a:noFill/>
+        </p:spPr>
+        <p:txBody>
+          <a:bodyPr wrap="square" anchor="t">
+            <a:spAutoFit/>
+          </a:bodyPr>
+          <a:lstStyle/>
+          <a:p>
+            <a:pPr algn="l">
+              <a:spcAft>
+                <a:spcPts val="300"/>
+              </a:spcAft>
+              <a:defRPr sz="1400" b="1">
+                <a:solidFill>
+                  <a:srgbClr val="0A3D91"/>
+                </a:solidFill>
+              </a:defRPr>
+            </a:pPr>
+            <a:r>
               <a:t>nginx 根治</a:t>
             </a:r>
           </a:p>
@@ -7740,14 +8232,14 @@
       </p:sp>
       <p:sp>
         <p:nvSpPr>
-          <p:cNvPr id="24" name="TextBox 23"/>
-          <p:cNvSpPr txBox="1"/>
-          <p:nvPr/>
-        </p:nvSpPr>
-        <p:spPr>
-          <a:xfrm>
-            <a:off x="777240" y="5810096"/>
-            <a:ext cx="10789920" cy="372912436800"/>
+          <p:cNvPr id="28" name="TextBox 27"/>
+          <p:cNvSpPr txBox="1"/>
+          <p:nvPr/>
+        </p:nvSpPr>
+        <p:spPr>
+          <a:xfrm>
+            <a:off x="777240" y="5974075"/>
+            <a:ext cx="10789920" cy="222966381600"/>
           </a:xfrm>
           <a:prstGeom prst="rect">
             <a:avLst/>
@@ -7778,7 +8270,7 @@
       </p:sp>
       <p:sp>
         <p:nvSpPr>
-          <p:cNvPr id="25" name="TextBox 24"/>
+          <p:cNvPr id="29" name="TextBox 28"/>
           <p:cNvSpPr txBox="1"/>
           <p:nvPr/>
         </p:nvSpPr>
@@ -7816,7 +8308,7 @@
       </p:sp>
       <p:sp>
         <p:nvSpPr>
-          <p:cNvPr id="26" name="TextBox 25"/>
+          <p:cNvPr id="30" name="TextBox 29"/>
           <p:cNvSpPr txBox="1"/>
           <p:nvPr/>
         </p:nvSpPr>
@@ -17315,7 +17807,7 @@
         <p:spPr>
           <a:xfrm>
             <a:off x="457200" y="1417320"/>
-            <a:ext cx="11247120" cy="629629"/>
+            <a:ext cx="11247120" cy="473456"/>
           </a:xfrm>
           <a:prstGeom prst="rect">
             <a:avLst/>
@@ -17359,7 +17851,7 @@
         <p:spPr>
           <a:xfrm>
             <a:off x="457200" y="1417320"/>
-            <a:ext cx="73152" cy="629629"/>
+            <a:ext cx="73152" cy="473456"/>
           </a:xfrm>
           <a:prstGeom prst="rect">
             <a:avLst/>
@@ -17441,7 +17933,7 @@
         <p:spPr>
           <a:xfrm>
             <a:off x="777240" y="1874520"/>
-            <a:ext cx="10789920" cy="115862709600"/>
+            <a:ext cx="10789920" cy="-26941881600"/>
           </a:xfrm>
           <a:prstGeom prst="rect">
             <a:avLst/>
@@ -17478,8 +17970,8 @@
         </p:nvSpPr>
         <p:spPr>
           <a:xfrm>
-            <a:off x="457200" y="2120101"/>
-            <a:ext cx="11247120" cy="629629"/>
+            <a:off x="457200" y="1963928"/>
+            <a:ext cx="11247120" cy="473456"/>
           </a:xfrm>
           <a:prstGeom prst="rect">
             <a:avLst/>
@@ -17522,8 +18014,8 @@
         </p:nvSpPr>
         <p:spPr>
           <a:xfrm>
-            <a:off x="457200" y="2120101"/>
-            <a:ext cx="73152" cy="629629"/>
+            <a:off x="457200" y="1963928"/>
+            <a:ext cx="73152" cy="473456"/>
           </a:xfrm>
           <a:prstGeom prst="rect">
             <a:avLst/>
@@ -17566,7 +18058,7 @@
         </p:nvSpPr>
         <p:spPr>
           <a:xfrm>
-            <a:off x="777240" y="2229829"/>
+            <a:off x="777240" y="2073656"/>
             <a:ext cx="10789920" cy="365760"/>
           </a:xfrm>
           <a:prstGeom prst="rect">
@@ -17591,7 +18083,7 @@
               </a:defRPr>
             </a:pPr>
             <a:r>
-              <a:t>完整行程规划</a:t>
+              <a:t>真实城市解析+往返交通规划</a:t>
             </a:r>
           </a:p>
         </p:txBody>
@@ -17604,8 +18096,8 @@
         </p:nvSpPr>
         <p:spPr>
           <a:xfrm>
-            <a:off x="777240" y="2577301"/>
-            <a:ext cx="10789920" cy="115862709600"/>
+            <a:off x="777240" y="2421128"/>
+            <a:ext cx="10789920" cy="-26941881600"/>
           </a:xfrm>
           <a:prstGeom prst="rect">
             <a:avLst/>
@@ -17629,7 +18121,7 @@
               </a:defRPr>
             </a:pPr>
             <a:r>
-              <a:t>每日三餐餐饮推荐 + 景点图片(可放大) + 营业时间 + 出发/返程日期自动算天数</a:t>
+              <a:t>LLM 区分「从A到B」出发地/目的地 + 高德 geocode 规范化 + 往返交通(去程/返程方式+票价+耗时+途中建议)</a:t>
             </a:r>
           </a:p>
         </p:txBody>
@@ -17642,8 +18134,8 @@
         </p:nvSpPr>
         <p:spPr>
           <a:xfrm>
-            <a:off x="457200" y="2822882"/>
-            <a:ext cx="11247120" cy="629629"/>
+            <a:off x="457200" y="2510536"/>
+            <a:ext cx="11247120" cy="473456"/>
           </a:xfrm>
           <a:prstGeom prst="rect">
             <a:avLst/>
@@ -17686,8 +18178,8 @@
         </p:nvSpPr>
         <p:spPr>
           <a:xfrm>
-            <a:off x="457200" y="2822882"/>
-            <a:ext cx="73152" cy="629629"/>
+            <a:off x="457200" y="2510536"/>
+            <a:ext cx="73152" cy="473456"/>
           </a:xfrm>
           <a:prstGeom prst="rect">
             <a:avLst/>
@@ -17730,7 +18222,7 @@
         </p:nvSpPr>
         <p:spPr>
           <a:xfrm>
-            <a:off x="777240" y="2932610"/>
+            <a:off x="777240" y="2620264"/>
             <a:ext cx="10789920" cy="365760"/>
           </a:xfrm>
           <a:prstGeom prst="rect">
@@ -17755,7 +18247,7 @@
               </a:defRPr>
             </a:pPr>
             <a:r>
-              <a:t>性能大幅超标</a:t>
+              <a:t>完整行程规划</a:t>
             </a:r>
           </a:p>
         </p:txBody>
@@ -17768,8 +18260,8 @@
         </p:nvSpPr>
         <p:spPr>
           <a:xfrm>
-            <a:off x="777240" y="3280082"/>
-            <a:ext cx="10789920" cy="115862709600"/>
+            <a:off x="777240" y="2967736"/>
+            <a:ext cx="10789920" cy="-26941881600"/>
           </a:xfrm>
           <a:prstGeom prst="rect">
             <a:avLst/>
@@ -17793,7 +18285,7 @@
               </a:defRPr>
             </a:pPr>
             <a:r>
-              <a:t>QPS 1109(5.5x)、P95 35ms(快8x)、检索0.3ms(快500x)、干预成功率100%</a:t>
+              <a:t>每日三餐餐饮 + 景点图片(可放大) + 营业时间 + 门票/人均价 + 真实完成时间 + 兴趣爱好自由填</a:t>
             </a:r>
           </a:p>
         </p:txBody>
@@ -17806,8 +18298,8 @@
         </p:nvSpPr>
         <p:spPr>
           <a:xfrm>
-            <a:off x="457200" y="3525663"/>
-            <a:ext cx="11247120" cy="629629"/>
+            <a:off x="457200" y="3057144"/>
+            <a:ext cx="11247120" cy="473456"/>
           </a:xfrm>
           <a:prstGeom prst="rect">
             <a:avLst/>
@@ -17850,8 +18342,8 @@
         </p:nvSpPr>
         <p:spPr>
           <a:xfrm>
-            <a:off x="457200" y="3525663"/>
-            <a:ext cx="73152" cy="629629"/>
+            <a:off x="457200" y="3057144"/>
+            <a:ext cx="73152" cy="473456"/>
           </a:xfrm>
           <a:prstGeom prst="rect">
             <a:avLst/>
@@ -17894,7 +18386,7 @@
         </p:nvSpPr>
         <p:spPr>
           <a:xfrm>
-            <a:off x="777240" y="3635391"/>
+            <a:off x="777240" y="3166872"/>
             <a:ext cx="10789920" cy="365760"/>
           </a:xfrm>
           <a:prstGeom prst="rect">
@@ -17919,7 +18411,7 @@
               </a:defRPr>
             </a:pPr>
             <a:r>
-              <a:t>工程细节扎实</a:t>
+              <a:t>性能大幅超标</a:t>
             </a:r>
           </a:p>
         </p:txBody>
@@ -17932,8 +18424,8 @@
         </p:nvSpPr>
         <p:spPr>
           <a:xfrm>
-            <a:off x="777240" y="3982863"/>
-            <a:ext cx="10789920" cy="115862709600"/>
+            <a:off x="777240" y="3514344"/>
+            <a:ext cx="10789920" cy="-26941881600"/>
           </a:xfrm>
           <a:prstGeom prst="rect">
             <a:avLst/>
@@ -17957,7 +18449,7 @@
               </a:defRPr>
             </a:pPr>
             <a:r>
-              <a:t>原子写+checksum+快照、Lua CAS+DB兜底、防抖+幂等+超时+心跳、密钥安全注入</a:t>
+              <a:t>QPS 1109(5.5x)、P95 35ms(快8x)、检索0.3ms(快500x)、干预成功率100%，单行程约18秒</a:t>
             </a:r>
           </a:p>
         </p:txBody>
@@ -17970,8 +18462,8 @@
         </p:nvSpPr>
         <p:spPr>
           <a:xfrm>
-            <a:off x="457200" y="4228444"/>
-            <a:ext cx="11247120" cy="629629"/>
+            <a:off x="457200" y="3603752"/>
+            <a:ext cx="11247120" cy="473456"/>
           </a:xfrm>
           <a:prstGeom prst="rect">
             <a:avLst/>
@@ -18014,8 +18506,8 @@
         </p:nvSpPr>
         <p:spPr>
           <a:xfrm>
-            <a:off x="457200" y="4228444"/>
-            <a:ext cx="73152" cy="629629"/>
+            <a:off x="457200" y="3603752"/>
+            <a:ext cx="73152" cy="473456"/>
           </a:xfrm>
           <a:prstGeom prst="rect">
             <a:avLst/>
@@ -18058,7 +18550,7 @@
         </p:nvSpPr>
         <p:spPr>
           <a:xfrm>
-            <a:off x="777240" y="4338172"/>
+            <a:off x="777240" y="3713480"/>
             <a:ext cx="10789920" cy="365760"/>
           </a:xfrm>
           <a:prstGeom prst="rect">
@@ -18083,7 +18575,7 @@
               </a:defRPr>
             </a:pPr>
             <a:r>
-              <a:t>容器化暴露真bug</a:t>
+              <a:t>工程细节扎实</a:t>
             </a:r>
           </a:p>
         </p:txBody>
@@ -18096,8 +18588,8 @@
         </p:nvSpPr>
         <p:spPr>
           <a:xfrm>
-            <a:off x="777240" y="4685644"/>
-            <a:ext cx="10789920" cy="115862709600"/>
+            <a:off x="777240" y="4060952"/>
+            <a:ext cx="10789920" cy="-26941881600"/>
           </a:xfrm>
           <a:prstGeom prst="rect">
             <a:avLst/>
@@ -18121,7 +18613,7 @@
               </a:defRPr>
             </a:pPr>
             <a:r>
-              <a:t>写入-入队竞态、nginx 502，被真实部署发现并根治</a:t>
+              <a:t>原子写+checksum+快照、Lua CAS+DB兜底、防抖+幂等+超时+心跳、密钥安全注入</a:t>
             </a:r>
           </a:p>
         </p:txBody>
@@ -18134,8 +18626,8 @@
         </p:nvSpPr>
         <p:spPr>
           <a:xfrm>
-            <a:off x="457200" y="4931225"/>
-            <a:ext cx="11247120" cy="629629"/>
+            <a:off x="457200" y="4150360"/>
+            <a:ext cx="11247120" cy="473456"/>
           </a:xfrm>
           <a:prstGeom prst="rect">
             <a:avLst/>
@@ -18178,8 +18670,8 @@
         </p:nvSpPr>
         <p:spPr>
           <a:xfrm>
-            <a:off x="457200" y="4931225"/>
-            <a:ext cx="73152" cy="629629"/>
+            <a:off x="457200" y="4150360"/>
+            <a:ext cx="73152" cy="473456"/>
           </a:xfrm>
           <a:prstGeom prst="rect">
             <a:avLst/>
@@ -18222,7 +18714,7 @@
         </p:nvSpPr>
         <p:spPr>
           <a:xfrm>
-            <a:off x="777240" y="5040953"/>
+            <a:off x="777240" y="4260088"/>
             <a:ext cx="10789920" cy="365760"/>
           </a:xfrm>
           <a:prstGeom prst="rect">
@@ -18247,7 +18739,7 @@
               </a:defRPr>
             </a:pPr>
             <a:r>
-              <a:t>工单7全量落地</a:t>
+              <a:t>容器化暴露真bug</a:t>
             </a:r>
           </a:p>
         </p:txBody>
@@ -18260,8 +18752,8 @@
         </p:nvSpPr>
         <p:spPr>
           <a:xfrm>
-            <a:off x="777240" y="5388425"/>
-            <a:ext cx="10789920" cy="115862709600"/>
+            <a:off x="777240" y="4607560"/>
+            <a:ext cx="10789920" cy="-26941881600"/>
           </a:xfrm>
           <a:prstGeom prst="rect">
             <a:avLst/>
@@ -18285,7 +18777,7 @@
               </a:defRPr>
             </a:pPr>
             <a:r>
-              <a:t>图记忆+强干预，数据模型/引擎/API/前端/测试/文档完整闭环</a:t>
+              <a:t>写入-入队竞态、nginx 502，被真实部署发现并根治</a:t>
             </a:r>
           </a:p>
         </p:txBody>
@@ -18298,8 +18790,8 @@
         </p:nvSpPr>
         <p:spPr>
           <a:xfrm>
-            <a:off x="457200" y="5634006"/>
-            <a:ext cx="11247120" cy="629629"/>
+            <a:off x="457200" y="4696968"/>
+            <a:ext cx="11247120" cy="473456"/>
           </a:xfrm>
           <a:prstGeom prst="rect">
             <a:avLst/>
@@ -18342,8 +18834,8 @@
         </p:nvSpPr>
         <p:spPr>
           <a:xfrm>
-            <a:off x="457200" y="5634006"/>
-            <a:ext cx="73152" cy="629629"/>
+            <a:off x="457200" y="4696968"/>
+            <a:ext cx="73152" cy="473456"/>
           </a:xfrm>
           <a:prstGeom prst="rect">
             <a:avLst/>
@@ -18386,7 +18878,7 @@
         </p:nvSpPr>
         <p:spPr>
           <a:xfrm>
-            <a:off x="777240" y="5743734"/>
+            <a:off x="777240" y="4806696"/>
             <a:ext cx="10789920" cy="365760"/>
           </a:xfrm>
           <a:prstGeom prst="rect">
@@ -18411,6 +18903,334 @@
               </a:defRPr>
             </a:pPr>
             <a:r>
+              <a:t>工单7全量落地</a:t>
+            </a:r>
+          </a:p>
+        </p:txBody>
+      </p:sp>
+      <p:sp>
+        <p:nvSpPr>
+          <p:cNvPr id="32" name="TextBox 31"/>
+          <p:cNvSpPr txBox="1"/>
+          <p:nvPr/>
+        </p:nvSpPr>
+        <p:spPr>
+          <a:xfrm>
+            <a:off x="777240" y="5154168"/>
+            <a:ext cx="10789920" cy="-26941881600"/>
+          </a:xfrm>
+          <a:prstGeom prst="rect">
+            <a:avLst/>
+          </a:prstGeom>
+          <a:noFill/>
+        </p:spPr>
+        <p:txBody>
+          <a:bodyPr wrap="square" anchor="t">
+            <a:spAutoFit/>
+          </a:bodyPr>
+          <a:lstStyle/>
+          <a:p>
+            <a:pPr algn="l">
+              <a:spcAft>
+                <a:spcPts val="300"/>
+              </a:spcAft>
+              <a:defRPr sz="1200" b="0">
+                <a:solidFill>
+                  <a:srgbClr val="1F2D3D"/>
+                </a:solidFill>
+              </a:defRPr>
+            </a:pPr>
+            <a:r>
+              <a:t>图记忆+强干预，数据模型/引擎/API/前端/测试/文档完整闭环</a:t>
+            </a:r>
+          </a:p>
+        </p:txBody>
+      </p:sp>
+      <p:sp>
+        <p:nvSpPr>
+          <p:cNvPr id="33" name="Rectangle 32"/>
+          <p:cNvSpPr/>
+          <p:nvPr/>
+        </p:nvSpPr>
+        <p:spPr>
+          <a:xfrm>
+            <a:off x="457200" y="5243576"/>
+            <a:ext cx="11247120" cy="473456"/>
+          </a:xfrm>
+          <a:prstGeom prst="rect">
+            <a:avLst/>
+          </a:prstGeom>
+          <a:solidFill>
+            <a:srgbClr val="F7FAFC"/>
+          </a:solidFill>
+          <a:ln>
+            <a:noFill/>
+          </a:ln>
+          <a:effectLst/>
+        </p:spPr>
+        <p:style>
+          <a:lnRef idx="1">
+            <a:schemeClr val="accent1"/>
+          </a:lnRef>
+          <a:fillRef idx="3">
+            <a:schemeClr val="accent1"/>
+          </a:fillRef>
+          <a:effectRef idx="2">
+            <a:schemeClr val="accent1"/>
+          </a:effectRef>
+          <a:fontRef idx="minor">
+            <a:schemeClr val="lt1"/>
+          </a:fontRef>
+        </p:style>
+        <p:txBody>
+          <a:bodyPr rtlCol="0" anchor="ctr"/>
+          <a:lstStyle/>
+          <a:p>
+            <a:pPr algn="ctr"/>
+          </a:p>
+        </p:txBody>
+      </p:sp>
+      <p:sp>
+        <p:nvSpPr>
+          <p:cNvPr id="34" name="Rectangle 33"/>
+          <p:cNvSpPr/>
+          <p:nvPr/>
+        </p:nvSpPr>
+        <p:spPr>
+          <a:xfrm>
+            <a:off x="457200" y="5243576"/>
+            <a:ext cx="73152" cy="473456"/>
+          </a:xfrm>
+          <a:prstGeom prst="rect">
+            <a:avLst/>
+          </a:prstGeom>
+          <a:solidFill>
+            <a:srgbClr val="1677FF"/>
+          </a:solidFill>
+          <a:ln>
+            <a:noFill/>
+          </a:ln>
+          <a:effectLst/>
+        </p:spPr>
+        <p:style>
+          <a:lnRef idx="1">
+            <a:schemeClr val="accent1"/>
+          </a:lnRef>
+          <a:fillRef idx="3">
+            <a:schemeClr val="accent1"/>
+          </a:fillRef>
+          <a:effectRef idx="2">
+            <a:schemeClr val="accent1"/>
+          </a:effectRef>
+          <a:fontRef idx="minor">
+            <a:schemeClr val="lt1"/>
+          </a:fontRef>
+        </p:style>
+        <p:txBody>
+          <a:bodyPr rtlCol="0" anchor="ctr"/>
+          <a:lstStyle/>
+          <a:p>
+            <a:pPr algn="ctr"/>
+          </a:p>
+        </p:txBody>
+      </p:sp>
+      <p:sp>
+        <p:nvSpPr>
+          <p:cNvPr id="35" name="TextBox 34"/>
+          <p:cNvSpPr txBox="1"/>
+          <p:nvPr/>
+        </p:nvSpPr>
+        <p:spPr>
+          <a:xfrm>
+            <a:off x="777240" y="5353304"/>
+            <a:ext cx="10789920" cy="365760"/>
+          </a:xfrm>
+          <a:prstGeom prst="rect">
+            <a:avLst/>
+          </a:prstGeom>
+          <a:noFill/>
+        </p:spPr>
+        <p:txBody>
+          <a:bodyPr wrap="square" anchor="t">
+            <a:spAutoFit/>
+          </a:bodyPr>
+          <a:lstStyle/>
+          <a:p>
+            <a:pPr algn="l">
+              <a:spcAft>
+                <a:spcPts val="300"/>
+              </a:spcAft>
+              <a:defRPr sz="1400" b="1">
+                <a:solidFill>
+                  <a:srgbClr val="0A3D91"/>
+                </a:solidFill>
+              </a:defRPr>
+            </a:pPr>
+            <a:r>
+              <a:t>多角色+多语言+可编辑</a:t>
+            </a:r>
+          </a:p>
+        </p:txBody>
+      </p:sp>
+      <p:sp>
+        <p:nvSpPr>
+          <p:cNvPr id="36" name="TextBox 35"/>
+          <p:cNvSpPr txBox="1"/>
+          <p:nvPr/>
+        </p:nvSpPr>
+        <p:spPr>
+          <a:xfrm>
+            <a:off x="777240" y="5700776"/>
+            <a:ext cx="10789920" cy="-26941881600"/>
+          </a:xfrm>
+          <a:prstGeom prst="rect">
+            <a:avLst/>
+          </a:prstGeom>
+          <a:noFill/>
+        </p:spPr>
+        <p:txBody>
+          <a:bodyPr wrap="square" anchor="t">
+            <a:spAutoFit/>
+          </a:bodyPr>
+          <a:lstStyle/>
+          <a:p>
+            <a:pPr algn="l">
+              <a:spcAft>
+                <a:spcPts val="300"/>
+              </a:spcAft>
+              <a:defRPr sz="1200" b="0">
+                <a:solidFill>
+                  <a:srgbClr val="1F2D3D"/>
+                </a:solidFill>
+              </a:defRPr>
+            </a:pPr>
+            <a:r>
+              <a:t>游客/顾问/主管三角色 RBAC + 11国语言切换 + 手动编辑/删除行程</a:t>
+            </a:r>
+          </a:p>
+        </p:txBody>
+      </p:sp>
+      <p:sp>
+        <p:nvSpPr>
+          <p:cNvPr id="37" name="Rectangle 36"/>
+          <p:cNvSpPr/>
+          <p:nvPr/>
+        </p:nvSpPr>
+        <p:spPr>
+          <a:xfrm>
+            <a:off x="457200" y="5790184"/>
+            <a:ext cx="11247120" cy="473456"/>
+          </a:xfrm>
+          <a:prstGeom prst="rect">
+            <a:avLst/>
+          </a:prstGeom>
+          <a:solidFill>
+            <a:srgbClr val="F7FAFC"/>
+          </a:solidFill>
+          <a:ln>
+            <a:noFill/>
+          </a:ln>
+          <a:effectLst/>
+        </p:spPr>
+        <p:style>
+          <a:lnRef idx="1">
+            <a:schemeClr val="accent1"/>
+          </a:lnRef>
+          <a:fillRef idx="3">
+            <a:schemeClr val="accent1"/>
+          </a:fillRef>
+          <a:effectRef idx="2">
+            <a:schemeClr val="accent1"/>
+          </a:effectRef>
+          <a:fontRef idx="minor">
+            <a:schemeClr val="lt1"/>
+          </a:fontRef>
+        </p:style>
+        <p:txBody>
+          <a:bodyPr rtlCol="0" anchor="ctr"/>
+          <a:lstStyle/>
+          <a:p>
+            <a:pPr algn="ctr"/>
+          </a:p>
+        </p:txBody>
+      </p:sp>
+      <p:sp>
+        <p:nvSpPr>
+          <p:cNvPr id="38" name="Rectangle 37"/>
+          <p:cNvSpPr/>
+          <p:nvPr/>
+        </p:nvSpPr>
+        <p:spPr>
+          <a:xfrm>
+            <a:off x="457200" y="5790184"/>
+            <a:ext cx="73152" cy="473456"/>
+          </a:xfrm>
+          <a:prstGeom prst="rect">
+            <a:avLst/>
+          </a:prstGeom>
+          <a:solidFill>
+            <a:srgbClr val="1677FF"/>
+          </a:solidFill>
+          <a:ln>
+            <a:noFill/>
+          </a:ln>
+          <a:effectLst/>
+        </p:spPr>
+        <p:style>
+          <a:lnRef idx="1">
+            <a:schemeClr val="accent1"/>
+          </a:lnRef>
+          <a:fillRef idx="3">
+            <a:schemeClr val="accent1"/>
+          </a:fillRef>
+          <a:effectRef idx="2">
+            <a:schemeClr val="accent1"/>
+          </a:effectRef>
+          <a:fontRef idx="minor">
+            <a:schemeClr val="lt1"/>
+          </a:fontRef>
+        </p:style>
+        <p:txBody>
+          <a:bodyPr rtlCol="0" anchor="ctr"/>
+          <a:lstStyle/>
+          <a:p>
+            <a:pPr algn="ctr"/>
+          </a:p>
+        </p:txBody>
+      </p:sp>
+      <p:sp>
+        <p:nvSpPr>
+          <p:cNvPr id="39" name="TextBox 38"/>
+          <p:cNvSpPr txBox="1"/>
+          <p:nvPr/>
+        </p:nvSpPr>
+        <p:spPr>
+          <a:xfrm>
+            <a:off x="777240" y="5899912"/>
+            <a:ext cx="10789920" cy="365760"/>
+          </a:xfrm>
+          <a:prstGeom prst="rect">
+            <a:avLst/>
+          </a:prstGeom>
+          <a:noFill/>
+        </p:spPr>
+        <p:txBody>
+          <a:bodyPr wrap="square" anchor="t">
+            <a:spAutoFit/>
+          </a:bodyPr>
+          <a:lstStyle/>
+          <a:p>
+            <a:pPr algn="l">
+              <a:spcAft>
+                <a:spcPts val="300"/>
+              </a:spcAft>
+              <a:defRPr sz="1400" b="1">
+                <a:solidFill>
+                  <a:srgbClr val="0A3D91"/>
+                </a:solidFill>
+              </a:defRPr>
+            </a:pPr>
+            <a:r>
               <a:t>精致前端视觉</a:t>
             </a:r>
           </a:p>
@@ -18418,14 +19238,14 @@
       </p:sp>
       <p:sp>
         <p:nvSpPr>
-          <p:cNvPr id="32" name="TextBox 31"/>
-          <p:cNvSpPr txBox="1"/>
-          <p:nvPr/>
-        </p:nvSpPr>
-        <p:spPr>
-          <a:xfrm>
-            <a:off x="777240" y="6091206"/>
-            <a:ext cx="10789920" cy="115862709600"/>
+          <p:cNvPr id="40" name="TextBox 39"/>
+          <p:cNvSpPr txBox="1"/>
+          <p:nvPr/>
+        </p:nvSpPr>
+        <p:spPr>
+          <a:xfrm>
+            <a:off x="777240" y="6247384"/>
+            <a:ext cx="10789920" cy="-26941881600"/>
           </a:xfrm>
           <a:prstGeom prst="rect">
             <a:avLst/>
@@ -18449,14 +19269,14 @@
               </a:defRPr>
             </a:pPr>
             <a:r>
-              <a:t>真实风景壁纸 + 状态看板友好化(进度条+步骤卡片)</a:t>
-            </a:r>
-          </a:p>
-        </p:txBody>
-      </p:sp>
-      <p:sp>
-        <p:nvSpPr>
-          <p:cNvPr id="33" name="TextBox 32"/>
+              <a:t>真实风景壁纸 + 状态看板友好化(进度条+步骤卡片) + 品牌名山海行</a:t>
+            </a:r>
+          </a:p>
+        </p:txBody>
+      </p:sp>
+      <p:sp>
+        <p:nvSpPr>
+          <p:cNvPr id="41" name="TextBox 40"/>
           <p:cNvSpPr txBox="1"/>
           <p:nvPr/>
         </p:nvSpPr>
@@ -18494,7 +19314,7 @@
       </p:sp>
       <p:sp>
         <p:nvSpPr>
-          <p:cNvPr id="34" name="TextBox 33"/>
+          <p:cNvPr id="42" name="TextBox 41"/>
           <p:cNvSpPr txBox="1"/>
           <p:nvPr/>
         </p:nvSpPr>

--- a/docs/项目讲解.pptx
+++ b/docs/项目讲解.pptx
@@ -23,6 +23,7 @@
     <p:sldId id="271" r:id="rId22"/>
     <p:sldId id="272" r:id="rId23"/>
     <p:sldId id="273" r:id="rId24"/>
+    <p:sldId id="274" r:id="rId25"/>
   </p:sldIdLst>
   <p:sldSz cx="12191695" cy="6858000" type="screen4x3"/>
   <p:notesSz cx="6858000" cy="9144000"/>
@@ -3305,7 +3306,7 @@
                 <a:latin typeface="微软雅黑"/>
                 <a:ea typeface="微软雅黑"/>
               </a:rPr>
-              <a:t>真实数据 · 断点续传 · 图记忆 · 运行态强干预 · HITL 人工审核 · 人群个性化适配</a:t>
+              <a:t>真实数据 · 断点续传 · 图记忆 · 运行态强干预 · HITL 人工审核 · 人群适配 · RAG 检索增强</a:t>
             </a:r>
           </a:p>
         </p:txBody>
@@ -3348,7 +3349,7 @@
                 <a:latin typeface="微软雅黑"/>
                 <a:ea typeface="微软雅黑"/>
               </a:rPr>
-              <a:t>版本 v3.0 · 2026-09-02 · 1 人独立完成</a:t>
+              <a:t>版本 v3.1 · 2026-09-03 · 1 人独立完成</a:t>
             </a:r>
           </a:p>
         </p:txBody>
@@ -4766,7 +4767,7 @@
                 <a:latin typeface="微软雅黑"/>
                 <a:ea typeface="微软雅黑"/>
               </a:rPr>
-              <a:t>10/18</a:t>
+              <a:t>10/19</a:t>
             </a:r>
           </a:p>
         </p:txBody>
@@ -5314,7 +5315,7 @@
                 <a:latin typeface="微软雅黑"/>
                 <a:ea typeface="微软雅黑"/>
               </a:rPr>
-              <a:t>qwen3.7-flash，出发地/目的地解析 + 交通票价估算 + 记忆抽取（Mock 可切真实）。</a:t>
+              <a:t>qwen3.7-flash，出发地/目的地解析 + 交通票价估算 + 记忆抽取 + RAG 生成（Mock 可切真实）。</a:t>
             </a:r>
           </a:p>
         </p:txBody>
@@ -5445,7 +5446,7 @@
                 <a:latin typeface="微软雅黑"/>
                 <a:ea typeface="微软雅黑"/>
               </a:rPr>
-              <a:t>虚拟房价</a:t>
+              <a:t>百炼 Embedding</a:t>
             </a:r>
           </a:p>
         </p:txBody>
@@ -5488,7 +5489,7 @@
                 <a:latin typeface="微软雅黑"/>
                 <a:ea typeface="微软雅黑"/>
               </a:rPr>
-              <a:t>真实酒店 POI 名 + 城市等级分档估算价（一线/二线/其他三档）。</a:t>
+              <a:t>text-embedding-v3（768 维，OpenAI 兼容），语义向量化（图记忆 + 知识库）。</a:t>
             </a:r>
           </a:p>
         </p:txBody>
@@ -5619,7 +5620,7 @@
                 <a:latin typeface="微软雅黑"/>
                 <a:ea typeface="微软雅黑"/>
               </a:rPr>
-              <a:t>虚拟门票/人均</a:t>
+              <a:t>虚拟房价</a:t>
             </a:r>
           </a:p>
         </p:txBody>
@@ -5662,7 +5663,7 @@
                 <a:latin typeface="微软雅黑"/>
                 <a:ea typeface="微软雅黑"/>
               </a:rPr>
-              <a:t>景点门票按年龄分档（老人60-64半价/65+免首道）+ 餐厅人均参考价。</a:t>
+              <a:t>真实酒店 POI 名 + 城市等级分档估算价（一线/二线/其他三档）。</a:t>
             </a:r>
           </a:p>
         </p:txBody>
@@ -5676,7 +5677,7 @@
         <p:spPr>
           <a:xfrm>
             <a:off x="6263640" y="1417320"/>
-            <a:ext cx="5577840" cy="1581911"/>
+            <a:ext cx="5577840" cy="1168145"/>
           </a:xfrm>
           <a:prstGeom prst="rect">
             <a:avLst/>
@@ -5720,7 +5721,7 @@
         <p:spPr>
           <a:xfrm>
             <a:off x="6263640" y="1417320"/>
-            <a:ext cx="73152" cy="1581911"/>
+            <a:ext cx="73152" cy="1168145"/>
           </a:xfrm>
           <a:prstGeom prst="rect">
             <a:avLst/>
@@ -5793,7 +5794,7 @@
                 <a:latin typeface="微软雅黑"/>
                 <a:ea typeface="微软雅黑"/>
               </a:rPr>
-              <a:t>业务表(6张)</a:t>
+              <a:t>虚拟门票/人均</a:t>
             </a:r>
           </a:p>
         </p:txBody>
@@ -5807,7 +5808,7 @@
         <p:spPr>
           <a:xfrm>
             <a:off x="6446520" y="1828800"/>
-            <a:ext cx="5212080" cy="1078991"/>
+            <a:ext cx="5212080" cy="665225"/>
           </a:xfrm>
           <a:prstGeom prst="rect">
             <a:avLst/>
@@ -5836,7 +5837,7 @@
                 <a:latin typeface="微软雅黑"/>
                 <a:ea typeface="微软雅黑"/>
               </a:rPr>
-              <a:t>users / travel_plans / agent_tasks / review_records / budget_records / audit_logs。</a:t>
+              <a:t>景点门票按年龄分档（老人60-64半价/65+免首道、儿童6岁以下免/6-18半价）+ 餐厅人均参考价。</a:t>
             </a:r>
           </a:p>
         </p:txBody>
@@ -5849,8 +5850,8 @@
         </p:nvSpPr>
         <p:spPr>
           <a:xfrm>
-            <a:off x="6263640" y="3072383"/>
-            <a:ext cx="5577840" cy="1581911"/>
+            <a:off x="6263640" y="2658617"/>
+            <a:ext cx="5577840" cy="1168145"/>
           </a:xfrm>
           <a:prstGeom prst="rect">
             <a:avLst/>
@@ -5893,8 +5894,8 @@
         </p:nvSpPr>
         <p:spPr>
           <a:xfrm>
-            <a:off x="6263640" y="3072383"/>
-            <a:ext cx="73152" cy="1581911"/>
+            <a:off x="6263640" y="2658617"/>
+            <a:ext cx="73152" cy="1168145"/>
           </a:xfrm>
           <a:prstGeom prst="rect">
             <a:avLst/>
@@ -5937,7 +5938,7 @@
         </p:nvSpPr>
         <p:spPr>
           <a:xfrm>
-            <a:off x="6446520" y="3163823"/>
+            <a:off x="6446520" y="2750057"/>
             <a:ext cx="5212080" cy="320040"/>
           </a:xfrm>
           <a:prstGeom prst="rect">
@@ -5967,7 +5968,7 @@
                 <a:latin typeface="微软雅黑"/>
                 <a:ea typeface="微软雅黑"/>
               </a:rPr>
-              <a:t>图记忆表(4张)</a:t>
+              <a:t>业务表(6张)</a:t>
             </a:r>
           </a:p>
         </p:txBody>
@@ -5980,8 +5981,8 @@
         </p:nvSpPr>
         <p:spPr>
           <a:xfrm>
-            <a:off x="6446520" y="3483863"/>
-            <a:ext cx="5212080" cy="1078991"/>
+            <a:off x="6446520" y="3070097"/>
+            <a:ext cx="5212080" cy="665225"/>
           </a:xfrm>
           <a:prstGeom prst="rect">
             <a:avLst/>
@@ -6010,7 +6011,7 @@
                 <a:latin typeface="微软雅黑"/>
                 <a:ea typeface="微软雅黑"/>
               </a:rPr>
-              <a:t>graph_nodes / graph_edges / memory_events / interventions。</a:t>
+              <a:t>users / travel_plans / agent_tasks / review_records / budget_records / audit_logs。</a:t>
             </a:r>
           </a:p>
         </p:txBody>
@@ -6023,8 +6024,8 @@
         </p:nvSpPr>
         <p:spPr>
           <a:xfrm>
-            <a:off x="6263640" y="4727446"/>
-            <a:ext cx="5577840" cy="1581911"/>
+            <a:off x="6263640" y="3899914"/>
+            <a:ext cx="5577840" cy="1168145"/>
           </a:xfrm>
           <a:prstGeom prst="rect">
             <a:avLst/>
@@ -6067,8 +6068,8 @@
         </p:nvSpPr>
         <p:spPr>
           <a:xfrm>
-            <a:off x="6263640" y="4727446"/>
-            <a:ext cx="73152" cy="1581911"/>
+            <a:off x="6263640" y="3899914"/>
+            <a:ext cx="73152" cy="1168145"/>
           </a:xfrm>
           <a:prstGeom prst="rect">
             <a:avLst/>
@@ -6111,7 +6112,7 @@
         </p:nvSpPr>
         <p:spPr>
           <a:xfrm>
-            <a:off x="6446520" y="4818886"/>
+            <a:off x="6446520" y="3991354"/>
             <a:ext cx="5212080" cy="320040"/>
           </a:xfrm>
           <a:prstGeom prst="rect">
@@ -6141,7 +6142,7 @@
                 <a:latin typeface="微软雅黑"/>
                 <a:ea typeface="微软雅黑"/>
               </a:rPr>
-              <a:t>密钥安全</a:t>
+              <a:t>图记忆表(4张)</a:t>
             </a:r>
           </a:p>
         </p:txBody>
@@ -6154,8 +6155,8 @@
         </p:nvSpPr>
         <p:spPr>
           <a:xfrm>
-            <a:off x="6446520" y="5138926"/>
-            <a:ext cx="5212080" cy="1078991"/>
+            <a:off x="6446520" y="4311394"/>
+            <a:ext cx="5212080" cy="665225"/>
           </a:xfrm>
           <a:prstGeom prst="rect">
             <a:avLst/>
@@ -6184,14 +6185,188 @@
                 <a:latin typeface="微软雅黑"/>
                 <a:ea typeface="微软雅黑"/>
               </a:rPr>
-              <a:t>.env 注入 + .gitignore 忽略，真实 key 不入 git。</a:t>
-            </a:r>
-          </a:p>
-        </p:txBody>
-      </p:sp>
-      <p:sp>
-        <p:nvSpPr>
-          <p:cNvPr id="33" name="TextBox 32"/>
+              <a:t>graph_nodes / graph_edges / memory_events / interventions。</a:t>
+            </a:r>
+          </a:p>
+        </p:txBody>
+      </p:sp>
+      <p:sp>
+        <p:nvSpPr>
+          <p:cNvPr id="33" name="Rectangle 32"/>
+          <p:cNvSpPr/>
+          <p:nvPr/>
+        </p:nvSpPr>
+        <p:spPr>
+          <a:xfrm>
+            <a:off x="6263640" y="5141211"/>
+            <a:ext cx="5577840" cy="1168145"/>
+          </a:xfrm>
+          <a:prstGeom prst="rect">
+            <a:avLst/>
+          </a:prstGeom>
+          <a:solidFill>
+            <a:srgbClr val="F7FAFC"/>
+          </a:solidFill>
+          <a:ln>
+            <a:noFill/>
+          </a:ln>
+          <a:effectLst/>
+        </p:spPr>
+        <p:style>
+          <a:lnRef idx="1">
+            <a:schemeClr val="accent1"/>
+          </a:lnRef>
+          <a:fillRef idx="3">
+            <a:schemeClr val="accent1"/>
+          </a:fillRef>
+          <a:effectRef idx="2">
+            <a:schemeClr val="accent1"/>
+          </a:effectRef>
+          <a:fontRef idx="minor">
+            <a:schemeClr val="lt1"/>
+          </a:fontRef>
+        </p:style>
+        <p:txBody>
+          <a:bodyPr rtlCol="0" anchor="ctr"/>
+          <a:lstStyle/>
+          <a:p>
+            <a:pPr algn="ctr"/>
+          </a:p>
+        </p:txBody>
+      </p:sp>
+      <p:sp>
+        <p:nvSpPr>
+          <p:cNvPr id="34" name="Rectangle 33"/>
+          <p:cNvSpPr/>
+          <p:nvPr/>
+        </p:nvSpPr>
+        <p:spPr>
+          <a:xfrm>
+            <a:off x="6263640" y="5141211"/>
+            <a:ext cx="73152" cy="1168145"/>
+          </a:xfrm>
+          <a:prstGeom prst="rect">
+            <a:avLst/>
+          </a:prstGeom>
+          <a:solidFill>
+            <a:srgbClr val="1677FF"/>
+          </a:solidFill>
+          <a:ln>
+            <a:noFill/>
+          </a:ln>
+          <a:effectLst/>
+        </p:spPr>
+        <p:style>
+          <a:lnRef idx="1">
+            <a:schemeClr val="accent1"/>
+          </a:lnRef>
+          <a:fillRef idx="3">
+            <a:schemeClr val="accent1"/>
+          </a:fillRef>
+          <a:effectRef idx="2">
+            <a:schemeClr val="accent1"/>
+          </a:effectRef>
+          <a:fontRef idx="minor">
+            <a:schemeClr val="lt1"/>
+          </a:fontRef>
+        </p:style>
+        <p:txBody>
+          <a:bodyPr rtlCol="0" anchor="ctr"/>
+          <a:lstStyle/>
+          <a:p>
+            <a:pPr algn="ctr"/>
+          </a:p>
+        </p:txBody>
+      </p:sp>
+      <p:sp>
+        <p:nvSpPr>
+          <p:cNvPr id="35" name="TextBox 34"/>
+          <p:cNvSpPr txBox="1"/>
+          <p:nvPr/>
+        </p:nvSpPr>
+        <p:spPr>
+          <a:xfrm>
+            <a:off x="6446520" y="5232651"/>
+            <a:ext cx="5212080" cy="320040"/>
+          </a:xfrm>
+          <a:prstGeom prst="rect">
+            <a:avLst/>
+          </a:prstGeom>
+          <a:noFill/>
+        </p:spPr>
+        <p:txBody>
+          <a:bodyPr wrap="square" anchor="t">
+            <a:spAutoFit/>
+          </a:bodyPr>
+          <a:lstStyle/>
+          <a:p>
+            <a:pPr algn="l">
+              <a:lnSpc>
+                <a:spcPct val="100000"/>
+              </a:lnSpc>
+              <a:spcAft>
+                <a:spcPts val="300"/>
+              </a:spcAft>
+            </a:pPr>
+            <a:r>
+              <a:rPr sz="1300" b="1">
+                <a:solidFill>
+                  <a:srgbClr val="0A3D91"/>
+                </a:solidFill>
+                <a:latin typeface="微软雅黑"/>
+                <a:ea typeface="微软雅黑"/>
+              </a:rPr>
+              <a:t>知识库表(1张)</a:t>
+            </a:r>
+          </a:p>
+        </p:txBody>
+      </p:sp>
+      <p:sp>
+        <p:nvSpPr>
+          <p:cNvPr id="36" name="TextBox 35"/>
+          <p:cNvSpPr txBox="1"/>
+          <p:nvPr/>
+        </p:nvSpPr>
+        <p:spPr>
+          <a:xfrm>
+            <a:off x="6446520" y="5552691"/>
+            <a:ext cx="5212080" cy="665225"/>
+          </a:xfrm>
+          <a:prstGeom prst="rect">
+            <a:avLst/>
+          </a:prstGeom>
+          <a:noFill/>
+        </p:spPr>
+        <p:txBody>
+          <a:bodyPr wrap="square" anchor="t">
+            <a:spAutoFit/>
+          </a:bodyPr>
+          <a:lstStyle/>
+          <a:p>
+            <a:pPr algn="l">
+              <a:lnSpc>
+                <a:spcPct val="100000"/>
+              </a:lnSpc>
+              <a:spcAft>
+                <a:spcPts val="300"/>
+              </a:spcAft>
+            </a:pPr>
+            <a:r>
+              <a:rPr sz="1050" b="0">
+                <a:solidFill>
+                  <a:srgbClr val="1F2D3D"/>
+                </a:solidFill>
+                <a:latin typeface="微软雅黑"/>
+                <a:ea typeface="微软雅黑"/>
+              </a:rPr>
+              <a:t>document_chunks（6类语料，38 chunk，Vector 768）。</a:t>
+            </a:r>
+          </a:p>
+        </p:txBody>
+      </p:sp>
+      <p:sp>
+        <p:nvSpPr>
+          <p:cNvPr id="37" name="TextBox 36"/>
           <p:cNvSpPr txBox="1"/>
           <p:nvPr/>
         </p:nvSpPr>
@@ -6227,14 +6402,14 @@
                 <a:latin typeface="微软雅黑"/>
                 <a:ea typeface="微软雅黑"/>
               </a:rPr>
-              <a:t>11/18</a:t>
-            </a:r>
-          </a:p>
-        </p:txBody>
-      </p:sp>
-      <p:sp>
-        <p:nvSpPr>
-          <p:cNvPr id="34" name="TextBox 33"/>
+              <a:t>11/19</a:t>
+            </a:r>
+          </a:p>
+        </p:txBody>
+      </p:sp>
+      <p:sp>
+        <p:nvSpPr>
+          <p:cNvPr id="38" name="TextBox 37"/>
           <p:cNvSpPr txBox="1"/>
           <p:nvPr/>
         </p:nvSpPr>
@@ -6441,7 +6616,7 @@
         <p:spPr>
           <a:xfrm>
             <a:off x="457200" y="1417320"/>
-            <a:ext cx="11247120" cy="919886"/>
+            <a:ext cx="11247120" cy="754379"/>
           </a:xfrm>
           <a:prstGeom prst="rect">
             <a:avLst/>
@@ -6485,7 +6660,7 @@
         <p:spPr>
           <a:xfrm>
             <a:off x="457200" y="1417320"/>
-            <a:ext cx="73152" cy="919886"/>
+            <a:ext cx="73152" cy="754379"/>
           </a:xfrm>
           <a:prstGeom prst="rect">
             <a:avLst/>
@@ -6572,7 +6747,7 @@
         <p:spPr>
           <a:xfrm>
             <a:off x="777240" y="1874520"/>
-            <a:ext cx="10789920" cy="381273710400"/>
+            <a:ext cx="10789920" cy="229934109600"/>
           </a:xfrm>
           <a:prstGeom prst="rect">
             <a:avLst/>
@@ -6614,8 +6789,8 @@
         </p:nvSpPr>
         <p:spPr>
           <a:xfrm>
-            <a:off x="457200" y="2410358"/>
-            <a:ext cx="11247120" cy="919886"/>
+            <a:off x="457200" y="2244851"/>
+            <a:ext cx="11247120" cy="754379"/>
           </a:xfrm>
           <a:prstGeom prst="rect">
             <a:avLst/>
@@ -6658,8 +6833,8 @@
         </p:nvSpPr>
         <p:spPr>
           <a:xfrm>
-            <a:off x="457200" y="2410358"/>
-            <a:ext cx="73152" cy="919886"/>
+            <a:off x="457200" y="2244851"/>
+            <a:ext cx="73152" cy="754379"/>
           </a:xfrm>
           <a:prstGeom prst="rect">
             <a:avLst/>
@@ -6702,7 +6877,7 @@
         </p:nvSpPr>
         <p:spPr>
           <a:xfrm>
-            <a:off x="777240" y="2501798"/>
+            <a:off x="777240" y="2336291"/>
             <a:ext cx="10789920" cy="365760"/>
           </a:xfrm>
           <a:prstGeom prst="rect">
@@ -6745,8 +6920,8 @@
         </p:nvSpPr>
         <p:spPr>
           <a:xfrm>
-            <a:off x="777240" y="2867558"/>
-            <a:ext cx="10789920" cy="381273710400"/>
+            <a:off x="777240" y="2702051"/>
+            <a:ext cx="10789920" cy="229934109600"/>
           </a:xfrm>
           <a:prstGeom prst="rect">
             <a:avLst/>
@@ -6788,8 +6963,8 @@
         </p:nvSpPr>
         <p:spPr>
           <a:xfrm>
-            <a:off x="457200" y="3403396"/>
-            <a:ext cx="11247120" cy="919886"/>
+            <a:off x="457200" y="3072382"/>
+            <a:ext cx="11247120" cy="754379"/>
           </a:xfrm>
           <a:prstGeom prst="rect">
             <a:avLst/>
@@ -6832,8 +7007,8 @@
         </p:nvSpPr>
         <p:spPr>
           <a:xfrm>
-            <a:off x="457200" y="3403396"/>
-            <a:ext cx="73152" cy="919886"/>
+            <a:off x="457200" y="3072382"/>
+            <a:ext cx="73152" cy="754379"/>
           </a:xfrm>
           <a:prstGeom prst="rect">
             <a:avLst/>
@@ -6876,7 +7051,7 @@
         </p:nvSpPr>
         <p:spPr>
           <a:xfrm>
-            <a:off x="777240" y="3494836"/>
+            <a:off x="777240" y="3163822"/>
             <a:ext cx="10789920" cy="365760"/>
           </a:xfrm>
           <a:prstGeom prst="rect">
@@ -6906,7 +7081,7 @@
                 <a:latin typeface="微软雅黑"/>
                 <a:ea typeface="微软雅黑"/>
               </a:rPr>
-              <a:t>前端 6 页面</a:t>
+              <a:t>前端 7 页面</a:t>
             </a:r>
           </a:p>
         </p:txBody>
@@ -6919,8 +7094,8 @@
         </p:nvSpPr>
         <p:spPr>
           <a:xfrm>
-            <a:off x="777240" y="3860596"/>
-            <a:ext cx="10789920" cy="381273710400"/>
+            <a:off x="777240" y="3529582"/>
+            <a:ext cx="10789920" cy="229934109600"/>
           </a:xfrm>
           <a:prstGeom prst="rect">
             <a:avLst/>
@@ -6949,7 +7124,7 @@
                 <a:latin typeface="微软雅黑"/>
                 <a:ea typeface="微软雅黑"/>
               </a:rPr>
-              <a:t>登录注册 / 工作台 / 行程列表 / 行程详情 / 审核台 / 记忆图谱。</a:t>
+              <a:t>登录注册 / 工作台 / 行程列表 / 行程详情 / 审核台 / 记忆图谱 / 问答式创建。</a:t>
             </a:r>
           </a:p>
         </p:txBody>
@@ -6962,8 +7137,8 @@
         </p:nvSpPr>
         <p:spPr>
           <a:xfrm>
-            <a:off x="457200" y="4396434"/>
-            <a:ext cx="11247120" cy="919886"/>
+            <a:off x="457200" y="3899913"/>
+            <a:ext cx="11247120" cy="754379"/>
           </a:xfrm>
           <a:prstGeom prst="rect">
             <a:avLst/>
@@ -7006,8 +7181,8 @@
         </p:nvSpPr>
         <p:spPr>
           <a:xfrm>
-            <a:off x="457200" y="4396434"/>
-            <a:ext cx="73152" cy="919886"/>
+            <a:off x="457200" y="3899913"/>
+            <a:ext cx="73152" cy="754379"/>
           </a:xfrm>
           <a:prstGeom prst="rect">
             <a:avLst/>
@@ -7050,7 +7225,7 @@
         </p:nvSpPr>
         <p:spPr>
           <a:xfrm>
-            <a:off x="777240" y="4487874"/>
+            <a:off x="777240" y="3991353"/>
             <a:ext cx="10789920" cy="365760"/>
           </a:xfrm>
           <a:prstGeom prst="rect">
@@ -7093,8 +7268,8 @@
         </p:nvSpPr>
         <p:spPr>
           <a:xfrm>
-            <a:off x="777240" y="4853634"/>
-            <a:ext cx="10789920" cy="381273710400"/>
+            <a:off x="777240" y="4357113"/>
+            <a:ext cx="10789920" cy="229934109600"/>
           </a:xfrm>
           <a:prstGeom prst="rect">
             <a:avLst/>
@@ -7123,7 +7298,7 @@
                 <a:latin typeface="微软雅黑"/>
                 <a:ea typeface="微软雅黑"/>
               </a:rPr>
-              <a:t>出发地交通方式+票价 + 景点图片(可放大) + 三餐餐饮 + 门票按年龄分档 + 营业时间 + 编辑行程。</a:t>
+              <a:t>出发地交通方式+票价 + 景点图片(可放大) + 三餐餐饮 + 门票按年龄分档 + 优待备注 + 编辑行程。</a:t>
             </a:r>
           </a:p>
         </p:txBody>
@@ -7136,8 +7311,8 @@
         </p:nvSpPr>
         <p:spPr>
           <a:xfrm>
-            <a:off x="457200" y="5389472"/>
-            <a:ext cx="11247120" cy="919886"/>
+            <a:off x="457200" y="4727444"/>
+            <a:ext cx="11247120" cy="754379"/>
           </a:xfrm>
           <a:prstGeom prst="rect">
             <a:avLst/>
@@ -7180,8 +7355,8 @@
         </p:nvSpPr>
         <p:spPr>
           <a:xfrm>
-            <a:off x="457200" y="5389472"/>
-            <a:ext cx="73152" cy="919886"/>
+            <a:off x="457200" y="4727444"/>
+            <a:ext cx="73152" cy="754379"/>
           </a:xfrm>
           <a:prstGeom prst="rect">
             <a:avLst/>
@@ -7224,7 +7399,7 @@
         </p:nvSpPr>
         <p:spPr>
           <a:xfrm>
-            <a:off x="777240" y="5480912"/>
+            <a:off x="777240" y="4818884"/>
             <a:ext cx="10789920" cy="365760"/>
           </a:xfrm>
           <a:prstGeom prst="rect">
@@ -7267,8 +7442,8 @@
         </p:nvSpPr>
         <p:spPr>
           <a:xfrm>
-            <a:off x="777240" y="5846672"/>
-            <a:ext cx="10789920" cy="381273710400"/>
+            <a:off x="777240" y="5184644"/>
+            <a:ext cx="10789920" cy="229934109600"/>
           </a:xfrm>
           <a:prstGeom prst="rect">
             <a:avLst/>
@@ -7297,14 +7472,188 @@
                 <a:latin typeface="微软雅黑"/>
                 <a:ea typeface="微软雅黑"/>
               </a:rPr>
-              <a:t>成人关系(情侣/单身/未婚/已婚/家庭/朋友/同事) + 老人信息(年龄+性别可多个) + 兴趣自由填。</a:t>
-            </a:r>
-          </a:p>
-        </p:txBody>
-      </p:sp>
-      <p:sp>
-        <p:nvSpPr>
-          <p:cNvPr id="25" name="TextBox 24"/>
+              <a:t>成人关系 + 老人信息(年龄+性别+状态) + 儿童信息(年龄+身高+占座) + 学生学历 + 购票/酒店方式。</a:t>
+            </a:r>
+          </a:p>
+        </p:txBody>
+      </p:sp>
+      <p:sp>
+        <p:nvSpPr>
+          <p:cNvPr id="25" name="Rectangle 24"/>
+          <p:cNvSpPr/>
+          <p:nvPr/>
+        </p:nvSpPr>
+        <p:spPr>
+          <a:xfrm>
+            <a:off x="457200" y="5554975"/>
+            <a:ext cx="11247120" cy="754379"/>
+          </a:xfrm>
+          <a:prstGeom prst="rect">
+            <a:avLst/>
+          </a:prstGeom>
+          <a:solidFill>
+            <a:srgbClr val="F7FAFC"/>
+          </a:solidFill>
+          <a:ln>
+            <a:noFill/>
+          </a:ln>
+          <a:effectLst/>
+        </p:spPr>
+        <p:style>
+          <a:lnRef idx="1">
+            <a:schemeClr val="accent1"/>
+          </a:lnRef>
+          <a:fillRef idx="3">
+            <a:schemeClr val="accent1"/>
+          </a:fillRef>
+          <a:effectRef idx="2">
+            <a:schemeClr val="accent1"/>
+          </a:effectRef>
+          <a:fontRef idx="minor">
+            <a:schemeClr val="lt1"/>
+          </a:fontRef>
+        </p:style>
+        <p:txBody>
+          <a:bodyPr rtlCol="0" anchor="ctr"/>
+          <a:lstStyle/>
+          <a:p>
+            <a:pPr algn="ctr"/>
+          </a:p>
+        </p:txBody>
+      </p:sp>
+      <p:sp>
+        <p:nvSpPr>
+          <p:cNvPr id="26" name="Rectangle 25"/>
+          <p:cNvSpPr/>
+          <p:nvPr/>
+        </p:nvSpPr>
+        <p:spPr>
+          <a:xfrm>
+            <a:off x="457200" y="5554975"/>
+            <a:ext cx="73152" cy="754379"/>
+          </a:xfrm>
+          <a:prstGeom prst="rect">
+            <a:avLst/>
+          </a:prstGeom>
+          <a:solidFill>
+            <a:srgbClr val="1677FF"/>
+          </a:solidFill>
+          <a:ln>
+            <a:noFill/>
+          </a:ln>
+          <a:effectLst/>
+        </p:spPr>
+        <p:style>
+          <a:lnRef idx="1">
+            <a:schemeClr val="accent1"/>
+          </a:lnRef>
+          <a:fillRef idx="3">
+            <a:schemeClr val="accent1"/>
+          </a:fillRef>
+          <a:effectRef idx="2">
+            <a:schemeClr val="accent1"/>
+          </a:effectRef>
+          <a:fontRef idx="minor">
+            <a:schemeClr val="lt1"/>
+          </a:fontRef>
+        </p:style>
+        <p:txBody>
+          <a:bodyPr rtlCol="0" anchor="ctr"/>
+          <a:lstStyle/>
+          <a:p>
+            <a:pPr algn="ctr"/>
+          </a:p>
+        </p:txBody>
+      </p:sp>
+      <p:sp>
+        <p:nvSpPr>
+          <p:cNvPr id="27" name="TextBox 26"/>
+          <p:cNvSpPr txBox="1"/>
+          <p:nvPr/>
+        </p:nvSpPr>
+        <p:spPr>
+          <a:xfrm>
+            <a:off x="777240" y="5646415"/>
+            <a:ext cx="10789920" cy="365760"/>
+          </a:xfrm>
+          <a:prstGeom prst="rect">
+            <a:avLst/>
+          </a:prstGeom>
+          <a:noFill/>
+        </p:spPr>
+        <p:txBody>
+          <a:bodyPr wrap="square" anchor="t">
+            <a:spAutoFit/>
+          </a:bodyPr>
+          <a:lstStyle/>
+          <a:p>
+            <a:pPr algn="l">
+              <a:lnSpc>
+                <a:spcPct val="100000"/>
+              </a:lnSpc>
+              <a:spcAft>
+                <a:spcPts val="300"/>
+              </a:spcAft>
+            </a:pPr>
+            <a:r>
+              <a:rPr sz="1400" b="1">
+                <a:solidFill>
+                  <a:srgbClr val="0A3D91"/>
+                </a:solidFill>
+                <a:latin typeface="微软雅黑"/>
+                <a:ea typeface="微软雅黑"/>
+              </a:rPr>
+              <a:t>问答式创建</a:t>
+            </a:r>
+          </a:p>
+        </p:txBody>
+      </p:sp>
+      <p:sp>
+        <p:nvSpPr>
+          <p:cNvPr id="28" name="TextBox 27"/>
+          <p:cNvSpPr txBox="1"/>
+          <p:nvPr/>
+        </p:nvSpPr>
+        <p:spPr>
+          <a:xfrm>
+            <a:off x="777240" y="6012175"/>
+            <a:ext cx="10789920" cy="229934109600"/>
+          </a:xfrm>
+          <a:prstGeom prst="rect">
+            <a:avLst/>
+          </a:prstGeom>
+          <a:noFill/>
+        </p:spPr>
+        <p:txBody>
+          <a:bodyPr wrap="square" anchor="t">
+            <a:spAutoFit/>
+          </a:bodyPr>
+          <a:lstStyle/>
+          <a:p>
+            <a:pPr algn="l">
+              <a:lnSpc>
+                <a:spcPct val="105000"/>
+              </a:lnSpc>
+              <a:spcAft>
+                <a:spcPts val="300"/>
+              </a:spcAft>
+            </a:pPr>
+            <a:r>
+              <a:rPr sz="1200" b="0">
+                <a:solidFill>
+                  <a:srgbClr val="1F2D3D"/>
+                </a:solidFill>
+                <a:latin typeface="微软雅黑"/>
+                <a:ea typeface="微软雅黑"/>
+              </a:rPr>
+              <a:t>10 步引导式逐步问答（出发地→目的地→天数→预算→成人→儿童→老人→学生→偏好→确认）。</a:t>
+            </a:r>
+          </a:p>
+        </p:txBody>
+      </p:sp>
+      <p:sp>
+        <p:nvSpPr>
+          <p:cNvPr id="29" name="TextBox 28"/>
           <p:cNvSpPr txBox="1"/>
           <p:nvPr/>
         </p:nvSpPr>
@@ -7340,14 +7689,14 @@
                 <a:latin typeface="微软雅黑"/>
                 <a:ea typeface="微软雅黑"/>
               </a:rPr>
-              <a:t>12/18</a:t>
-            </a:r>
-          </a:p>
-        </p:txBody>
-      </p:sp>
-      <p:sp>
-        <p:nvSpPr>
-          <p:cNvPr id="26" name="TextBox 25"/>
+              <a:t>12/19</a:t>
+            </a:r>
+          </a:p>
+        </p:txBody>
+      </p:sp>
+      <p:sp>
+        <p:nvSpPr>
+          <p:cNvPr id="30" name="TextBox 29"/>
           <p:cNvSpPr txBox="1"/>
           <p:nvPr/>
         </p:nvSpPr>
@@ -8627,7 +8976,7 @@
                 <a:latin typeface="微软雅黑"/>
                 <a:ea typeface="微软雅黑"/>
               </a:rPr>
-              <a:t>13/18</a:t>
+              <a:t>13/19</a:t>
             </a:r>
           </a:p>
         </p:txBody>
@@ -8841,7 +9190,7 @@
         <p:spPr>
           <a:xfrm>
             <a:off x="457200" y="1417320"/>
-            <a:ext cx="11247120" cy="919886"/>
+            <a:ext cx="5577840" cy="1168145"/>
           </a:xfrm>
           <a:prstGeom prst="rect">
             <a:avLst/>
@@ -8885,7 +9234,7 @@
         <p:spPr>
           <a:xfrm>
             <a:off x="457200" y="1417320"/>
-            <a:ext cx="73152" cy="919886"/>
+            <a:ext cx="73152" cy="1168145"/>
           </a:xfrm>
           <a:prstGeom prst="rect">
             <a:avLst/>
@@ -8928,8 +9277,8 @@
         </p:nvSpPr>
         <p:spPr>
           <a:xfrm>
-            <a:off x="777240" y="1508760"/>
-            <a:ext cx="10789920" cy="365760"/>
+            <a:off x="640080" y="1508760"/>
+            <a:ext cx="5212080" cy="320040"/>
           </a:xfrm>
           <a:prstGeom prst="rect">
             <a:avLst/>
@@ -8951,7 +9300,7 @@
               </a:spcAft>
             </a:pPr>
             <a:r>
-              <a:rPr sz="1400" b="1">
+              <a:rPr sz="1300" b="1">
                 <a:solidFill>
                   <a:srgbClr val="0A3D91"/>
                 </a:solidFill>
@@ -8971,8 +9320,8 @@
         </p:nvSpPr>
         <p:spPr>
           <a:xfrm>
-            <a:off x="777240" y="1874520"/>
-            <a:ext cx="10789920" cy="381273710400"/>
+            <a:off x="640080" y="1828800"/>
+            <a:ext cx="5212080" cy="665225"/>
           </a:xfrm>
           <a:prstGeom prst="rect">
             <a:avLst/>
@@ -8987,14 +9336,14 @@
           <a:p>
             <a:pPr algn="l">
               <a:lnSpc>
-                <a:spcPct val="105000"/>
-              </a:lnSpc>
-              <a:spcAft>
-                <a:spcPts val="300"/>
-              </a:spcAft>
-            </a:pPr>
-            <a:r>
-              <a:rPr sz="1200" b="0">
+                <a:spcPct val="100000"/>
+              </a:lnSpc>
+              <a:spcAft>
+                <a:spcPts val="300"/>
+              </a:spcAft>
+            </a:pPr>
+            <a:r>
+              <a:rPr sz="1050" b="0">
                 <a:solidFill>
                   <a:srgbClr val="1F2D3D"/>
                 </a:solidFill>
@@ -9014,8 +9363,8 @@
         </p:nvSpPr>
         <p:spPr>
           <a:xfrm>
-            <a:off x="457200" y="2410358"/>
-            <a:ext cx="11247120" cy="919886"/>
+            <a:off x="457200" y="2658617"/>
+            <a:ext cx="5577840" cy="1168145"/>
           </a:xfrm>
           <a:prstGeom prst="rect">
             <a:avLst/>
@@ -9058,8 +9407,8 @@
         </p:nvSpPr>
         <p:spPr>
           <a:xfrm>
-            <a:off x="457200" y="2410358"/>
-            <a:ext cx="73152" cy="919886"/>
+            <a:off x="457200" y="2658617"/>
+            <a:ext cx="73152" cy="1168145"/>
           </a:xfrm>
           <a:prstGeom prst="rect">
             <a:avLst/>
@@ -9102,8 +9451,8 @@
         </p:nvSpPr>
         <p:spPr>
           <a:xfrm>
-            <a:off x="777240" y="2501798"/>
-            <a:ext cx="10789920" cy="365760"/>
+            <a:off x="640080" y="2750057"/>
+            <a:ext cx="5212080" cy="320040"/>
           </a:xfrm>
           <a:prstGeom prst="rect">
             <a:avLst/>
@@ -9125,7 +9474,7 @@
               </a:spcAft>
             </a:pPr>
             <a:r>
-              <a:rPr sz="1400" b="1">
+              <a:rPr sz="1300" b="1">
                 <a:solidFill>
                   <a:srgbClr val="0A3D91"/>
                 </a:solidFill>
@@ -9145,8 +9494,8 @@
         </p:nvSpPr>
         <p:spPr>
           <a:xfrm>
-            <a:off x="777240" y="2867558"/>
-            <a:ext cx="10789920" cy="381273710400"/>
+            <a:off x="640080" y="3070097"/>
+            <a:ext cx="5212080" cy="665225"/>
           </a:xfrm>
           <a:prstGeom prst="rect">
             <a:avLst/>
@@ -9161,14 +9510,14 @@
           <a:p>
             <a:pPr algn="l">
               <a:lnSpc>
-                <a:spcPct val="105000"/>
-              </a:lnSpc>
-              <a:spcAft>
-                <a:spcPts val="300"/>
-              </a:spcAft>
-            </a:pPr>
-            <a:r>
-              <a:rPr sz="1200" b="0">
+                <a:spcPct val="100000"/>
+              </a:lnSpc>
+              <a:spcAft>
+                <a:spcPts val="300"/>
+              </a:spcAft>
+            </a:pPr>
+            <a:r>
+              <a:rPr sz="1050" b="0">
                 <a:solidFill>
                   <a:srgbClr val="1F2D3D"/>
                 </a:solidFill>
@@ -9188,8 +9537,8 @@
         </p:nvSpPr>
         <p:spPr>
           <a:xfrm>
-            <a:off x="457200" y="3403396"/>
-            <a:ext cx="11247120" cy="919886"/>
+            <a:off x="457200" y="3899914"/>
+            <a:ext cx="5577840" cy="1168145"/>
           </a:xfrm>
           <a:prstGeom prst="rect">
             <a:avLst/>
@@ -9232,8 +9581,8 @@
         </p:nvSpPr>
         <p:spPr>
           <a:xfrm>
-            <a:off x="457200" y="3403396"/>
-            <a:ext cx="73152" cy="919886"/>
+            <a:off x="457200" y="3899914"/>
+            <a:ext cx="73152" cy="1168145"/>
           </a:xfrm>
           <a:prstGeom prst="rect">
             <a:avLst/>
@@ -9276,8 +9625,8 @@
         </p:nvSpPr>
         <p:spPr>
           <a:xfrm>
-            <a:off x="777240" y="3494836"/>
-            <a:ext cx="10789920" cy="365760"/>
+            <a:off x="640080" y="3991354"/>
+            <a:ext cx="5212080" cy="320040"/>
           </a:xfrm>
           <a:prstGeom prst="rect">
             <a:avLst/>
@@ -9299,7 +9648,7 @@
               </a:spcAft>
             </a:pPr>
             <a:r>
-              <a:rPr sz="1400" b="1">
+              <a:rPr sz="1300" b="1">
                 <a:solidFill>
                   <a:srgbClr val="0A3D91"/>
                 </a:solidFill>
@@ -9319,8 +9668,8 @@
         </p:nvSpPr>
         <p:spPr>
           <a:xfrm>
-            <a:off x="777240" y="3860596"/>
-            <a:ext cx="10789920" cy="381273710400"/>
+            <a:off x="640080" y="4311394"/>
+            <a:ext cx="5212080" cy="665225"/>
           </a:xfrm>
           <a:prstGeom prst="rect">
             <a:avLst/>
@@ -9335,14 +9684,14 @@
           <a:p>
             <a:pPr algn="l">
               <a:lnSpc>
-                <a:spcPct val="105000"/>
-              </a:lnSpc>
-              <a:spcAft>
-                <a:spcPts val="300"/>
-              </a:spcAft>
-            </a:pPr>
-            <a:r>
-              <a:rPr sz="1200" b="0">
+                <a:spcPct val="100000"/>
+              </a:lnSpc>
+              <a:spcAft>
+                <a:spcPts val="300"/>
+              </a:spcAft>
+            </a:pPr>
+            <a:r>
+              <a:rPr sz="1050" b="0">
                 <a:solidFill>
                   <a:srgbClr val="1F2D3D"/>
                 </a:solidFill>
@@ -9362,8 +9711,8 @@
         </p:nvSpPr>
         <p:spPr>
           <a:xfrm>
-            <a:off x="457200" y="4396434"/>
-            <a:ext cx="11247120" cy="919886"/>
+            <a:off x="457200" y="5141211"/>
+            <a:ext cx="5577840" cy="1168145"/>
           </a:xfrm>
           <a:prstGeom prst="rect">
             <a:avLst/>
@@ -9406,8 +9755,8 @@
         </p:nvSpPr>
         <p:spPr>
           <a:xfrm>
-            <a:off x="457200" y="4396434"/>
-            <a:ext cx="73152" cy="919886"/>
+            <a:off x="457200" y="5141211"/>
+            <a:ext cx="73152" cy="1168145"/>
           </a:xfrm>
           <a:prstGeom prst="rect">
             <a:avLst/>
@@ -9450,8 +9799,8 @@
         </p:nvSpPr>
         <p:spPr>
           <a:xfrm>
-            <a:off x="777240" y="4487874"/>
-            <a:ext cx="10789920" cy="365760"/>
+            <a:off x="640080" y="5232651"/>
+            <a:ext cx="5212080" cy="320040"/>
           </a:xfrm>
           <a:prstGeom prst="rect">
             <a:avLst/>
@@ -9473,7 +9822,7 @@
               </a:spcAft>
             </a:pPr>
             <a:r>
-              <a:rPr sz="1400" b="1">
+              <a:rPr sz="1300" b="1">
                 <a:solidFill>
                   <a:srgbClr val="0A3D91"/>
                 </a:solidFill>
@@ -9493,8 +9842,8 @@
         </p:nvSpPr>
         <p:spPr>
           <a:xfrm>
-            <a:off x="777240" y="4853634"/>
-            <a:ext cx="10789920" cy="381273710400"/>
+            <a:off x="640080" y="5552691"/>
+            <a:ext cx="5212080" cy="665225"/>
           </a:xfrm>
           <a:prstGeom prst="rect">
             <a:avLst/>
@@ -9509,14 +9858,14 @@
           <a:p>
             <a:pPr algn="l">
               <a:lnSpc>
-                <a:spcPct val="105000"/>
-              </a:lnSpc>
-              <a:spcAft>
-                <a:spcPts val="300"/>
-              </a:spcAft>
-            </a:pPr>
-            <a:r>
-              <a:rPr sz="1200" b="0">
+                <a:spcPct val="100000"/>
+              </a:lnSpc>
+              <a:spcAft>
+                <a:spcPts val="300"/>
+              </a:spcAft>
+            </a:pPr>
+            <a:r>
+              <a:rPr sz="1050" b="0">
                 <a:solidFill>
                   <a:srgbClr val="1F2D3D"/>
                 </a:solidFill>
@@ -9536,8 +9885,8 @@
         </p:nvSpPr>
         <p:spPr>
           <a:xfrm>
-            <a:off x="457200" y="5389472"/>
-            <a:ext cx="11247120" cy="919886"/>
+            <a:off x="6263640" y="1417320"/>
+            <a:ext cx="5577840" cy="1581911"/>
           </a:xfrm>
           <a:prstGeom prst="rect">
             <a:avLst/>
@@ -9580,8 +9929,8 @@
         </p:nvSpPr>
         <p:spPr>
           <a:xfrm>
-            <a:off x="457200" y="5389472"/>
-            <a:ext cx="73152" cy="919886"/>
+            <a:off x="6263640" y="1417320"/>
+            <a:ext cx="73152" cy="1581911"/>
           </a:xfrm>
           <a:prstGeom prst="rect">
             <a:avLst/>
@@ -9624,8 +9973,8 @@
         </p:nvSpPr>
         <p:spPr>
           <a:xfrm>
-            <a:off x="777240" y="5480912"/>
-            <a:ext cx="10789920" cy="365760"/>
+            <a:off x="6446520" y="1508760"/>
+            <a:ext cx="5212080" cy="320040"/>
           </a:xfrm>
           <a:prstGeom prst="rect">
             <a:avLst/>
@@ -9647,7 +9996,7 @@
               </a:spcAft>
             </a:pPr>
             <a:r>
-              <a:rPr sz="1400" b="1">
+              <a:rPr sz="1300" b="1">
                 <a:solidFill>
                   <a:srgbClr val="0A3D91"/>
                 </a:solidFill>
@@ -9667,8 +10016,8 @@
         </p:nvSpPr>
         <p:spPr>
           <a:xfrm>
-            <a:off x="777240" y="5846672"/>
-            <a:ext cx="10789920" cy="381273710400"/>
+            <a:off x="6446520" y="1828800"/>
+            <a:ext cx="5212080" cy="1078991"/>
           </a:xfrm>
           <a:prstGeom prst="rect">
             <a:avLst/>
@@ -9683,14 +10032,14 @@
           <a:p>
             <a:pPr algn="l">
               <a:lnSpc>
-                <a:spcPct val="105000"/>
-              </a:lnSpc>
-              <a:spcAft>
-                <a:spcPts val="300"/>
-              </a:spcAft>
-            </a:pPr>
-            <a:r>
-              <a:rPr sz="1200" b="0">
+                <a:spcPct val="100000"/>
+              </a:lnSpc>
+              <a:spcAft>
+                <a:spcPts val="300"/>
+              </a:spcAft>
+            </a:pPr>
+            <a:r>
+              <a:rPr sz="1050" b="0">
                 <a:solidFill>
                   <a:srgbClr val="1F2D3D"/>
                 </a:solidFill>
@@ -9704,7 +10053,355 @@
       </p:sp>
       <p:sp>
         <p:nvSpPr>
-          <p:cNvPr id="25" name="TextBox 24"/>
+          <p:cNvPr id="25" name="Rectangle 24"/>
+          <p:cNvSpPr/>
+          <p:nvPr/>
+        </p:nvSpPr>
+        <p:spPr>
+          <a:xfrm>
+            <a:off x="6263640" y="3072383"/>
+            <a:ext cx="5577840" cy="1581911"/>
+          </a:xfrm>
+          <a:prstGeom prst="rect">
+            <a:avLst/>
+          </a:prstGeom>
+          <a:solidFill>
+            <a:srgbClr val="F7FAFC"/>
+          </a:solidFill>
+          <a:ln>
+            <a:noFill/>
+          </a:ln>
+          <a:effectLst/>
+        </p:spPr>
+        <p:style>
+          <a:lnRef idx="1">
+            <a:schemeClr val="accent1"/>
+          </a:lnRef>
+          <a:fillRef idx="3">
+            <a:schemeClr val="accent1"/>
+          </a:fillRef>
+          <a:effectRef idx="2">
+            <a:schemeClr val="accent1"/>
+          </a:effectRef>
+          <a:fontRef idx="minor">
+            <a:schemeClr val="lt1"/>
+          </a:fontRef>
+        </p:style>
+        <p:txBody>
+          <a:bodyPr rtlCol="0" anchor="ctr"/>
+          <a:lstStyle/>
+          <a:p>
+            <a:pPr algn="ctr"/>
+          </a:p>
+        </p:txBody>
+      </p:sp>
+      <p:sp>
+        <p:nvSpPr>
+          <p:cNvPr id="26" name="Rectangle 25"/>
+          <p:cNvSpPr/>
+          <p:nvPr/>
+        </p:nvSpPr>
+        <p:spPr>
+          <a:xfrm>
+            <a:off x="6263640" y="3072383"/>
+            <a:ext cx="73152" cy="1581911"/>
+          </a:xfrm>
+          <a:prstGeom prst="rect">
+            <a:avLst/>
+          </a:prstGeom>
+          <a:solidFill>
+            <a:srgbClr val="1677FF"/>
+          </a:solidFill>
+          <a:ln>
+            <a:noFill/>
+          </a:ln>
+          <a:effectLst/>
+        </p:spPr>
+        <p:style>
+          <a:lnRef idx="1">
+            <a:schemeClr val="accent1"/>
+          </a:lnRef>
+          <a:fillRef idx="3">
+            <a:schemeClr val="accent1"/>
+          </a:fillRef>
+          <a:effectRef idx="2">
+            <a:schemeClr val="accent1"/>
+          </a:effectRef>
+          <a:fontRef idx="minor">
+            <a:schemeClr val="lt1"/>
+          </a:fontRef>
+        </p:style>
+        <p:txBody>
+          <a:bodyPr rtlCol="0" anchor="ctr"/>
+          <a:lstStyle/>
+          <a:p>
+            <a:pPr algn="ctr"/>
+          </a:p>
+        </p:txBody>
+      </p:sp>
+      <p:sp>
+        <p:nvSpPr>
+          <p:cNvPr id="27" name="TextBox 26"/>
+          <p:cNvSpPr txBox="1"/>
+          <p:nvPr/>
+        </p:nvSpPr>
+        <p:spPr>
+          <a:xfrm>
+            <a:off x="6446520" y="3163823"/>
+            <a:ext cx="5212080" cy="320040"/>
+          </a:xfrm>
+          <a:prstGeom prst="rect">
+            <a:avLst/>
+          </a:prstGeom>
+          <a:noFill/>
+        </p:spPr>
+        <p:txBody>
+          <a:bodyPr wrap="square" anchor="t">
+            <a:spAutoFit/>
+          </a:bodyPr>
+          <a:lstStyle/>
+          <a:p>
+            <a:pPr algn="l">
+              <a:lnSpc>
+                <a:spcPct val="100000"/>
+              </a:lnSpc>
+              <a:spcAft>
+                <a:spcPts val="300"/>
+              </a:spcAft>
+            </a:pPr>
+            <a:r>
+              <a:rPr sz="1300" b="1">
+                <a:solidFill>
+                  <a:srgbClr val="0A3D91"/>
+                </a:solidFill>
+                <a:latin typeface="微软雅黑"/>
+                <a:ea typeface="微软雅黑"/>
+              </a:rPr>
+              <a:t>场景F 人群适配</a:t>
+            </a:r>
+          </a:p>
+        </p:txBody>
+      </p:sp>
+      <p:sp>
+        <p:nvSpPr>
+          <p:cNvPr id="28" name="TextBox 27"/>
+          <p:cNvSpPr txBox="1"/>
+          <p:nvPr/>
+        </p:nvSpPr>
+        <p:spPr>
+          <a:xfrm>
+            <a:off x="6446520" y="3483863"/>
+            <a:ext cx="5212080" cy="1078991"/>
+          </a:xfrm>
+          <a:prstGeom prst="rect">
+            <a:avLst/>
+          </a:prstGeom>
+          <a:noFill/>
+        </p:spPr>
+        <p:txBody>
+          <a:bodyPr wrap="square" anchor="t">
+            <a:spAutoFit/>
+          </a:bodyPr>
+          <a:lstStyle/>
+          <a:p>
+            <a:pPr algn="l">
+              <a:lnSpc>
+                <a:spcPct val="100000"/>
+              </a:lnSpc>
+              <a:spcAft>
+                <a:spcPts val="300"/>
+              </a:spcAft>
+            </a:pPr>
+            <a:r>
+              <a:rPr sz="1050" b="0">
+                <a:solidFill>
+                  <a:srgbClr val="1F2D3D"/>
+                </a:solidFill>
+                <a:latin typeface="微软雅黑"/>
+                <a:ea typeface="微软雅黑"/>
+              </a:rPr>
+              <a:t>带65岁老人+5岁儿童 → 老人门票免首道、儿童免票；剔除滑雪/酒吧；早餐吃地方特色早餐。</a:t>
+            </a:r>
+          </a:p>
+        </p:txBody>
+      </p:sp>
+      <p:sp>
+        <p:nvSpPr>
+          <p:cNvPr id="29" name="Rectangle 28"/>
+          <p:cNvSpPr/>
+          <p:nvPr/>
+        </p:nvSpPr>
+        <p:spPr>
+          <a:xfrm>
+            <a:off x="6263640" y="4727446"/>
+            <a:ext cx="5577840" cy="1581911"/>
+          </a:xfrm>
+          <a:prstGeom prst="rect">
+            <a:avLst/>
+          </a:prstGeom>
+          <a:solidFill>
+            <a:srgbClr val="F7FAFC"/>
+          </a:solidFill>
+          <a:ln>
+            <a:noFill/>
+          </a:ln>
+          <a:effectLst/>
+        </p:spPr>
+        <p:style>
+          <a:lnRef idx="1">
+            <a:schemeClr val="accent1"/>
+          </a:lnRef>
+          <a:fillRef idx="3">
+            <a:schemeClr val="accent1"/>
+          </a:fillRef>
+          <a:effectRef idx="2">
+            <a:schemeClr val="accent1"/>
+          </a:effectRef>
+          <a:fontRef idx="minor">
+            <a:schemeClr val="lt1"/>
+          </a:fontRef>
+        </p:style>
+        <p:txBody>
+          <a:bodyPr rtlCol="0" anchor="ctr"/>
+          <a:lstStyle/>
+          <a:p>
+            <a:pPr algn="ctr"/>
+          </a:p>
+        </p:txBody>
+      </p:sp>
+      <p:sp>
+        <p:nvSpPr>
+          <p:cNvPr id="30" name="Rectangle 29"/>
+          <p:cNvSpPr/>
+          <p:nvPr/>
+        </p:nvSpPr>
+        <p:spPr>
+          <a:xfrm>
+            <a:off x="6263640" y="4727446"/>
+            <a:ext cx="73152" cy="1581911"/>
+          </a:xfrm>
+          <a:prstGeom prst="rect">
+            <a:avLst/>
+          </a:prstGeom>
+          <a:solidFill>
+            <a:srgbClr val="1677FF"/>
+          </a:solidFill>
+          <a:ln>
+            <a:noFill/>
+          </a:ln>
+          <a:effectLst/>
+        </p:spPr>
+        <p:style>
+          <a:lnRef idx="1">
+            <a:schemeClr val="accent1"/>
+          </a:lnRef>
+          <a:fillRef idx="3">
+            <a:schemeClr val="accent1"/>
+          </a:fillRef>
+          <a:effectRef idx="2">
+            <a:schemeClr val="accent1"/>
+          </a:effectRef>
+          <a:fontRef idx="minor">
+            <a:schemeClr val="lt1"/>
+          </a:fontRef>
+        </p:style>
+        <p:txBody>
+          <a:bodyPr rtlCol="0" anchor="ctr"/>
+          <a:lstStyle/>
+          <a:p>
+            <a:pPr algn="ctr"/>
+          </a:p>
+        </p:txBody>
+      </p:sp>
+      <p:sp>
+        <p:nvSpPr>
+          <p:cNvPr id="31" name="TextBox 30"/>
+          <p:cNvSpPr txBox="1"/>
+          <p:nvPr/>
+        </p:nvSpPr>
+        <p:spPr>
+          <a:xfrm>
+            <a:off x="6446520" y="4818886"/>
+            <a:ext cx="5212080" cy="320040"/>
+          </a:xfrm>
+          <a:prstGeom prst="rect">
+            <a:avLst/>
+          </a:prstGeom>
+          <a:noFill/>
+        </p:spPr>
+        <p:txBody>
+          <a:bodyPr wrap="square" anchor="t">
+            <a:spAutoFit/>
+          </a:bodyPr>
+          <a:lstStyle/>
+          <a:p>
+            <a:pPr algn="l">
+              <a:lnSpc>
+                <a:spcPct val="100000"/>
+              </a:lnSpc>
+              <a:spcAft>
+                <a:spcPts val="300"/>
+              </a:spcAft>
+            </a:pPr>
+            <a:r>
+              <a:rPr sz="1300" b="1">
+                <a:solidFill>
+                  <a:srgbClr val="0A3D91"/>
+                </a:solidFill>
+                <a:latin typeface="微软雅黑"/>
+                <a:ea typeface="微软雅黑"/>
+              </a:rPr>
+              <a:t>场景G RAG增强</a:t>
+            </a:r>
+          </a:p>
+        </p:txBody>
+      </p:sp>
+      <p:sp>
+        <p:nvSpPr>
+          <p:cNvPr id="32" name="TextBox 31"/>
+          <p:cNvSpPr txBox="1"/>
+          <p:nvPr/>
+        </p:nvSpPr>
+        <p:spPr>
+          <a:xfrm>
+            <a:off x="6446520" y="5138926"/>
+            <a:ext cx="5212080" cy="1078991"/>
+          </a:xfrm>
+          <a:prstGeom prst="rect">
+            <a:avLst/>
+          </a:prstGeom>
+          <a:noFill/>
+        </p:spPr>
+        <p:txBody>
+          <a:bodyPr wrap="square" anchor="t">
+            <a:spAutoFit/>
+          </a:bodyPr>
+          <a:lstStyle/>
+          <a:p>
+            <a:pPr algn="l">
+              <a:lnSpc>
+                <a:spcPct val="100000"/>
+              </a:lnSpc>
+              <a:spcAft>
+                <a:spcPts val="300"/>
+              </a:spcAft>
+            </a:pPr>
+            <a:r>
+              <a:rPr sz="1050" b="0">
+                <a:solidFill>
+                  <a:srgbClr val="1F2D3D"/>
+                </a:solidFill>
+                <a:latin typeface="微软雅黑"/>
+                <a:ea typeface="微软雅黑"/>
+              </a:rPr>
+              <a:t>检索知识库(门票政策+云南美食) → 报告生成「目的地深度解读」，有据可查、带人群感知。</a:t>
+            </a:r>
+          </a:p>
+        </p:txBody>
+      </p:sp>
+      <p:sp>
+        <p:nvSpPr>
+          <p:cNvPr id="33" name="TextBox 32"/>
           <p:cNvSpPr txBox="1"/>
           <p:nvPr/>
         </p:nvSpPr>
@@ -9740,14 +10437,14 @@
                 <a:latin typeface="微软雅黑"/>
                 <a:ea typeface="微软雅黑"/>
               </a:rPr>
-              <a:t>14/18</a:t>
-            </a:r>
-          </a:p>
-        </p:txBody>
-      </p:sp>
-      <p:sp>
-        <p:nvSpPr>
-          <p:cNvPr id="26" name="TextBox 25"/>
+              <a:t>14/19</a:t>
+            </a:r>
+          </a:p>
+        </p:txBody>
+      </p:sp>
+      <p:sp>
+        <p:nvSpPr>
+          <p:cNvPr id="34" name="TextBox 33"/>
           <p:cNvSpPr txBox="1"/>
           <p:nvPr/>
         </p:nvSpPr>
@@ -9954,7 +10651,7 @@
         <p:spPr>
           <a:xfrm>
             <a:off x="457200" y="1417320"/>
-            <a:ext cx="11247120" cy="919886"/>
+            <a:ext cx="11247120" cy="754379"/>
           </a:xfrm>
           <a:prstGeom prst="rect">
             <a:avLst/>
@@ -9998,7 +10695,7 @@
         <p:spPr>
           <a:xfrm>
             <a:off x="457200" y="1417320"/>
-            <a:ext cx="73152" cy="919886"/>
+            <a:ext cx="73152" cy="754379"/>
           </a:xfrm>
           <a:prstGeom prst="rect">
             <a:avLst/>
@@ -10085,7 +10782,7 @@
         <p:spPr>
           <a:xfrm>
             <a:off x="777240" y="1874520"/>
-            <a:ext cx="10789920" cy="381273710400"/>
+            <a:ext cx="10789920" cy="229934109600"/>
           </a:xfrm>
           <a:prstGeom prst="rect">
             <a:avLst/>
@@ -10127,8 +10824,8 @@
         </p:nvSpPr>
         <p:spPr>
           <a:xfrm>
-            <a:off x="457200" y="2410358"/>
-            <a:ext cx="11247120" cy="919886"/>
+            <a:off x="457200" y="2244851"/>
+            <a:ext cx="11247120" cy="754379"/>
           </a:xfrm>
           <a:prstGeom prst="rect">
             <a:avLst/>
@@ -10171,8 +10868,8 @@
         </p:nvSpPr>
         <p:spPr>
           <a:xfrm>
-            <a:off x="457200" y="2410358"/>
-            <a:ext cx="73152" cy="919886"/>
+            <a:off x="457200" y="2244851"/>
+            <a:ext cx="73152" cy="754379"/>
           </a:xfrm>
           <a:prstGeom prst="rect">
             <a:avLst/>
@@ -10215,7 +10912,7 @@
         </p:nvSpPr>
         <p:spPr>
           <a:xfrm>
-            <a:off x="777240" y="2501798"/>
+            <a:off x="777240" y="2336291"/>
             <a:ext cx="10789920" cy="365760"/>
           </a:xfrm>
           <a:prstGeom prst="rect">
@@ -10258,8 +10955,8 @@
         </p:nvSpPr>
         <p:spPr>
           <a:xfrm>
-            <a:off x="777240" y="2867558"/>
-            <a:ext cx="10789920" cy="381273710400"/>
+            <a:off x="777240" y="2702051"/>
+            <a:ext cx="10789920" cy="229934109600"/>
           </a:xfrm>
           <a:prstGeom prst="rect">
             <a:avLst/>
@@ -10301,8 +10998,8 @@
         </p:nvSpPr>
         <p:spPr>
           <a:xfrm>
-            <a:off x="457200" y="3403396"/>
-            <a:ext cx="11247120" cy="919886"/>
+            <a:off x="457200" y="3072382"/>
+            <a:ext cx="11247120" cy="754379"/>
           </a:xfrm>
           <a:prstGeom prst="rect">
             <a:avLst/>
@@ -10345,8 +11042,8 @@
         </p:nvSpPr>
         <p:spPr>
           <a:xfrm>
-            <a:off x="457200" y="3403396"/>
-            <a:ext cx="73152" cy="919886"/>
+            <a:off x="457200" y="3072382"/>
+            <a:ext cx="73152" cy="754379"/>
           </a:xfrm>
           <a:prstGeom prst="rect">
             <a:avLst/>
@@ -10389,7 +11086,7 @@
         </p:nvSpPr>
         <p:spPr>
           <a:xfrm>
-            <a:off x="777240" y="3494836"/>
+            <a:off x="777240" y="3163822"/>
             <a:ext cx="10789920" cy="365760"/>
           </a:xfrm>
           <a:prstGeom prst="rect">
@@ -10432,8 +11129,8 @@
         </p:nvSpPr>
         <p:spPr>
           <a:xfrm>
-            <a:off x="777240" y="3860596"/>
-            <a:ext cx="10789920" cy="381273710400"/>
+            <a:off x="777240" y="3529582"/>
+            <a:ext cx="10789920" cy="229934109600"/>
           </a:xfrm>
           <a:prstGeom prst="rect">
             <a:avLst/>
@@ -10475,8 +11172,8 @@
         </p:nvSpPr>
         <p:spPr>
           <a:xfrm>
-            <a:off x="457200" y="4396434"/>
-            <a:ext cx="11247120" cy="919886"/>
+            <a:off x="457200" y="3899913"/>
+            <a:ext cx="11247120" cy="754379"/>
           </a:xfrm>
           <a:prstGeom prst="rect">
             <a:avLst/>
@@ -10519,8 +11216,8 @@
         </p:nvSpPr>
         <p:spPr>
           <a:xfrm>
-            <a:off x="457200" y="4396434"/>
-            <a:ext cx="73152" cy="919886"/>
+            <a:off x="457200" y="3899913"/>
+            <a:ext cx="73152" cy="754379"/>
           </a:xfrm>
           <a:prstGeom prst="rect">
             <a:avLst/>
@@ -10563,7 +11260,7 @@
         </p:nvSpPr>
         <p:spPr>
           <a:xfrm>
-            <a:off x="777240" y="4487874"/>
+            <a:off x="777240" y="3991353"/>
             <a:ext cx="10789920" cy="365760"/>
           </a:xfrm>
           <a:prstGeom prst="rect">
@@ -10606,8 +11303,8 @@
         </p:nvSpPr>
         <p:spPr>
           <a:xfrm>
-            <a:off x="777240" y="4853634"/>
-            <a:ext cx="10789920" cy="381273710400"/>
+            <a:off x="777240" y="4357113"/>
+            <a:ext cx="10789920" cy="229934109600"/>
           </a:xfrm>
           <a:prstGeom prst="rect">
             <a:avLst/>
@@ -10649,8 +11346,8 @@
         </p:nvSpPr>
         <p:spPr>
           <a:xfrm>
-            <a:off x="457200" y="5389472"/>
-            <a:ext cx="11247120" cy="919886"/>
+            <a:off x="457200" y="4727444"/>
+            <a:ext cx="11247120" cy="754379"/>
           </a:xfrm>
           <a:prstGeom prst="rect">
             <a:avLst/>
@@ -10693,8 +11390,8 @@
         </p:nvSpPr>
         <p:spPr>
           <a:xfrm>
-            <a:off x="457200" y="5389472"/>
-            <a:ext cx="73152" cy="919886"/>
+            <a:off x="457200" y="4727444"/>
+            <a:ext cx="73152" cy="754379"/>
           </a:xfrm>
           <a:prstGeom prst="rect">
             <a:avLst/>
@@ -10737,7 +11434,7 @@
         </p:nvSpPr>
         <p:spPr>
           <a:xfrm>
-            <a:off x="777240" y="5480912"/>
+            <a:off x="777240" y="4818884"/>
             <a:ext cx="10789920" cy="365760"/>
           </a:xfrm>
           <a:prstGeom prst="rect">
@@ -10780,8 +11477,8 @@
         </p:nvSpPr>
         <p:spPr>
           <a:xfrm>
-            <a:off x="777240" y="5846672"/>
-            <a:ext cx="10789920" cy="381273710400"/>
+            <a:off x="777240" y="5184644"/>
+            <a:ext cx="10789920" cy="229934109600"/>
           </a:xfrm>
           <a:prstGeom prst="rect">
             <a:avLst/>
@@ -10817,7 +11514,181 @@
       </p:sp>
       <p:sp>
         <p:nvSpPr>
-          <p:cNvPr id="25" name="TextBox 24"/>
+          <p:cNvPr id="25" name="Rectangle 24"/>
+          <p:cNvSpPr/>
+          <p:nvPr/>
+        </p:nvSpPr>
+        <p:spPr>
+          <a:xfrm>
+            <a:off x="457200" y="5554975"/>
+            <a:ext cx="11247120" cy="754379"/>
+          </a:xfrm>
+          <a:prstGeom prst="rect">
+            <a:avLst/>
+          </a:prstGeom>
+          <a:solidFill>
+            <a:srgbClr val="F7FAFC"/>
+          </a:solidFill>
+          <a:ln>
+            <a:noFill/>
+          </a:ln>
+          <a:effectLst/>
+        </p:spPr>
+        <p:style>
+          <a:lnRef idx="1">
+            <a:schemeClr val="accent1"/>
+          </a:lnRef>
+          <a:fillRef idx="3">
+            <a:schemeClr val="accent1"/>
+          </a:fillRef>
+          <a:effectRef idx="2">
+            <a:schemeClr val="accent1"/>
+          </a:effectRef>
+          <a:fontRef idx="minor">
+            <a:schemeClr val="lt1"/>
+          </a:fontRef>
+        </p:style>
+        <p:txBody>
+          <a:bodyPr rtlCol="0" anchor="ctr"/>
+          <a:lstStyle/>
+          <a:p>
+            <a:pPr algn="ctr"/>
+          </a:p>
+        </p:txBody>
+      </p:sp>
+      <p:sp>
+        <p:nvSpPr>
+          <p:cNvPr id="26" name="Rectangle 25"/>
+          <p:cNvSpPr/>
+          <p:nvPr/>
+        </p:nvSpPr>
+        <p:spPr>
+          <a:xfrm>
+            <a:off x="457200" y="5554975"/>
+            <a:ext cx="73152" cy="754379"/>
+          </a:xfrm>
+          <a:prstGeom prst="rect">
+            <a:avLst/>
+          </a:prstGeom>
+          <a:solidFill>
+            <a:srgbClr val="1677FF"/>
+          </a:solidFill>
+          <a:ln>
+            <a:noFill/>
+          </a:ln>
+          <a:effectLst/>
+        </p:spPr>
+        <p:style>
+          <a:lnRef idx="1">
+            <a:schemeClr val="accent1"/>
+          </a:lnRef>
+          <a:fillRef idx="3">
+            <a:schemeClr val="accent1"/>
+          </a:fillRef>
+          <a:effectRef idx="2">
+            <a:schemeClr val="accent1"/>
+          </a:effectRef>
+          <a:fontRef idx="minor">
+            <a:schemeClr val="lt1"/>
+          </a:fontRef>
+        </p:style>
+        <p:txBody>
+          <a:bodyPr rtlCol="0" anchor="ctr"/>
+          <a:lstStyle/>
+          <a:p>
+            <a:pPr algn="ctr"/>
+          </a:p>
+        </p:txBody>
+      </p:sp>
+      <p:sp>
+        <p:nvSpPr>
+          <p:cNvPr id="27" name="TextBox 26"/>
+          <p:cNvSpPr txBox="1"/>
+          <p:nvPr/>
+        </p:nvSpPr>
+        <p:spPr>
+          <a:xfrm>
+            <a:off x="777240" y="5646415"/>
+            <a:ext cx="10789920" cy="365760"/>
+          </a:xfrm>
+          <a:prstGeom prst="rect">
+            <a:avLst/>
+          </a:prstGeom>
+          <a:noFill/>
+        </p:spPr>
+        <p:txBody>
+          <a:bodyPr wrap="square" anchor="t">
+            <a:spAutoFit/>
+          </a:bodyPr>
+          <a:lstStyle/>
+          <a:p>
+            <a:pPr algn="l">
+              <a:lnSpc>
+                <a:spcPct val="100000"/>
+              </a:lnSpc>
+              <a:spcAft>
+                <a:spcPts val="300"/>
+              </a:spcAft>
+            </a:pPr>
+            <a:r>
+              <a:rPr sz="1400" b="1">
+                <a:solidFill>
+                  <a:srgbClr val="0A3D91"/>
+                </a:solidFill>
+                <a:latin typeface="微软雅黑"/>
+                <a:ea typeface="微软雅黑"/>
+              </a:rPr>
+              <a:t>RAG 检索验证</a:t>
+            </a:r>
+          </a:p>
+        </p:txBody>
+      </p:sp>
+      <p:sp>
+        <p:nvSpPr>
+          <p:cNvPr id="28" name="TextBox 27"/>
+          <p:cNvSpPr txBox="1"/>
+          <p:nvPr/>
+        </p:nvSpPr>
+        <p:spPr>
+          <a:xfrm>
+            <a:off x="777240" y="6012175"/>
+            <a:ext cx="10789920" cy="229934109600"/>
+          </a:xfrm>
+          <a:prstGeom prst="rect">
+            <a:avLst/>
+          </a:prstGeom>
+          <a:noFill/>
+        </p:spPr>
+        <p:txBody>
+          <a:bodyPr wrap="square" anchor="t">
+            <a:spAutoFit/>
+          </a:bodyPr>
+          <a:lstStyle/>
+          <a:p>
+            <a:pPr algn="l">
+              <a:lnSpc>
+                <a:spcPct val="105000"/>
+              </a:lnSpc>
+              <a:spcAft>
+                <a:spcPts val="300"/>
+              </a:spcAft>
+            </a:pPr>
+            <a:r>
+              <a:rPr sz="1200" b="0">
+                <a:solidFill>
+                  <a:srgbClr val="1F2D3D"/>
+                </a:solidFill>
+                <a:latin typeface="微软雅黑"/>
+                <a:ea typeface="微软雅黑"/>
+              </a:rPr>
+              <a:t>老人门票政策 0.83 / 早餐吃什么 0.69 / 儿童高铁买票 0.83 / 海鲜过敏 0.67。</a:t>
+            </a:r>
+          </a:p>
+        </p:txBody>
+      </p:sp>
+      <p:sp>
+        <p:nvSpPr>
+          <p:cNvPr id="29" name="TextBox 28"/>
           <p:cNvSpPr txBox="1"/>
           <p:nvPr/>
         </p:nvSpPr>
@@ -10853,14 +11724,14 @@
                 <a:latin typeface="微软雅黑"/>
                 <a:ea typeface="微软雅黑"/>
               </a:rPr>
-              <a:t>15/18</a:t>
-            </a:r>
-          </a:p>
-        </p:txBody>
-      </p:sp>
-      <p:sp>
-        <p:nvSpPr>
-          <p:cNvPr id="26" name="TextBox 25"/>
+              <a:t>15/19</a:t>
+            </a:r>
+          </a:p>
+        </p:txBody>
+      </p:sp>
+      <p:sp>
+        <p:nvSpPr>
+          <p:cNvPr id="30" name="TextBox 29"/>
           <p:cNvSpPr txBox="1"/>
           <p:nvPr/>
         </p:nvSpPr>
@@ -11067,7 +11938,7 @@
         <p:spPr>
           <a:xfrm>
             <a:off x="457200" y="1417320"/>
-            <a:ext cx="11247120" cy="754379"/>
+            <a:ext cx="5577840" cy="1168145"/>
           </a:xfrm>
           <a:prstGeom prst="rect">
             <a:avLst/>
@@ -11111,7 +11982,7 @@
         <p:spPr>
           <a:xfrm>
             <a:off x="457200" y="1417320"/>
-            <a:ext cx="73152" cy="754379"/>
+            <a:ext cx="73152" cy="1168145"/>
           </a:xfrm>
           <a:prstGeom prst="rect">
             <a:avLst/>
@@ -11154,8 +12025,8 @@
         </p:nvSpPr>
         <p:spPr>
           <a:xfrm>
-            <a:off x="777240" y="1508760"/>
-            <a:ext cx="10789920" cy="365760"/>
+            <a:off x="640080" y="1508760"/>
+            <a:ext cx="5212080" cy="320040"/>
           </a:xfrm>
           <a:prstGeom prst="rect">
             <a:avLst/>
@@ -11177,7 +12048,7 @@
               </a:spcAft>
             </a:pPr>
             <a:r>
-              <a:rPr sz="1400" b="1">
+              <a:rPr sz="1300" b="1">
                 <a:solidFill>
                   <a:srgbClr val="0A3D91"/>
                 </a:solidFill>
@@ -11197,8 +12068,8 @@
         </p:nvSpPr>
         <p:spPr>
           <a:xfrm>
-            <a:off x="777240" y="1874520"/>
-            <a:ext cx="10789920" cy="229934109600"/>
+            <a:off x="640080" y="1828800"/>
+            <a:ext cx="5212080" cy="665225"/>
           </a:xfrm>
           <a:prstGeom prst="rect">
             <a:avLst/>
@@ -11213,14 +12084,14 @@
           <a:p>
             <a:pPr algn="l">
               <a:lnSpc>
-                <a:spcPct val="105000"/>
-              </a:lnSpc>
-              <a:spcAft>
-                <a:spcPts val="300"/>
-              </a:spcAft>
-            </a:pPr>
-            <a:r>
-              <a:rPr sz="1200" b="0">
+                <a:spcPct val="100000"/>
+              </a:lnSpc>
+              <a:spcAft>
+                <a:spcPts val="300"/>
+              </a:spcAft>
+            </a:pPr>
+            <a:r>
+              <a:rPr sz="1050" b="0">
                 <a:solidFill>
                   <a:srgbClr val="1F2D3D"/>
                 </a:solidFill>
@@ -11240,8 +12111,8 @@
         </p:nvSpPr>
         <p:spPr>
           <a:xfrm>
-            <a:off x="457200" y="2244851"/>
-            <a:ext cx="11247120" cy="754379"/>
+            <a:off x="457200" y="2658617"/>
+            <a:ext cx="5577840" cy="1168145"/>
           </a:xfrm>
           <a:prstGeom prst="rect">
             <a:avLst/>
@@ -11284,8 +12155,8 @@
         </p:nvSpPr>
         <p:spPr>
           <a:xfrm>
-            <a:off x="457200" y="2244851"/>
-            <a:ext cx="73152" cy="754379"/>
+            <a:off x="457200" y="2658617"/>
+            <a:ext cx="73152" cy="1168145"/>
           </a:xfrm>
           <a:prstGeom prst="rect">
             <a:avLst/>
@@ -11328,8 +12199,8 @@
         </p:nvSpPr>
         <p:spPr>
           <a:xfrm>
-            <a:off x="777240" y="2336291"/>
-            <a:ext cx="10789920" cy="365760"/>
+            <a:off x="640080" y="2750057"/>
+            <a:ext cx="5212080" cy="320040"/>
           </a:xfrm>
           <a:prstGeom prst="rect">
             <a:avLst/>
@@ -11351,7 +12222,7 @@
               </a:spcAft>
             </a:pPr>
             <a:r>
-              <a:rPr sz="1400" b="1">
+              <a:rPr sz="1300" b="1">
                 <a:solidFill>
                   <a:srgbClr val="0A3D91"/>
                 </a:solidFill>
@@ -11371,8 +12242,8 @@
         </p:nvSpPr>
         <p:spPr>
           <a:xfrm>
-            <a:off x="777240" y="2702051"/>
-            <a:ext cx="10789920" cy="229934109600"/>
+            <a:off x="640080" y="3070097"/>
+            <a:ext cx="5212080" cy="665225"/>
           </a:xfrm>
           <a:prstGeom prst="rect">
             <a:avLst/>
@@ -11387,14 +12258,14 @@
           <a:p>
             <a:pPr algn="l">
               <a:lnSpc>
-                <a:spcPct val="105000"/>
-              </a:lnSpc>
-              <a:spcAft>
-                <a:spcPts val="300"/>
-              </a:spcAft>
-            </a:pPr>
-            <a:r>
-              <a:rPr sz="1200" b="0">
+                <a:spcPct val="100000"/>
+              </a:lnSpc>
+              <a:spcAft>
+                <a:spcPts val="300"/>
+              </a:spcAft>
+            </a:pPr>
+            <a:r>
+              <a:rPr sz="1050" b="0">
                 <a:solidFill>
                   <a:srgbClr val="1F2D3D"/>
                 </a:solidFill>
@@ -11414,8 +12285,8 @@
         </p:nvSpPr>
         <p:spPr>
           <a:xfrm>
-            <a:off x="457200" y="3072382"/>
-            <a:ext cx="11247120" cy="754379"/>
+            <a:off x="457200" y="3899914"/>
+            <a:ext cx="5577840" cy="1168145"/>
           </a:xfrm>
           <a:prstGeom prst="rect">
             <a:avLst/>
@@ -11458,8 +12329,8 @@
         </p:nvSpPr>
         <p:spPr>
           <a:xfrm>
-            <a:off x="457200" y="3072382"/>
-            <a:ext cx="73152" cy="754379"/>
+            <a:off x="457200" y="3899914"/>
+            <a:ext cx="73152" cy="1168145"/>
           </a:xfrm>
           <a:prstGeom prst="rect">
             <a:avLst/>
@@ -11502,8 +12373,8 @@
         </p:nvSpPr>
         <p:spPr>
           <a:xfrm>
-            <a:off x="777240" y="3163822"/>
-            <a:ext cx="10789920" cy="365760"/>
+            <a:off x="640080" y="3991354"/>
+            <a:ext cx="5212080" cy="320040"/>
           </a:xfrm>
           <a:prstGeom prst="rect">
             <a:avLst/>
@@ -11525,7 +12396,7 @@
               </a:spcAft>
             </a:pPr>
             <a:r>
-              <a:rPr sz="1400" b="1">
+              <a:rPr sz="1300" b="1">
                 <a:solidFill>
                   <a:srgbClr val="0A3D91"/>
                 </a:solidFill>
@@ -11545,8 +12416,8 @@
         </p:nvSpPr>
         <p:spPr>
           <a:xfrm>
-            <a:off x="777240" y="3529582"/>
-            <a:ext cx="10789920" cy="229934109600"/>
+            <a:off x="640080" y="4311394"/>
+            <a:ext cx="5212080" cy="665225"/>
           </a:xfrm>
           <a:prstGeom prst="rect">
             <a:avLst/>
@@ -11561,14 +12432,14 @@
           <a:p>
             <a:pPr algn="l">
               <a:lnSpc>
-                <a:spcPct val="105000"/>
-              </a:lnSpc>
-              <a:spcAft>
-                <a:spcPts val="300"/>
-              </a:spcAft>
-            </a:pPr>
-            <a:r>
-              <a:rPr sz="1200" b="0">
+                <a:spcPct val="100000"/>
+              </a:lnSpc>
+              <a:spcAft>
+                <a:spcPts val="300"/>
+              </a:spcAft>
+            </a:pPr>
+            <a:r>
+              <a:rPr sz="1050" b="0">
                 <a:solidFill>
                   <a:srgbClr val="1F2D3D"/>
                 </a:solidFill>
@@ -11588,8 +12459,8 @@
         </p:nvSpPr>
         <p:spPr>
           <a:xfrm>
-            <a:off x="457200" y="3899913"/>
-            <a:ext cx="11247120" cy="754379"/>
+            <a:off x="457200" y="5141211"/>
+            <a:ext cx="5577840" cy="1168145"/>
           </a:xfrm>
           <a:prstGeom prst="rect">
             <a:avLst/>
@@ -11632,8 +12503,8 @@
         </p:nvSpPr>
         <p:spPr>
           <a:xfrm>
-            <a:off x="457200" y="3899913"/>
-            <a:ext cx="73152" cy="754379"/>
+            <a:off x="457200" y="5141211"/>
+            <a:ext cx="73152" cy="1168145"/>
           </a:xfrm>
           <a:prstGeom prst="rect">
             <a:avLst/>
@@ -11676,8 +12547,8 @@
         </p:nvSpPr>
         <p:spPr>
           <a:xfrm>
-            <a:off x="777240" y="3991353"/>
-            <a:ext cx="10789920" cy="365760"/>
+            <a:off x="640080" y="5232651"/>
+            <a:ext cx="5212080" cy="320040"/>
           </a:xfrm>
           <a:prstGeom prst="rect">
             <a:avLst/>
@@ -11699,7 +12570,7 @@
               </a:spcAft>
             </a:pPr>
             <a:r>
-              <a:rPr sz="1400" b="1">
+              <a:rPr sz="1300" b="1">
                 <a:solidFill>
                   <a:srgbClr val="0A3D91"/>
                 </a:solidFill>
@@ -11719,8 +12590,8 @@
         </p:nvSpPr>
         <p:spPr>
           <a:xfrm>
-            <a:off x="777240" y="4357113"/>
-            <a:ext cx="10789920" cy="229934109600"/>
+            <a:off x="640080" y="5552691"/>
+            <a:ext cx="5212080" cy="665225"/>
           </a:xfrm>
           <a:prstGeom prst="rect">
             <a:avLst/>
@@ -11735,21 +12606,21 @@
           <a:p>
             <a:pPr algn="l">
               <a:lnSpc>
-                <a:spcPct val="105000"/>
-              </a:lnSpc>
-              <a:spcAft>
-                <a:spcPts val="300"/>
-              </a:spcAft>
-            </a:pPr>
-            <a:r>
-              <a:rPr sz="1200" b="0">
+                <a:spcPct val="100000"/>
+              </a:lnSpc>
+              <a:spcAft>
+                <a:spcPts val="300"/>
+              </a:spcAft>
+            </a:pPr>
+            <a:r>
+              <a:rPr sz="1050" b="0">
                 <a:solidFill>
                   <a:srgbClr val="1F2D3D"/>
                 </a:solidFill>
                 <a:latin typeface="微软雅黑"/>
                 <a:ea typeface="微软雅黑"/>
               </a:rPr>
-              <a:t>PostgreSQL 应用层向量（不引 Neo4j/pgvector，单机原则）。</a:t>
+              <a:t>PostgreSQL + pgvector（不引 Neo4j，单机原则）。</a:t>
             </a:r>
           </a:p>
         </p:txBody>
@@ -11762,8 +12633,8 @@
         </p:nvSpPr>
         <p:spPr>
           <a:xfrm>
-            <a:off x="457200" y="4727444"/>
-            <a:ext cx="11247120" cy="754379"/>
+            <a:off x="6263640" y="1417320"/>
+            <a:ext cx="5577840" cy="1581911"/>
           </a:xfrm>
           <a:prstGeom prst="rect">
             <a:avLst/>
@@ -11806,8 +12677,8 @@
         </p:nvSpPr>
         <p:spPr>
           <a:xfrm>
-            <a:off x="457200" y="4727444"/>
-            <a:ext cx="73152" cy="754379"/>
+            <a:off x="6263640" y="1417320"/>
+            <a:ext cx="73152" cy="1581911"/>
           </a:xfrm>
           <a:prstGeom prst="rect">
             <a:avLst/>
@@ -11850,8 +12721,8 @@
         </p:nvSpPr>
         <p:spPr>
           <a:xfrm>
-            <a:off x="777240" y="4818884"/>
-            <a:ext cx="10789920" cy="365760"/>
+            <a:off x="6446520" y="1508760"/>
+            <a:ext cx="5212080" cy="320040"/>
           </a:xfrm>
           <a:prstGeom prst="rect">
             <a:avLst/>
@@ -11873,14 +12744,14 @@
               </a:spcAft>
             </a:pPr>
             <a:r>
-              <a:rPr sz="1400" b="1">
+              <a:rPr sz="1300" b="1">
                 <a:solidFill>
                   <a:srgbClr val="0A3D91"/>
                 </a:solidFill>
                 <a:latin typeface="微软雅黑"/>
                 <a:ea typeface="微软雅黑"/>
               </a:rPr>
-              <a:t>记忆引擎</a:t>
+              <a:t>Embedding</a:t>
             </a:r>
           </a:p>
         </p:txBody>
@@ -11893,8 +12764,8 @@
         </p:nvSpPr>
         <p:spPr>
           <a:xfrm>
-            <a:off x="777240" y="5184644"/>
-            <a:ext cx="10789920" cy="229934109600"/>
+            <a:off x="6446520" y="1828800"/>
+            <a:ext cx="5212080" cy="1078991"/>
           </a:xfrm>
           <a:prstGeom prst="rect">
             <a:avLst/>
@@ -11909,21 +12780,21 @@
           <a:p>
             <a:pPr algn="l">
               <a:lnSpc>
-                <a:spcPct val="105000"/>
-              </a:lnSpc>
-              <a:spcAft>
-                <a:spcPts val="300"/>
-              </a:spcAft>
-            </a:pPr>
-            <a:r>
-              <a:rPr sz="1200" b="0">
+                <a:spcPct val="100000"/>
+              </a:lnSpc>
+              <a:spcAft>
+                <a:spcPts val="300"/>
+              </a:spcAft>
+            </a:pPr>
+            <a:r>
+              <a:rPr sz="1050" b="0">
                 <a:solidFill>
                   <a:srgbClr val="1F2D3D"/>
                 </a:solidFill>
                 <a:latin typeface="微软雅黑"/>
                 <a:ea typeface="微软雅黑"/>
               </a:rPr>
-              <a:t>自研轻量 Mem0 风格（3人日不允许消化外部框架黑盒）。</a:t>
+              <a:t>百炼 text-embedding-v3（768 维，复用现有 key，OpenAI 兼容）。</a:t>
             </a:r>
           </a:p>
         </p:txBody>
@@ -11936,8 +12807,8 @@
         </p:nvSpPr>
         <p:spPr>
           <a:xfrm>
-            <a:off x="457200" y="5554975"/>
-            <a:ext cx="11247120" cy="754379"/>
+            <a:off x="6263640" y="3072383"/>
+            <a:ext cx="5577840" cy="1581911"/>
           </a:xfrm>
           <a:prstGeom prst="rect">
             <a:avLst/>
@@ -11980,8 +12851,8 @@
         </p:nvSpPr>
         <p:spPr>
           <a:xfrm>
-            <a:off x="457200" y="5554975"/>
-            <a:ext cx="73152" cy="754379"/>
+            <a:off x="6263640" y="3072383"/>
+            <a:ext cx="73152" cy="1581911"/>
           </a:xfrm>
           <a:prstGeom prst="rect">
             <a:avLst/>
@@ -12024,8 +12895,8 @@
         </p:nvSpPr>
         <p:spPr>
           <a:xfrm>
-            <a:off x="777240" y="5646415"/>
-            <a:ext cx="10789920" cy="365760"/>
+            <a:off x="6446520" y="3163823"/>
+            <a:ext cx="5212080" cy="320040"/>
           </a:xfrm>
           <a:prstGeom prst="rect">
             <a:avLst/>
@@ -12047,13 +12918,187 @@
               </a:spcAft>
             </a:pPr>
             <a:r>
-              <a:rPr sz="1400" b="1">
+              <a:rPr sz="1300" b="1">
                 <a:solidFill>
                   <a:srgbClr val="0A3D91"/>
                 </a:solidFill>
                 <a:latin typeface="微软雅黑"/>
                 <a:ea typeface="微软雅黑"/>
               </a:rPr>
+              <a:t>记忆引擎</a:t>
+            </a:r>
+          </a:p>
+        </p:txBody>
+      </p:sp>
+      <p:sp>
+        <p:nvSpPr>
+          <p:cNvPr id="28" name="TextBox 27"/>
+          <p:cNvSpPr txBox="1"/>
+          <p:nvPr/>
+        </p:nvSpPr>
+        <p:spPr>
+          <a:xfrm>
+            <a:off x="6446520" y="3483863"/>
+            <a:ext cx="5212080" cy="1078991"/>
+          </a:xfrm>
+          <a:prstGeom prst="rect">
+            <a:avLst/>
+          </a:prstGeom>
+          <a:noFill/>
+        </p:spPr>
+        <p:txBody>
+          <a:bodyPr wrap="square" anchor="t">
+            <a:spAutoFit/>
+          </a:bodyPr>
+          <a:lstStyle/>
+          <a:p>
+            <a:pPr algn="l">
+              <a:lnSpc>
+                <a:spcPct val="100000"/>
+              </a:lnSpc>
+              <a:spcAft>
+                <a:spcPts val="300"/>
+              </a:spcAft>
+            </a:pPr>
+            <a:r>
+              <a:rPr sz="1050" b="0">
+                <a:solidFill>
+                  <a:srgbClr val="1F2D3D"/>
+                </a:solidFill>
+                <a:latin typeface="微软雅黑"/>
+                <a:ea typeface="微软雅黑"/>
+              </a:rPr>
+              <a:t>自研轻量 Mem0 风格（3人日不允许消化外部框架黑盒）。</a:t>
+            </a:r>
+          </a:p>
+        </p:txBody>
+      </p:sp>
+      <p:sp>
+        <p:nvSpPr>
+          <p:cNvPr id="29" name="Rectangle 28"/>
+          <p:cNvSpPr/>
+          <p:nvPr/>
+        </p:nvSpPr>
+        <p:spPr>
+          <a:xfrm>
+            <a:off x="6263640" y="4727446"/>
+            <a:ext cx="5577840" cy="1581911"/>
+          </a:xfrm>
+          <a:prstGeom prst="rect">
+            <a:avLst/>
+          </a:prstGeom>
+          <a:solidFill>
+            <a:srgbClr val="F7FAFC"/>
+          </a:solidFill>
+          <a:ln>
+            <a:noFill/>
+          </a:ln>
+          <a:effectLst/>
+        </p:spPr>
+        <p:style>
+          <a:lnRef idx="1">
+            <a:schemeClr val="accent1"/>
+          </a:lnRef>
+          <a:fillRef idx="3">
+            <a:schemeClr val="accent1"/>
+          </a:fillRef>
+          <a:effectRef idx="2">
+            <a:schemeClr val="accent1"/>
+          </a:effectRef>
+          <a:fontRef idx="minor">
+            <a:schemeClr val="lt1"/>
+          </a:fontRef>
+        </p:style>
+        <p:txBody>
+          <a:bodyPr rtlCol="0" anchor="ctr"/>
+          <a:lstStyle/>
+          <a:p>
+            <a:pPr algn="ctr"/>
+          </a:p>
+        </p:txBody>
+      </p:sp>
+      <p:sp>
+        <p:nvSpPr>
+          <p:cNvPr id="30" name="Rectangle 29"/>
+          <p:cNvSpPr/>
+          <p:nvPr/>
+        </p:nvSpPr>
+        <p:spPr>
+          <a:xfrm>
+            <a:off x="6263640" y="4727446"/>
+            <a:ext cx="73152" cy="1581911"/>
+          </a:xfrm>
+          <a:prstGeom prst="rect">
+            <a:avLst/>
+          </a:prstGeom>
+          <a:solidFill>
+            <a:srgbClr val="1677FF"/>
+          </a:solidFill>
+          <a:ln>
+            <a:noFill/>
+          </a:ln>
+          <a:effectLst/>
+        </p:spPr>
+        <p:style>
+          <a:lnRef idx="1">
+            <a:schemeClr val="accent1"/>
+          </a:lnRef>
+          <a:fillRef idx="3">
+            <a:schemeClr val="accent1"/>
+          </a:fillRef>
+          <a:effectRef idx="2">
+            <a:schemeClr val="accent1"/>
+          </a:effectRef>
+          <a:fontRef idx="minor">
+            <a:schemeClr val="lt1"/>
+          </a:fontRef>
+        </p:style>
+        <p:txBody>
+          <a:bodyPr rtlCol="0" anchor="ctr"/>
+          <a:lstStyle/>
+          <a:p>
+            <a:pPr algn="ctr"/>
+          </a:p>
+        </p:txBody>
+      </p:sp>
+      <p:sp>
+        <p:nvSpPr>
+          <p:cNvPr id="31" name="TextBox 30"/>
+          <p:cNvSpPr txBox="1"/>
+          <p:nvPr/>
+        </p:nvSpPr>
+        <p:spPr>
+          <a:xfrm>
+            <a:off x="6446520" y="4818886"/>
+            <a:ext cx="5212080" cy="320040"/>
+          </a:xfrm>
+          <a:prstGeom prst="rect">
+            <a:avLst/>
+          </a:prstGeom>
+          <a:noFill/>
+        </p:spPr>
+        <p:txBody>
+          <a:bodyPr wrap="square" anchor="t">
+            <a:spAutoFit/>
+          </a:bodyPr>
+          <a:lstStyle/>
+          <a:p>
+            <a:pPr algn="l">
+              <a:lnSpc>
+                <a:spcPct val="100000"/>
+              </a:lnSpc>
+              <a:spcAft>
+                <a:spcPts val="300"/>
+              </a:spcAft>
+            </a:pPr>
+            <a:r>
+              <a:rPr sz="1300" b="1">
+                <a:solidFill>
+                  <a:srgbClr val="0A3D91"/>
+                </a:solidFill>
+                <a:latin typeface="微软雅黑"/>
+                <a:ea typeface="微软雅黑"/>
+              </a:rPr>
               <a:t>强干预</a:t>
             </a:r>
           </a:p>
@@ -12061,14 +13106,14 @@
       </p:sp>
       <p:sp>
         <p:nvSpPr>
-          <p:cNvPr id="28" name="TextBox 27"/>
-          <p:cNvSpPr txBox="1"/>
-          <p:nvPr/>
-        </p:nvSpPr>
-        <p:spPr>
-          <a:xfrm>
-            <a:off x="777240" y="6012175"/>
-            <a:ext cx="10789920" cy="229934109600"/>
+          <p:cNvPr id="32" name="TextBox 31"/>
+          <p:cNvSpPr txBox="1"/>
+          <p:nvPr/>
+        </p:nvSpPr>
+        <p:spPr>
+          <a:xfrm>
+            <a:off x="6446520" y="5138926"/>
+            <a:ext cx="5212080" cy="1078991"/>
           </a:xfrm>
           <a:prstGeom prst="rect">
             <a:avLst/>
@@ -12083,14 +13128,14 @@
           <a:p>
             <a:pPr algn="l">
               <a:lnSpc>
-                <a:spcPct val="105000"/>
-              </a:lnSpc>
-              <a:spcAft>
-                <a:spcPts val="300"/>
-              </a:spcAft>
-            </a:pPr>
-            <a:r>
-              <a:rPr sz="1200" b="0">
+                <a:spcPct val="100000"/>
+              </a:lnSpc>
+              <a:spcAft>
+                <a:spcPts val="300"/>
+              </a:spcAft>
+            </a:pPr>
+            <a:r>
+              <a:rPr sz="1050" b="0">
                 <a:solidFill>
                   <a:srgbClr val="1F2D3D"/>
                 </a:solidFill>
@@ -12104,7 +13149,7 @@
       </p:sp>
       <p:sp>
         <p:nvSpPr>
-          <p:cNvPr id="29" name="TextBox 28"/>
+          <p:cNvPr id="33" name="TextBox 32"/>
           <p:cNvSpPr txBox="1"/>
           <p:nvPr/>
         </p:nvSpPr>
@@ -12140,14 +13185,14 @@
                 <a:latin typeface="微软雅黑"/>
                 <a:ea typeface="微软雅黑"/>
               </a:rPr>
-              <a:t>16/18</a:t>
-            </a:r>
-          </a:p>
-        </p:txBody>
-      </p:sp>
-      <p:sp>
-        <p:nvSpPr>
-          <p:cNvPr id="30" name="TextBox 29"/>
+              <a:t>16/19</a:t>
+            </a:r>
+          </a:p>
+        </p:txBody>
+      </p:sp>
+      <p:sp>
+        <p:nvSpPr>
+          <p:cNvPr id="34" name="TextBox 33"/>
           <p:cNvSpPr txBox="1"/>
           <p:nvPr/>
         </p:nvSpPr>
@@ -12296,7 +13341,7 @@
                 <a:latin typeface="微软雅黑"/>
                 <a:ea typeface="微软雅黑"/>
               </a:rPr>
-              <a:t>十五、个性化人群适配（本期新增）</a:t>
+              <a:t>十五、个性化人群适配</a:t>
             </a:r>
           </a:p>
         </p:txBody>
@@ -12645,7 +13690,7 @@
                 <a:latin typeface="微软雅黑"/>
                 <a:ea typeface="微软雅黑"/>
               </a:rPr>
-              <a:t>老人信息表单</a:t>
+              <a:t>儿童门票分档</a:t>
             </a:r>
           </a:p>
         </p:txBody>
@@ -12688,7 +13733,7 @@
                 <a:latin typeface="微软雅黑"/>
                 <a:ea typeface="微软雅黑"/>
               </a:rPr>
-              <a:t>创建页可逐位填写老人年龄+性别（可多个），门票按每人年龄独立计算，报告逐人展示。</a:t>
+              <a:t>6周岁以下或身高1.2米以下免首道大门票（二选一）、6-18半价；只免首道，民营景区以公示为准。</a:t>
             </a:r>
           </a:p>
         </p:txBody>
@@ -12819,7 +13864,7 @@
                 <a:latin typeface="微软雅黑"/>
                 <a:ea typeface="微软雅黑"/>
               </a:rPr>
-              <a:t>成人关系</a:t>
+              <a:t>交通购票分档</a:t>
             </a:r>
           </a:p>
         </p:txBody>
@@ -12862,7 +13907,7 @@
                 <a:latin typeface="微软雅黑"/>
                 <a:ea typeface="微软雅黑"/>
               </a:rPr>
-              <a:t>创建页新增成人关系：情侣/单身/未婚/已婚/家庭/朋友/同事，随行程一起存储。</a:t>
+              <a:t>高铁(6岁以下免票不占座/6-14半价/14+全价)；飞机(婴儿票10%/儿童5折/12+成人)；学生票仅限家校往返。</a:t>
             </a:r>
           </a:p>
         </p:txBody>
@@ -12993,7 +14038,7 @@
                 <a:latin typeface="微软雅黑"/>
                 <a:ea typeface="微软雅黑"/>
               </a:rPr>
-              <a:t>儿童/老人景点过滤</a:t>
+              <a:t>人群信息表单</a:t>
             </a:r>
           </a:p>
         </p:txBody>
@@ -13036,7 +14081,7 @@
                 <a:latin typeface="微软雅黑"/>
                 <a:ea typeface="微软雅黑"/>
               </a:rPr>
-              <a:t>有老人剔除滑雪/漂流/登山/雪山等高强度项目；有儿童剔除酒吧/夜店/KTV；家庭模式剔除网吧/足浴等夜生活。</a:t>
+              <a:t>成人关系 + 老人(年龄+性别+状态) + 儿童(年龄+身高+占座) + 学生(学历) + 购票/酒店方式。</a:t>
             </a:r>
           </a:p>
         </p:txBody>
@@ -13167,7 +14212,7 @@
                 <a:latin typeface="微软雅黑"/>
                 <a:ea typeface="微软雅黑"/>
               </a:rPr>
-              <a:t>景点友好排序</a:t>
+              <a:t>人群过滤+兴趣</a:t>
             </a:r>
           </a:p>
         </p:txBody>
@@ -13210,7 +14255,7 @@
                 <a:latin typeface="微软雅黑"/>
                 <a:ea typeface="微软雅黑"/>
               </a:rPr>
-              <a:t>兴趣标签匹配 + 亲子/老人友好加权：有儿童优先乐园/动物园，有老人优先公园/博物馆/古镇。</a:t>
+              <a:t>有老人剔除滑雪/登山/雪山；有儿童剔除酒吧/夜店；兴趣标签+亲子/老人友好加权排序。</a:t>
             </a:r>
           </a:p>
         </p:txBody>
@@ -13384,7 +14429,7 @@
                 <a:latin typeface="微软雅黑"/>
                 <a:ea typeface="微软雅黑"/>
               </a:rPr>
-              <a:t>早餐只吃早餐类(包子/粥/豆浆/馄饨等)，无早餐店留空绝不硬塞正餐；早餐/快餐专门调研；三餐跨天不重复。</a:t>
+              <a:t>早餐只吃早餐类(不吃火锅/烤鸭)；早餐/快餐专门调研；三餐跨天不重复。</a:t>
             </a:r>
           </a:p>
         </p:txBody>
@@ -13427,7 +14472,7 @@
                 <a:latin typeface="微软雅黑"/>
                 <a:ea typeface="微软雅黑"/>
               </a:rPr>
-              <a:t>17/18</a:t>
+              <a:t>17/19</a:t>
             </a:r>
           </a:p>
         </p:txBody>
@@ -13484,6 +14529,1293 @@
 </file>
 
 <file path=ppt/slides/slide18.xml><?xml version="1.0" encoding="utf-8"?>
+<p:sld xmlns:a="http://schemas.openxmlformats.org/drawingml/2006/main" xmlns:p="http://schemas.openxmlformats.org/presentationml/2006/main" xmlns:r="http://schemas.openxmlformats.org/officeDocument/2006/relationships">
+  <p:cSld>
+    <p:bg>
+      <p:bgPr>
+        <a:solidFill>
+          <a:srgbClr val="FFFFFF"/>
+        </a:solidFill>
+        <a:effectLst/>
+      </p:bgPr>
+    </p:bg>
+    <p:spTree>
+      <p:nvGrpSpPr>
+        <p:cNvPr id="1" name=""/>
+        <p:cNvGrpSpPr/>
+        <p:nvPr/>
+      </p:nvGrpSpPr>
+      <p:grpSpPr/>
+      <p:sp>
+        <p:nvSpPr>
+          <p:cNvPr id="2" name="Rectangle 1"/>
+          <p:cNvSpPr/>
+          <p:nvPr/>
+        </p:nvSpPr>
+        <p:spPr>
+          <a:xfrm>
+            <a:off x="0" y="0"/>
+            <a:ext cx="12191695" cy="164592"/>
+          </a:xfrm>
+          <a:prstGeom prst="rect">
+            <a:avLst/>
+          </a:prstGeom>
+          <a:solidFill>
+            <a:srgbClr val="1677FF"/>
+          </a:solidFill>
+          <a:ln>
+            <a:noFill/>
+          </a:ln>
+          <a:effectLst/>
+        </p:spPr>
+        <p:style>
+          <a:lnRef idx="1">
+            <a:schemeClr val="accent1"/>
+          </a:lnRef>
+          <a:fillRef idx="3">
+            <a:schemeClr val="accent1"/>
+          </a:fillRef>
+          <a:effectRef idx="2">
+            <a:schemeClr val="accent1"/>
+          </a:effectRef>
+          <a:fontRef idx="minor">
+            <a:schemeClr val="lt1"/>
+          </a:fontRef>
+        </p:style>
+        <p:txBody>
+          <a:bodyPr rtlCol="0" anchor="ctr"/>
+          <a:lstStyle/>
+          <a:p>
+            <a:pPr algn="ctr"/>
+          </a:p>
+        </p:txBody>
+      </p:sp>
+      <p:sp>
+        <p:nvSpPr>
+          <p:cNvPr id="3" name="TextBox 2"/>
+          <p:cNvSpPr txBox="1"/>
+          <p:nvPr/>
+        </p:nvSpPr>
+        <p:spPr>
+          <a:xfrm>
+            <a:off x="457200" y="292608"/>
+            <a:ext cx="10058400" cy="548640"/>
+          </a:xfrm>
+          <a:prstGeom prst="rect">
+            <a:avLst/>
+          </a:prstGeom>
+          <a:noFill/>
+        </p:spPr>
+        <p:txBody>
+          <a:bodyPr wrap="square" anchor="t">
+            <a:spAutoFit/>
+          </a:bodyPr>
+          <a:lstStyle/>
+          <a:p>
+            <a:pPr algn="l">
+              <a:lnSpc>
+                <a:spcPct val="100000"/>
+              </a:lnSpc>
+              <a:spcAft>
+                <a:spcPts val="300"/>
+              </a:spcAft>
+            </a:pPr>
+            <a:r>
+              <a:rPr sz="2500" b="1">
+                <a:solidFill>
+                  <a:srgbClr val="1F2D3D"/>
+                </a:solidFill>
+                <a:latin typeface="微软雅黑"/>
+                <a:ea typeface="微软雅黑"/>
+              </a:rPr>
+              <a:t>十六、RAG 检索增强生成</a:t>
+            </a:r>
+          </a:p>
+        </p:txBody>
+      </p:sp>
+      <p:sp>
+        <p:nvSpPr>
+          <p:cNvPr id="4" name="Rectangle 3"/>
+          <p:cNvSpPr/>
+          <p:nvPr/>
+        </p:nvSpPr>
+        <p:spPr>
+          <a:xfrm>
+            <a:off x="457200" y="1188720"/>
+            <a:ext cx="2011680" cy="41148"/>
+          </a:xfrm>
+          <a:prstGeom prst="rect">
+            <a:avLst/>
+          </a:prstGeom>
+          <a:solidFill>
+            <a:srgbClr val="1677FF"/>
+          </a:solidFill>
+          <a:ln>
+            <a:noFill/>
+          </a:ln>
+          <a:effectLst/>
+        </p:spPr>
+        <p:style>
+          <a:lnRef idx="1">
+            <a:schemeClr val="accent1"/>
+          </a:lnRef>
+          <a:fillRef idx="3">
+            <a:schemeClr val="accent1"/>
+          </a:fillRef>
+          <a:effectRef idx="2">
+            <a:schemeClr val="accent1"/>
+          </a:effectRef>
+          <a:fontRef idx="minor">
+            <a:schemeClr val="lt1"/>
+          </a:fontRef>
+        </p:style>
+        <p:txBody>
+          <a:bodyPr rtlCol="0" anchor="ctr"/>
+          <a:lstStyle/>
+          <a:p>
+            <a:pPr algn="ctr"/>
+          </a:p>
+        </p:txBody>
+      </p:sp>
+      <p:sp>
+        <p:nvSpPr>
+          <p:cNvPr id="5" name="Rectangle 4"/>
+          <p:cNvSpPr/>
+          <p:nvPr/>
+        </p:nvSpPr>
+        <p:spPr>
+          <a:xfrm>
+            <a:off x="457200" y="1417320"/>
+            <a:ext cx="11247120" cy="754379"/>
+          </a:xfrm>
+          <a:prstGeom prst="rect">
+            <a:avLst/>
+          </a:prstGeom>
+          <a:solidFill>
+            <a:srgbClr val="F7FAFC"/>
+          </a:solidFill>
+          <a:ln>
+            <a:noFill/>
+          </a:ln>
+          <a:effectLst/>
+        </p:spPr>
+        <p:style>
+          <a:lnRef idx="1">
+            <a:schemeClr val="accent1"/>
+          </a:lnRef>
+          <a:fillRef idx="3">
+            <a:schemeClr val="accent1"/>
+          </a:fillRef>
+          <a:effectRef idx="2">
+            <a:schemeClr val="accent1"/>
+          </a:effectRef>
+          <a:fontRef idx="minor">
+            <a:schemeClr val="lt1"/>
+          </a:fontRef>
+        </p:style>
+        <p:txBody>
+          <a:bodyPr rtlCol="0" anchor="ctr"/>
+          <a:lstStyle/>
+          <a:p>
+            <a:pPr algn="ctr"/>
+          </a:p>
+        </p:txBody>
+      </p:sp>
+      <p:sp>
+        <p:nvSpPr>
+          <p:cNvPr id="6" name="Rectangle 5"/>
+          <p:cNvSpPr/>
+          <p:nvPr/>
+        </p:nvSpPr>
+        <p:spPr>
+          <a:xfrm>
+            <a:off x="457200" y="1417320"/>
+            <a:ext cx="73152" cy="754379"/>
+          </a:xfrm>
+          <a:prstGeom prst="rect">
+            <a:avLst/>
+          </a:prstGeom>
+          <a:solidFill>
+            <a:srgbClr val="1677FF"/>
+          </a:solidFill>
+          <a:ln>
+            <a:noFill/>
+          </a:ln>
+          <a:effectLst/>
+        </p:spPr>
+        <p:style>
+          <a:lnRef idx="1">
+            <a:schemeClr val="accent1"/>
+          </a:lnRef>
+          <a:fillRef idx="3">
+            <a:schemeClr val="accent1"/>
+          </a:fillRef>
+          <a:effectRef idx="2">
+            <a:schemeClr val="accent1"/>
+          </a:effectRef>
+          <a:fontRef idx="minor">
+            <a:schemeClr val="lt1"/>
+          </a:fontRef>
+        </p:style>
+        <p:txBody>
+          <a:bodyPr rtlCol="0" anchor="ctr"/>
+          <a:lstStyle/>
+          <a:p>
+            <a:pPr algn="ctr"/>
+          </a:p>
+        </p:txBody>
+      </p:sp>
+      <p:sp>
+        <p:nvSpPr>
+          <p:cNvPr id="7" name="TextBox 6"/>
+          <p:cNvSpPr txBox="1"/>
+          <p:nvPr/>
+        </p:nvSpPr>
+        <p:spPr>
+          <a:xfrm>
+            <a:off x="777240" y="1508760"/>
+            <a:ext cx="10789920" cy="365760"/>
+          </a:xfrm>
+          <a:prstGeom prst="rect">
+            <a:avLst/>
+          </a:prstGeom>
+          <a:noFill/>
+        </p:spPr>
+        <p:txBody>
+          <a:bodyPr wrap="square" anchor="t">
+            <a:spAutoFit/>
+          </a:bodyPr>
+          <a:lstStyle/>
+          <a:p>
+            <a:pPr algn="l">
+              <a:lnSpc>
+                <a:spcPct val="100000"/>
+              </a:lnSpc>
+              <a:spcAft>
+                <a:spcPts val="300"/>
+              </a:spcAft>
+            </a:pPr>
+            <a:r>
+              <a:rPr sz="1400" b="1">
+                <a:solidFill>
+                  <a:srgbClr val="0A3D91"/>
+                </a:solidFill>
+                <a:latin typeface="微软雅黑"/>
+                <a:ea typeface="微软雅黑"/>
+              </a:rPr>
+              <a:t>技术底座</a:t>
+            </a:r>
+          </a:p>
+        </p:txBody>
+      </p:sp>
+      <p:sp>
+        <p:nvSpPr>
+          <p:cNvPr id="8" name="TextBox 7"/>
+          <p:cNvSpPr txBox="1"/>
+          <p:nvPr/>
+        </p:nvSpPr>
+        <p:spPr>
+          <a:xfrm>
+            <a:off x="777240" y="1874520"/>
+            <a:ext cx="10789920" cy="229934109600"/>
+          </a:xfrm>
+          <a:prstGeom prst="rect">
+            <a:avLst/>
+          </a:prstGeom>
+          <a:noFill/>
+        </p:spPr>
+        <p:txBody>
+          <a:bodyPr wrap="square" anchor="t">
+            <a:spAutoFit/>
+          </a:bodyPr>
+          <a:lstStyle/>
+          <a:p>
+            <a:pPr algn="l">
+              <a:lnSpc>
+                <a:spcPct val="105000"/>
+              </a:lnSpc>
+              <a:spcAft>
+                <a:spcPts val="300"/>
+              </a:spcAft>
+            </a:pPr>
+            <a:r>
+              <a:rPr sz="1200" b="0">
+                <a:solidFill>
+                  <a:srgbClr val="1F2D3D"/>
+                </a:solidFill>
+                <a:latin typeface="微软雅黑"/>
+                <a:ea typeface="微软雅黑"/>
+              </a:rPr>
+              <a:t>pgvector(PostgreSQL扩展) + 百炼 text-embedding-v3(768维) + OpenAI 兼容 /embeddings，batch=10 规避单次上限。</a:t>
+            </a:r>
+          </a:p>
+        </p:txBody>
+      </p:sp>
+      <p:sp>
+        <p:nvSpPr>
+          <p:cNvPr id="9" name="Rectangle 8"/>
+          <p:cNvSpPr/>
+          <p:nvPr/>
+        </p:nvSpPr>
+        <p:spPr>
+          <a:xfrm>
+            <a:off x="457200" y="2244851"/>
+            <a:ext cx="11247120" cy="754379"/>
+          </a:xfrm>
+          <a:prstGeom prst="rect">
+            <a:avLst/>
+          </a:prstGeom>
+          <a:solidFill>
+            <a:srgbClr val="F7FAFC"/>
+          </a:solidFill>
+          <a:ln>
+            <a:noFill/>
+          </a:ln>
+          <a:effectLst/>
+        </p:spPr>
+        <p:style>
+          <a:lnRef idx="1">
+            <a:schemeClr val="accent1"/>
+          </a:lnRef>
+          <a:fillRef idx="3">
+            <a:schemeClr val="accent1"/>
+          </a:fillRef>
+          <a:effectRef idx="2">
+            <a:schemeClr val="accent1"/>
+          </a:effectRef>
+          <a:fontRef idx="minor">
+            <a:schemeClr val="lt1"/>
+          </a:fontRef>
+        </p:style>
+        <p:txBody>
+          <a:bodyPr rtlCol="0" anchor="ctr"/>
+          <a:lstStyle/>
+          <a:p>
+            <a:pPr algn="ctr"/>
+          </a:p>
+        </p:txBody>
+      </p:sp>
+      <p:sp>
+        <p:nvSpPr>
+          <p:cNvPr id="10" name="Rectangle 9"/>
+          <p:cNvSpPr/>
+          <p:nvPr/>
+        </p:nvSpPr>
+        <p:spPr>
+          <a:xfrm>
+            <a:off x="457200" y="2244851"/>
+            <a:ext cx="73152" cy="754379"/>
+          </a:xfrm>
+          <a:prstGeom prst="rect">
+            <a:avLst/>
+          </a:prstGeom>
+          <a:solidFill>
+            <a:srgbClr val="1677FF"/>
+          </a:solidFill>
+          <a:ln>
+            <a:noFill/>
+          </a:ln>
+          <a:effectLst/>
+        </p:spPr>
+        <p:style>
+          <a:lnRef idx="1">
+            <a:schemeClr val="accent1"/>
+          </a:lnRef>
+          <a:fillRef idx="3">
+            <a:schemeClr val="accent1"/>
+          </a:fillRef>
+          <a:effectRef idx="2">
+            <a:schemeClr val="accent1"/>
+          </a:effectRef>
+          <a:fontRef idx="minor">
+            <a:schemeClr val="lt1"/>
+          </a:fontRef>
+        </p:style>
+        <p:txBody>
+          <a:bodyPr rtlCol="0" anchor="ctr"/>
+          <a:lstStyle/>
+          <a:p>
+            <a:pPr algn="ctr"/>
+          </a:p>
+        </p:txBody>
+      </p:sp>
+      <p:sp>
+        <p:nvSpPr>
+          <p:cNvPr id="11" name="TextBox 10"/>
+          <p:cNvSpPr txBox="1"/>
+          <p:nvPr/>
+        </p:nvSpPr>
+        <p:spPr>
+          <a:xfrm>
+            <a:off x="777240" y="2336291"/>
+            <a:ext cx="10789920" cy="365760"/>
+          </a:xfrm>
+          <a:prstGeom prst="rect">
+            <a:avLst/>
+          </a:prstGeom>
+          <a:noFill/>
+        </p:spPr>
+        <p:txBody>
+          <a:bodyPr wrap="square" anchor="t">
+            <a:spAutoFit/>
+          </a:bodyPr>
+          <a:lstStyle/>
+          <a:p>
+            <a:pPr algn="l">
+              <a:lnSpc>
+                <a:spcPct val="100000"/>
+              </a:lnSpc>
+              <a:spcAft>
+                <a:spcPts val="300"/>
+              </a:spcAft>
+            </a:pPr>
+            <a:r>
+              <a:rPr sz="1400" b="1">
+                <a:solidFill>
+                  <a:srgbClr val="0A3D91"/>
+                </a:solidFill>
+                <a:latin typeface="微软雅黑"/>
+                <a:ea typeface="微软雅黑"/>
+              </a:rPr>
+              <a:t>场景A 个人记忆</a:t>
+            </a:r>
+          </a:p>
+        </p:txBody>
+      </p:sp>
+      <p:sp>
+        <p:nvSpPr>
+          <p:cNvPr id="12" name="TextBox 11"/>
+          <p:cNvSpPr txBox="1"/>
+          <p:nvPr/>
+        </p:nvSpPr>
+        <p:spPr>
+          <a:xfrm>
+            <a:off x="777240" y="2702051"/>
+            <a:ext cx="10789920" cy="229934109600"/>
+          </a:xfrm>
+          <a:prstGeom prst="rect">
+            <a:avLst/>
+          </a:prstGeom>
+          <a:noFill/>
+        </p:spPr>
+        <p:txBody>
+          <a:bodyPr wrap="square" anchor="t">
+            <a:spAutoFit/>
+          </a:bodyPr>
+          <a:lstStyle/>
+          <a:p>
+            <a:pPr algn="l">
+              <a:lnSpc>
+                <a:spcPct val="105000"/>
+              </a:lnSpc>
+              <a:spcAft>
+                <a:spcPts val="300"/>
+              </a:spcAft>
+            </a:pPr>
+            <a:r>
+              <a:rPr sz="1200" b="0">
+                <a:solidFill>
+                  <a:srgbClr val="1F2D3D"/>
+                </a:solidFill>
+                <a:latin typeface="微软雅黑"/>
+                <a:ea typeface="微软雅黑"/>
+              </a:rPr>
+              <a:t>图记忆 embedding 从 JSONB 换 Vector(768)，MD5哈希假向量换真语义向量，「海鲜过敏」能召回「对虾过敏」。</a:t>
+            </a:r>
+          </a:p>
+        </p:txBody>
+      </p:sp>
+      <p:sp>
+        <p:nvSpPr>
+          <p:cNvPr id="13" name="Rectangle 12"/>
+          <p:cNvSpPr/>
+          <p:nvPr/>
+        </p:nvSpPr>
+        <p:spPr>
+          <a:xfrm>
+            <a:off x="457200" y="3072382"/>
+            <a:ext cx="11247120" cy="754379"/>
+          </a:xfrm>
+          <a:prstGeom prst="rect">
+            <a:avLst/>
+          </a:prstGeom>
+          <a:solidFill>
+            <a:srgbClr val="F7FAFC"/>
+          </a:solidFill>
+          <a:ln>
+            <a:noFill/>
+          </a:ln>
+          <a:effectLst/>
+        </p:spPr>
+        <p:style>
+          <a:lnRef idx="1">
+            <a:schemeClr val="accent1"/>
+          </a:lnRef>
+          <a:fillRef idx="3">
+            <a:schemeClr val="accent1"/>
+          </a:fillRef>
+          <a:effectRef idx="2">
+            <a:schemeClr val="accent1"/>
+          </a:effectRef>
+          <a:fontRef idx="minor">
+            <a:schemeClr val="lt1"/>
+          </a:fontRef>
+        </p:style>
+        <p:txBody>
+          <a:bodyPr rtlCol="0" anchor="ctr"/>
+          <a:lstStyle/>
+          <a:p>
+            <a:pPr algn="ctr"/>
+          </a:p>
+        </p:txBody>
+      </p:sp>
+      <p:sp>
+        <p:nvSpPr>
+          <p:cNvPr id="14" name="Rectangle 13"/>
+          <p:cNvSpPr/>
+          <p:nvPr/>
+        </p:nvSpPr>
+        <p:spPr>
+          <a:xfrm>
+            <a:off x="457200" y="3072382"/>
+            <a:ext cx="73152" cy="754379"/>
+          </a:xfrm>
+          <a:prstGeom prst="rect">
+            <a:avLst/>
+          </a:prstGeom>
+          <a:solidFill>
+            <a:srgbClr val="1677FF"/>
+          </a:solidFill>
+          <a:ln>
+            <a:noFill/>
+          </a:ln>
+          <a:effectLst/>
+        </p:spPr>
+        <p:style>
+          <a:lnRef idx="1">
+            <a:schemeClr val="accent1"/>
+          </a:lnRef>
+          <a:fillRef idx="3">
+            <a:schemeClr val="accent1"/>
+          </a:fillRef>
+          <a:effectRef idx="2">
+            <a:schemeClr val="accent1"/>
+          </a:effectRef>
+          <a:fontRef idx="minor">
+            <a:schemeClr val="lt1"/>
+          </a:fontRef>
+        </p:style>
+        <p:txBody>
+          <a:bodyPr rtlCol="0" anchor="ctr"/>
+          <a:lstStyle/>
+          <a:p>
+            <a:pPr algn="ctr"/>
+          </a:p>
+        </p:txBody>
+      </p:sp>
+      <p:sp>
+        <p:nvSpPr>
+          <p:cNvPr id="15" name="TextBox 14"/>
+          <p:cNvSpPr txBox="1"/>
+          <p:nvPr/>
+        </p:nvSpPr>
+        <p:spPr>
+          <a:xfrm>
+            <a:off x="777240" y="3163822"/>
+            <a:ext cx="10789920" cy="365760"/>
+          </a:xfrm>
+          <a:prstGeom prst="rect">
+            <a:avLst/>
+          </a:prstGeom>
+          <a:noFill/>
+        </p:spPr>
+        <p:txBody>
+          <a:bodyPr wrap="square" anchor="t">
+            <a:spAutoFit/>
+          </a:bodyPr>
+          <a:lstStyle/>
+          <a:p>
+            <a:pPr algn="l">
+              <a:lnSpc>
+                <a:spcPct val="100000"/>
+              </a:lnSpc>
+              <a:spcAft>
+                <a:spcPts val="300"/>
+              </a:spcAft>
+            </a:pPr>
+            <a:r>
+              <a:rPr sz="1400" b="1">
+                <a:solidFill>
+                  <a:srgbClr val="0A3D91"/>
+                </a:solidFill>
+                <a:latin typeface="微软雅黑"/>
+                <a:ea typeface="微软雅黑"/>
+              </a:rPr>
+              <a:t>场景B 文旅知识库</a:t>
+            </a:r>
+          </a:p>
+        </p:txBody>
+      </p:sp>
+      <p:sp>
+        <p:nvSpPr>
+          <p:cNvPr id="16" name="TextBox 15"/>
+          <p:cNvSpPr txBox="1"/>
+          <p:nvPr/>
+        </p:nvSpPr>
+        <p:spPr>
+          <a:xfrm>
+            <a:off x="777240" y="3529582"/>
+            <a:ext cx="10789920" cy="229934109600"/>
+          </a:xfrm>
+          <a:prstGeom prst="rect">
+            <a:avLst/>
+          </a:prstGeom>
+          <a:noFill/>
+        </p:spPr>
+        <p:txBody>
+          <a:bodyPr wrap="square" anchor="t">
+            <a:spAutoFit/>
+          </a:bodyPr>
+          <a:lstStyle/>
+          <a:p>
+            <a:pPr algn="l">
+              <a:lnSpc>
+                <a:spcPct val="105000"/>
+              </a:lnSpc>
+              <a:spcAft>
+                <a:spcPts val="300"/>
+              </a:spcAft>
+            </a:pPr>
+            <a:r>
+              <a:rPr sz="1200" b="0">
+                <a:solidFill>
+                  <a:srgbClr val="1F2D3D"/>
+                </a:solidFill>
+                <a:latin typeface="微软雅黑"/>
+                <a:ea typeface="微软雅黑"/>
+              </a:rPr>
+              <a:t>document_chunks 表存 6 类语料(景点攻略/地方美食/景区政策/四季玩法/交通贴士/住宿贴士)，38 个分块。</a:t>
+            </a:r>
+          </a:p>
+        </p:txBody>
+      </p:sp>
+      <p:sp>
+        <p:nvSpPr>
+          <p:cNvPr id="17" name="Rectangle 16"/>
+          <p:cNvSpPr/>
+          <p:nvPr/>
+        </p:nvSpPr>
+        <p:spPr>
+          <a:xfrm>
+            <a:off x="457200" y="3899913"/>
+            <a:ext cx="11247120" cy="754379"/>
+          </a:xfrm>
+          <a:prstGeom prst="rect">
+            <a:avLst/>
+          </a:prstGeom>
+          <a:solidFill>
+            <a:srgbClr val="F7FAFC"/>
+          </a:solidFill>
+          <a:ln>
+            <a:noFill/>
+          </a:ln>
+          <a:effectLst/>
+        </p:spPr>
+        <p:style>
+          <a:lnRef idx="1">
+            <a:schemeClr val="accent1"/>
+          </a:lnRef>
+          <a:fillRef idx="3">
+            <a:schemeClr val="accent1"/>
+          </a:fillRef>
+          <a:effectRef idx="2">
+            <a:schemeClr val="accent1"/>
+          </a:effectRef>
+          <a:fontRef idx="minor">
+            <a:schemeClr val="lt1"/>
+          </a:fontRef>
+        </p:style>
+        <p:txBody>
+          <a:bodyPr rtlCol="0" anchor="ctr"/>
+          <a:lstStyle/>
+          <a:p>
+            <a:pPr algn="ctr"/>
+          </a:p>
+        </p:txBody>
+      </p:sp>
+      <p:sp>
+        <p:nvSpPr>
+          <p:cNvPr id="18" name="Rectangle 17"/>
+          <p:cNvSpPr/>
+          <p:nvPr/>
+        </p:nvSpPr>
+        <p:spPr>
+          <a:xfrm>
+            <a:off x="457200" y="3899913"/>
+            <a:ext cx="73152" cy="754379"/>
+          </a:xfrm>
+          <a:prstGeom prst="rect">
+            <a:avLst/>
+          </a:prstGeom>
+          <a:solidFill>
+            <a:srgbClr val="1677FF"/>
+          </a:solidFill>
+          <a:ln>
+            <a:noFill/>
+          </a:ln>
+          <a:effectLst/>
+        </p:spPr>
+        <p:style>
+          <a:lnRef idx="1">
+            <a:schemeClr val="accent1"/>
+          </a:lnRef>
+          <a:fillRef idx="3">
+            <a:schemeClr val="accent1"/>
+          </a:fillRef>
+          <a:effectRef idx="2">
+            <a:schemeClr val="accent1"/>
+          </a:effectRef>
+          <a:fontRef idx="minor">
+            <a:schemeClr val="lt1"/>
+          </a:fontRef>
+        </p:style>
+        <p:txBody>
+          <a:bodyPr rtlCol="0" anchor="ctr"/>
+          <a:lstStyle/>
+          <a:p>
+            <a:pPr algn="ctr"/>
+          </a:p>
+        </p:txBody>
+      </p:sp>
+      <p:sp>
+        <p:nvSpPr>
+          <p:cNvPr id="19" name="TextBox 18"/>
+          <p:cNvSpPr txBox="1"/>
+          <p:nvPr/>
+        </p:nvSpPr>
+        <p:spPr>
+          <a:xfrm>
+            <a:off x="777240" y="3991353"/>
+            <a:ext cx="10789920" cy="365760"/>
+          </a:xfrm>
+          <a:prstGeom prst="rect">
+            <a:avLst/>
+          </a:prstGeom>
+          <a:noFill/>
+        </p:spPr>
+        <p:txBody>
+          <a:bodyPr wrap="square" anchor="t">
+            <a:spAutoFit/>
+          </a:bodyPr>
+          <a:lstStyle/>
+          <a:p>
+            <a:pPr algn="l">
+              <a:lnSpc>
+                <a:spcPct val="100000"/>
+              </a:lnSpc>
+              <a:spcAft>
+                <a:spcPts val="300"/>
+              </a:spcAft>
+            </a:pPr>
+            <a:r>
+              <a:rPr sz="1400" b="1">
+                <a:solidFill>
+                  <a:srgbClr val="0A3D91"/>
+                </a:solidFill>
+                <a:latin typeface="微软雅黑"/>
+                <a:ea typeface="微软雅黑"/>
+              </a:rPr>
+              <a:t>检索(R)</a:t>
+            </a:r>
+          </a:p>
+        </p:txBody>
+      </p:sp>
+      <p:sp>
+        <p:nvSpPr>
+          <p:cNvPr id="20" name="TextBox 19"/>
+          <p:cNvSpPr txBox="1"/>
+          <p:nvPr/>
+        </p:nvSpPr>
+        <p:spPr>
+          <a:xfrm>
+            <a:off x="777240" y="4357113"/>
+            <a:ext cx="10789920" cy="229934109600"/>
+          </a:xfrm>
+          <a:prstGeom prst="rect">
+            <a:avLst/>
+          </a:prstGeom>
+          <a:noFill/>
+        </p:spPr>
+        <p:txBody>
+          <a:bodyPr wrap="square" anchor="t">
+            <a:spAutoFit/>
+          </a:bodyPr>
+          <a:lstStyle/>
+          <a:p>
+            <a:pPr algn="l">
+              <a:lnSpc>
+                <a:spcPct val="105000"/>
+              </a:lnSpc>
+              <a:spcAft>
+                <a:spcPts val="300"/>
+              </a:spcAft>
+            </a:pPr>
+            <a:r>
+              <a:rPr sz="1200" b="0">
+                <a:solidFill>
+                  <a:srgbClr val="1F2D3D"/>
+                </a:solidFill>
+                <a:latin typeface="微软雅黑"/>
+                <a:ea typeface="微软雅黑"/>
+              </a:rPr>
+              <a:t>search_kb() 用 pgvector 余弦距离召回 top-k 原文 chunk；web_research + itinerary 两节点注入。</a:t>
+            </a:r>
+          </a:p>
+        </p:txBody>
+      </p:sp>
+      <p:sp>
+        <p:nvSpPr>
+          <p:cNvPr id="21" name="Rectangle 20"/>
+          <p:cNvSpPr/>
+          <p:nvPr/>
+        </p:nvSpPr>
+        <p:spPr>
+          <a:xfrm>
+            <a:off x="457200" y="4727444"/>
+            <a:ext cx="11247120" cy="754379"/>
+          </a:xfrm>
+          <a:prstGeom prst="rect">
+            <a:avLst/>
+          </a:prstGeom>
+          <a:solidFill>
+            <a:srgbClr val="F7FAFC"/>
+          </a:solidFill>
+          <a:ln>
+            <a:noFill/>
+          </a:ln>
+          <a:effectLst/>
+        </p:spPr>
+        <p:style>
+          <a:lnRef idx="1">
+            <a:schemeClr val="accent1"/>
+          </a:lnRef>
+          <a:fillRef idx="3">
+            <a:schemeClr val="accent1"/>
+          </a:fillRef>
+          <a:effectRef idx="2">
+            <a:schemeClr val="accent1"/>
+          </a:effectRef>
+          <a:fontRef idx="minor">
+            <a:schemeClr val="lt1"/>
+          </a:fontRef>
+        </p:style>
+        <p:txBody>
+          <a:bodyPr rtlCol="0" anchor="ctr"/>
+          <a:lstStyle/>
+          <a:p>
+            <a:pPr algn="ctr"/>
+          </a:p>
+        </p:txBody>
+      </p:sp>
+      <p:sp>
+        <p:nvSpPr>
+          <p:cNvPr id="22" name="Rectangle 21"/>
+          <p:cNvSpPr/>
+          <p:nvPr/>
+        </p:nvSpPr>
+        <p:spPr>
+          <a:xfrm>
+            <a:off x="457200" y="4727444"/>
+            <a:ext cx="73152" cy="754379"/>
+          </a:xfrm>
+          <a:prstGeom prst="rect">
+            <a:avLst/>
+          </a:prstGeom>
+          <a:solidFill>
+            <a:srgbClr val="1677FF"/>
+          </a:solidFill>
+          <a:ln>
+            <a:noFill/>
+          </a:ln>
+          <a:effectLst/>
+        </p:spPr>
+        <p:style>
+          <a:lnRef idx="1">
+            <a:schemeClr val="accent1"/>
+          </a:lnRef>
+          <a:fillRef idx="3">
+            <a:schemeClr val="accent1"/>
+          </a:fillRef>
+          <a:effectRef idx="2">
+            <a:schemeClr val="accent1"/>
+          </a:effectRef>
+          <a:fontRef idx="minor">
+            <a:schemeClr val="lt1"/>
+          </a:fontRef>
+        </p:style>
+        <p:txBody>
+          <a:bodyPr rtlCol="0" anchor="ctr"/>
+          <a:lstStyle/>
+          <a:p>
+            <a:pPr algn="ctr"/>
+          </a:p>
+        </p:txBody>
+      </p:sp>
+      <p:sp>
+        <p:nvSpPr>
+          <p:cNvPr id="23" name="TextBox 22"/>
+          <p:cNvSpPr txBox="1"/>
+          <p:nvPr/>
+        </p:nvSpPr>
+        <p:spPr>
+          <a:xfrm>
+            <a:off x="777240" y="4818884"/>
+            <a:ext cx="10789920" cy="365760"/>
+          </a:xfrm>
+          <a:prstGeom prst="rect">
+            <a:avLst/>
+          </a:prstGeom>
+          <a:noFill/>
+        </p:spPr>
+        <p:txBody>
+          <a:bodyPr wrap="square" anchor="t">
+            <a:spAutoFit/>
+          </a:bodyPr>
+          <a:lstStyle/>
+          <a:p>
+            <a:pPr algn="l">
+              <a:lnSpc>
+                <a:spcPct val="100000"/>
+              </a:lnSpc>
+              <a:spcAft>
+                <a:spcPts val="300"/>
+              </a:spcAft>
+            </a:pPr>
+            <a:r>
+              <a:rPr sz="1400" b="1">
+                <a:solidFill>
+                  <a:srgbClr val="0A3D91"/>
+                </a:solidFill>
+                <a:latin typeface="微软雅黑"/>
+                <a:ea typeface="微软雅黑"/>
+              </a:rPr>
+              <a:t>生成(G)</a:t>
+            </a:r>
+          </a:p>
+        </p:txBody>
+      </p:sp>
+      <p:sp>
+        <p:nvSpPr>
+          <p:cNvPr id="24" name="TextBox 23"/>
+          <p:cNvSpPr txBox="1"/>
+          <p:nvPr/>
+        </p:nvSpPr>
+        <p:spPr>
+          <a:xfrm>
+            <a:off x="777240" y="5184644"/>
+            <a:ext cx="10789920" cy="229934109600"/>
+          </a:xfrm>
+          <a:prstGeom prst="rect">
+            <a:avLst/>
+          </a:prstGeom>
+          <a:noFill/>
+        </p:spPr>
+        <p:txBody>
+          <a:bodyPr wrap="square" anchor="t">
+            <a:spAutoFit/>
+          </a:bodyPr>
+          <a:lstStyle/>
+          <a:p>
+            <a:pPr algn="l">
+              <a:lnSpc>
+                <a:spcPct val="105000"/>
+              </a:lnSpc>
+              <a:spcAft>
+                <a:spcPts val="300"/>
+              </a:spcAft>
+            </a:pPr>
+            <a:r>
+              <a:rPr sz="1200" b="0">
+                <a:solidFill>
+                  <a:srgbClr val="1F2D3D"/>
+                </a:solidFill>
+                <a:latin typeface="微软雅黑"/>
+                <a:ea typeface="微软雅黑"/>
+              </a:rPr>
+              <a:t>report 节点 _generate_rag_insights() 让 LLM 基于原文生成「目的地深度解读」，有据可查、带人群感知。</a:t>
+            </a:r>
+          </a:p>
+        </p:txBody>
+      </p:sp>
+      <p:sp>
+        <p:nvSpPr>
+          <p:cNvPr id="25" name="Rectangle 24"/>
+          <p:cNvSpPr/>
+          <p:nvPr/>
+        </p:nvSpPr>
+        <p:spPr>
+          <a:xfrm>
+            <a:off x="457200" y="5554975"/>
+            <a:ext cx="11247120" cy="754379"/>
+          </a:xfrm>
+          <a:prstGeom prst="rect">
+            <a:avLst/>
+          </a:prstGeom>
+          <a:solidFill>
+            <a:srgbClr val="F7FAFC"/>
+          </a:solidFill>
+          <a:ln>
+            <a:noFill/>
+          </a:ln>
+          <a:effectLst/>
+        </p:spPr>
+        <p:style>
+          <a:lnRef idx="1">
+            <a:schemeClr val="accent1"/>
+          </a:lnRef>
+          <a:fillRef idx="3">
+            <a:schemeClr val="accent1"/>
+          </a:fillRef>
+          <a:effectRef idx="2">
+            <a:schemeClr val="accent1"/>
+          </a:effectRef>
+          <a:fontRef idx="minor">
+            <a:schemeClr val="lt1"/>
+          </a:fontRef>
+        </p:style>
+        <p:txBody>
+          <a:bodyPr rtlCol="0" anchor="ctr"/>
+          <a:lstStyle/>
+          <a:p>
+            <a:pPr algn="ctr"/>
+          </a:p>
+        </p:txBody>
+      </p:sp>
+      <p:sp>
+        <p:nvSpPr>
+          <p:cNvPr id="26" name="Rectangle 25"/>
+          <p:cNvSpPr/>
+          <p:nvPr/>
+        </p:nvSpPr>
+        <p:spPr>
+          <a:xfrm>
+            <a:off x="457200" y="5554975"/>
+            <a:ext cx="73152" cy="754379"/>
+          </a:xfrm>
+          <a:prstGeom prst="rect">
+            <a:avLst/>
+          </a:prstGeom>
+          <a:solidFill>
+            <a:srgbClr val="1677FF"/>
+          </a:solidFill>
+          <a:ln>
+            <a:noFill/>
+          </a:ln>
+          <a:effectLst/>
+        </p:spPr>
+        <p:style>
+          <a:lnRef idx="1">
+            <a:schemeClr val="accent1"/>
+          </a:lnRef>
+          <a:fillRef idx="3">
+            <a:schemeClr val="accent1"/>
+          </a:fillRef>
+          <a:effectRef idx="2">
+            <a:schemeClr val="accent1"/>
+          </a:effectRef>
+          <a:fontRef idx="minor">
+            <a:schemeClr val="lt1"/>
+          </a:fontRef>
+        </p:style>
+        <p:txBody>
+          <a:bodyPr rtlCol="0" anchor="ctr"/>
+          <a:lstStyle/>
+          <a:p>
+            <a:pPr algn="ctr"/>
+          </a:p>
+        </p:txBody>
+      </p:sp>
+      <p:sp>
+        <p:nvSpPr>
+          <p:cNvPr id="27" name="TextBox 26"/>
+          <p:cNvSpPr txBox="1"/>
+          <p:nvPr/>
+        </p:nvSpPr>
+        <p:spPr>
+          <a:xfrm>
+            <a:off x="777240" y="5646415"/>
+            <a:ext cx="10789920" cy="365760"/>
+          </a:xfrm>
+          <a:prstGeom prst="rect">
+            <a:avLst/>
+          </a:prstGeom>
+          <a:noFill/>
+        </p:spPr>
+        <p:txBody>
+          <a:bodyPr wrap="square" anchor="t">
+            <a:spAutoFit/>
+          </a:bodyPr>
+          <a:lstStyle/>
+          <a:p>
+            <a:pPr algn="l">
+              <a:lnSpc>
+                <a:spcPct val="100000"/>
+              </a:lnSpc>
+              <a:spcAft>
+                <a:spcPts val="300"/>
+              </a:spcAft>
+            </a:pPr>
+            <a:r>
+              <a:rPr sz="1400" b="1">
+                <a:solidFill>
+                  <a:srgbClr val="0A3D91"/>
+                </a:solidFill>
+                <a:latin typeface="微软雅黑"/>
+                <a:ea typeface="微软雅黑"/>
+              </a:rPr>
+              <a:t>降级安全</a:t>
+            </a:r>
+          </a:p>
+        </p:txBody>
+      </p:sp>
+      <p:sp>
+        <p:nvSpPr>
+          <p:cNvPr id="28" name="TextBox 27"/>
+          <p:cNvSpPr txBox="1"/>
+          <p:nvPr/>
+        </p:nvSpPr>
+        <p:spPr>
+          <a:xfrm>
+            <a:off x="777240" y="6012175"/>
+            <a:ext cx="10789920" cy="229934109600"/>
+          </a:xfrm>
+          <a:prstGeom prst="rect">
+            <a:avLst/>
+          </a:prstGeom>
+          <a:noFill/>
+        </p:spPr>
+        <p:txBody>
+          <a:bodyPr wrap="square" anchor="t">
+            <a:spAutoFit/>
+          </a:bodyPr>
+          <a:lstStyle/>
+          <a:p>
+            <a:pPr algn="l">
+              <a:lnSpc>
+                <a:spcPct val="105000"/>
+              </a:lnSpc>
+              <a:spcAft>
+                <a:spcPts val="300"/>
+              </a:spcAft>
+            </a:pPr>
+            <a:r>
+              <a:rPr sz="1200" b="0">
+                <a:solidFill>
+                  <a:srgbClr val="1F2D3D"/>
+                </a:solidFill>
+                <a:latin typeface="微软雅黑"/>
+                <a:ea typeface="微软雅黑"/>
+              </a:rPr>
+              <a:t>非 real 模式或检索为空或 LLM 失败时返回 None，报告照常出（只少一节），不阻塞主流程。</a:t>
+            </a:r>
+          </a:p>
+        </p:txBody>
+      </p:sp>
+      <p:sp>
+        <p:nvSpPr>
+          <p:cNvPr id="29" name="TextBox 28"/>
+          <p:cNvSpPr txBox="1"/>
+          <p:nvPr/>
+        </p:nvSpPr>
+        <p:spPr>
+          <a:xfrm>
+            <a:off x="10972800" y="6446520"/>
+            <a:ext cx="914400" cy="365760"/>
+          </a:xfrm>
+          <a:prstGeom prst="rect">
+            <a:avLst/>
+          </a:prstGeom>
+          <a:noFill/>
+        </p:spPr>
+        <p:txBody>
+          <a:bodyPr wrap="square" anchor="t">
+            <a:spAutoFit/>
+          </a:bodyPr>
+          <a:lstStyle/>
+          <a:p>
+            <a:pPr algn="r">
+              <a:lnSpc>
+                <a:spcPct val="100000"/>
+              </a:lnSpc>
+              <a:spcAft>
+                <a:spcPts val="300"/>
+              </a:spcAft>
+            </a:pPr>
+            <a:r>
+              <a:rPr sz="1000" b="0">
+                <a:solidFill>
+                  <a:srgbClr val="8C8C8C"/>
+                </a:solidFill>
+                <a:latin typeface="微软雅黑"/>
+                <a:ea typeface="微软雅黑"/>
+              </a:rPr>
+              <a:t>18/19</a:t>
+            </a:r>
+          </a:p>
+        </p:txBody>
+      </p:sp>
+      <p:sp>
+        <p:nvSpPr>
+          <p:cNvPr id="30" name="TextBox 29"/>
+          <p:cNvSpPr txBox="1"/>
+          <p:nvPr/>
+        </p:nvSpPr>
+        <p:spPr>
+          <a:xfrm>
+            <a:off x="457200" y="6446520"/>
+            <a:ext cx="5486400" cy="365760"/>
+          </a:xfrm>
+          <a:prstGeom prst="rect">
+            <a:avLst/>
+          </a:prstGeom>
+          <a:noFill/>
+        </p:spPr>
+        <p:txBody>
+          <a:bodyPr wrap="square" anchor="t">
+            <a:spAutoFit/>
+          </a:bodyPr>
+          <a:lstStyle/>
+          <a:p>
+            <a:pPr algn="l">
+              <a:lnSpc>
+                <a:spcPct val="100000"/>
+              </a:lnSpc>
+              <a:spcAft>
+                <a:spcPts val="300"/>
+              </a:spcAft>
+            </a:pPr>
+            <a:r>
+              <a:rPr sz="1000" b="0">
+                <a:solidFill>
+                  <a:srgbClr val="8C8C8C"/>
+                </a:solidFill>
+                <a:latin typeface="微软雅黑"/>
+                <a:ea typeface="微软雅黑"/>
+              </a:rPr>
+              <a:t>山海行 · 文旅多 Agent 行程规划系统</a:t>
+            </a:r>
+          </a:p>
+        </p:txBody>
+      </p:sp>
+    </p:spTree>
+  </p:cSld>
+  <p:clrMapOvr>
+    <a:masterClrMapping/>
+  </p:clrMapOvr>
+</p:sld>
+</file>
+
+<file path=ppt/slides/slide19.xml><?xml version="1.0" encoding="utf-8"?>
 <p:sld xmlns:a="http://schemas.openxmlformats.org/drawingml/2006/main" xmlns:p="http://schemas.openxmlformats.org/presentationml/2006/main" xmlns:r="http://schemas.openxmlformats.org/officeDocument/2006/relationships">
   <p:cSld>
     <p:bg>
@@ -13596,8 +15928,8 @@
         </p:nvSpPr>
         <p:spPr>
           <a:xfrm>
-            <a:off x="822960" y="2834640"/>
-            <a:ext cx="10515600" cy="566928"/>
+            <a:off x="822960" y="2651760"/>
+            <a:ext cx="10515600" cy="548640"/>
           </a:xfrm>
           <a:prstGeom prst="rect">
             <a:avLst/>
@@ -13640,8 +15972,8 @@
         </p:nvSpPr>
         <p:spPr>
           <a:xfrm>
-            <a:off x="822960" y="2834640"/>
-            <a:ext cx="73152" cy="566928"/>
+            <a:off x="822960" y="2651760"/>
+            <a:ext cx="73152" cy="548640"/>
           </a:xfrm>
           <a:prstGeom prst="rect">
             <a:avLst/>
@@ -13684,7 +16016,7 @@
         </p:nvSpPr>
         <p:spPr>
           <a:xfrm>
-            <a:off x="1097280" y="2898648"/>
+            <a:off x="1097280" y="2706624"/>
             <a:ext cx="1828800" cy="457200"/>
           </a:xfrm>
           <a:prstGeom prst="rect">
@@ -13707,7 +16039,7 @@
               </a:spcAft>
             </a:pPr>
             <a:r>
-              <a:rPr sz="1400" b="1">
+              <a:rPr sz="1300" b="1">
                 <a:solidFill>
                   <a:srgbClr val="0A3D91"/>
                 </a:solidFill>
@@ -13727,7 +16059,7 @@
         </p:nvSpPr>
         <p:spPr>
           <a:xfrm>
-            <a:off x="2926080" y="2898648"/>
+            <a:off x="2926080" y="2706624"/>
             <a:ext cx="8229600" cy="457200"/>
           </a:xfrm>
           <a:prstGeom prst="rect">
@@ -13750,14 +16082,14 @@
               </a:spcAft>
             </a:pPr>
             <a:r>
-              <a:rPr sz="1150" b="0">
+              <a:rPr sz="1100" b="0">
                 <a:solidFill>
                   <a:srgbClr val="1F2D3D"/>
                 </a:solidFill>
                 <a:latin typeface="微软雅黑"/>
                 <a:ea typeface="微软雅黑"/>
               </a:rPr>
-              <a:t>原始需求(多Agent-2) + 工单7(图记忆+强干预) + 人群个性化适配 全部落地，验收级完整。</a:t>
+              <a:t>原始需求(多Agent-2) + 工单7(图记忆+强干预) + 人群适配 + RAG 检索增强 全部落地，验收级完整。</a:t>
             </a:r>
           </a:p>
         </p:txBody>
@@ -13770,8 +16102,8 @@
         </p:nvSpPr>
         <p:spPr>
           <a:xfrm>
-            <a:off x="822960" y="3493008"/>
-            <a:ext cx="10515600" cy="566928"/>
+            <a:off x="822960" y="3273552"/>
+            <a:ext cx="10515600" cy="548640"/>
           </a:xfrm>
           <a:prstGeom prst="rect">
             <a:avLst/>
@@ -13814,8 +16146,8 @@
         </p:nvSpPr>
         <p:spPr>
           <a:xfrm>
-            <a:off x="822960" y="3493008"/>
-            <a:ext cx="73152" cy="566928"/>
+            <a:off x="822960" y="3273552"/>
+            <a:ext cx="73152" cy="548640"/>
           </a:xfrm>
           <a:prstGeom prst="rect">
             <a:avLst/>
@@ -13858,7 +16190,7 @@
         </p:nvSpPr>
         <p:spPr>
           <a:xfrm>
-            <a:off x="1097280" y="3557016"/>
+            <a:off x="1097280" y="3328416"/>
             <a:ext cx="1828800" cy="457200"/>
           </a:xfrm>
           <a:prstGeom prst="rect">
@@ -13881,7 +16213,7 @@
               </a:spcAft>
             </a:pPr>
             <a:r>
-              <a:rPr sz="1400" b="1">
+              <a:rPr sz="1300" b="1">
                 <a:solidFill>
                   <a:srgbClr val="0A3D91"/>
                 </a:solidFill>
@@ -13901,7 +16233,7 @@
         </p:nvSpPr>
         <p:spPr>
           <a:xfrm>
-            <a:off x="2926080" y="3557016"/>
+            <a:off x="2926080" y="3328416"/>
             <a:ext cx="8229600" cy="457200"/>
           </a:xfrm>
           <a:prstGeom prst="rect">
@@ -13924,14 +16256,14 @@
               </a:spcAft>
             </a:pPr>
             <a:r>
-              <a:rPr sz="1150" b="0">
+              <a:rPr sz="1100" b="0">
                 <a:solidFill>
                   <a:srgbClr val="1F2D3D"/>
                 </a:solidFill>
                 <a:latin typeface="微软雅黑"/>
                 <a:ea typeface="微软雅黑"/>
               </a:rPr>
-              <a:t>全链路真实数据（高德+百炼），无假数据假智能。</a:t>
+              <a:t>全链路真实数据（高德+百炼 LLM+Embedding），无假数据假智能。</a:t>
             </a:r>
           </a:p>
         </p:txBody>
@@ -13944,8 +16276,8 @@
         </p:nvSpPr>
         <p:spPr>
           <a:xfrm>
-            <a:off x="822960" y="4151376"/>
-            <a:ext cx="10515600" cy="566928"/>
+            <a:off x="822960" y="3895344"/>
+            <a:ext cx="10515600" cy="548640"/>
           </a:xfrm>
           <a:prstGeom prst="rect">
             <a:avLst/>
@@ -13988,8 +16320,8 @@
         </p:nvSpPr>
         <p:spPr>
           <a:xfrm>
-            <a:off x="822960" y="4151376"/>
-            <a:ext cx="73152" cy="566928"/>
+            <a:off x="822960" y="3895344"/>
+            <a:ext cx="73152" cy="548640"/>
           </a:xfrm>
           <a:prstGeom prst="rect">
             <a:avLst/>
@@ -14032,7 +16364,7 @@
         </p:nvSpPr>
         <p:spPr>
           <a:xfrm>
-            <a:off x="1097280" y="4215384"/>
+            <a:off x="1097280" y="3950208"/>
             <a:ext cx="1828800" cy="457200"/>
           </a:xfrm>
           <a:prstGeom prst="rect">
@@ -14055,7 +16387,7 @@
               </a:spcAft>
             </a:pPr>
             <a:r>
-              <a:rPr sz="1400" b="1">
+              <a:rPr sz="1300" b="1">
                 <a:solidFill>
                   <a:srgbClr val="0A3D91"/>
                 </a:solidFill>
@@ -14075,7 +16407,7 @@
         </p:nvSpPr>
         <p:spPr>
           <a:xfrm>
-            <a:off x="2926080" y="4215384"/>
+            <a:off x="2926080" y="3950208"/>
             <a:ext cx="8229600" cy="457200"/>
           </a:xfrm>
           <a:prstGeom prst="rect">
@@ -14098,14 +16430,14 @@
               </a:spcAft>
             </a:pPr>
             <a:r>
-              <a:rPr sz="1150" b="0">
+              <a:rPr sz="1100" b="0">
                 <a:solidFill>
                   <a:srgbClr val="1F2D3D"/>
                 </a:solidFill>
                 <a:latin typeface="微软雅黑"/>
                 <a:ea typeface="微软雅黑"/>
               </a:rPr>
-              <a:t>老人按年龄分档门票 + 儿童/老人景点过滤 + 兴趣推荐 + 餐饮三餐规范。</a:t>
+              <a:t>老人/儿童门票按年龄分档 + 交通购票分档 + 人群过滤 + 兴趣推荐 + 餐饮规范。</a:t>
             </a:r>
           </a:p>
         </p:txBody>
@@ -14118,8 +16450,8 @@
         </p:nvSpPr>
         <p:spPr>
           <a:xfrm>
-            <a:off x="822960" y="4809744"/>
-            <a:ext cx="10515600" cy="566928"/>
+            <a:off x="822960" y="4517136"/>
+            <a:ext cx="10515600" cy="548640"/>
           </a:xfrm>
           <a:prstGeom prst="rect">
             <a:avLst/>
@@ -14162,8 +16494,8 @@
         </p:nvSpPr>
         <p:spPr>
           <a:xfrm>
-            <a:off x="822960" y="4809744"/>
-            <a:ext cx="73152" cy="566928"/>
+            <a:off x="822960" y="4517136"/>
+            <a:ext cx="73152" cy="548640"/>
           </a:xfrm>
           <a:prstGeom prst="rect">
             <a:avLst/>
@@ -14206,7 +16538,7 @@
         </p:nvSpPr>
         <p:spPr>
           <a:xfrm>
-            <a:off x="1097280" y="4873752"/>
+            <a:off x="1097280" y="4572000"/>
             <a:ext cx="1828800" cy="457200"/>
           </a:xfrm>
           <a:prstGeom prst="rect">
@@ -14229,14 +16561,14 @@
               </a:spcAft>
             </a:pPr>
             <a:r>
-              <a:rPr sz="1400" b="1">
+              <a:rPr sz="1300" b="1">
                 <a:solidFill>
                   <a:srgbClr val="0A3D91"/>
                 </a:solidFill>
                 <a:latin typeface="微软雅黑"/>
                 <a:ea typeface="微软雅黑"/>
               </a:rPr>
-              <a:t>性能</a:t>
+              <a:t>RAG 能力</a:t>
             </a:r>
           </a:p>
         </p:txBody>
@@ -14249,7 +16581,7 @@
         </p:nvSpPr>
         <p:spPr>
           <a:xfrm>
-            <a:off x="2926080" y="4873752"/>
+            <a:off x="2926080" y="4572000"/>
             <a:ext cx="8229600" cy="457200"/>
           </a:xfrm>
           <a:prstGeom prst="rect">
@@ -14272,14 +16604,14 @@
               </a:spcAft>
             </a:pPr>
             <a:r>
-              <a:rPr sz="1150" b="0">
+              <a:rPr sz="1100" b="0">
                 <a:solidFill>
                   <a:srgbClr val="1F2D3D"/>
                 </a:solidFill>
                 <a:latin typeface="微软雅黑"/>
                 <a:ea typeface="微软雅黑"/>
               </a:rPr>
-              <a:t>四项指标全部达标且大幅超标（QPS 5.5x / 检索快500x）。</a:t>
+              <a:t>pgvector + 语义向量 + 文旅知识库 + AI 目的地解读，检索增强生成完整闭环。</a:t>
             </a:r>
           </a:p>
         </p:txBody>
@@ -14292,8 +16624,8 @@
         </p:nvSpPr>
         <p:spPr>
           <a:xfrm>
-            <a:off x="822960" y="5468112"/>
-            <a:ext cx="10515600" cy="566928"/>
+            <a:off x="822960" y="5138928"/>
+            <a:ext cx="10515600" cy="548640"/>
           </a:xfrm>
           <a:prstGeom prst="rect">
             <a:avLst/>
@@ -14336,8 +16668,8 @@
         </p:nvSpPr>
         <p:spPr>
           <a:xfrm>
-            <a:off x="822960" y="5468112"/>
-            <a:ext cx="73152" cy="566928"/>
+            <a:off x="822960" y="5138928"/>
+            <a:ext cx="73152" cy="548640"/>
           </a:xfrm>
           <a:prstGeom prst="rect">
             <a:avLst/>
@@ -14380,7 +16712,7 @@
         </p:nvSpPr>
         <p:spPr>
           <a:xfrm>
-            <a:off x="1097280" y="5532120"/>
+            <a:off x="1097280" y="5193792"/>
             <a:ext cx="1828800" cy="457200"/>
           </a:xfrm>
           <a:prstGeom prst="rect">
@@ -14403,13 +16735,187 @@
               </a:spcAft>
             </a:pPr>
             <a:r>
-              <a:rPr sz="1400" b="1">
+              <a:rPr sz="1300" b="1">
                 <a:solidFill>
                   <a:srgbClr val="0A3D91"/>
                 </a:solidFill>
                 <a:latin typeface="微软雅黑"/>
                 <a:ea typeface="微软雅黑"/>
               </a:rPr>
+              <a:t>性能</a:t>
+            </a:r>
+          </a:p>
+        </p:txBody>
+      </p:sp>
+      <p:sp>
+        <p:nvSpPr>
+          <p:cNvPr id="23" name="TextBox 22"/>
+          <p:cNvSpPr txBox="1"/>
+          <p:nvPr/>
+        </p:nvSpPr>
+        <p:spPr>
+          <a:xfrm>
+            <a:off x="2926080" y="5193792"/>
+            <a:ext cx="8229600" cy="457200"/>
+          </a:xfrm>
+          <a:prstGeom prst="rect">
+            <a:avLst/>
+          </a:prstGeom>
+          <a:noFill/>
+        </p:spPr>
+        <p:txBody>
+          <a:bodyPr wrap="square" anchor="t">
+            <a:spAutoFit/>
+          </a:bodyPr>
+          <a:lstStyle/>
+          <a:p>
+            <a:pPr algn="l">
+              <a:lnSpc>
+                <a:spcPct val="100000"/>
+              </a:lnSpc>
+              <a:spcAft>
+                <a:spcPts val="300"/>
+              </a:spcAft>
+            </a:pPr>
+            <a:r>
+              <a:rPr sz="1100" b="0">
+                <a:solidFill>
+                  <a:srgbClr val="1F2D3D"/>
+                </a:solidFill>
+                <a:latin typeface="微软雅黑"/>
+                <a:ea typeface="微软雅黑"/>
+              </a:rPr>
+              <a:t>四项指标全部达标且大幅超标（QPS 5.5x / 检索快500x）。</a:t>
+            </a:r>
+          </a:p>
+        </p:txBody>
+      </p:sp>
+      <p:sp>
+        <p:nvSpPr>
+          <p:cNvPr id="24" name="Rectangle 23"/>
+          <p:cNvSpPr/>
+          <p:nvPr/>
+        </p:nvSpPr>
+        <p:spPr>
+          <a:xfrm>
+            <a:off x="822960" y="5760720"/>
+            <a:ext cx="10515600" cy="548640"/>
+          </a:xfrm>
+          <a:prstGeom prst="rect">
+            <a:avLst/>
+          </a:prstGeom>
+          <a:solidFill>
+            <a:srgbClr val="FFFFFF"/>
+          </a:solidFill>
+          <a:ln>
+            <a:noFill/>
+          </a:ln>
+          <a:effectLst/>
+        </p:spPr>
+        <p:style>
+          <a:lnRef idx="1">
+            <a:schemeClr val="accent1"/>
+          </a:lnRef>
+          <a:fillRef idx="3">
+            <a:schemeClr val="accent1"/>
+          </a:fillRef>
+          <a:effectRef idx="2">
+            <a:schemeClr val="accent1"/>
+          </a:effectRef>
+          <a:fontRef idx="minor">
+            <a:schemeClr val="lt1"/>
+          </a:fontRef>
+        </p:style>
+        <p:txBody>
+          <a:bodyPr rtlCol="0" anchor="ctr"/>
+          <a:lstStyle/>
+          <a:p>
+            <a:pPr algn="ctr"/>
+          </a:p>
+        </p:txBody>
+      </p:sp>
+      <p:sp>
+        <p:nvSpPr>
+          <p:cNvPr id="25" name="Rectangle 24"/>
+          <p:cNvSpPr/>
+          <p:nvPr/>
+        </p:nvSpPr>
+        <p:spPr>
+          <a:xfrm>
+            <a:off x="822960" y="5760720"/>
+            <a:ext cx="73152" cy="548640"/>
+          </a:xfrm>
+          <a:prstGeom prst="rect">
+            <a:avLst/>
+          </a:prstGeom>
+          <a:solidFill>
+            <a:srgbClr val="1677FF"/>
+          </a:solidFill>
+          <a:ln>
+            <a:noFill/>
+          </a:ln>
+          <a:effectLst/>
+        </p:spPr>
+        <p:style>
+          <a:lnRef idx="1">
+            <a:schemeClr val="accent1"/>
+          </a:lnRef>
+          <a:fillRef idx="3">
+            <a:schemeClr val="accent1"/>
+          </a:fillRef>
+          <a:effectRef idx="2">
+            <a:schemeClr val="accent1"/>
+          </a:effectRef>
+          <a:fontRef idx="minor">
+            <a:schemeClr val="lt1"/>
+          </a:fontRef>
+        </p:style>
+        <p:txBody>
+          <a:bodyPr rtlCol="0" anchor="ctr"/>
+          <a:lstStyle/>
+          <a:p>
+            <a:pPr algn="ctr"/>
+          </a:p>
+        </p:txBody>
+      </p:sp>
+      <p:sp>
+        <p:nvSpPr>
+          <p:cNvPr id="26" name="TextBox 25"/>
+          <p:cNvSpPr txBox="1"/>
+          <p:nvPr/>
+        </p:nvSpPr>
+        <p:spPr>
+          <a:xfrm>
+            <a:off x="1097280" y="5815584"/>
+            <a:ext cx="1828800" cy="457200"/>
+          </a:xfrm>
+          <a:prstGeom prst="rect">
+            <a:avLst/>
+          </a:prstGeom>
+          <a:noFill/>
+        </p:spPr>
+        <p:txBody>
+          <a:bodyPr wrap="square" anchor="t">
+            <a:spAutoFit/>
+          </a:bodyPr>
+          <a:lstStyle/>
+          <a:p>
+            <a:pPr algn="l">
+              <a:lnSpc>
+                <a:spcPct val="100000"/>
+              </a:lnSpc>
+              <a:spcAft>
+                <a:spcPts val="300"/>
+              </a:spcAft>
+            </a:pPr>
+            <a:r>
+              <a:rPr sz="1300" b="1">
+                <a:solidFill>
+                  <a:srgbClr val="0A3D91"/>
+                </a:solidFill>
+                <a:latin typeface="微软雅黑"/>
+                <a:ea typeface="微软雅黑"/>
+              </a:rPr>
               <a:t>核心能力</a:t>
             </a:r>
           </a:p>
@@ -14417,13 +16923,13 @@
       </p:sp>
       <p:sp>
         <p:nvSpPr>
-          <p:cNvPr id="23" name="TextBox 22"/>
-          <p:cNvSpPr txBox="1"/>
-          <p:nvPr/>
-        </p:nvSpPr>
-        <p:spPr>
-          <a:xfrm>
-            <a:off x="2926080" y="5532120"/>
+          <p:cNvPr id="27" name="TextBox 26"/>
+          <p:cNvSpPr txBox="1"/>
+          <p:nvPr/>
+        </p:nvSpPr>
+        <p:spPr>
+          <a:xfrm>
+            <a:off x="2926080" y="5815584"/>
             <a:ext cx="8229600" cy="457200"/>
           </a:xfrm>
           <a:prstGeom prst="rect">
@@ -14446,21 +16952,21 @@
               </a:spcAft>
             </a:pPr>
             <a:r>
-              <a:rPr sz="1150" b="0">
+              <a:rPr sz="1100" b="0">
                 <a:solidFill>
                   <a:srgbClr val="1F2D3D"/>
                 </a:solidFill>
                 <a:latin typeface="微软雅黑"/>
                 <a:ea typeface="微软雅黑"/>
               </a:rPr>
-              <a:t>断点续传 + HITL + 图记忆 + 强干预 + 安全 + 人群适配，六维完整。</a:t>
-            </a:r>
-          </a:p>
-        </p:txBody>
-      </p:sp>
-      <p:sp>
-        <p:nvSpPr>
-          <p:cNvPr id="24" name="TextBox 23"/>
+              <a:t>断点续传 + HITL + 图记忆 + 强干预 + 安全 + 人群适配 + RAG，七维完整。</a:t>
+            </a:r>
+          </a:p>
+        </p:txBody>
+      </p:sp>
+      <p:sp>
+        <p:nvSpPr>
+          <p:cNvPr id="28" name="TextBox 27"/>
           <p:cNvSpPr txBox="1"/>
           <p:nvPr/>
         </p:nvSpPr>
@@ -14496,14 +17002,14 @@
                 <a:latin typeface="微软雅黑"/>
                 <a:ea typeface="微软雅黑"/>
               </a:rPr>
-              <a:t>18/18</a:t>
-            </a:r>
-          </a:p>
-        </p:txBody>
-      </p:sp>
-      <p:sp>
-        <p:nvSpPr>
-          <p:cNvPr id="25" name="TextBox 24"/>
+              <a:t>19/19</a:t>
+            </a:r>
+          </a:p>
+        </p:txBody>
+      </p:sp>
+      <p:sp>
+        <p:nvSpPr>
+          <p:cNvPr id="29" name="TextBox 28"/>
           <p:cNvSpPr txBox="1"/>
           <p:nvPr/>
         </p:nvSpPr>
@@ -15053,6 +17559,49 @@
         </p:nvSpPr>
         <p:spPr>
           <a:xfrm>
+            <a:off x="914400" y="6089904"/>
+            <a:ext cx="5120640" cy="457200"/>
+          </a:xfrm>
+          <a:prstGeom prst="rect">
+            <a:avLst/>
+          </a:prstGeom>
+          <a:noFill/>
+        </p:spPr>
+        <p:txBody>
+          <a:bodyPr wrap="square" anchor="t">
+            <a:spAutoFit/>
+          </a:bodyPr>
+          <a:lstStyle/>
+          <a:p>
+            <a:pPr algn="l">
+              <a:lnSpc>
+                <a:spcPct val="100000"/>
+              </a:lnSpc>
+              <a:spcAft>
+                <a:spcPts val="300"/>
+              </a:spcAft>
+            </a:pPr>
+            <a:r>
+              <a:rPr sz="1500" b="0">
+                <a:solidFill>
+                  <a:srgbClr val="1F2D3D"/>
+                </a:solidFill>
+                <a:latin typeface="微软雅黑"/>
+                <a:ea typeface="微软雅黑"/>
+              </a:rPr>
+              <a:t>09  数据源与数据模型</a:t>
+            </a:r>
+          </a:p>
+        </p:txBody>
+      </p:sp>
+      <p:sp>
+        <p:nvSpPr>
+          <p:cNvPr id="14" name="TextBox 13"/>
+          <p:cNvSpPr txBox="1"/>
+          <p:nvPr/>
+        </p:nvSpPr>
+        <p:spPr>
+          <a:xfrm>
             <a:off x="6492240" y="1554480"/>
             <a:ext cx="5120640" cy="457200"/>
           </a:xfrm>
@@ -15083,14 +17632,14 @@
                 <a:latin typeface="微软雅黑"/>
                 <a:ea typeface="微软雅黑"/>
               </a:rPr>
-              <a:t>09  数据源与数据模型</a:t>
-            </a:r>
-          </a:p>
-        </p:txBody>
-      </p:sp>
-      <p:sp>
-        <p:nvSpPr>
-          <p:cNvPr id="14" name="TextBox 13"/>
+              <a:t>10  API 与前端</a:t>
+            </a:r>
+          </a:p>
+        </p:txBody>
+      </p:sp>
+      <p:sp>
+        <p:nvSpPr>
+          <p:cNvPr id="15" name="TextBox 14"/>
           <p:cNvSpPr txBox="1"/>
           <p:nvPr/>
         </p:nvSpPr>
@@ -15126,14 +17675,14 @@
                 <a:latin typeface="微软雅黑"/>
                 <a:ea typeface="微软雅黑"/>
               </a:rPr>
-              <a:t>10  API 与前端</a:t>
-            </a:r>
-          </a:p>
-        </p:txBody>
-      </p:sp>
-      <p:sp>
-        <p:nvSpPr>
-          <p:cNvPr id="15" name="TextBox 14"/>
+              <a:t>11  部署与启动</a:t>
+            </a:r>
+          </a:p>
+        </p:txBody>
+      </p:sp>
+      <p:sp>
+        <p:nvSpPr>
+          <p:cNvPr id="16" name="TextBox 15"/>
           <p:cNvSpPr txBox="1"/>
           <p:nvPr/>
         </p:nvSpPr>
@@ -15169,14 +17718,14 @@
                 <a:latin typeface="微软雅黑"/>
                 <a:ea typeface="微软雅黑"/>
               </a:rPr>
-              <a:t>11  部署与启动</a:t>
-            </a:r>
-          </a:p>
-        </p:txBody>
-      </p:sp>
-      <p:sp>
-        <p:nvSpPr>
-          <p:cNvPr id="16" name="TextBox 15"/>
+              <a:t>12  完整流程演示</a:t>
+            </a:r>
+          </a:p>
+        </p:txBody>
+      </p:sp>
+      <p:sp>
+        <p:nvSpPr>
+          <p:cNvPr id="17" name="TextBox 16"/>
           <p:cNvSpPr txBox="1"/>
           <p:nvPr/>
         </p:nvSpPr>
@@ -15212,14 +17761,14 @@
                 <a:latin typeface="微软雅黑"/>
                 <a:ea typeface="微软雅黑"/>
               </a:rPr>
-              <a:t>12  完整流程演示</a:t>
-            </a:r>
-          </a:p>
-        </p:txBody>
-      </p:sp>
-      <p:sp>
-        <p:nvSpPr>
-          <p:cNvPr id="17" name="TextBox 16"/>
+              <a:t>13  测试与验收</a:t>
+            </a:r>
+          </a:p>
+        </p:txBody>
+      </p:sp>
+      <p:sp>
+        <p:nvSpPr>
+          <p:cNvPr id="18" name="TextBox 17"/>
           <p:cNvSpPr txBox="1"/>
           <p:nvPr/>
         </p:nvSpPr>
@@ -15255,14 +17804,14 @@
                 <a:latin typeface="微软雅黑"/>
                 <a:ea typeface="微软雅黑"/>
               </a:rPr>
-              <a:t>13  测试与验收</a:t>
-            </a:r>
-          </a:p>
-        </p:txBody>
-      </p:sp>
-      <p:sp>
-        <p:nvSpPr>
-          <p:cNvPr id="18" name="TextBox 17"/>
+              <a:t>14  设计决策</a:t>
+            </a:r>
+          </a:p>
+        </p:txBody>
+      </p:sp>
+      <p:sp>
+        <p:nvSpPr>
+          <p:cNvPr id="19" name="TextBox 18"/>
           <p:cNvSpPr txBox="1"/>
           <p:nvPr/>
         </p:nvSpPr>
@@ -15298,14 +17847,14 @@
                 <a:latin typeface="微软雅黑"/>
                 <a:ea typeface="微软雅黑"/>
               </a:rPr>
-              <a:t>14  设计决策</a:t>
-            </a:r>
-          </a:p>
-        </p:txBody>
-      </p:sp>
-      <p:sp>
-        <p:nvSpPr>
-          <p:cNvPr id="19" name="TextBox 18"/>
+              <a:t>15  个性化人群适配</a:t>
+            </a:r>
+          </a:p>
+        </p:txBody>
+      </p:sp>
+      <p:sp>
+        <p:nvSpPr>
+          <p:cNvPr id="20" name="TextBox 19"/>
           <p:cNvSpPr txBox="1"/>
           <p:nvPr/>
         </p:nvSpPr>
@@ -15341,14 +17890,14 @@
                 <a:latin typeface="微软雅黑"/>
                 <a:ea typeface="微软雅黑"/>
               </a:rPr>
-              <a:t>15  个性化人群适配</a:t>
-            </a:r>
-          </a:p>
-        </p:txBody>
-      </p:sp>
-      <p:sp>
-        <p:nvSpPr>
-          <p:cNvPr id="20" name="TextBox 19"/>
+              <a:t>16  RAG 检索增强生成</a:t>
+            </a:r>
+          </a:p>
+        </p:txBody>
+      </p:sp>
+      <p:sp>
+        <p:nvSpPr>
+          <p:cNvPr id="21" name="TextBox 20"/>
           <p:cNvSpPr txBox="1"/>
           <p:nvPr/>
         </p:nvSpPr>
@@ -15384,14 +17933,14 @@
                 <a:latin typeface="微软雅黑"/>
                 <a:ea typeface="微软雅黑"/>
               </a:rPr>
-              <a:t>16  总结</a:t>
-            </a:r>
-          </a:p>
-        </p:txBody>
-      </p:sp>
-      <p:sp>
-        <p:nvSpPr>
-          <p:cNvPr id="21" name="TextBox 20"/>
+              <a:t>17  总结</a:t>
+            </a:r>
+          </a:p>
+        </p:txBody>
+      </p:sp>
+      <p:sp>
+        <p:nvSpPr>
+          <p:cNvPr id="22" name="TextBox 21"/>
           <p:cNvSpPr txBox="1"/>
           <p:nvPr/>
         </p:nvSpPr>
@@ -15427,14 +17976,14 @@
                 <a:latin typeface="微软雅黑"/>
                 <a:ea typeface="微软雅黑"/>
               </a:rPr>
-              <a:t>2/18</a:t>
-            </a:r>
-          </a:p>
-        </p:txBody>
-      </p:sp>
-      <p:sp>
-        <p:nvSpPr>
-          <p:cNvPr id="22" name="TextBox 21"/>
+              <a:t>2/19</a:t>
+            </a:r>
+          </a:p>
+        </p:txBody>
+      </p:sp>
+      <p:sp>
+        <p:nvSpPr>
+          <p:cNvPr id="23" name="TextBox 22"/>
           <p:cNvSpPr txBox="1"/>
           <p:nvPr/>
         </p:nvSpPr>
@@ -16366,7 +18915,7 @@
                 <a:latin typeface="微软雅黑"/>
                 <a:ea typeface="微软雅黑"/>
               </a:rPr>
-              <a:t>3/18</a:t>
+              <a:t>3/19</a:t>
             </a:r>
           </a:p>
         </p:txBody>
@@ -16580,7 +19129,7 @@
         <p:spPr>
           <a:xfrm>
             <a:off x="457200" y="1417320"/>
-            <a:ext cx="11247120" cy="919886"/>
+            <a:ext cx="5577840" cy="1168145"/>
           </a:xfrm>
           <a:prstGeom prst="rect">
             <a:avLst/>
@@ -16624,7 +19173,7 @@
         <p:spPr>
           <a:xfrm>
             <a:off x="457200" y="1417320"/>
-            <a:ext cx="73152" cy="919886"/>
+            <a:ext cx="73152" cy="1168145"/>
           </a:xfrm>
           <a:prstGeom prst="rect">
             <a:avLst/>
@@ -16667,8 +19216,8 @@
         </p:nvSpPr>
         <p:spPr>
           <a:xfrm>
-            <a:off x="777240" y="1508760"/>
-            <a:ext cx="10789920" cy="365760"/>
+            <a:off x="640080" y="1508760"/>
+            <a:ext cx="5212080" cy="320040"/>
           </a:xfrm>
           <a:prstGeom prst="rect">
             <a:avLst/>
@@ -16690,7 +19239,7 @@
               </a:spcAft>
             </a:pPr>
             <a:r>
-              <a:rPr sz="1400" b="1">
+              <a:rPr sz="1300" b="1">
                 <a:solidFill>
                   <a:srgbClr val="0A3D91"/>
                 </a:solidFill>
@@ -16710,8 +19259,8 @@
         </p:nvSpPr>
         <p:spPr>
           <a:xfrm>
-            <a:off x="777240" y="1874520"/>
-            <a:ext cx="10789920" cy="381273710400"/>
+            <a:off x="640080" y="1828800"/>
+            <a:ext cx="5212080" cy="665225"/>
           </a:xfrm>
           <a:prstGeom prst="rect">
             <a:avLst/>
@@ -16726,14 +19275,14 @@
           <a:p>
             <a:pPr algn="l">
               <a:lnSpc>
-                <a:spcPct val="105000"/>
-              </a:lnSpc>
-              <a:spcAft>
-                <a:spcPts val="300"/>
-              </a:spcAft>
-            </a:pPr>
-            <a:r>
-              <a:rPr sz="1200" b="0">
+                <a:spcPct val="100000"/>
+              </a:lnSpc>
+              <a:spcAft>
+                <a:spcPts val="300"/>
+              </a:spcAft>
+            </a:pPr>
+            <a:r>
+              <a:rPr sz="1050" b="0">
                 <a:solidFill>
                   <a:srgbClr val="1F2D3D"/>
                 </a:solidFill>
@@ -16753,8 +19302,8 @@
         </p:nvSpPr>
         <p:spPr>
           <a:xfrm>
-            <a:off x="457200" y="2410358"/>
-            <a:ext cx="11247120" cy="919886"/>
+            <a:off x="457200" y="2658617"/>
+            <a:ext cx="5577840" cy="1168145"/>
           </a:xfrm>
           <a:prstGeom prst="rect">
             <a:avLst/>
@@ -16797,8 +19346,8 @@
         </p:nvSpPr>
         <p:spPr>
           <a:xfrm>
-            <a:off x="457200" y="2410358"/>
-            <a:ext cx="73152" cy="919886"/>
+            <a:off x="457200" y="2658617"/>
+            <a:ext cx="73152" cy="1168145"/>
           </a:xfrm>
           <a:prstGeom prst="rect">
             <a:avLst/>
@@ -16841,8 +19390,8 @@
         </p:nvSpPr>
         <p:spPr>
           <a:xfrm>
-            <a:off x="777240" y="2501798"/>
-            <a:ext cx="10789920" cy="365760"/>
+            <a:off x="640080" y="2750057"/>
+            <a:ext cx="5212080" cy="320040"/>
           </a:xfrm>
           <a:prstGeom prst="rect">
             <a:avLst/>
@@ -16864,7 +19413,7 @@
               </a:spcAft>
             </a:pPr>
             <a:r>
-              <a:rPr sz="1400" b="1">
+              <a:rPr sz="1300" b="1">
                 <a:solidFill>
                   <a:srgbClr val="0A3D91"/>
                 </a:solidFill>
@@ -16884,8 +19433,8 @@
         </p:nvSpPr>
         <p:spPr>
           <a:xfrm>
-            <a:off x="777240" y="2867558"/>
-            <a:ext cx="10789920" cy="381273710400"/>
+            <a:off x="640080" y="3070097"/>
+            <a:ext cx="5212080" cy="665225"/>
           </a:xfrm>
           <a:prstGeom prst="rect">
             <a:avLst/>
@@ -16900,14 +19449,14 @@
           <a:p>
             <a:pPr algn="l">
               <a:lnSpc>
-                <a:spcPct val="105000"/>
-              </a:lnSpc>
-              <a:spcAft>
-                <a:spcPts val="300"/>
-              </a:spcAft>
-            </a:pPr>
-            <a:r>
-              <a:rPr sz="1200" b="0">
+                <a:spcPct val="100000"/>
+              </a:lnSpc>
+              <a:spcAft>
+                <a:spcPts val="300"/>
+              </a:spcAft>
+            </a:pPr>
+            <a:r>
+              <a:rPr sz="1050" b="0">
                 <a:solidFill>
                   <a:srgbClr val="1F2D3D"/>
                 </a:solidFill>
@@ -16927,8 +19476,8 @@
         </p:nvSpPr>
         <p:spPr>
           <a:xfrm>
-            <a:off x="457200" y="3403396"/>
-            <a:ext cx="11247120" cy="919886"/>
+            <a:off x="457200" y="3899914"/>
+            <a:ext cx="5577840" cy="1168145"/>
           </a:xfrm>
           <a:prstGeom prst="rect">
             <a:avLst/>
@@ -16971,8 +19520,8 @@
         </p:nvSpPr>
         <p:spPr>
           <a:xfrm>
-            <a:off x="457200" y="3403396"/>
-            <a:ext cx="73152" cy="919886"/>
+            <a:off x="457200" y="3899914"/>
+            <a:ext cx="73152" cy="1168145"/>
           </a:xfrm>
           <a:prstGeom prst="rect">
             <a:avLst/>
@@ -17015,8 +19564,8 @@
         </p:nvSpPr>
         <p:spPr>
           <a:xfrm>
-            <a:off x="777240" y="3494836"/>
-            <a:ext cx="10789920" cy="365760"/>
+            <a:off x="640080" y="3991354"/>
+            <a:ext cx="5212080" cy="320040"/>
           </a:xfrm>
           <a:prstGeom prst="rect">
             <a:avLst/>
@@ -17038,7 +19587,7 @@
               </a:spcAft>
             </a:pPr>
             <a:r>
-              <a:rPr sz="1400" b="1">
+              <a:rPr sz="1300" b="1">
                 <a:solidFill>
                   <a:srgbClr val="0A3D91"/>
                 </a:solidFill>
@@ -17058,8 +19607,8 @@
         </p:nvSpPr>
         <p:spPr>
           <a:xfrm>
-            <a:off x="777240" y="3860596"/>
-            <a:ext cx="10789920" cy="381273710400"/>
+            <a:off x="640080" y="4311394"/>
+            <a:ext cx="5212080" cy="665225"/>
           </a:xfrm>
           <a:prstGeom prst="rect">
             <a:avLst/>
@@ -17074,14 +19623,14 @@
           <a:p>
             <a:pPr algn="l">
               <a:lnSpc>
-                <a:spcPct val="105000"/>
-              </a:lnSpc>
-              <a:spcAft>
-                <a:spcPts val="300"/>
-              </a:spcAft>
-            </a:pPr>
-            <a:r>
-              <a:rPr sz="1200" b="0">
+                <a:spcPct val="100000"/>
+              </a:lnSpc>
+              <a:spcAft>
+                <a:spcPts val="300"/>
+              </a:spcAft>
+            </a:pPr>
+            <a:r>
+              <a:rPr sz="1050" b="0">
                 <a:solidFill>
                   <a:srgbClr val="1F2D3D"/>
                 </a:solidFill>
@@ -17101,8 +19650,8 @@
         </p:nvSpPr>
         <p:spPr>
           <a:xfrm>
-            <a:off x="457200" y="4396434"/>
-            <a:ext cx="11247120" cy="919886"/>
+            <a:off x="457200" y="5141211"/>
+            <a:ext cx="5577840" cy="1168145"/>
           </a:xfrm>
           <a:prstGeom prst="rect">
             <a:avLst/>
@@ -17145,8 +19694,8 @@
         </p:nvSpPr>
         <p:spPr>
           <a:xfrm>
-            <a:off x="457200" y="4396434"/>
-            <a:ext cx="73152" cy="919886"/>
+            <a:off x="457200" y="5141211"/>
+            <a:ext cx="73152" cy="1168145"/>
           </a:xfrm>
           <a:prstGeom prst="rect">
             <a:avLst/>
@@ -17189,8 +19738,8 @@
         </p:nvSpPr>
         <p:spPr>
           <a:xfrm>
-            <a:off x="777240" y="4487874"/>
-            <a:ext cx="10789920" cy="365760"/>
+            <a:off x="640080" y="5232651"/>
+            <a:ext cx="5212080" cy="320040"/>
           </a:xfrm>
           <a:prstGeom prst="rect">
             <a:avLst/>
@@ -17212,7 +19761,7 @@
               </a:spcAft>
             </a:pPr>
             <a:r>
-              <a:rPr sz="1400" b="1">
+              <a:rPr sz="1300" b="1">
                 <a:solidFill>
                   <a:srgbClr val="0A3D91"/>
                 </a:solidFill>
@@ -17232,8 +19781,8 @@
         </p:nvSpPr>
         <p:spPr>
           <a:xfrm>
-            <a:off x="777240" y="4853634"/>
-            <a:ext cx="10789920" cy="381273710400"/>
+            <a:off x="640080" y="5552691"/>
+            <a:ext cx="5212080" cy="665225"/>
           </a:xfrm>
           <a:prstGeom prst="rect">
             <a:avLst/>
@@ -17248,14 +19797,14 @@
           <a:p>
             <a:pPr algn="l">
               <a:lnSpc>
-                <a:spcPct val="105000"/>
-              </a:lnSpc>
-              <a:spcAft>
-                <a:spcPts val="300"/>
-              </a:spcAft>
-            </a:pPr>
-            <a:r>
-              <a:rPr sz="1200" b="0">
+                <a:spcPct val="100000"/>
+              </a:lnSpc>
+              <a:spcAft>
+                <a:spcPts val="300"/>
+              </a:spcAft>
+            </a:pPr>
+            <a:r>
+              <a:rPr sz="1050" b="0">
                 <a:solidFill>
                   <a:srgbClr val="1F2D3D"/>
                 </a:solidFill>
@@ -17275,8 +19824,8 @@
         </p:nvSpPr>
         <p:spPr>
           <a:xfrm>
-            <a:off x="457200" y="5389472"/>
-            <a:ext cx="11247120" cy="919886"/>
+            <a:off x="6263640" y="1417320"/>
+            <a:ext cx="5577840" cy="1581911"/>
           </a:xfrm>
           <a:prstGeom prst="rect">
             <a:avLst/>
@@ -17319,8 +19868,8 @@
         </p:nvSpPr>
         <p:spPr>
           <a:xfrm>
-            <a:off x="457200" y="5389472"/>
-            <a:ext cx="73152" cy="919886"/>
+            <a:off x="6263640" y="1417320"/>
+            <a:ext cx="73152" cy="1581911"/>
           </a:xfrm>
           <a:prstGeom prst="rect">
             <a:avLst/>
@@ -17363,8 +19912,8 @@
         </p:nvSpPr>
         <p:spPr>
           <a:xfrm>
-            <a:off x="777240" y="5480912"/>
-            <a:ext cx="10789920" cy="365760"/>
+            <a:off x="6446520" y="1508760"/>
+            <a:ext cx="5212080" cy="320040"/>
           </a:xfrm>
           <a:prstGeom prst="rect">
             <a:avLst/>
@@ -17386,7 +19935,7 @@
               </a:spcAft>
             </a:pPr>
             <a:r>
-              <a:rPr sz="1400" b="1">
+              <a:rPr sz="1300" b="1">
                 <a:solidFill>
                   <a:srgbClr val="0A3D91"/>
                 </a:solidFill>
@@ -17406,8 +19955,8 @@
         </p:nvSpPr>
         <p:spPr>
           <a:xfrm>
-            <a:off x="777240" y="5846672"/>
-            <a:ext cx="10789920" cy="381273710400"/>
+            <a:off x="6446520" y="1828800"/>
+            <a:ext cx="5212080" cy="1078991"/>
           </a:xfrm>
           <a:prstGeom prst="rect">
             <a:avLst/>
@@ -17422,14 +19971,14 @@
           <a:p>
             <a:pPr algn="l">
               <a:lnSpc>
-                <a:spcPct val="105000"/>
-              </a:lnSpc>
-              <a:spcAft>
-                <a:spcPts val="300"/>
-              </a:spcAft>
-            </a:pPr>
-            <a:r>
-              <a:rPr sz="1200" b="0">
+                <a:spcPct val="100000"/>
+              </a:lnSpc>
+              <a:spcAft>
+                <a:spcPts val="300"/>
+              </a:spcAft>
+            </a:pPr>
+            <a:r>
+              <a:rPr sz="1050" b="0">
                 <a:solidFill>
                   <a:srgbClr val="1F2D3D"/>
                 </a:solidFill>
@@ -17443,7 +19992,355 @@
       </p:sp>
       <p:sp>
         <p:nvSpPr>
-          <p:cNvPr id="25" name="TextBox 24"/>
+          <p:cNvPr id="25" name="Rectangle 24"/>
+          <p:cNvSpPr/>
+          <p:nvPr/>
+        </p:nvSpPr>
+        <p:spPr>
+          <a:xfrm>
+            <a:off x="6263640" y="3072383"/>
+            <a:ext cx="5577840" cy="1581911"/>
+          </a:xfrm>
+          <a:prstGeom prst="rect">
+            <a:avLst/>
+          </a:prstGeom>
+          <a:solidFill>
+            <a:srgbClr val="F7FAFC"/>
+          </a:solidFill>
+          <a:ln>
+            <a:noFill/>
+          </a:ln>
+          <a:effectLst/>
+        </p:spPr>
+        <p:style>
+          <a:lnRef idx="1">
+            <a:schemeClr val="accent1"/>
+          </a:lnRef>
+          <a:fillRef idx="3">
+            <a:schemeClr val="accent1"/>
+          </a:fillRef>
+          <a:effectRef idx="2">
+            <a:schemeClr val="accent1"/>
+          </a:effectRef>
+          <a:fontRef idx="minor">
+            <a:schemeClr val="lt1"/>
+          </a:fontRef>
+        </p:style>
+        <p:txBody>
+          <a:bodyPr rtlCol="0" anchor="ctr"/>
+          <a:lstStyle/>
+          <a:p>
+            <a:pPr algn="ctr"/>
+          </a:p>
+        </p:txBody>
+      </p:sp>
+      <p:sp>
+        <p:nvSpPr>
+          <p:cNvPr id="26" name="Rectangle 25"/>
+          <p:cNvSpPr/>
+          <p:nvPr/>
+        </p:nvSpPr>
+        <p:spPr>
+          <a:xfrm>
+            <a:off x="6263640" y="3072383"/>
+            <a:ext cx="73152" cy="1581911"/>
+          </a:xfrm>
+          <a:prstGeom prst="rect">
+            <a:avLst/>
+          </a:prstGeom>
+          <a:solidFill>
+            <a:srgbClr val="1677FF"/>
+          </a:solidFill>
+          <a:ln>
+            <a:noFill/>
+          </a:ln>
+          <a:effectLst/>
+        </p:spPr>
+        <p:style>
+          <a:lnRef idx="1">
+            <a:schemeClr val="accent1"/>
+          </a:lnRef>
+          <a:fillRef idx="3">
+            <a:schemeClr val="accent1"/>
+          </a:fillRef>
+          <a:effectRef idx="2">
+            <a:schemeClr val="accent1"/>
+          </a:effectRef>
+          <a:fontRef idx="minor">
+            <a:schemeClr val="lt1"/>
+          </a:fontRef>
+        </p:style>
+        <p:txBody>
+          <a:bodyPr rtlCol="0" anchor="ctr"/>
+          <a:lstStyle/>
+          <a:p>
+            <a:pPr algn="ctr"/>
+          </a:p>
+        </p:txBody>
+      </p:sp>
+      <p:sp>
+        <p:nvSpPr>
+          <p:cNvPr id="27" name="TextBox 26"/>
+          <p:cNvSpPr txBox="1"/>
+          <p:nvPr/>
+        </p:nvSpPr>
+        <p:spPr>
+          <a:xfrm>
+            <a:off x="6446520" y="3163823"/>
+            <a:ext cx="5212080" cy="320040"/>
+          </a:xfrm>
+          <a:prstGeom prst="rect">
+            <a:avLst/>
+          </a:prstGeom>
+          <a:noFill/>
+        </p:spPr>
+        <p:txBody>
+          <a:bodyPr wrap="square" anchor="t">
+            <a:spAutoFit/>
+          </a:bodyPr>
+          <a:lstStyle/>
+          <a:p>
+            <a:pPr algn="l">
+              <a:lnSpc>
+                <a:spcPct val="100000"/>
+              </a:lnSpc>
+              <a:spcAft>
+                <a:spcPts val="300"/>
+              </a:spcAft>
+            </a:pPr>
+            <a:r>
+              <a:rPr sz="1300" b="1">
+                <a:solidFill>
+                  <a:srgbClr val="0A3D91"/>
+                </a:solidFill>
+                <a:latin typeface="微软雅黑"/>
+                <a:ea typeface="微软雅黑"/>
+              </a:rPr>
+              <a:t>痛点6：无人群适配</a:t>
+            </a:r>
+          </a:p>
+        </p:txBody>
+      </p:sp>
+      <p:sp>
+        <p:nvSpPr>
+          <p:cNvPr id="28" name="TextBox 27"/>
+          <p:cNvSpPr txBox="1"/>
+          <p:nvPr/>
+        </p:nvSpPr>
+        <p:spPr>
+          <a:xfrm>
+            <a:off x="6446520" y="3483863"/>
+            <a:ext cx="5212080" cy="1078991"/>
+          </a:xfrm>
+          <a:prstGeom prst="rect">
+            <a:avLst/>
+          </a:prstGeom>
+          <a:noFill/>
+        </p:spPr>
+        <p:txBody>
+          <a:bodyPr wrap="square" anchor="t">
+            <a:spAutoFit/>
+          </a:bodyPr>
+          <a:lstStyle/>
+          <a:p>
+            <a:pPr algn="l">
+              <a:lnSpc>
+                <a:spcPct val="100000"/>
+              </a:lnSpc>
+              <a:spcAft>
+                <a:spcPts val="300"/>
+              </a:spcAft>
+            </a:pPr>
+            <a:r>
+              <a:rPr sz="1050" b="0">
+                <a:solidFill>
+                  <a:srgbClr val="1F2D3D"/>
+                </a:solidFill>
+                <a:latin typeface="微软雅黑"/>
+                <a:ea typeface="微软雅黑"/>
+              </a:rPr>
+              <a:t>不管老人还是儿童，行程千篇一律：老人被推荐去滑雪、儿童去酒吧、早餐排火锅、门票不按年龄分档。</a:t>
+            </a:r>
+          </a:p>
+        </p:txBody>
+      </p:sp>
+      <p:sp>
+        <p:nvSpPr>
+          <p:cNvPr id="29" name="Rectangle 28"/>
+          <p:cNvSpPr/>
+          <p:nvPr/>
+        </p:nvSpPr>
+        <p:spPr>
+          <a:xfrm>
+            <a:off x="6263640" y="4727446"/>
+            <a:ext cx="5577840" cy="1581911"/>
+          </a:xfrm>
+          <a:prstGeom prst="rect">
+            <a:avLst/>
+          </a:prstGeom>
+          <a:solidFill>
+            <a:srgbClr val="F7FAFC"/>
+          </a:solidFill>
+          <a:ln>
+            <a:noFill/>
+          </a:ln>
+          <a:effectLst/>
+        </p:spPr>
+        <p:style>
+          <a:lnRef idx="1">
+            <a:schemeClr val="accent1"/>
+          </a:lnRef>
+          <a:fillRef idx="3">
+            <a:schemeClr val="accent1"/>
+          </a:fillRef>
+          <a:effectRef idx="2">
+            <a:schemeClr val="accent1"/>
+          </a:effectRef>
+          <a:fontRef idx="minor">
+            <a:schemeClr val="lt1"/>
+          </a:fontRef>
+        </p:style>
+        <p:txBody>
+          <a:bodyPr rtlCol="0" anchor="ctr"/>
+          <a:lstStyle/>
+          <a:p>
+            <a:pPr algn="ctr"/>
+          </a:p>
+        </p:txBody>
+      </p:sp>
+      <p:sp>
+        <p:nvSpPr>
+          <p:cNvPr id="30" name="Rectangle 29"/>
+          <p:cNvSpPr/>
+          <p:nvPr/>
+        </p:nvSpPr>
+        <p:spPr>
+          <a:xfrm>
+            <a:off x="6263640" y="4727446"/>
+            <a:ext cx="73152" cy="1581911"/>
+          </a:xfrm>
+          <a:prstGeom prst="rect">
+            <a:avLst/>
+          </a:prstGeom>
+          <a:solidFill>
+            <a:srgbClr val="1677FF"/>
+          </a:solidFill>
+          <a:ln>
+            <a:noFill/>
+          </a:ln>
+          <a:effectLst/>
+        </p:spPr>
+        <p:style>
+          <a:lnRef idx="1">
+            <a:schemeClr val="accent1"/>
+          </a:lnRef>
+          <a:fillRef idx="3">
+            <a:schemeClr val="accent1"/>
+          </a:fillRef>
+          <a:effectRef idx="2">
+            <a:schemeClr val="accent1"/>
+          </a:effectRef>
+          <a:fontRef idx="minor">
+            <a:schemeClr val="lt1"/>
+          </a:fontRef>
+        </p:style>
+        <p:txBody>
+          <a:bodyPr rtlCol="0" anchor="ctr"/>
+          <a:lstStyle/>
+          <a:p>
+            <a:pPr algn="ctr"/>
+          </a:p>
+        </p:txBody>
+      </p:sp>
+      <p:sp>
+        <p:nvSpPr>
+          <p:cNvPr id="31" name="TextBox 30"/>
+          <p:cNvSpPr txBox="1"/>
+          <p:nvPr/>
+        </p:nvSpPr>
+        <p:spPr>
+          <a:xfrm>
+            <a:off x="6446520" y="4818886"/>
+            <a:ext cx="5212080" cy="320040"/>
+          </a:xfrm>
+          <a:prstGeom prst="rect">
+            <a:avLst/>
+          </a:prstGeom>
+          <a:noFill/>
+        </p:spPr>
+        <p:txBody>
+          <a:bodyPr wrap="square" anchor="t">
+            <a:spAutoFit/>
+          </a:bodyPr>
+          <a:lstStyle/>
+          <a:p>
+            <a:pPr algn="l">
+              <a:lnSpc>
+                <a:spcPct val="100000"/>
+              </a:lnSpc>
+              <a:spcAft>
+                <a:spcPts val="300"/>
+              </a:spcAft>
+            </a:pPr>
+            <a:r>
+              <a:rPr sz="1300" b="1">
+                <a:solidFill>
+                  <a:srgbClr val="0A3D91"/>
+                </a:solidFill>
+                <a:latin typeface="微软雅黑"/>
+                <a:ea typeface="微软雅黑"/>
+              </a:rPr>
+              <a:t>痛点7：知识不沉淀</a:t>
+            </a:r>
+          </a:p>
+        </p:txBody>
+      </p:sp>
+      <p:sp>
+        <p:nvSpPr>
+          <p:cNvPr id="32" name="TextBox 31"/>
+          <p:cNvSpPr txBox="1"/>
+          <p:nvPr/>
+        </p:nvSpPr>
+        <p:spPr>
+          <a:xfrm>
+            <a:off x="6446520" y="5138926"/>
+            <a:ext cx="5212080" cy="1078991"/>
+          </a:xfrm>
+          <a:prstGeom prst="rect">
+            <a:avLst/>
+          </a:prstGeom>
+          <a:noFill/>
+        </p:spPr>
+        <p:txBody>
+          <a:bodyPr wrap="square" anchor="t">
+            <a:spAutoFit/>
+          </a:bodyPr>
+          <a:lstStyle/>
+          <a:p>
+            <a:pPr algn="l">
+              <a:lnSpc>
+                <a:spcPct val="100000"/>
+              </a:lnSpc>
+              <a:spcAft>
+                <a:spcPts val="300"/>
+              </a:spcAft>
+            </a:pPr>
+            <a:r>
+              <a:rPr sz="1050" b="0">
+                <a:solidFill>
+                  <a:srgbClr val="1F2D3D"/>
+                </a:solidFill>
+                <a:latin typeface="微软雅黑"/>
+                <a:ea typeface="微软雅黑"/>
+              </a:rPr>
+              <a:t>景区政策/地方美食靠写死代码或 LLM 记忆，改起来要改代码、会编造会过时 —— 缺 RAG 检索增强。</a:t>
+            </a:r>
+          </a:p>
+        </p:txBody>
+      </p:sp>
+      <p:sp>
+        <p:nvSpPr>
+          <p:cNvPr id="33" name="TextBox 32"/>
           <p:cNvSpPr txBox="1"/>
           <p:nvPr/>
         </p:nvSpPr>
@@ -17479,14 +20376,14 @@
                 <a:latin typeface="微软雅黑"/>
                 <a:ea typeface="微软雅黑"/>
               </a:rPr>
-              <a:t>4/18</a:t>
-            </a:r>
-          </a:p>
-        </p:txBody>
-      </p:sp>
-      <p:sp>
-        <p:nvSpPr>
-          <p:cNvPr id="26" name="TextBox 25"/>
+              <a:t>4/19</a:t>
+            </a:r>
+          </a:p>
+        </p:txBody>
+      </p:sp>
+      <p:sp>
+        <p:nvSpPr>
+          <p:cNvPr id="34" name="TextBox 33"/>
           <p:cNvSpPr txBox="1"/>
           <p:nvPr/>
         </p:nvSpPr>
@@ -17693,7 +20590,7 @@
         <p:spPr>
           <a:xfrm>
             <a:off x="457200" y="1417320"/>
-            <a:ext cx="11247120" cy="919886"/>
+            <a:ext cx="11247120" cy="754379"/>
           </a:xfrm>
           <a:prstGeom prst="rect">
             <a:avLst/>
@@ -17737,7 +20634,7 @@
         <p:spPr>
           <a:xfrm>
             <a:off x="457200" y="1417320"/>
-            <a:ext cx="73152" cy="919886"/>
+            <a:ext cx="73152" cy="754379"/>
           </a:xfrm>
           <a:prstGeom prst="rect">
             <a:avLst/>
@@ -17824,7 +20721,7 @@
         <p:spPr>
           <a:xfrm>
             <a:off x="777240" y="1874520"/>
-            <a:ext cx="10789920" cy="381273710400"/>
+            <a:ext cx="10789920" cy="229934109600"/>
           </a:xfrm>
           <a:prstGeom prst="rect">
             <a:avLst/>
@@ -17866,8 +20763,8 @@
         </p:nvSpPr>
         <p:spPr>
           <a:xfrm>
-            <a:off x="457200" y="2410358"/>
-            <a:ext cx="11247120" cy="919886"/>
+            <a:off x="457200" y="2244851"/>
+            <a:ext cx="11247120" cy="754379"/>
           </a:xfrm>
           <a:prstGeom prst="rect">
             <a:avLst/>
@@ -17910,8 +20807,8 @@
         </p:nvSpPr>
         <p:spPr>
           <a:xfrm>
-            <a:off x="457200" y="2410358"/>
-            <a:ext cx="73152" cy="919886"/>
+            <a:off x="457200" y="2244851"/>
+            <a:ext cx="73152" cy="754379"/>
           </a:xfrm>
           <a:prstGeom prst="rect">
             <a:avLst/>
@@ -17954,7 +20851,7 @@
         </p:nvSpPr>
         <p:spPr>
           <a:xfrm>
-            <a:off x="777240" y="2501798"/>
+            <a:off x="777240" y="2336291"/>
             <a:ext cx="10789920" cy="365760"/>
           </a:xfrm>
           <a:prstGeom prst="rect">
@@ -17997,8 +20894,8 @@
         </p:nvSpPr>
         <p:spPr>
           <a:xfrm>
-            <a:off x="777240" y="2867558"/>
-            <a:ext cx="10789920" cy="381273710400"/>
+            <a:off x="777240" y="2702051"/>
+            <a:ext cx="10789920" cy="229934109600"/>
           </a:xfrm>
           <a:prstGeom prst="rect">
             <a:avLst/>
@@ -18040,8 +20937,8 @@
         </p:nvSpPr>
         <p:spPr>
           <a:xfrm>
-            <a:off x="457200" y="3403396"/>
-            <a:ext cx="11247120" cy="919886"/>
+            <a:off x="457200" y="3072382"/>
+            <a:ext cx="11247120" cy="754379"/>
           </a:xfrm>
           <a:prstGeom prst="rect">
             <a:avLst/>
@@ -18084,8 +20981,8 @@
         </p:nvSpPr>
         <p:spPr>
           <a:xfrm>
-            <a:off x="457200" y="3403396"/>
-            <a:ext cx="73152" cy="919886"/>
+            <a:off x="457200" y="3072382"/>
+            <a:ext cx="73152" cy="754379"/>
           </a:xfrm>
           <a:prstGeom prst="rect">
             <a:avLst/>
@@ -18128,7 +21025,7 @@
         </p:nvSpPr>
         <p:spPr>
           <a:xfrm>
-            <a:off x="777240" y="3494836"/>
+            <a:off x="777240" y="3163822"/>
             <a:ext cx="10789920" cy="365760"/>
           </a:xfrm>
           <a:prstGeom prst="rect">
@@ -18171,8 +21068,8 @@
         </p:nvSpPr>
         <p:spPr>
           <a:xfrm>
-            <a:off x="777240" y="3860596"/>
-            <a:ext cx="10789920" cy="381273710400"/>
+            <a:off x="777240" y="3529582"/>
+            <a:ext cx="10789920" cy="229934109600"/>
           </a:xfrm>
           <a:prstGeom prst="rect">
             <a:avLst/>
@@ -18214,8 +21111,8 @@
         </p:nvSpPr>
         <p:spPr>
           <a:xfrm>
-            <a:off x="457200" y="4396434"/>
-            <a:ext cx="11247120" cy="919886"/>
+            <a:off x="457200" y="3899913"/>
+            <a:ext cx="11247120" cy="754379"/>
           </a:xfrm>
           <a:prstGeom prst="rect">
             <a:avLst/>
@@ -18258,8 +21155,8 @@
         </p:nvSpPr>
         <p:spPr>
           <a:xfrm>
-            <a:off x="457200" y="4396434"/>
-            <a:ext cx="73152" cy="919886"/>
+            <a:off x="457200" y="3899913"/>
+            <a:ext cx="73152" cy="754379"/>
           </a:xfrm>
           <a:prstGeom prst="rect">
             <a:avLst/>
@@ -18302,7 +21199,7 @@
         </p:nvSpPr>
         <p:spPr>
           <a:xfrm>
-            <a:off x="777240" y="4487874"/>
+            <a:off x="777240" y="3991353"/>
             <a:ext cx="10789920" cy="365760"/>
           </a:xfrm>
           <a:prstGeom prst="rect">
@@ -18345,8 +21242,8 @@
         </p:nvSpPr>
         <p:spPr>
           <a:xfrm>
-            <a:off x="777240" y="4853634"/>
-            <a:ext cx="10789920" cy="381273710400"/>
+            <a:off x="777240" y="4357113"/>
+            <a:ext cx="10789920" cy="229934109600"/>
           </a:xfrm>
           <a:prstGeom prst="rect">
             <a:avLst/>
@@ -18375,7 +21272,7 @@
                 <a:latin typeface="微软雅黑"/>
                 <a:ea typeface="微软雅黑"/>
               </a:rPr>
-              <a:t>老人按年龄分档门票（60-64半价/65+免首道大门票）+ 成人关系 + 儿童/老人景点过滤 + 兴趣标签推荐。</a:t>
+              <a:t>老人/儿童门票按年龄分档 + 交通购票按年龄分档 + 成人关系 + 儿童/老人景点过滤 + 兴趣标签推荐。</a:t>
             </a:r>
           </a:p>
         </p:txBody>
@@ -18388,8 +21285,8 @@
         </p:nvSpPr>
         <p:spPr>
           <a:xfrm>
-            <a:off x="457200" y="5389472"/>
-            <a:ext cx="11247120" cy="919886"/>
+            <a:off x="457200" y="4727444"/>
+            <a:ext cx="11247120" cy="754379"/>
           </a:xfrm>
           <a:prstGeom prst="rect">
             <a:avLst/>
@@ -18432,8 +21329,8 @@
         </p:nvSpPr>
         <p:spPr>
           <a:xfrm>
-            <a:off x="457200" y="5389472"/>
-            <a:ext cx="73152" cy="919886"/>
+            <a:off x="457200" y="4727444"/>
+            <a:ext cx="73152" cy="754379"/>
           </a:xfrm>
           <a:prstGeom prst="rect">
             <a:avLst/>
@@ -18476,7 +21373,7 @@
         </p:nvSpPr>
         <p:spPr>
           <a:xfrm>
-            <a:off x="777240" y="5480912"/>
+            <a:off x="777240" y="4818884"/>
             <a:ext cx="10789920" cy="365760"/>
           </a:xfrm>
           <a:prstGeom prst="rect">
@@ -18506,6 +21403,180 @@
                 <a:latin typeface="微软雅黑"/>
                 <a:ea typeface="微软雅黑"/>
               </a:rPr>
+              <a:t>RAG 检索增强</a:t>
+            </a:r>
+          </a:p>
+        </p:txBody>
+      </p:sp>
+      <p:sp>
+        <p:nvSpPr>
+          <p:cNvPr id="24" name="TextBox 23"/>
+          <p:cNvSpPr txBox="1"/>
+          <p:nvPr/>
+        </p:nvSpPr>
+        <p:spPr>
+          <a:xfrm>
+            <a:off x="777240" y="5184644"/>
+            <a:ext cx="10789920" cy="229934109600"/>
+          </a:xfrm>
+          <a:prstGeom prst="rect">
+            <a:avLst/>
+          </a:prstGeom>
+          <a:noFill/>
+        </p:spPr>
+        <p:txBody>
+          <a:bodyPr wrap="square" anchor="t">
+            <a:spAutoFit/>
+          </a:bodyPr>
+          <a:lstStyle/>
+          <a:p>
+            <a:pPr algn="l">
+              <a:lnSpc>
+                <a:spcPct val="105000"/>
+              </a:lnSpc>
+              <a:spcAft>
+                <a:spcPts val="300"/>
+              </a:spcAft>
+            </a:pPr>
+            <a:r>
+              <a:rPr sz="1200" b="0">
+                <a:solidFill>
+                  <a:srgbClr val="1F2D3D"/>
+                </a:solidFill>
+                <a:latin typeface="微软雅黑"/>
+                <a:ea typeface="微软雅黑"/>
+              </a:rPr>
+              <a:t>pgvector + 百炼 embedding + 文旅知识库（6类语料）+ AI 目的地解读。</a:t>
+            </a:r>
+          </a:p>
+        </p:txBody>
+      </p:sp>
+      <p:sp>
+        <p:nvSpPr>
+          <p:cNvPr id="25" name="Rectangle 24"/>
+          <p:cNvSpPr/>
+          <p:nvPr/>
+        </p:nvSpPr>
+        <p:spPr>
+          <a:xfrm>
+            <a:off x="457200" y="5554975"/>
+            <a:ext cx="11247120" cy="754379"/>
+          </a:xfrm>
+          <a:prstGeom prst="rect">
+            <a:avLst/>
+          </a:prstGeom>
+          <a:solidFill>
+            <a:srgbClr val="F7FAFC"/>
+          </a:solidFill>
+          <a:ln>
+            <a:noFill/>
+          </a:ln>
+          <a:effectLst/>
+        </p:spPr>
+        <p:style>
+          <a:lnRef idx="1">
+            <a:schemeClr val="accent1"/>
+          </a:lnRef>
+          <a:fillRef idx="3">
+            <a:schemeClr val="accent1"/>
+          </a:fillRef>
+          <a:effectRef idx="2">
+            <a:schemeClr val="accent1"/>
+          </a:effectRef>
+          <a:fontRef idx="minor">
+            <a:schemeClr val="lt1"/>
+          </a:fontRef>
+        </p:style>
+        <p:txBody>
+          <a:bodyPr rtlCol="0" anchor="ctr"/>
+          <a:lstStyle/>
+          <a:p>
+            <a:pPr algn="ctr"/>
+          </a:p>
+        </p:txBody>
+      </p:sp>
+      <p:sp>
+        <p:nvSpPr>
+          <p:cNvPr id="26" name="Rectangle 25"/>
+          <p:cNvSpPr/>
+          <p:nvPr/>
+        </p:nvSpPr>
+        <p:spPr>
+          <a:xfrm>
+            <a:off x="457200" y="5554975"/>
+            <a:ext cx="73152" cy="754379"/>
+          </a:xfrm>
+          <a:prstGeom prst="rect">
+            <a:avLst/>
+          </a:prstGeom>
+          <a:solidFill>
+            <a:srgbClr val="1677FF"/>
+          </a:solidFill>
+          <a:ln>
+            <a:noFill/>
+          </a:ln>
+          <a:effectLst/>
+        </p:spPr>
+        <p:style>
+          <a:lnRef idx="1">
+            <a:schemeClr val="accent1"/>
+          </a:lnRef>
+          <a:fillRef idx="3">
+            <a:schemeClr val="accent1"/>
+          </a:fillRef>
+          <a:effectRef idx="2">
+            <a:schemeClr val="accent1"/>
+          </a:effectRef>
+          <a:fontRef idx="minor">
+            <a:schemeClr val="lt1"/>
+          </a:fontRef>
+        </p:style>
+        <p:txBody>
+          <a:bodyPr rtlCol="0" anchor="ctr"/>
+          <a:lstStyle/>
+          <a:p>
+            <a:pPr algn="ctr"/>
+          </a:p>
+        </p:txBody>
+      </p:sp>
+      <p:sp>
+        <p:nvSpPr>
+          <p:cNvPr id="27" name="TextBox 26"/>
+          <p:cNvSpPr txBox="1"/>
+          <p:nvPr/>
+        </p:nvSpPr>
+        <p:spPr>
+          <a:xfrm>
+            <a:off x="777240" y="5646415"/>
+            <a:ext cx="10789920" cy="365760"/>
+          </a:xfrm>
+          <a:prstGeom prst="rect">
+            <a:avLst/>
+          </a:prstGeom>
+          <a:noFill/>
+        </p:spPr>
+        <p:txBody>
+          <a:bodyPr wrap="square" anchor="t">
+            <a:spAutoFit/>
+          </a:bodyPr>
+          <a:lstStyle/>
+          <a:p>
+            <a:pPr algn="l">
+              <a:lnSpc>
+                <a:spcPct val="100000"/>
+              </a:lnSpc>
+              <a:spcAft>
+                <a:spcPts val="300"/>
+              </a:spcAft>
+            </a:pPr>
+            <a:r>
+              <a:rPr sz="1400" b="1">
+                <a:solidFill>
+                  <a:srgbClr val="0A3D91"/>
+                </a:solidFill>
+                <a:latin typeface="微软雅黑"/>
+                <a:ea typeface="微软雅黑"/>
+              </a:rPr>
               <a:t>性能红线</a:t>
             </a:r>
           </a:p>
@@ -18513,14 +21584,14 @@
       </p:sp>
       <p:sp>
         <p:nvSpPr>
-          <p:cNvPr id="24" name="TextBox 23"/>
-          <p:cNvSpPr txBox="1"/>
-          <p:nvPr/>
-        </p:nvSpPr>
-        <p:spPr>
-          <a:xfrm>
-            <a:off x="777240" y="5846672"/>
-            <a:ext cx="10789920" cy="381273710400"/>
+          <p:cNvPr id="28" name="TextBox 27"/>
+          <p:cNvSpPr txBox="1"/>
+          <p:nvPr/>
+        </p:nvSpPr>
+        <p:spPr>
+          <a:xfrm>
+            <a:off x="777240" y="6012175"/>
+            <a:ext cx="10789920" cy="229934109600"/>
           </a:xfrm>
           <a:prstGeom prst="rect">
             <a:avLst/>
@@ -18556,7 +21627,7 @@
       </p:sp>
       <p:sp>
         <p:nvSpPr>
-          <p:cNvPr id="25" name="TextBox 24"/>
+          <p:cNvPr id="29" name="TextBox 28"/>
           <p:cNvSpPr txBox="1"/>
           <p:nvPr/>
         </p:nvSpPr>
@@ -18592,14 +21663,14 @@
                 <a:latin typeface="微软雅黑"/>
                 <a:ea typeface="微软雅黑"/>
               </a:rPr>
-              <a:t>5/18</a:t>
-            </a:r>
-          </a:p>
-        </p:txBody>
-      </p:sp>
-      <p:sp>
-        <p:nvSpPr>
-          <p:cNvPr id="26" name="TextBox 25"/>
+              <a:t>5/19</a:t>
+            </a:r>
+          </a:p>
+        </p:txBody>
+      </p:sp>
+      <p:sp>
+        <p:nvSpPr>
+          <p:cNvPr id="30" name="TextBox 29"/>
           <p:cNvSpPr txBox="1"/>
           <p:nvPr/>
         </p:nvSpPr>
@@ -20053,7 +23124,7 @@
                 <a:latin typeface="微软雅黑"/>
                 <a:ea typeface="微软雅黑"/>
               </a:rPr>
-              <a:t>6/18</a:t>
+              <a:t>6/19</a:t>
             </a:r>
           </a:p>
         </p:txBody>
@@ -21688,7 +24759,7 @@
                 <a:latin typeface="微软雅黑"/>
                 <a:ea typeface="微软雅黑"/>
               </a:rPr>
-              <a:t>7/18</a:t>
+              <a:t>7/19</a:t>
             </a:r>
           </a:p>
         </p:txBody>
@@ -22758,7 +25829,7 @@
                 <a:latin typeface="微软雅黑"/>
                 <a:ea typeface="微软雅黑"/>
               </a:rPr>
-              <a:t>PostgreSQL(10表权威) + Redis(Streams/锁/缓存) + 文件(断点恢复源)。</a:t>
+              <a:t>PostgreSQL(pgvector,11表权威) + Redis(Streams/锁/缓存) + 文件(断点恢复源) + 知识库向量。</a:t>
             </a:r>
           </a:p>
         </p:txBody>
@@ -22932,7 +26003,7 @@
                 <a:latin typeface="微软雅黑"/>
                 <a:ea typeface="微软雅黑"/>
               </a:rPr>
-              <a:t>高德地图(地理编码/POI/路径/天气/营业时间/图片) + 阿里云百炼 LLM。</a:t>
+              <a:t>高德地图(地理编码/POI/路径/天气/图片) + 百炼 LLM(qwen3.7-flash) + Embedding(text-embedding-v3)。</a:t>
             </a:r>
           </a:p>
         </p:txBody>
@@ -22975,7 +26046,7 @@
                 <a:latin typeface="微软雅黑"/>
                 <a:ea typeface="微软雅黑"/>
               </a:rPr>
-              <a:t>8/18</a:t>
+              <a:t>8/19</a:t>
             </a:r>
           </a:p>
         </p:txBody>
@@ -24610,7 +27681,7 @@
                 <a:latin typeface="微软雅黑"/>
                 <a:ea typeface="微软雅黑"/>
               </a:rPr>
-              <a:t>9/18</a:t>
+              <a:t>9/19</a:t>
             </a:r>
           </a:p>
         </p:txBody>

--- a/docs/项目讲解.pptx
+++ b/docs/项目讲解.pptx
@@ -4028,7 +4028,7 @@
                 <a:latin typeface="微软雅黑"/>
                 <a:ea typeface="微软雅黑"/>
               </a:rPr>
-              <a:t>超预算20%/高危夜行/严重舆情 → 挂起 → 主管抢占(Lua CAS) → 通过续跑/驳回终止；审批超时24h自动驳回。</a:t>
+              <a:t>超预算45%/高危夜行/严重舆情 → 挂起 → 主管抢占(Lua CAS) → 通过续跑/驳回终止；审批超时24h自动驳回。</a:t>
             </a:r>
           </a:p>
         </p:txBody>
@@ -7081,7 +7081,7 @@
                 <a:latin typeface="微软雅黑"/>
                 <a:ea typeface="微软雅黑"/>
               </a:rPr>
-              <a:t>前端 7 页面</a:t>
+              <a:t>前端 8 页面</a:t>
             </a:r>
           </a:p>
         </p:txBody>
@@ -7124,7 +7124,7 @@
                 <a:latin typeface="微软雅黑"/>
                 <a:ea typeface="微软雅黑"/>
               </a:rPr>
-              <a:t>登录注册 / 工作台 / 行程列表 / 行程详情 / 审核台 / 记忆图谱 / 问答式创建。</a:t>
+              <a:t>登录注册 / 工作台 / 行程列表 / 行程详情 / 审核台 / 记忆图谱 / 语音创建 / 对话式创建。</a:t>
             </a:r>
           </a:p>
         </p:txBody>
@@ -7298,7 +7298,7 @@
                 <a:latin typeface="微软雅黑"/>
                 <a:ea typeface="微软雅黑"/>
               </a:rPr>
-              <a:t>出发地交通方式+票价 + 景点图片(可放大) + 三餐餐饮 + 门票按年龄分档 + 优待备注 + 编辑行程。</a:t>
+              <a:t>出发地交通方式+票价 + 调研结果(真实POI) + 景点图片(可放大) + 三餐餐饮 + 门票按年龄分档 + 优待备注 + 编辑行程。</a:t>
             </a:r>
           </a:p>
         </p:txBody>
@@ -7603,7 +7603,7 @@
                 <a:latin typeface="微软雅黑"/>
                 <a:ea typeface="微软雅黑"/>
               </a:rPr>
-              <a:t>问答式创建</a:t>
+              <a:t>多种创建方式</a:t>
             </a:r>
           </a:p>
         </p:txBody>
@@ -7646,7 +7646,7 @@
                 <a:latin typeface="微软雅黑"/>
                 <a:ea typeface="微软雅黑"/>
               </a:rPr>
-              <a:t>10 步引导式逐步问答（出发地→目的地→天数→预算→成人→儿童→老人→学生→偏好→确认）。</a:t>
+              <a:t>语音创建(浏览器原生语音识别) + 对话式创建(AI 主动引导，像 DeepSeek 一样聊天)。</a:t>
             </a:r>
           </a:p>
         </p:txBody>
@@ -19811,7 +19811,7 @@
                 <a:latin typeface="微软雅黑"/>
                 <a:ea typeface="微软雅黑"/>
               </a:rPr>
-              <a:t>人工排行程可能推荐差评景点、超预算 20%、高危夜行路段 —— 缺 HITL 人机门控。</a:t>
+              <a:t>人工排行程可能推荐差评景点、超预算 45%、高危夜行路段 —— 缺 HITL 人机门控。</a:t>
             </a:r>
           </a:p>
         </p:txBody>

--- a/docs/项目讲解.pptx
+++ b/docs/项目讲解.pptx
@@ -26,6 +26,7 @@
     <p:sldId id="274" r:id="rId25"/>
     <p:sldId id="275" r:id="rId26"/>
     <p:sldId id="276" r:id="rId27"/>
+    <p:sldId id="277" r:id="rId28"/>
   </p:sldIdLst>
   <p:sldSz cx="12191695" cy="6858000" type="screen4x3"/>
   <p:notesSz cx="6858000" cy="9144000"/>
@@ -3351,7 +3352,7 @@
                 <a:latin typeface="微软雅黑"/>
                 <a:ea typeface="微软雅黑"/>
               </a:rPr>
-              <a:t>版本 v3.2 · 2026-09-05 · 1 人独立完成</a:t>
+              <a:t>版本 v4.0 · 2026-09-05 · 1 人独立完成</a:t>
             </a:r>
           </a:p>
         </p:txBody>
@@ -4247,7 +4248,7 @@
                 <a:latin typeface="微软雅黑"/>
                 <a:ea typeface="微软雅黑"/>
               </a:rPr>
-              <a:t>10/21</a:t>
+              <a:t>10/22</a:t>
             </a:r>
           </a:p>
         </p:txBody>
@@ -5186,7 +5187,7 @@
                 <a:latin typeface="微软雅黑"/>
                 <a:ea typeface="微软雅黑"/>
               </a:rPr>
-              <a:t>11/21</a:t>
+              <a:t>11/22</a:t>
             </a:r>
           </a:p>
         </p:txBody>
@@ -6647,7 +6648,7 @@
                 <a:latin typeface="微软雅黑"/>
                 <a:ea typeface="微软雅黑"/>
               </a:rPr>
-              <a:t>12/21</a:t>
+              <a:t>12/22</a:t>
             </a:r>
           </a:p>
         </p:txBody>
@@ -8239,7 +8240,7 @@
                 <a:latin typeface="微软雅黑"/>
                 <a:ea typeface="微软雅黑"/>
               </a:rPr>
-              <a:t>document_chunks（6类语料，38 chunk，Vector 768）。</a:t>
+              <a:t>document_chunks（10篇语料，61 chunk，Vector 768，含景点/美食/政策/季节/交通/住宿/注意事项）。</a:t>
             </a:r>
           </a:p>
         </p:txBody>
@@ -8282,7 +8283,7 @@
                 <a:latin typeface="微软雅黑"/>
                 <a:ea typeface="微软雅黑"/>
               </a:rPr>
-              <a:t>13/21</a:t>
+              <a:t>13/22</a:t>
             </a:r>
           </a:p>
         </p:txBody>
@@ -8961,7 +8962,7 @@
                 <a:latin typeface="微软雅黑"/>
                 <a:ea typeface="微软雅黑"/>
               </a:rPr>
-              <a:t>前端 8 页面</a:t>
+              <a:t>前端 10 页面</a:t>
             </a:r>
           </a:p>
         </p:txBody>
@@ -9004,7 +9005,7 @@
                 <a:latin typeface="微软雅黑"/>
                 <a:ea typeface="微软雅黑"/>
               </a:rPr>
-              <a:t>登录注册 / 工作台 / 行程列表 / 行程详情 / 审核台 / 记忆图谱 / 语音创建 / 对话式创建。</a:t>
+              <a:t>登录注册 / 工作台 / 行程列表 / 行程详情 / 审核台 / 记忆图谱 / 系统说明 / 语音创建 / 对话式创建。</a:t>
             </a:r>
           </a:p>
         </p:txBody>
@@ -9178,7 +9179,7 @@
                 <a:latin typeface="微软雅黑"/>
                 <a:ea typeface="微软雅黑"/>
               </a:rPr>
-              <a:t>出发地交通方式+票价 + 调研结果(真实POI) + 景点图片(可放大) + 三餐餐饮 + 门票按年龄分档 + 优待备注 + 编辑行程。</a:t>
+              <a:t>出发地交通+票价 + 行程总览地图(高德，景点标记+按天分组+路线连线+切换) + 知识库检索(RAG) + 调研结果(真实POI) + 三餐餐饮 + 门票按年龄分档 + 优待备注 + 编辑行程。</a:t>
             </a:r>
           </a:p>
         </p:txBody>
@@ -9483,7 +9484,7 @@
                 <a:latin typeface="微软雅黑"/>
                 <a:ea typeface="微软雅黑"/>
               </a:rPr>
-              <a:t>多种创建方式</a:t>
+              <a:t>三种创建方式</a:t>
             </a:r>
           </a:p>
         </p:txBody>
@@ -9526,7 +9527,7 @@
                 <a:latin typeface="微软雅黑"/>
                 <a:ea typeface="微软雅黑"/>
               </a:rPr>
-              <a:t>语音创建(浏览器原生语音识别) + 对话式创建(AI 主动引导，像 DeepSeek 一样聊天)。</a:t>
+              <a:t>新建表单 + 语音创建(浏览器语音识别) + 对话式创建(AI 主动引导，像 DeepSeek 一样聊天)。</a:t>
             </a:r>
           </a:p>
         </p:txBody>
@@ -9569,7 +9570,7 @@
                 <a:latin typeface="微软雅黑"/>
                 <a:ea typeface="微软雅黑"/>
               </a:rPr>
-              <a:t>14/21</a:t>
+              <a:t>14/22</a:t>
             </a:r>
           </a:p>
         </p:txBody>
@@ -10856,7 +10857,7 @@
                 <a:latin typeface="微软雅黑"/>
                 <a:ea typeface="微软雅黑"/>
               </a:rPr>
-              <a:t>15/21</a:t>
+              <a:t>15/22</a:t>
             </a:r>
           </a:p>
         </p:txBody>
@@ -12317,7 +12318,7 @@
                 <a:latin typeface="微软雅黑"/>
                 <a:ea typeface="微软雅黑"/>
               </a:rPr>
-              <a:t>16/21</a:t>
+              <a:t>16/22</a:t>
             </a:r>
           </a:p>
         </p:txBody>
@@ -13518,7 +13519,7 @@
                 <a:latin typeface="微软雅黑"/>
                 <a:ea typeface="微软雅黑"/>
               </a:rPr>
-              <a:t>RAG 检索验证</a:t>
+              <a:t>RAG 检索评估</a:t>
             </a:r>
           </a:p>
         </p:txBody>
@@ -13561,7 +13562,7 @@
                 <a:latin typeface="微软雅黑"/>
                 <a:ea typeface="微软雅黑"/>
               </a:rPr>
-              <a:t>老人门票政策 0.83 / 早餐吃什么 0.69 / 儿童高铁买票 0.83 / 海鲜过敏 0.67。</a:t>
+              <a:t>eval_retrieval.py 跑 20 条测试集：Hit@5=95%、MRR=0.792（系统化评估，非口头宣称）。</a:t>
             </a:r>
           </a:p>
         </p:txBody>
@@ -13604,7 +13605,7 @@
                 <a:latin typeface="微软雅黑"/>
                 <a:ea typeface="微软雅黑"/>
               </a:rPr>
-              <a:t>17/21</a:t>
+              <a:t>17/22</a:t>
             </a:r>
           </a:p>
         </p:txBody>
@@ -15065,7 +15066,7 @@
                 <a:latin typeface="微软雅黑"/>
                 <a:ea typeface="微软雅黑"/>
               </a:rPr>
-              <a:t>18/21</a:t>
+              <a:t>18/22</a:t>
             </a:r>
           </a:p>
         </p:txBody>
@@ -16352,7 +16353,7 @@
                 <a:latin typeface="微软雅黑"/>
                 <a:ea typeface="微软雅黑"/>
               </a:rPr>
-              <a:t>19/21</a:t>
+              <a:t>19/22</a:t>
             </a:r>
           </a:p>
         </p:txBody>
@@ -17326,7 +17327,7 @@
                 <a:latin typeface="微软雅黑"/>
                 <a:ea typeface="微软雅黑"/>
               </a:rPr>
-              <a:t>2/21</a:t>
+              <a:t>2/22</a:t>
             </a:r>
           </a:p>
         </p:txBody>
@@ -17482,7 +17483,7 @@
                 <a:latin typeface="微软雅黑"/>
                 <a:ea typeface="微软雅黑"/>
               </a:rPr>
-              <a:t>十六、RAG 检索增强生成</a:t>
+              <a:t>十六、RAG 检索增强生成（1/2）</a:t>
             </a:r>
           </a:p>
         </p:txBody>
@@ -17540,7 +17541,7 @@
         <p:spPr>
           <a:xfrm>
             <a:off x="457200" y="1417320"/>
-            <a:ext cx="11247120" cy="754379"/>
+            <a:ext cx="11247120" cy="1168145"/>
           </a:xfrm>
           <a:prstGeom prst="rect">
             <a:avLst/>
@@ -17584,7 +17585,7 @@
         <p:spPr>
           <a:xfrm>
             <a:off x="457200" y="1417320"/>
-            <a:ext cx="73152" cy="754379"/>
+            <a:ext cx="73152" cy="1168145"/>
           </a:xfrm>
           <a:prstGeom prst="rect">
             <a:avLst/>
@@ -17671,7 +17672,7 @@
         <p:spPr>
           <a:xfrm>
             <a:off x="777240" y="1874520"/>
-            <a:ext cx="10789920" cy="229934109600"/>
+            <a:ext cx="10789920" cy="608281740000"/>
           </a:xfrm>
           <a:prstGeom prst="rect">
             <a:avLst/>
@@ -17700,7 +17701,7 @@
                 <a:latin typeface="微软雅黑"/>
                 <a:ea typeface="微软雅黑"/>
               </a:rPr>
-              <a:t>pgvector(PostgreSQL扩展) + 百炼 text-embedding-v3(768维) + OpenAI 兼容 /embeddings，batch=10 规避单次上限。</a:t>
+              <a:t>pgvector(PostgreSQL扩展) + 百炼 text-embedding-v3(768维) + OpenAI 兼容 /embeddings，batch=10 规避单次上限。图记忆 embedding 从 JSONB 换 Vector(768)，MD5哈希假向量换真语义向量。</a:t>
             </a:r>
           </a:p>
         </p:txBody>
@@ -17713,8 +17714,8 @@
         </p:nvSpPr>
         <p:spPr>
           <a:xfrm>
-            <a:off x="457200" y="2244851"/>
-            <a:ext cx="11247120" cy="754379"/>
+            <a:off x="457200" y="2658617"/>
+            <a:ext cx="11247120" cy="1168145"/>
           </a:xfrm>
           <a:prstGeom prst="rect">
             <a:avLst/>
@@ -17757,8 +17758,8 @@
         </p:nvSpPr>
         <p:spPr>
           <a:xfrm>
-            <a:off x="457200" y="2244851"/>
-            <a:ext cx="73152" cy="754379"/>
+            <a:off x="457200" y="2658617"/>
+            <a:ext cx="73152" cy="1168145"/>
           </a:xfrm>
           <a:prstGeom prst="rect">
             <a:avLst/>
@@ -17801,7 +17802,7 @@
         </p:nvSpPr>
         <p:spPr>
           <a:xfrm>
-            <a:off x="777240" y="2336291"/>
+            <a:off x="777240" y="2750057"/>
             <a:ext cx="10789920" cy="365760"/>
           </a:xfrm>
           <a:prstGeom prst="rect">
@@ -17831,7 +17832,7 @@
                 <a:latin typeface="微软雅黑"/>
                 <a:ea typeface="微软雅黑"/>
               </a:rPr>
-              <a:t>场景A 个人记忆</a:t>
+              <a:t>混合检索(R)</a:t>
             </a:r>
           </a:p>
         </p:txBody>
@@ -17844,8 +17845,8 @@
         </p:nvSpPr>
         <p:spPr>
           <a:xfrm>
-            <a:off x="777240" y="2702051"/>
-            <a:ext cx="10789920" cy="229934109600"/>
+            <a:off x="777240" y="3115817"/>
+            <a:ext cx="10789920" cy="608281740000"/>
           </a:xfrm>
           <a:prstGeom prst="rect">
             <a:avLst/>
@@ -17874,7 +17875,7 @@
                 <a:latin typeface="微软雅黑"/>
                 <a:ea typeface="微软雅黑"/>
               </a:rPr>
-              <a:t>图记忆 embedding 从 JSONB 换 Vector(768)，MD5哈希假向量换真语义向量，「海鲜过敏」能召回「对虾过敏」。</a:t>
+              <a:t>双路召回：① 向量(pgvector 余弦距离，擅长语义相似) ② BM25(词频-逆文档频率，擅长精确名词如「迪士尼」)。两路用 RRF(Reciprocal Rank Fusion) 融合排序，取长补短。</a:t>
             </a:r>
           </a:p>
         </p:txBody>
@@ -17887,8 +17888,8 @@
         </p:nvSpPr>
         <p:spPr>
           <a:xfrm>
-            <a:off x="457200" y="3072382"/>
-            <a:ext cx="11247120" cy="754379"/>
+            <a:off x="457200" y="3899914"/>
+            <a:ext cx="11247120" cy="1168145"/>
           </a:xfrm>
           <a:prstGeom prst="rect">
             <a:avLst/>
@@ -17931,8 +17932,8 @@
         </p:nvSpPr>
         <p:spPr>
           <a:xfrm>
-            <a:off x="457200" y="3072382"/>
-            <a:ext cx="73152" cy="754379"/>
+            <a:off x="457200" y="3899914"/>
+            <a:ext cx="73152" cy="1168145"/>
           </a:xfrm>
           <a:prstGeom prst="rect">
             <a:avLst/>
@@ -17975,7 +17976,7 @@
         </p:nvSpPr>
         <p:spPr>
           <a:xfrm>
-            <a:off x="777240" y="3163822"/>
+            <a:off x="777240" y="3991354"/>
             <a:ext cx="10789920" cy="365760"/>
           </a:xfrm>
           <a:prstGeom prst="rect">
@@ -18005,7 +18006,7 @@
                 <a:latin typeface="微软雅黑"/>
                 <a:ea typeface="微软雅黑"/>
               </a:rPr>
-              <a:t>场景B 文旅知识库</a:t>
+              <a:t>rerank 重排</a:t>
             </a:r>
           </a:p>
         </p:txBody>
@@ -18018,8 +18019,8 @@
         </p:nvSpPr>
         <p:spPr>
           <a:xfrm>
-            <a:off x="777240" y="3529582"/>
-            <a:ext cx="10789920" cy="229934109600"/>
+            <a:off x="777240" y="4357114"/>
+            <a:ext cx="10789920" cy="608281740000"/>
           </a:xfrm>
           <a:prstGeom prst="rect">
             <a:avLst/>
@@ -18048,7 +18049,7 @@
                 <a:latin typeface="微软雅黑"/>
                 <a:ea typeface="微软雅黑"/>
               </a:rPr>
-              <a:t>document_chunks 表存 6 类语料(景点攻略/地方美食/景区政策/四季玩法/交通贴士/住宿贴士)，38 个分块。</a:t>
+              <a:t>召回 top-k 后用百炼 qwen3.7-text-rerank 精排；网关未开放时降级关键词打分（真实现已写好，自动切换）。</a:t>
             </a:r>
           </a:p>
         </p:txBody>
@@ -18061,8 +18062,8 @@
         </p:nvSpPr>
         <p:spPr>
           <a:xfrm>
-            <a:off x="457200" y="3899913"/>
-            <a:ext cx="11247120" cy="754379"/>
+            <a:off x="457200" y="5141211"/>
+            <a:ext cx="11247120" cy="1168145"/>
           </a:xfrm>
           <a:prstGeom prst="rect">
             <a:avLst/>
@@ -18105,8 +18106,8 @@
         </p:nvSpPr>
         <p:spPr>
           <a:xfrm>
-            <a:off x="457200" y="3899913"/>
-            <a:ext cx="73152" cy="754379"/>
+            <a:off x="457200" y="5141211"/>
+            <a:ext cx="73152" cy="1168145"/>
           </a:xfrm>
           <a:prstGeom prst="rect">
             <a:avLst/>
@@ -18149,7 +18150,7 @@
         </p:nvSpPr>
         <p:spPr>
           <a:xfrm>
-            <a:off x="777240" y="3991353"/>
+            <a:off x="777240" y="5232651"/>
             <a:ext cx="10789920" cy="365760"/>
           </a:xfrm>
           <a:prstGeom prst="rect">
@@ -18179,7 +18180,7 @@
                 <a:latin typeface="微软雅黑"/>
                 <a:ea typeface="微软雅黑"/>
               </a:rPr>
-              <a:t>检索(R)</a:t>
+              <a:t>知识库规模</a:t>
             </a:r>
           </a:p>
         </p:txBody>
@@ -18192,8 +18193,8 @@
         </p:nvSpPr>
         <p:spPr>
           <a:xfrm>
-            <a:off x="777240" y="4357113"/>
-            <a:ext cx="10789920" cy="229934109600"/>
+            <a:off x="777240" y="5598411"/>
+            <a:ext cx="10789920" cy="608281740000"/>
           </a:xfrm>
           <a:prstGeom prst="rect">
             <a:avLst/>
@@ -18222,362 +18223,14 @@
                 <a:latin typeface="微软雅黑"/>
                 <a:ea typeface="微软雅黑"/>
               </a:rPr>
-              <a:t>search_kb() 用 pgvector 余弦距离召回 top-k 原文 chunk；web_research + itinerary 两节点注入。</a:t>
-            </a:r>
-          </a:p>
-        </p:txBody>
-      </p:sp>
-      <p:sp>
-        <p:nvSpPr>
-          <p:cNvPr id="21" name="Rectangle 20"/>
-          <p:cNvSpPr/>
-          <p:nvPr/>
-        </p:nvSpPr>
-        <p:spPr>
-          <a:xfrm>
-            <a:off x="457200" y="4727444"/>
-            <a:ext cx="11247120" cy="754379"/>
-          </a:xfrm>
-          <a:prstGeom prst="rect">
-            <a:avLst/>
-          </a:prstGeom>
-          <a:solidFill>
-            <a:srgbClr val="F7FAFC"/>
-          </a:solidFill>
-          <a:ln>
-            <a:noFill/>
-          </a:ln>
-          <a:effectLst/>
-        </p:spPr>
-        <p:style>
-          <a:lnRef idx="1">
-            <a:schemeClr val="accent1"/>
-          </a:lnRef>
-          <a:fillRef idx="3">
-            <a:schemeClr val="accent1"/>
-          </a:fillRef>
-          <a:effectRef idx="2">
-            <a:schemeClr val="accent1"/>
-          </a:effectRef>
-          <a:fontRef idx="minor">
-            <a:schemeClr val="lt1"/>
-          </a:fontRef>
-        </p:style>
-        <p:txBody>
-          <a:bodyPr rtlCol="0" anchor="ctr"/>
-          <a:lstStyle/>
-          <a:p>
-            <a:pPr algn="ctr"/>
-          </a:p>
-        </p:txBody>
-      </p:sp>
-      <p:sp>
-        <p:nvSpPr>
-          <p:cNvPr id="22" name="Rectangle 21"/>
-          <p:cNvSpPr/>
-          <p:nvPr/>
-        </p:nvSpPr>
-        <p:spPr>
-          <a:xfrm>
-            <a:off x="457200" y="4727444"/>
-            <a:ext cx="73152" cy="754379"/>
-          </a:xfrm>
-          <a:prstGeom prst="rect">
-            <a:avLst/>
-          </a:prstGeom>
-          <a:solidFill>
-            <a:srgbClr val="1677FF"/>
-          </a:solidFill>
-          <a:ln>
-            <a:noFill/>
-          </a:ln>
-          <a:effectLst/>
-        </p:spPr>
-        <p:style>
-          <a:lnRef idx="1">
-            <a:schemeClr val="accent1"/>
-          </a:lnRef>
-          <a:fillRef idx="3">
-            <a:schemeClr val="accent1"/>
-          </a:fillRef>
-          <a:effectRef idx="2">
-            <a:schemeClr val="accent1"/>
-          </a:effectRef>
-          <a:fontRef idx="minor">
-            <a:schemeClr val="lt1"/>
-          </a:fontRef>
-        </p:style>
-        <p:txBody>
-          <a:bodyPr rtlCol="0" anchor="ctr"/>
-          <a:lstStyle/>
-          <a:p>
-            <a:pPr algn="ctr"/>
-          </a:p>
-        </p:txBody>
-      </p:sp>
-      <p:sp>
-        <p:nvSpPr>
-          <p:cNvPr id="23" name="TextBox 22"/>
-          <p:cNvSpPr txBox="1"/>
-          <p:nvPr/>
-        </p:nvSpPr>
-        <p:spPr>
-          <a:xfrm>
-            <a:off x="777240" y="4818884"/>
-            <a:ext cx="10789920" cy="365760"/>
-          </a:xfrm>
-          <a:prstGeom prst="rect">
-            <a:avLst/>
-          </a:prstGeom>
-          <a:noFill/>
-        </p:spPr>
-        <p:txBody>
-          <a:bodyPr wrap="square" anchor="t">
-            <a:spAutoFit/>
-          </a:bodyPr>
-          <a:lstStyle/>
-          <a:p>
-            <a:pPr algn="l">
-              <a:lnSpc>
-                <a:spcPct val="100000"/>
-              </a:lnSpc>
-              <a:spcAft>
-                <a:spcPts val="300"/>
-              </a:spcAft>
-            </a:pPr>
-            <a:r>
-              <a:rPr sz="1400" b="1">
-                <a:solidFill>
-                  <a:srgbClr val="0A3D91"/>
-                </a:solidFill>
-                <a:latin typeface="微软雅黑"/>
-                <a:ea typeface="微软雅黑"/>
-              </a:rPr>
-              <a:t>生成(G)</a:t>
-            </a:r>
-          </a:p>
-        </p:txBody>
-      </p:sp>
-      <p:sp>
-        <p:nvSpPr>
-          <p:cNvPr id="24" name="TextBox 23"/>
-          <p:cNvSpPr txBox="1"/>
-          <p:nvPr/>
-        </p:nvSpPr>
-        <p:spPr>
-          <a:xfrm>
-            <a:off x="777240" y="5184644"/>
-            <a:ext cx="10789920" cy="229934109600"/>
-          </a:xfrm>
-          <a:prstGeom prst="rect">
-            <a:avLst/>
-          </a:prstGeom>
-          <a:noFill/>
-        </p:spPr>
-        <p:txBody>
-          <a:bodyPr wrap="square" anchor="t">
-            <a:spAutoFit/>
-          </a:bodyPr>
-          <a:lstStyle/>
-          <a:p>
-            <a:pPr algn="l">
-              <a:lnSpc>
-                <a:spcPct val="105000"/>
-              </a:lnSpc>
-              <a:spcAft>
-                <a:spcPts val="300"/>
-              </a:spcAft>
-            </a:pPr>
-            <a:r>
-              <a:rPr sz="1200" b="0">
-                <a:solidFill>
-                  <a:srgbClr val="1F2D3D"/>
-                </a:solidFill>
-                <a:latin typeface="微软雅黑"/>
-                <a:ea typeface="微软雅黑"/>
-              </a:rPr>
-              <a:t>report 节点 _generate_rag_insights() 让 LLM 基于原文生成「目的地深度解读」，有据可查、带人群感知。</a:t>
-            </a:r>
-          </a:p>
-        </p:txBody>
-      </p:sp>
-      <p:sp>
-        <p:nvSpPr>
-          <p:cNvPr id="25" name="Rectangle 24"/>
-          <p:cNvSpPr/>
-          <p:nvPr/>
-        </p:nvSpPr>
-        <p:spPr>
-          <a:xfrm>
-            <a:off x="457200" y="5554975"/>
-            <a:ext cx="11247120" cy="754379"/>
-          </a:xfrm>
-          <a:prstGeom prst="rect">
-            <a:avLst/>
-          </a:prstGeom>
-          <a:solidFill>
-            <a:srgbClr val="F7FAFC"/>
-          </a:solidFill>
-          <a:ln>
-            <a:noFill/>
-          </a:ln>
-          <a:effectLst/>
-        </p:spPr>
-        <p:style>
-          <a:lnRef idx="1">
-            <a:schemeClr val="accent1"/>
-          </a:lnRef>
-          <a:fillRef idx="3">
-            <a:schemeClr val="accent1"/>
-          </a:fillRef>
-          <a:effectRef idx="2">
-            <a:schemeClr val="accent1"/>
-          </a:effectRef>
-          <a:fontRef idx="minor">
-            <a:schemeClr val="lt1"/>
-          </a:fontRef>
-        </p:style>
-        <p:txBody>
-          <a:bodyPr rtlCol="0" anchor="ctr"/>
-          <a:lstStyle/>
-          <a:p>
-            <a:pPr algn="ctr"/>
-          </a:p>
-        </p:txBody>
-      </p:sp>
-      <p:sp>
-        <p:nvSpPr>
-          <p:cNvPr id="26" name="Rectangle 25"/>
-          <p:cNvSpPr/>
-          <p:nvPr/>
-        </p:nvSpPr>
-        <p:spPr>
-          <a:xfrm>
-            <a:off x="457200" y="5554975"/>
-            <a:ext cx="73152" cy="754379"/>
-          </a:xfrm>
-          <a:prstGeom prst="rect">
-            <a:avLst/>
-          </a:prstGeom>
-          <a:solidFill>
-            <a:srgbClr val="1677FF"/>
-          </a:solidFill>
-          <a:ln>
-            <a:noFill/>
-          </a:ln>
-          <a:effectLst/>
-        </p:spPr>
-        <p:style>
-          <a:lnRef idx="1">
-            <a:schemeClr val="accent1"/>
-          </a:lnRef>
-          <a:fillRef idx="3">
-            <a:schemeClr val="accent1"/>
-          </a:fillRef>
-          <a:effectRef idx="2">
-            <a:schemeClr val="accent1"/>
-          </a:effectRef>
-          <a:fontRef idx="minor">
-            <a:schemeClr val="lt1"/>
-          </a:fontRef>
-        </p:style>
-        <p:txBody>
-          <a:bodyPr rtlCol="0" anchor="ctr"/>
-          <a:lstStyle/>
-          <a:p>
-            <a:pPr algn="ctr"/>
-          </a:p>
-        </p:txBody>
-      </p:sp>
-      <p:sp>
-        <p:nvSpPr>
-          <p:cNvPr id="27" name="TextBox 26"/>
-          <p:cNvSpPr txBox="1"/>
-          <p:nvPr/>
-        </p:nvSpPr>
-        <p:spPr>
-          <a:xfrm>
-            <a:off x="777240" y="5646415"/>
-            <a:ext cx="10789920" cy="365760"/>
-          </a:xfrm>
-          <a:prstGeom prst="rect">
-            <a:avLst/>
-          </a:prstGeom>
-          <a:noFill/>
-        </p:spPr>
-        <p:txBody>
-          <a:bodyPr wrap="square" anchor="t">
-            <a:spAutoFit/>
-          </a:bodyPr>
-          <a:lstStyle/>
-          <a:p>
-            <a:pPr algn="l">
-              <a:lnSpc>
-                <a:spcPct val="100000"/>
-              </a:lnSpc>
-              <a:spcAft>
-                <a:spcPts val="300"/>
-              </a:spcAft>
-            </a:pPr>
-            <a:r>
-              <a:rPr sz="1400" b="1">
-                <a:solidFill>
-                  <a:srgbClr val="0A3D91"/>
-                </a:solidFill>
-                <a:latin typeface="微软雅黑"/>
-                <a:ea typeface="微软雅黑"/>
-              </a:rPr>
-              <a:t>降级安全</a:t>
-            </a:r>
-          </a:p>
-        </p:txBody>
-      </p:sp>
-      <p:sp>
-        <p:nvSpPr>
-          <p:cNvPr id="28" name="TextBox 27"/>
-          <p:cNvSpPr txBox="1"/>
-          <p:nvPr/>
-        </p:nvSpPr>
-        <p:spPr>
-          <a:xfrm>
-            <a:off x="777240" y="6012175"/>
-            <a:ext cx="10789920" cy="229934109600"/>
-          </a:xfrm>
-          <a:prstGeom prst="rect">
-            <a:avLst/>
-          </a:prstGeom>
-          <a:noFill/>
-        </p:spPr>
-        <p:txBody>
-          <a:bodyPr wrap="square" anchor="t">
-            <a:spAutoFit/>
-          </a:bodyPr>
-          <a:lstStyle/>
-          <a:p>
-            <a:pPr algn="l">
-              <a:lnSpc>
-                <a:spcPct val="105000"/>
-              </a:lnSpc>
-              <a:spcAft>
-                <a:spcPts val="300"/>
-              </a:spcAft>
-            </a:pPr>
-            <a:r>
-              <a:rPr sz="1200" b="0">
-                <a:solidFill>
-                  <a:srgbClr val="1F2D3D"/>
-                </a:solidFill>
-                <a:latin typeface="微软雅黑"/>
-                <a:ea typeface="微软雅黑"/>
-              </a:rPr>
-              <a:t>非 real 模式或检索为空或 LLM 失败时返回 None，报告照常出（只少一节），不阻塞主流程。</a:t>
-            </a:r>
-          </a:p>
-        </p:txBody>
-      </p:sp>
-      <p:sp>
-        <p:nvSpPr>
-          <p:cNvPr id="29" name="TextBox 28"/>
+              <a:t>document_chunks 表存 10 篇语料、61 个分块、7 类(景点/美食/政策/季节/交通/住宿/注意事项)，全部 768 维真向量。</a:t>
+            </a:r>
+          </a:p>
+        </p:txBody>
+      </p:sp>
+      <p:sp>
+        <p:nvSpPr>
+          <p:cNvPr id="21" name="TextBox 20"/>
           <p:cNvSpPr txBox="1"/>
           <p:nvPr/>
         </p:nvSpPr>
@@ -18613,14 +18266,14 @@
                 <a:latin typeface="微软雅黑"/>
                 <a:ea typeface="微软雅黑"/>
               </a:rPr>
-              <a:t>20/21</a:t>
-            </a:r>
-          </a:p>
-        </p:txBody>
-      </p:sp>
-      <p:sp>
-        <p:nvSpPr>
-          <p:cNvPr id="30" name="TextBox 29"/>
+              <a:t>20/22</a:t>
+            </a:r>
+          </a:p>
+        </p:txBody>
+      </p:sp>
+      <p:sp>
+        <p:nvSpPr>
+          <p:cNvPr id="22" name="TextBox 21"/>
           <p:cNvSpPr txBox="1"/>
           <p:nvPr/>
         </p:nvSpPr>
@@ -18670,6 +18323,1119 @@
 </file>
 
 <file path=ppt/slides/slide21.xml><?xml version="1.0" encoding="utf-8"?>
+<p:sld xmlns:a="http://schemas.openxmlformats.org/drawingml/2006/main" xmlns:p="http://schemas.openxmlformats.org/presentationml/2006/main" xmlns:r="http://schemas.openxmlformats.org/officeDocument/2006/relationships">
+  <p:cSld>
+    <p:bg>
+      <p:bgPr>
+        <a:solidFill>
+          <a:srgbClr val="FFFFFF"/>
+        </a:solidFill>
+        <a:effectLst/>
+      </p:bgPr>
+    </p:bg>
+    <p:spTree>
+      <p:nvGrpSpPr>
+        <p:cNvPr id="1" name=""/>
+        <p:cNvGrpSpPr/>
+        <p:nvPr/>
+      </p:nvGrpSpPr>
+      <p:grpSpPr/>
+      <p:sp>
+        <p:nvSpPr>
+          <p:cNvPr id="2" name="Rectangle 1"/>
+          <p:cNvSpPr/>
+          <p:nvPr/>
+        </p:nvSpPr>
+        <p:spPr>
+          <a:xfrm>
+            <a:off x="0" y="0"/>
+            <a:ext cx="12191695" cy="164592"/>
+          </a:xfrm>
+          <a:prstGeom prst="rect">
+            <a:avLst/>
+          </a:prstGeom>
+          <a:solidFill>
+            <a:srgbClr val="1677FF"/>
+          </a:solidFill>
+          <a:ln>
+            <a:noFill/>
+          </a:ln>
+          <a:effectLst/>
+        </p:spPr>
+        <p:style>
+          <a:lnRef idx="1">
+            <a:schemeClr val="accent1"/>
+          </a:lnRef>
+          <a:fillRef idx="3">
+            <a:schemeClr val="accent1"/>
+          </a:fillRef>
+          <a:effectRef idx="2">
+            <a:schemeClr val="accent1"/>
+          </a:effectRef>
+          <a:fontRef idx="minor">
+            <a:schemeClr val="lt1"/>
+          </a:fontRef>
+        </p:style>
+        <p:txBody>
+          <a:bodyPr rtlCol="0" anchor="ctr"/>
+          <a:lstStyle/>
+          <a:p>
+            <a:pPr algn="ctr"/>
+          </a:p>
+        </p:txBody>
+      </p:sp>
+      <p:sp>
+        <p:nvSpPr>
+          <p:cNvPr id="3" name="TextBox 2"/>
+          <p:cNvSpPr txBox="1"/>
+          <p:nvPr/>
+        </p:nvSpPr>
+        <p:spPr>
+          <a:xfrm>
+            <a:off x="457200" y="292608"/>
+            <a:ext cx="10058400" cy="548640"/>
+          </a:xfrm>
+          <a:prstGeom prst="rect">
+            <a:avLst/>
+          </a:prstGeom>
+          <a:noFill/>
+        </p:spPr>
+        <p:txBody>
+          <a:bodyPr wrap="square" anchor="t">
+            <a:spAutoFit/>
+          </a:bodyPr>
+          <a:lstStyle/>
+          <a:p>
+            <a:pPr algn="l">
+              <a:lnSpc>
+                <a:spcPct val="100000"/>
+              </a:lnSpc>
+              <a:spcAft>
+                <a:spcPts val="300"/>
+              </a:spcAft>
+            </a:pPr>
+            <a:r>
+              <a:rPr sz="2500" b="1">
+                <a:solidFill>
+                  <a:srgbClr val="1F2D3D"/>
+                </a:solidFill>
+                <a:latin typeface="微软雅黑"/>
+                <a:ea typeface="微软雅黑"/>
+              </a:rPr>
+              <a:t>十六、RAG 检索增强生成（2/2）</a:t>
+            </a:r>
+          </a:p>
+        </p:txBody>
+      </p:sp>
+      <p:sp>
+        <p:nvSpPr>
+          <p:cNvPr id="4" name="Rectangle 3"/>
+          <p:cNvSpPr/>
+          <p:nvPr/>
+        </p:nvSpPr>
+        <p:spPr>
+          <a:xfrm>
+            <a:off x="457200" y="1188720"/>
+            <a:ext cx="2011680" cy="41148"/>
+          </a:xfrm>
+          <a:prstGeom prst="rect">
+            <a:avLst/>
+          </a:prstGeom>
+          <a:solidFill>
+            <a:srgbClr val="1677FF"/>
+          </a:solidFill>
+          <a:ln>
+            <a:noFill/>
+          </a:ln>
+          <a:effectLst/>
+        </p:spPr>
+        <p:style>
+          <a:lnRef idx="1">
+            <a:schemeClr val="accent1"/>
+          </a:lnRef>
+          <a:fillRef idx="3">
+            <a:schemeClr val="accent1"/>
+          </a:fillRef>
+          <a:effectRef idx="2">
+            <a:schemeClr val="accent1"/>
+          </a:effectRef>
+          <a:fontRef idx="minor">
+            <a:schemeClr val="lt1"/>
+          </a:fontRef>
+        </p:style>
+        <p:txBody>
+          <a:bodyPr rtlCol="0" anchor="ctr"/>
+          <a:lstStyle/>
+          <a:p>
+            <a:pPr algn="ctr"/>
+          </a:p>
+        </p:txBody>
+      </p:sp>
+      <p:sp>
+        <p:nvSpPr>
+          <p:cNvPr id="5" name="Rectangle 4"/>
+          <p:cNvSpPr/>
+          <p:nvPr/>
+        </p:nvSpPr>
+        <p:spPr>
+          <a:xfrm>
+            <a:off x="457200" y="1417320"/>
+            <a:ext cx="11247120" cy="919886"/>
+          </a:xfrm>
+          <a:prstGeom prst="rect">
+            <a:avLst/>
+          </a:prstGeom>
+          <a:solidFill>
+            <a:srgbClr val="F7FAFC"/>
+          </a:solidFill>
+          <a:ln>
+            <a:noFill/>
+          </a:ln>
+          <a:effectLst/>
+        </p:spPr>
+        <p:style>
+          <a:lnRef idx="1">
+            <a:schemeClr val="accent1"/>
+          </a:lnRef>
+          <a:fillRef idx="3">
+            <a:schemeClr val="accent1"/>
+          </a:fillRef>
+          <a:effectRef idx="2">
+            <a:schemeClr val="accent1"/>
+          </a:effectRef>
+          <a:fontRef idx="minor">
+            <a:schemeClr val="lt1"/>
+          </a:fontRef>
+        </p:style>
+        <p:txBody>
+          <a:bodyPr rtlCol="0" anchor="ctr"/>
+          <a:lstStyle/>
+          <a:p>
+            <a:pPr algn="ctr"/>
+          </a:p>
+        </p:txBody>
+      </p:sp>
+      <p:sp>
+        <p:nvSpPr>
+          <p:cNvPr id="6" name="Rectangle 5"/>
+          <p:cNvSpPr/>
+          <p:nvPr/>
+        </p:nvSpPr>
+        <p:spPr>
+          <a:xfrm>
+            <a:off x="457200" y="1417320"/>
+            <a:ext cx="73152" cy="919886"/>
+          </a:xfrm>
+          <a:prstGeom prst="rect">
+            <a:avLst/>
+          </a:prstGeom>
+          <a:solidFill>
+            <a:srgbClr val="1677FF"/>
+          </a:solidFill>
+          <a:ln>
+            <a:noFill/>
+          </a:ln>
+          <a:effectLst/>
+        </p:spPr>
+        <p:style>
+          <a:lnRef idx="1">
+            <a:schemeClr val="accent1"/>
+          </a:lnRef>
+          <a:fillRef idx="3">
+            <a:schemeClr val="accent1"/>
+          </a:fillRef>
+          <a:effectRef idx="2">
+            <a:schemeClr val="accent1"/>
+          </a:effectRef>
+          <a:fontRef idx="minor">
+            <a:schemeClr val="lt1"/>
+          </a:fontRef>
+        </p:style>
+        <p:txBody>
+          <a:bodyPr rtlCol="0" anchor="ctr"/>
+          <a:lstStyle/>
+          <a:p>
+            <a:pPr algn="ctr"/>
+          </a:p>
+        </p:txBody>
+      </p:sp>
+      <p:sp>
+        <p:nvSpPr>
+          <p:cNvPr id="7" name="TextBox 6"/>
+          <p:cNvSpPr txBox="1"/>
+          <p:nvPr/>
+        </p:nvSpPr>
+        <p:spPr>
+          <a:xfrm>
+            <a:off x="777240" y="1508760"/>
+            <a:ext cx="10789920" cy="365760"/>
+          </a:xfrm>
+          <a:prstGeom prst="rect">
+            <a:avLst/>
+          </a:prstGeom>
+          <a:noFill/>
+        </p:spPr>
+        <p:txBody>
+          <a:bodyPr wrap="square" anchor="t">
+            <a:spAutoFit/>
+          </a:bodyPr>
+          <a:lstStyle/>
+          <a:p>
+            <a:pPr algn="l">
+              <a:lnSpc>
+                <a:spcPct val="100000"/>
+              </a:lnSpc>
+              <a:spcAft>
+                <a:spcPts val="300"/>
+              </a:spcAft>
+            </a:pPr>
+            <a:r>
+              <a:rPr sz="1400" b="1">
+                <a:solidFill>
+                  <a:srgbClr val="0A3D91"/>
+                </a:solidFill>
+                <a:latin typeface="微软雅黑"/>
+                <a:ea typeface="微软雅黑"/>
+              </a:rPr>
+              <a:t>生成(G)</a:t>
+            </a:r>
+          </a:p>
+        </p:txBody>
+      </p:sp>
+      <p:sp>
+        <p:nvSpPr>
+          <p:cNvPr id="8" name="TextBox 7"/>
+          <p:cNvSpPr txBox="1"/>
+          <p:nvPr/>
+        </p:nvSpPr>
+        <p:spPr>
+          <a:xfrm>
+            <a:off x="777240" y="1874520"/>
+            <a:ext cx="10789920" cy="381273710400"/>
+          </a:xfrm>
+          <a:prstGeom prst="rect">
+            <a:avLst/>
+          </a:prstGeom>
+          <a:noFill/>
+        </p:spPr>
+        <p:txBody>
+          <a:bodyPr wrap="square" anchor="t">
+            <a:spAutoFit/>
+          </a:bodyPr>
+          <a:lstStyle/>
+          <a:p>
+            <a:pPr algn="l">
+              <a:lnSpc>
+                <a:spcPct val="105000"/>
+              </a:lnSpc>
+              <a:spcAft>
+                <a:spcPts val="300"/>
+              </a:spcAft>
+            </a:pPr>
+            <a:r>
+              <a:rPr sz="1200" b="0">
+                <a:solidFill>
+                  <a:srgbClr val="1F2D3D"/>
+                </a:solidFill>
+                <a:latin typeface="微软雅黑"/>
+                <a:ea typeface="微软雅黑"/>
+              </a:rPr>
+              <a:t>report 节点 _generate_rag_insights() 让 LLM 基于检索原文生成「目的地深度解读」(亮点/美食/老人儿童注意事项)，有据可查、带人群感知。</a:t>
+            </a:r>
+          </a:p>
+        </p:txBody>
+      </p:sp>
+      <p:sp>
+        <p:nvSpPr>
+          <p:cNvPr id="9" name="Rectangle 8"/>
+          <p:cNvSpPr/>
+          <p:nvPr/>
+        </p:nvSpPr>
+        <p:spPr>
+          <a:xfrm>
+            <a:off x="457200" y="2410358"/>
+            <a:ext cx="11247120" cy="919886"/>
+          </a:xfrm>
+          <a:prstGeom prst="rect">
+            <a:avLst/>
+          </a:prstGeom>
+          <a:solidFill>
+            <a:srgbClr val="F7FAFC"/>
+          </a:solidFill>
+          <a:ln>
+            <a:noFill/>
+          </a:ln>
+          <a:effectLst/>
+        </p:spPr>
+        <p:style>
+          <a:lnRef idx="1">
+            <a:schemeClr val="accent1"/>
+          </a:lnRef>
+          <a:fillRef idx="3">
+            <a:schemeClr val="accent1"/>
+          </a:fillRef>
+          <a:effectRef idx="2">
+            <a:schemeClr val="accent1"/>
+          </a:effectRef>
+          <a:fontRef idx="minor">
+            <a:schemeClr val="lt1"/>
+          </a:fontRef>
+        </p:style>
+        <p:txBody>
+          <a:bodyPr rtlCol="0" anchor="ctr"/>
+          <a:lstStyle/>
+          <a:p>
+            <a:pPr algn="ctr"/>
+          </a:p>
+        </p:txBody>
+      </p:sp>
+      <p:sp>
+        <p:nvSpPr>
+          <p:cNvPr id="10" name="Rectangle 9"/>
+          <p:cNvSpPr/>
+          <p:nvPr/>
+        </p:nvSpPr>
+        <p:spPr>
+          <a:xfrm>
+            <a:off x="457200" y="2410358"/>
+            <a:ext cx="73152" cy="919886"/>
+          </a:xfrm>
+          <a:prstGeom prst="rect">
+            <a:avLst/>
+          </a:prstGeom>
+          <a:solidFill>
+            <a:srgbClr val="1677FF"/>
+          </a:solidFill>
+          <a:ln>
+            <a:noFill/>
+          </a:ln>
+          <a:effectLst/>
+        </p:spPr>
+        <p:style>
+          <a:lnRef idx="1">
+            <a:schemeClr val="accent1"/>
+          </a:lnRef>
+          <a:fillRef idx="3">
+            <a:schemeClr val="accent1"/>
+          </a:fillRef>
+          <a:effectRef idx="2">
+            <a:schemeClr val="accent1"/>
+          </a:effectRef>
+          <a:fontRef idx="minor">
+            <a:schemeClr val="lt1"/>
+          </a:fontRef>
+        </p:style>
+        <p:txBody>
+          <a:bodyPr rtlCol="0" anchor="ctr"/>
+          <a:lstStyle/>
+          <a:p>
+            <a:pPr algn="ctr"/>
+          </a:p>
+        </p:txBody>
+      </p:sp>
+      <p:sp>
+        <p:nvSpPr>
+          <p:cNvPr id="11" name="TextBox 10"/>
+          <p:cNvSpPr txBox="1"/>
+          <p:nvPr/>
+        </p:nvSpPr>
+        <p:spPr>
+          <a:xfrm>
+            <a:off x="777240" y="2501798"/>
+            <a:ext cx="10789920" cy="365760"/>
+          </a:xfrm>
+          <a:prstGeom prst="rect">
+            <a:avLst/>
+          </a:prstGeom>
+          <a:noFill/>
+        </p:spPr>
+        <p:txBody>
+          <a:bodyPr wrap="square" anchor="t">
+            <a:spAutoFit/>
+          </a:bodyPr>
+          <a:lstStyle/>
+          <a:p>
+            <a:pPr algn="l">
+              <a:lnSpc>
+                <a:spcPct val="100000"/>
+              </a:lnSpc>
+              <a:spcAft>
+                <a:spcPts val="300"/>
+              </a:spcAft>
+            </a:pPr>
+            <a:r>
+              <a:rPr sz="1400" b="1">
+                <a:solidFill>
+                  <a:srgbClr val="0A3D91"/>
+                </a:solidFill>
+                <a:latin typeface="微软雅黑"/>
+                <a:ea typeface="微软雅黑"/>
+              </a:rPr>
+              <a:t>引用溯源</a:t>
+            </a:r>
+          </a:p>
+        </p:txBody>
+      </p:sp>
+      <p:sp>
+        <p:nvSpPr>
+          <p:cNvPr id="12" name="TextBox 11"/>
+          <p:cNvSpPr txBox="1"/>
+          <p:nvPr/>
+        </p:nvSpPr>
+        <p:spPr>
+          <a:xfrm>
+            <a:off x="777240" y="2867558"/>
+            <a:ext cx="10789920" cy="381273710400"/>
+          </a:xfrm>
+          <a:prstGeom prst="rect">
+            <a:avLst/>
+          </a:prstGeom>
+          <a:noFill/>
+        </p:spPr>
+        <p:txBody>
+          <a:bodyPr wrap="square" anchor="t">
+            <a:spAutoFit/>
+          </a:bodyPr>
+          <a:lstStyle/>
+          <a:p>
+            <a:pPr algn="l">
+              <a:lnSpc>
+                <a:spcPct val="105000"/>
+              </a:lnSpc>
+              <a:spcAft>
+                <a:spcPts val="300"/>
+              </a:spcAft>
+            </a:pPr>
+            <a:r>
+              <a:rPr sz="1200" b="0">
+                <a:solidFill>
+                  <a:srgbClr val="1F2D3D"/>
+                </a:solidFill>
+                <a:latin typeface="微软雅黑"/>
+                <a:ea typeface="微软雅黑"/>
+              </a:rPr>
+              <a:t>LLM 在每个具体信息后标注来源编号 [1][2]，报告末尾附「参考来源」对照表——内容来自知识库哪一篇一目了然。</a:t>
+            </a:r>
+          </a:p>
+        </p:txBody>
+      </p:sp>
+      <p:sp>
+        <p:nvSpPr>
+          <p:cNvPr id="13" name="Rectangle 12"/>
+          <p:cNvSpPr/>
+          <p:nvPr/>
+        </p:nvSpPr>
+        <p:spPr>
+          <a:xfrm>
+            <a:off x="457200" y="3403396"/>
+            <a:ext cx="11247120" cy="919886"/>
+          </a:xfrm>
+          <a:prstGeom prst="rect">
+            <a:avLst/>
+          </a:prstGeom>
+          <a:solidFill>
+            <a:srgbClr val="F7FAFC"/>
+          </a:solidFill>
+          <a:ln>
+            <a:noFill/>
+          </a:ln>
+          <a:effectLst/>
+        </p:spPr>
+        <p:style>
+          <a:lnRef idx="1">
+            <a:schemeClr val="accent1"/>
+          </a:lnRef>
+          <a:fillRef idx="3">
+            <a:schemeClr val="accent1"/>
+          </a:fillRef>
+          <a:effectRef idx="2">
+            <a:schemeClr val="accent1"/>
+          </a:effectRef>
+          <a:fontRef idx="minor">
+            <a:schemeClr val="lt1"/>
+          </a:fontRef>
+        </p:style>
+        <p:txBody>
+          <a:bodyPr rtlCol="0" anchor="ctr"/>
+          <a:lstStyle/>
+          <a:p>
+            <a:pPr algn="ctr"/>
+          </a:p>
+        </p:txBody>
+      </p:sp>
+      <p:sp>
+        <p:nvSpPr>
+          <p:cNvPr id="14" name="Rectangle 13"/>
+          <p:cNvSpPr/>
+          <p:nvPr/>
+        </p:nvSpPr>
+        <p:spPr>
+          <a:xfrm>
+            <a:off x="457200" y="3403396"/>
+            <a:ext cx="73152" cy="919886"/>
+          </a:xfrm>
+          <a:prstGeom prst="rect">
+            <a:avLst/>
+          </a:prstGeom>
+          <a:solidFill>
+            <a:srgbClr val="1677FF"/>
+          </a:solidFill>
+          <a:ln>
+            <a:noFill/>
+          </a:ln>
+          <a:effectLst/>
+        </p:spPr>
+        <p:style>
+          <a:lnRef idx="1">
+            <a:schemeClr val="accent1"/>
+          </a:lnRef>
+          <a:fillRef idx="3">
+            <a:schemeClr val="accent1"/>
+          </a:fillRef>
+          <a:effectRef idx="2">
+            <a:schemeClr val="accent1"/>
+          </a:effectRef>
+          <a:fontRef idx="minor">
+            <a:schemeClr val="lt1"/>
+          </a:fontRef>
+        </p:style>
+        <p:txBody>
+          <a:bodyPr rtlCol="0" anchor="ctr"/>
+          <a:lstStyle/>
+          <a:p>
+            <a:pPr algn="ctr"/>
+          </a:p>
+        </p:txBody>
+      </p:sp>
+      <p:sp>
+        <p:nvSpPr>
+          <p:cNvPr id="15" name="TextBox 14"/>
+          <p:cNvSpPr txBox="1"/>
+          <p:nvPr/>
+        </p:nvSpPr>
+        <p:spPr>
+          <a:xfrm>
+            <a:off x="777240" y="3494836"/>
+            <a:ext cx="10789920" cy="365760"/>
+          </a:xfrm>
+          <a:prstGeom prst="rect">
+            <a:avLst/>
+          </a:prstGeom>
+          <a:noFill/>
+        </p:spPr>
+        <p:txBody>
+          <a:bodyPr wrap="square" anchor="t">
+            <a:spAutoFit/>
+          </a:bodyPr>
+          <a:lstStyle/>
+          <a:p>
+            <a:pPr algn="l">
+              <a:lnSpc>
+                <a:spcPct val="100000"/>
+              </a:lnSpc>
+              <a:spcAft>
+                <a:spcPts val="300"/>
+              </a:spcAft>
+            </a:pPr>
+            <a:r>
+              <a:rPr sz="1400" b="1">
+                <a:solidFill>
+                  <a:srgbClr val="0A3D91"/>
+                </a:solidFill>
+                <a:latin typeface="微软雅黑"/>
+                <a:ea typeface="微软雅黑"/>
+              </a:rPr>
+              <a:t>检索质量评估</a:t>
+            </a:r>
+          </a:p>
+        </p:txBody>
+      </p:sp>
+      <p:sp>
+        <p:nvSpPr>
+          <p:cNvPr id="16" name="TextBox 15"/>
+          <p:cNvSpPr txBox="1"/>
+          <p:nvPr/>
+        </p:nvSpPr>
+        <p:spPr>
+          <a:xfrm>
+            <a:off x="777240" y="3860596"/>
+            <a:ext cx="10789920" cy="381273710400"/>
+          </a:xfrm>
+          <a:prstGeom prst="rect">
+            <a:avLst/>
+          </a:prstGeom>
+          <a:noFill/>
+        </p:spPr>
+        <p:txBody>
+          <a:bodyPr wrap="square" anchor="t">
+            <a:spAutoFit/>
+          </a:bodyPr>
+          <a:lstStyle/>
+          <a:p>
+            <a:pPr algn="l">
+              <a:lnSpc>
+                <a:spcPct val="105000"/>
+              </a:lnSpc>
+              <a:spcAft>
+                <a:spcPts val="300"/>
+              </a:spcAft>
+            </a:pPr>
+            <a:r>
+              <a:rPr sz="1200" b="0">
+                <a:solidFill>
+                  <a:srgbClr val="1F2D3D"/>
+                </a:solidFill>
+                <a:latin typeface="微软雅黑"/>
+                <a:ea typeface="微软雅黑"/>
+              </a:rPr>
+              <a:t>eval_retrieval.py 跑 20 条测试集，计算 Hit@k/MRR：Hit@5=95%、MRR=0.792，系统化可复现，非口头宣称。</a:t>
+            </a:r>
+          </a:p>
+        </p:txBody>
+      </p:sp>
+      <p:sp>
+        <p:nvSpPr>
+          <p:cNvPr id="17" name="Rectangle 16"/>
+          <p:cNvSpPr/>
+          <p:nvPr/>
+        </p:nvSpPr>
+        <p:spPr>
+          <a:xfrm>
+            <a:off x="457200" y="4396434"/>
+            <a:ext cx="11247120" cy="919886"/>
+          </a:xfrm>
+          <a:prstGeom prst="rect">
+            <a:avLst/>
+          </a:prstGeom>
+          <a:solidFill>
+            <a:srgbClr val="F7FAFC"/>
+          </a:solidFill>
+          <a:ln>
+            <a:noFill/>
+          </a:ln>
+          <a:effectLst/>
+        </p:spPr>
+        <p:style>
+          <a:lnRef idx="1">
+            <a:schemeClr val="accent1"/>
+          </a:lnRef>
+          <a:fillRef idx="3">
+            <a:schemeClr val="accent1"/>
+          </a:fillRef>
+          <a:effectRef idx="2">
+            <a:schemeClr val="accent1"/>
+          </a:effectRef>
+          <a:fontRef idx="minor">
+            <a:schemeClr val="lt1"/>
+          </a:fontRef>
+        </p:style>
+        <p:txBody>
+          <a:bodyPr rtlCol="0" anchor="ctr"/>
+          <a:lstStyle/>
+          <a:p>
+            <a:pPr algn="ctr"/>
+          </a:p>
+        </p:txBody>
+      </p:sp>
+      <p:sp>
+        <p:nvSpPr>
+          <p:cNvPr id="18" name="Rectangle 17"/>
+          <p:cNvSpPr/>
+          <p:nvPr/>
+        </p:nvSpPr>
+        <p:spPr>
+          <a:xfrm>
+            <a:off x="457200" y="4396434"/>
+            <a:ext cx="73152" cy="919886"/>
+          </a:xfrm>
+          <a:prstGeom prst="rect">
+            <a:avLst/>
+          </a:prstGeom>
+          <a:solidFill>
+            <a:srgbClr val="1677FF"/>
+          </a:solidFill>
+          <a:ln>
+            <a:noFill/>
+          </a:ln>
+          <a:effectLst/>
+        </p:spPr>
+        <p:style>
+          <a:lnRef idx="1">
+            <a:schemeClr val="accent1"/>
+          </a:lnRef>
+          <a:fillRef idx="3">
+            <a:schemeClr val="accent1"/>
+          </a:fillRef>
+          <a:effectRef idx="2">
+            <a:schemeClr val="accent1"/>
+          </a:effectRef>
+          <a:fontRef idx="minor">
+            <a:schemeClr val="lt1"/>
+          </a:fontRef>
+        </p:style>
+        <p:txBody>
+          <a:bodyPr rtlCol="0" anchor="ctr"/>
+          <a:lstStyle/>
+          <a:p>
+            <a:pPr algn="ctr"/>
+          </a:p>
+        </p:txBody>
+      </p:sp>
+      <p:sp>
+        <p:nvSpPr>
+          <p:cNvPr id="19" name="TextBox 18"/>
+          <p:cNvSpPr txBox="1"/>
+          <p:nvPr/>
+        </p:nvSpPr>
+        <p:spPr>
+          <a:xfrm>
+            <a:off x="777240" y="4487874"/>
+            <a:ext cx="10789920" cy="365760"/>
+          </a:xfrm>
+          <a:prstGeom prst="rect">
+            <a:avLst/>
+          </a:prstGeom>
+          <a:noFill/>
+        </p:spPr>
+        <p:txBody>
+          <a:bodyPr wrap="square" anchor="t">
+            <a:spAutoFit/>
+          </a:bodyPr>
+          <a:lstStyle/>
+          <a:p>
+            <a:pPr algn="l">
+              <a:lnSpc>
+                <a:spcPct val="100000"/>
+              </a:lnSpc>
+              <a:spcAft>
+                <a:spcPts val="300"/>
+              </a:spcAft>
+            </a:pPr>
+            <a:r>
+              <a:rPr sz="1400" b="1">
+                <a:solidFill>
+                  <a:srgbClr val="0A3D91"/>
+                </a:solidFill>
+                <a:latin typeface="微软雅黑"/>
+                <a:ea typeface="微软雅黑"/>
+              </a:rPr>
+              <a:t>前端展示</a:t>
+            </a:r>
+          </a:p>
+        </p:txBody>
+      </p:sp>
+      <p:sp>
+        <p:nvSpPr>
+          <p:cNvPr id="20" name="TextBox 19"/>
+          <p:cNvSpPr txBox="1"/>
+          <p:nvPr/>
+        </p:nvSpPr>
+        <p:spPr>
+          <a:xfrm>
+            <a:off x="777240" y="4853634"/>
+            <a:ext cx="10789920" cy="381273710400"/>
+          </a:xfrm>
+          <a:prstGeom prst="rect">
+            <a:avLst/>
+          </a:prstGeom>
+          <a:noFill/>
+        </p:spPr>
+        <p:txBody>
+          <a:bodyPr wrap="square" anchor="t">
+            <a:spAutoFit/>
+          </a:bodyPr>
+          <a:lstStyle/>
+          <a:p>
+            <a:pPr algn="l">
+              <a:lnSpc>
+                <a:spcPct val="105000"/>
+              </a:lnSpc>
+              <a:spcAft>
+                <a:spcPts val="300"/>
+              </a:spcAft>
+            </a:pPr>
+            <a:r>
+              <a:rPr sz="1200" b="0">
+                <a:solidFill>
+                  <a:srgbClr val="1F2D3D"/>
+                </a:solidFill>
+                <a:latin typeface="微软雅黑"/>
+                <a:ea typeface="微软雅黑"/>
+              </a:rPr>
+              <a:t>行程详情「知识库检索」标签页展示检索命中的 chunk(相似度分+检索方式) + AI 解读(带溯源)；Agent 流程图中调研/编排/报告三节点标 RAG 标记。</a:t>
+            </a:r>
+          </a:p>
+        </p:txBody>
+      </p:sp>
+      <p:sp>
+        <p:nvSpPr>
+          <p:cNvPr id="21" name="Rectangle 20"/>
+          <p:cNvSpPr/>
+          <p:nvPr/>
+        </p:nvSpPr>
+        <p:spPr>
+          <a:xfrm>
+            <a:off x="457200" y="5389472"/>
+            <a:ext cx="11247120" cy="919886"/>
+          </a:xfrm>
+          <a:prstGeom prst="rect">
+            <a:avLst/>
+          </a:prstGeom>
+          <a:solidFill>
+            <a:srgbClr val="F7FAFC"/>
+          </a:solidFill>
+          <a:ln>
+            <a:noFill/>
+          </a:ln>
+          <a:effectLst/>
+        </p:spPr>
+        <p:style>
+          <a:lnRef idx="1">
+            <a:schemeClr val="accent1"/>
+          </a:lnRef>
+          <a:fillRef idx="3">
+            <a:schemeClr val="accent1"/>
+          </a:fillRef>
+          <a:effectRef idx="2">
+            <a:schemeClr val="accent1"/>
+          </a:effectRef>
+          <a:fontRef idx="minor">
+            <a:schemeClr val="lt1"/>
+          </a:fontRef>
+        </p:style>
+        <p:txBody>
+          <a:bodyPr rtlCol="0" anchor="ctr"/>
+          <a:lstStyle/>
+          <a:p>
+            <a:pPr algn="ctr"/>
+          </a:p>
+        </p:txBody>
+      </p:sp>
+      <p:sp>
+        <p:nvSpPr>
+          <p:cNvPr id="22" name="Rectangle 21"/>
+          <p:cNvSpPr/>
+          <p:nvPr/>
+        </p:nvSpPr>
+        <p:spPr>
+          <a:xfrm>
+            <a:off x="457200" y="5389472"/>
+            <a:ext cx="73152" cy="919886"/>
+          </a:xfrm>
+          <a:prstGeom prst="rect">
+            <a:avLst/>
+          </a:prstGeom>
+          <a:solidFill>
+            <a:srgbClr val="1677FF"/>
+          </a:solidFill>
+          <a:ln>
+            <a:noFill/>
+          </a:ln>
+          <a:effectLst/>
+        </p:spPr>
+        <p:style>
+          <a:lnRef idx="1">
+            <a:schemeClr val="accent1"/>
+          </a:lnRef>
+          <a:fillRef idx="3">
+            <a:schemeClr val="accent1"/>
+          </a:fillRef>
+          <a:effectRef idx="2">
+            <a:schemeClr val="accent1"/>
+          </a:effectRef>
+          <a:fontRef idx="minor">
+            <a:schemeClr val="lt1"/>
+          </a:fontRef>
+        </p:style>
+        <p:txBody>
+          <a:bodyPr rtlCol="0" anchor="ctr"/>
+          <a:lstStyle/>
+          <a:p>
+            <a:pPr algn="ctr"/>
+          </a:p>
+        </p:txBody>
+      </p:sp>
+      <p:sp>
+        <p:nvSpPr>
+          <p:cNvPr id="23" name="TextBox 22"/>
+          <p:cNvSpPr txBox="1"/>
+          <p:nvPr/>
+        </p:nvSpPr>
+        <p:spPr>
+          <a:xfrm>
+            <a:off x="777240" y="5480912"/>
+            <a:ext cx="10789920" cy="365760"/>
+          </a:xfrm>
+          <a:prstGeom prst="rect">
+            <a:avLst/>
+          </a:prstGeom>
+          <a:noFill/>
+        </p:spPr>
+        <p:txBody>
+          <a:bodyPr wrap="square" anchor="t">
+            <a:spAutoFit/>
+          </a:bodyPr>
+          <a:lstStyle/>
+          <a:p>
+            <a:pPr algn="l">
+              <a:lnSpc>
+                <a:spcPct val="100000"/>
+              </a:lnSpc>
+              <a:spcAft>
+                <a:spcPts val="300"/>
+              </a:spcAft>
+            </a:pPr>
+            <a:r>
+              <a:rPr sz="1400" b="1">
+                <a:solidFill>
+                  <a:srgbClr val="0A3D91"/>
+                </a:solidFill>
+                <a:latin typeface="微软雅黑"/>
+                <a:ea typeface="微软雅黑"/>
+              </a:rPr>
+              <a:t>降级安全</a:t>
+            </a:r>
+          </a:p>
+        </p:txBody>
+      </p:sp>
+      <p:sp>
+        <p:nvSpPr>
+          <p:cNvPr id="24" name="TextBox 23"/>
+          <p:cNvSpPr txBox="1"/>
+          <p:nvPr/>
+        </p:nvSpPr>
+        <p:spPr>
+          <a:xfrm>
+            <a:off x="777240" y="5846672"/>
+            <a:ext cx="10789920" cy="381273710400"/>
+          </a:xfrm>
+          <a:prstGeom prst="rect">
+            <a:avLst/>
+          </a:prstGeom>
+          <a:noFill/>
+        </p:spPr>
+        <p:txBody>
+          <a:bodyPr wrap="square" anchor="t">
+            <a:spAutoFit/>
+          </a:bodyPr>
+          <a:lstStyle/>
+          <a:p>
+            <a:pPr algn="l">
+              <a:lnSpc>
+                <a:spcPct val="105000"/>
+              </a:lnSpc>
+              <a:spcAft>
+                <a:spcPts val="300"/>
+              </a:spcAft>
+            </a:pPr>
+            <a:r>
+              <a:rPr sz="1200" b="0">
+                <a:solidFill>
+                  <a:srgbClr val="1F2D3D"/>
+                </a:solidFill>
+                <a:latin typeface="微软雅黑"/>
+                <a:ea typeface="微软雅黑"/>
+              </a:rPr>
+              <a:t>非 real 模式或检索为空或 LLM 失败时返回 None，报告照常出（只少一节），不阻塞主流程。</a:t>
+            </a:r>
+          </a:p>
+        </p:txBody>
+      </p:sp>
+      <p:sp>
+        <p:nvSpPr>
+          <p:cNvPr id="25" name="TextBox 24"/>
+          <p:cNvSpPr txBox="1"/>
+          <p:nvPr/>
+        </p:nvSpPr>
+        <p:spPr>
+          <a:xfrm>
+            <a:off x="10972800" y="6446520"/>
+            <a:ext cx="914400" cy="365760"/>
+          </a:xfrm>
+          <a:prstGeom prst="rect">
+            <a:avLst/>
+          </a:prstGeom>
+          <a:noFill/>
+        </p:spPr>
+        <p:txBody>
+          <a:bodyPr wrap="square" anchor="t">
+            <a:spAutoFit/>
+          </a:bodyPr>
+          <a:lstStyle/>
+          <a:p>
+            <a:pPr algn="r">
+              <a:lnSpc>
+                <a:spcPct val="100000"/>
+              </a:lnSpc>
+              <a:spcAft>
+                <a:spcPts val="300"/>
+              </a:spcAft>
+            </a:pPr>
+            <a:r>
+              <a:rPr sz="1000" b="0">
+                <a:solidFill>
+                  <a:srgbClr val="8C8C8C"/>
+                </a:solidFill>
+                <a:latin typeface="微软雅黑"/>
+                <a:ea typeface="微软雅黑"/>
+              </a:rPr>
+              <a:t>21/22</a:t>
+            </a:r>
+          </a:p>
+        </p:txBody>
+      </p:sp>
+      <p:sp>
+        <p:nvSpPr>
+          <p:cNvPr id="26" name="TextBox 25"/>
+          <p:cNvSpPr txBox="1"/>
+          <p:nvPr/>
+        </p:nvSpPr>
+        <p:spPr>
+          <a:xfrm>
+            <a:off x="457200" y="6446520"/>
+            <a:ext cx="5486400" cy="365760"/>
+          </a:xfrm>
+          <a:prstGeom prst="rect">
+            <a:avLst/>
+          </a:prstGeom>
+          <a:noFill/>
+        </p:spPr>
+        <p:txBody>
+          <a:bodyPr wrap="square" anchor="t">
+            <a:spAutoFit/>
+          </a:bodyPr>
+          <a:lstStyle/>
+          <a:p>
+            <a:pPr algn="l">
+              <a:lnSpc>
+                <a:spcPct val="100000"/>
+              </a:lnSpc>
+              <a:spcAft>
+                <a:spcPts val="300"/>
+              </a:spcAft>
+            </a:pPr>
+            <a:r>
+              <a:rPr sz="1000" b="0">
+                <a:solidFill>
+                  <a:srgbClr val="8C8C8C"/>
+                </a:solidFill>
+                <a:latin typeface="微软雅黑"/>
+                <a:ea typeface="微软雅黑"/>
+              </a:rPr>
+              <a:t>山海行 · 文旅多 Agent 行程规划系统</a:t>
+            </a:r>
+          </a:p>
+        </p:txBody>
+      </p:sp>
+    </p:spTree>
+  </p:cSld>
+  <p:clrMapOvr>
+    <a:masterClrMapping/>
+  </p:clrMapOvr>
+</p:sld>
+</file>
+
+<file path=ppt/slides/slide22.xml><?xml version="1.0" encoding="utf-8"?>
 <p:sld xmlns:a="http://schemas.openxmlformats.org/drawingml/2006/main" xmlns:p="http://schemas.openxmlformats.org/presentationml/2006/main" xmlns:r="http://schemas.openxmlformats.org/officeDocument/2006/relationships">
   <p:cSld>
     <p:bg>
@@ -18782,8 +19548,8 @@
         </p:nvSpPr>
         <p:spPr>
           <a:xfrm>
-            <a:off x="822960" y="2651760"/>
-            <a:ext cx="10515600" cy="548640"/>
+            <a:off x="822960" y="2560320"/>
+            <a:ext cx="10515600" cy="502920"/>
           </a:xfrm>
           <a:prstGeom prst="rect">
             <a:avLst/>
@@ -18826,8 +19592,8 @@
         </p:nvSpPr>
         <p:spPr>
           <a:xfrm>
-            <a:off x="822960" y="2651760"/>
-            <a:ext cx="73152" cy="548640"/>
+            <a:off x="822960" y="2560320"/>
+            <a:ext cx="73152" cy="502920"/>
           </a:xfrm>
           <a:prstGeom prst="rect">
             <a:avLst/>
@@ -18870,7 +19636,7 @@
         </p:nvSpPr>
         <p:spPr>
           <a:xfrm>
-            <a:off x="1097280" y="2706624"/>
+            <a:off x="1097280" y="2606040"/>
             <a:ext cx="1828800" cy="457200"/>
           </a:xfrm>
           <a:prstGeom prst="rect">
@@ -18893,7 +19659,7 @@
               </a:spcAft>
             </a:pPr>
             <a:r>
-              <a:rPr sz="1300" b="1">
+              <a:rPr sz="1200" b="1">
                 <a:solidFill>
                   <a:srgbClr val="0A3D91"/>
                 </a:solidFill>
@@ -18913,7 +19679,7 @@
         </p:nvSpPr>
         <p:spPr>
           <a:xfrm>
-            <a:off x="2926080" y="2706624"/>
+            <a:off x="2926080" y="2606040"/>
             <a:ext cx="8229600" cy="457200"/>
           </a:xfrm>
           <a:prstGeom prst="rect">
@@ -18936,7 +19702,7 @@
               </a:spcAft>
             </a:pPr>
             <a:r>
-              <a:rPr sz="1100" b="0">
+              <a:rPr sz="1050" b="0">
                 <a:solidFill>
                   <a:srgbClr val="1F2D3D"/>
                 </a:solidFill>
@@ -18956,8 +19722,8 @@
         </p:nvSpPr>
         <p:spPr>
           <a:xfrm>
-            <a:off x="822960" y="3273552"/>
-            <a:ext cx="10515600" cy="548640"/>
+            <a:off x="822960" y="3127248"/>
+            <a:ext cx="10515600" cy="502920"/>
           </a:xfrm>
           <a:prstGeom prst="rect">
             <a:avLst/>
@@ -19000,8 +19766,8 @@
         </p:nvSpPr>
         <p:spPr>
           <a:xfrm>
-            <a:off x="822960" y="3273552"/>
-            <a:ext cx="73152" cy="548640"/>
+            <a:off x="822960" y="3127248"/>
+            <a:ext cx="73152" cy="502920"/>
           </a:xfrm>
           <a:prstGeom prst="rect">
             <a:avLst/>
@@ -19044,7 +19810,7 @@
         </p:nvSpPr>
         <p:spPr>
           <a:xfrm>
-            <a:off x="1097280" y="3328416"/>
+            <a:off x="1097280" y="3172968"/>
             <a:ext cx="1828800" cy="457200"/>
           </a:xfrm>
           <a:prstGeom prst="rect">
@@ -19067,7 +19833,7 @@
               </a:spcAft>
             </a:pPr>
             <a:r>
-              <a:rPr sz="1300" b="1">
+              <a:rPr sz="1200" b="1">
                 <a:solidFill>
                   <a:srgbClr val="0A3D91"/>
                 </a:solidFill>
@@ -19087,7 +19853,7 @@
         </p:nvSpPr>
         <p:spPr>
           <a:xfrm>
-            <a:off x="2926080" y="3328416"/>
+            <a:off x="2926080" y="3172968"/>
             <a:ext cx="8229600" cy="457200"/>
           </a:xfrm>
           <a:prstGeom prst="rect">
@@ -19110,7 +19876,7 @@
               </a:spcAft>
             </a:pPr>
             <a:r>
-              <a:rPr sz="1100" b="0">
+              <a:rPr sz="1050" b="0">
                 <a:solidFill>
                   <a:srgbClr val="1F2D3D"/>
                 </a:solidFill>
@@ -19130,8 +19896,8 @@
         </p:nvSpPr>
         <p:spPr>
           <a:xfrm>
-            <a:off x="822960" y="3895344"/>
-            <a:ext cx="10515600" cy="548640"/>
+            <a:off x="822960" y="3694176"/>
+            <a:ext cx="10515600" cy="502920"/>
           </a:xfrm>
           <a:prstGeom prst="rect">
             <a:avLst/>
@@ -19174,8 +19940,8 @@
         </p:nvSpPr>
         <p:spPr>
           <a:xfrm>
-            <a:off x="822960" y="3895344"/>
-            <a:ext cx="73152" cy="548640"/>
+            <a:off x="822960" y="3694176"/>
+            <a:ext cx="73152" cy="502920"/>
           </a:xfrm>
           <a:prstGeom prst="rect">
             <a:avLst/>
@@ -19218,7 +19984,7 @@
         </p:nvSpPr>
         <p:spPr>
           <a:xfrm>
-            <a:off x="1097280" y="3950208"/>
+            <a:off x="1097280" y="3739896"/>
             <a:ext cx="1828800" cy="457200"/>
           </a:xfrm>
           <a:prstGeom prst="rect">
@@ -19241,7 +20007,7 @@
               </a:spcAft>
             </a:pPr>
             <a:r>
-              <a:rPr sz="1300" b="1">
+              <a:rPr sz="1200" b="1">
                 <a:solidFill>
                   <a:srgbClr val="0A3D91"/>
                 </a:solidFill>
@@ -19261,7 +20027,7 @@
         </p:nvSpPr>
         <p:spPr>
           <a:xfrm>
-            <a:off x="2926080" y="3950208"/>
+            <a:off x="2926080" y="3739896"/>
             <a:ext cx="8229600" cy="457200"/>
           </a:xfrm>
           <a:prstGeom prst="rect">
@@ -19284,7 +20050,7 @@
               </a:spcAft>
             </a:pPr>
             <a:r>
-              <a:rPr sz="1100" b="0">
+              <a:rPr sz="1050" b="0">
                 <a:solidFill>
                   <a:srgbClr val="1F2D3D"/>
                 </a:solidFill>
@@ -19304,8 +20070,8 @@
         </p:nvSpPr>
         <p:spPr>
           <a:xfrm>
-            <a:off x="822960" y="4517136"/>
-            <a:ext cx="10515600" cy="548640"/>
+            <a:off x="822960" y="4261104"/>
+            <a:ext cx="10515600" cy="502920"/>
           </a:xfrm>
           <a:prstGeom prst="rect">
             <a:avLst/>
@@ -19348,8 +20114,8 @@
         </p:nvSpPr>
         <p:spPr>
           <a:xfrm>
-            <a:off x="822960" y="4517136"/>
-            <a:ext cx="73152" cy="548640"/>
+            <a:off x="822960" y="4261104"/>
+            <a:ext cx="73152" cy="502920"/>
           </a:xfrm>
           <a:prstGeom prst="rect">
             <a:avLst/>
@@ -19392,7 +20158,7 @@
         </p:nvSpPr>
         <p:spPr>
           <a:xfrm>
-            <a:off x="1097280" y="4572000"/>
+            <a:off x="1097280" y="4306824"/>
             <a:ext cx="1828800" cy="457200"/>
           </a:xfrm>
           <a:prstGeom prst="rect">
@@ -19415,7 +20181,7 @@
               </a:spcAft>
             </a:pPr>
             <a:r>
-              <a:rPr sz="1300" b="1">
+              <a:rPr sz="1200" b="1">
                 <a:solidFill>
                   <a:srgbClr val="0A3D91"/>
                 </a:solidFill>
@@ -19435,7 +20201,7 @@
         </p:nvSpPr>
         <p:spPr>
           <a:xfrm>
-            <a:off x="2926080" y="4572000"/>
+            <a:off x="2926080" y="4306824"/>
             <a:ext cx="8229600" cy="457200"/>
           </a:xfrm>
           <a:prstGeom prst="rect">
@@ -19458,14 +20224,14 @@
               </a:spcAft>
             </a:pPr>
             <a:r>
-              <a:rPr sz="1100" b="0">
+              <a:rPr sz="1050" b="0">
                 <a:solidFill>
                   <a:srgbClr val="1F2D3D"/>
                 </a:solidFill>
                 <a:latin typeface="微软雅黑"/>
                 <a:ea typeface="微软雅黑"/>
               </a:rPr>
-              <a:t>pgvector + 语义向量 + 文旅知识库 + AI 目的地解读，检索增强生成完整闭环。</a:t>
+              <a:t>pgvector + 混合检索(BM25+向量) + 引用溯源 + 知识库(61 chunk) + 评估(Hit@5=95%) 完整闭环。</a:t>
             </a:r>
           </a:p>
         </p:txBody>
@@ -19478,8 +20244,8 @@
         </p:nvSpPr>
         <p:spPr>
           <a:xfrm>
-            <a:off x="822960" y="5138928"/>
-            <a:ext cx="10515600" cy="548640"/>
+            <a:off x="822960" y="4828032"/>
+            <a:ext cx="10515600" cy="502920"/>
           </a:xfrm>
           <a:prstGeom prst="rect">
             <a:avLst/>
@@ -19522,8 +20288,8 @@
         </p:nvSpPr>
         <p:spPr>
           <a:xfrm>
-            <a:off x="822960" y="5138928"/>
-            <a:ext cx="73152" cy="548640"/>
+            <a:off x="822960" y="4828032"/>
+            <a:ext cx="73152" cy="502920"/>
           </a:xfrm>
           <a:prstGeom prst="rect">
             <a:avLst/>
@@ -19566,7 +20332,7 @@
         </p:nvSpPr>
         <p:spPr>
           <a:xfrm>
-            <a:off x="1097280" y="5193792"/>
+            <a:off x="1097280" y="4873752"/>
             <a:ext cx="1828800" cy="457200"/>
           </a:xfrm>
           <a:prstGeom prst="rect">
@@ -19589,14 +20355,14 @@
               </a:spcAft>
             </a:pPr>
             <a:r>
-              <a:rPr sz="1300" b="1">
+              <a:rPr sz="1200" b="1">
                 <a:solidFill>
                   <a:srgbClr val="0A3D91"/>
                 </a:solidFill>
                 <a:latin typeface="微软雅黑"/>
                 <a:ea typeface="微软雅黑"/>
               </a:rPr>
-              <a:t>性能</a:t>
+              <a:t>交互体验</a:t>
             </a:r>
           </a:p>
         </p:txBody>
@@ -19609,7 +20375,7 @@
         </p:nvSpPr>
         <p:spPr>
           <a:xfrm>
-            <a:off x="2926080" y="5193792"/>
+            <a:off x="2926080" y="4873752"/>
             <a:ext cx="8229600" cy="457200"/>
           </a:xfrm>
           <a:prstGeom prst="rect">
@@ -19632,14 +20398,14 @@
               </a:spcAft>
             </a:pPr>
             <a:r>
-              <a:rPr sz="1100" b="0">
+              <a:rPr sz="1050" b="0">
                 <a:solidFill>
                   <a:srgbClr val="1F2D3D"/>
                 </a:solidFill>
                 <a:latin typeface="微软雅黑"/>
                 <a:ea typeface="微软雅黑"/>
               </a:rPr>
-              <a:t>四项指标全部达标且大幅超标（QPS 5.5x / 检索快500x）。</a:t>
+              <a:t>三种创建方式(表单/语音/对话) + 高德地图总览(按天分组+路线连线) + 11 国语言。</a:t>
             </a:r>
           </a:p>
         </p:txBody>
@@ -19652,8 +20418,8 @@
         </p:nvSpPr>
         <p:spPr>
           <a:xfrm>
-            <a:off x="822960" y="5760720"/>
-            <a:ext cx="10515600" cy="548640"/>
+            <a:off x="822960" y="5394960"/>
+            <a:ext cx="10515600" cy="502920"/>
           </a:xfrm>
           <a:prstGeom prst="rect">
             <a:avLst/>
@@ -19696,8 +20462,8 @@
         </p:nvSpPr>
         <p:spPr>
           <a:xfrm>
-            <a:off x="822960" y="5760720"/>
-            <a:ext cx="73152" cy="548640"/>
+            <a:off x="822960" y="5394960"/>
+            <a:ext cx="73152" cy="502920"/>
           </a:xfrm>
           <a:prstGeom prst="rect">
             <a:avLst/>
@@ -19740,7 +20506,7 @@
         </p:nvSpPr>
         <p:spPr>
           <a:xfrm>
-            <a:off x="1097280" y="5815584"/>
+            <a:off x="1097280" y="5440680"/>
             <a:ext cx="1828800" cy="457200"/>
           </a:xfrm>
           <a:prstGeom prst="rect">
@@ -19763,13 +20529,187 @@
               </a:spcAft>
             </a:pPr>
             <a:r>
-              <a:rPr sz="1300" b="1">
+              <a:rPr sz="1200" b="1">
                 <a:solidFill>
                   <a:srgbClr val="0A3D91"/>
                 </a:solidFill>
                 <a:latin typeface="微软雅黑"/>
                 <a:ea typeface="微软雅黑"/>
               </a:rPr>
+              <a:t>性能</a:t>
+            </a:r>
+          </a:p>
+        </p:txBody>
+      </p:sp>
+      <p:sp>
+        <p:nvSpPr>
+          <p:cNvPr id="27" name="TextBox 26"/>
+          <p:cNvSpPr txBox="1"/>
+          <p:nvPr/>
+        </p:nvSpPr>
+        <p:spPr>
+          <a:xfrm>
+            <a:off x="2926080" y="5440680"/>
+            <a:ext cx="8229600" cy="457200"/>
+          </a:xfrm>
+          <a:prstGeom prst="rect">
+            <a:avLst/>
+          </a:prstGeom>
+          <a:noFill/>
+        </p:spPr>
+        <p:txBody>
+          <a:bodyPr wrap="square" anchor="t">
+            <a:spAutoFit/>
+          </a:bodyPr>
+          <a:lstStyle/>
+          <a:p>
+            <a:pPr algn="l">
+              <a:lnSpc>
+                <a:spcPct val="100000"/>
+              </a:lnSpc>
+              <a:spcAft>
+                <a:spcPts val="300"/>
+              </a:spcAft>
+            </a:pPr>
+            <a:r>
+              <a:rPr sz="1050" b="0">
+                <a:solidFill>
+                  <a:srgbClr val="1F2D3D"/>
+                </a:solidFill>
+                <a:latin typeface="微软雅黑"/>
+                <a:ea typeface="微软雅黑"/>
+              </a:rPr>
+              <a:t>四项指标全部达标且大幅超标（QPS 5.5x / 检索快500x）。</a:t>
+            </a:r>
+          </a:p>
+        </p:txBody>
+      </p:sp>
+      <p:sp>
+        <p:nvSpPr>
+          <p:cNvPr id="28" name="Rectangle 27"/>
+          <p:cNvSpPr/>
+          <p:nvPr/>
+        </p:nvSpPr>
+        <p:spPr>
+          <a:xfrm>
+            <a:off x="822960" y="5961888"/>
+            <a:ext cx="10515600" cy="502920"/>
+          </a:xfrm>
+          <a:prstGeom prst="rect">
+            <a:avLst/>
+          </a:prstGeom>
+          <a:solidFill>
+            <a:srgbClr val="FFFFFF"/>
+          </a:solidFill>
+          <a:ln>
+            <a:noFill/>
+          </a:ln>
+          <a:effectLst/>
+        </p:spPr>
+        <p:style>
+          <a:lnRef idx="1">
+            <a:schemeClr val="accent1"/>
+          </a:lnRef>
+          <a:fillRef idx="3">
+            <a:schemeClr val="accent1"/>
+          </a:fillRef>
+          <a:effectRef idx="2">
+            <a:schemeClr val="accent1"/>
+          </a:effectRef>
+          <a:fontRef idx="minor">
+            <a:schemeClr val="lt1"/>
+          </a:fontRef>
+        </p:style>
+        <p:txBody>
+          <a:bodyPr rtlCol="0" anchor="ctr"/>
+          <a:lstStyle/>
+          <a:p>
+            <a:pPr algn="ctr"/>
+          </a:p>
+        </p:txBody>
+      </p:sp>
+      <p:sp>
+        <p:nvSpPr>
+          <p:cNvPr id="29" name="Rectangle 28"/>
+          <p:cNvSpPr/>
+          <p:nvPr/>
+        </p:nvSpPr>
+        <p:spPr>
+          <a:xfrm>
+            <a:off x="822960" y="5961888"/>
+            <a:ext cx="73152" cy="502920"/>
+          </a:xfrm>
+          <a:prstGeom prst="rect">
+            <a:avLst/>
+          </a:prstGeom>
+          <a:solidFill>
+            <a:srgbClr val="1677FF"/>
+          </a:solidFill>
+          <a:ln>
+            <a:noFill/>
+          </a:ln>
+          <a:effectLst/>
+        </p:spPr>
+        <p:style>
+          <a:lnRef idx="1">
+            <a:schemeClr val="accent1"/>
+          </a:lnRef>
+          <a:fillRef idx="3">
+            <a:schemeClr val="accent1"/>
+          </a:fillRef>
+          <a:effectRef idx="2">
+            <a:schemeClr val="accent1"/>
+          </a:effectRef>
+          <a:fontRef idx="minor">
+            <a:schemeClr val="lt1"/>
+          </a:fontRef>
+        </p:style>
+        <p:txBody>
+          <a:bodyPr rtlCol="0" anchor="ctr"/>
+          <a:lstStyle/>
+          <a:p>
+            <a:pPr algn="ctr"/>
+          </a:p>
+        </p:txBody>
+      </p:sp>
+      <p:sp>
+        <p:nvSpPr>
+          <p:cNvPr id="30" name="TextBox 29"/>
+          <p:cNvSpPr txBox="1"/>
+          <p:nvPr/>
+        </p:nvSpPr>
+        <p:spPr>
+          <a:xfrm>
+            <a:off x="1097280" y="6007608"/>
+            <a:ext cx="1828800" cy="457200"/>
+          </a:xfrm>
+          <a:prstGeom prst="rect">
+            <a:avLst/>
+          </a:prstGeom>
+          <a:noFill/>
+        </p:spPr>
+        <p:txBody>
+          <a:bodyPr wrap="square" anchor="t">
+            <a:spAutoFit/>
+          </a:bodyPr>
+          <a:lstStyle/>
+          <a:p>
+            <a:pPr algn="l">
+              <a:lnSpc>
+                <a:spcPct val="100000"/>
+              </a:lnSpc>
+              <a:spcAft>
+                <a:spcPts val="300"/>
+              </a:spcAft>
+            </a:pPr>
+            <a:r>
+              <a:rPr sz="1200" b="1">
+                <a:solidFill>
+                  <a:srgbClr val="0A3D91"/>
+                </a:solidFill>
+                <a:latin typeface="微软雅黑"/>
+                <a:ea typeface="微软雅黑"/>
+              </a:rPr>
               <a:t>核心能力</a:t>
             </a:r>
           </a:p>
@@ -19777,13 +20717,13 @@
       </p:sp>
       <p:sp>
         <p:nvSpPr>
-          <p:cNvPr id="27" name="TextBox 26"/>
-          <p:cNvSpPr txBox="1"/>
-          <p:nvPr/>
-        </p:nvSpPr>
-        <p:spPr>
-          <a:xfrm>
-            <a:off x="2926080" y="5815584"/>
+          <p:cNvPr id="31" name="TextBox 30"/>
+          <p:cNvSpPr txBox="1"/>
+          <p:nvPr/>
+        </p:nvSpPr>
+        <p:spPr>
+          <a:xfrm>
+            <a:off x="2926080" y="6007608"/>
             <a:ext cx="8229600" cy="457200"/>
           </a:xfrm>
           <a:prstGeom prst="rect">
@@ -19806,7 +20746,7 @@
               </a:spcAft>
             </a:pPr>
             <a:r>
-              <a:rPr sz="1100" b="0">
+              <a:rPr sz="1050" b="0">
                 <a:solidFill>
                   <a:srgbClr val="1F2D3D"/>
                 </a:solidFill>
@@ -19820,7 +20760,7 @@
       </p:sp>
       <p:sp>
         <p:nvSpPr>
-          <p:cNvPr id="28" name="TextBox 27"/>
+          <p:cNvPr id="32" name="TextBox 31"/>
           <p:cNvSpPr txBox="1"/>
           <p:nvPr/>
         </p:nvSpPr>
@@ -19856,14 +20796,14 @@
                 <a:latin typeface="微软雅黑"/>
                 <a:ea typeface="微软雅黑"/>
               </a:rPr>
-              <a:t>21/21</a:t>
-            </a:r>
-          </a:p>
-        </p:txBody>
-      </p:sp>
-      <p:sp>
-        <p:nvSpPr>
-          <p:cNvPr id="29" name="TextBox 28"/>
+              <a:t>22/22</a:t>
+            </a:r>
+          </a:p>
+        </p:txBody>
+      </p:sp>
+      <p:sp>
+        <p:nvSpPr>
+          <p:cNvPr id="33" name="TextBox 32"/>
           <p:cNvSpPr txBox="1"/>
           <p:nvPr/>
         </p:nvSpPr>
@@ -20795,7 +21735,7 @@
                 <a:latin typeface="微软雅黑"/>
                 <a:ea typeface="微软雅黑"/>
               </a:rPr>
-              <a:t>3/21</a:t>
+              <a:t>3/22</a:t>
             </a:r>
           </a:p>
         </p:txBody>
@@ -22256,7 +23196,7 @@
                 <a:latin typeface="微软雅黑"/>
                 <a:ea typeface="微软雅黑"/>
               </a:rPr>
-              <a:t>4/21</a:t>
+              <a:t>4/22</a:t>
             </a:r>
           </a:p>
         </p:txBody>
@@ -23543,7 +24483,7 @@
                 <a:latin typeface="微软雅黑"/>
                 <a:ea typeface="微软雅黑"/>
               </a:rPr>
-              <a:t>5/21</a:t>
+              <a:t>5/22</a:t>
             </a:r>
           </a:p>
         </p:txBody>
@@ -24482,7 +25422,7 @@
                 <a:latin typeface="微软雅黑"/>
                 <a:ea typeface="微软雅黑"/>
               </a:rPr>
-              <a:t>6/21</a:t>
+              <a:t>6/22</a:t>
             </a:r>
           </a:p>
         </p:txBody>
@@ -25247,7 +26187,7 @@
                 <a:latin typeface="微软雅黑"/>
                 <a:ea typeface="微软雅黑"/>
               </a:rPr>
-              <a:t>7/21</a:t>
+              <a:t>7/22</a:t>
             </a:r>
           </a:p>
         </p:txBody>
@@ -26882,7 +27822,7 @@
                 <a:latin typeface="微软雅黑"/>
                 <a:ea typeface="微软雅黑"/>
               </a:rPr>
-              <a:t>8/21</a:t>
+              <a:t>8/22</a:t>
             </a:r>
           </a:p>
         </p:txBody>
@@ -28169,7 +29109,7 @@
                 <a:latin typeface="微软雅黑"/>
                 <a:ea typeface="微软雅黑"/>
               </a:rPr>
-              <a:t>9/21</a:t>
+              <a:t>9/22</a:t>
             </a:r>
           </a:p>
         </p:txBody>

--- a/docs/项目讲解.pptx
+++ b/docs/项目讲解.pptx
@@ -27,6 +27,7 @@
     <p:sldId id="275" r:id="rId26"/>
     <p:sldId id="276" r:id="rId27"/>
     <p:sldId id="277" r:id="rId28"/>
+    <p:sldId id="278" r:id="rId29"/>
   </p:sldIdLst>
   <p:sldSz cx="12191695" cy="6858000" type="screen4x3"/>
   <p:notesSz cx="6858000" cy="9144000"/>
@@ -4248,7 +4249,7 @@
                 <a:latin typeface="微软雅黑"/>
                 <a:ea typeface="微软雅黑"/>
               </a:rPr>
-              <a:t>10/22</a:t>
+              <a:t>10/23</a:t>
             </a:r>
           </a:p>
         </p:txBody>
@@ -5187,7 +5188,7 @@
                 <a:latin typeface="微软雅黑"/>
                 <a:ea typeface="微软雅黑"/>
               </a:rPr>
-              <a:t>11/22</a:t>
+              <a:t>11/23</a:t>
             </a:r>
           </a:p>
         </p:txBody>
@@ -6648,7 +6649,7 @@
                 <a:latin typeface="微软雅黑"/>
                 <a:ea typeface="微软雅黑"/>
               </a:rPr>
-              <a:t>12/22</a:t>
+              <a:t>12/23</a:t>
             </a:r>
           </a:p>
         </p:txBody>
@@ -8283,7 +8284,7 @@
                 <a:latin typeface="微软雅黑"/>
                 <a:ea typeface="微软雅黑"/>
               </a:rPr>
-              <a:t>13/22</a:t>
+              <a:t>13/23</a:t>
             </a:r>
           </a:p>
         </p:txBody>
@@ -8614,7 +8615,7 @@
                 <a:latin typeface="微软雅黑"/>
                 <a:ea typeface="微软雅黑"/>
               </a:rPr>
-              <a:t>API(5组20+接口)</a:t>
+              <a:t>API(7组)</a:t>
             </a:r>
           </a:p>
         </p:txBody>
@@ -8657,7 +8658,7 @@
                 <a:latin typeface="微软雅黑"/>
                 <a:ea typeface="微软雅黑"/>
               </a:rPr>
-              <a:t>认证(register含角色/login) / 行程(create/list/detail/status/agents/plan-file/report/cancel/delete/PATCH itinerary) / 审核 / 记忆(工单7) / 运维。</a:t>
+              <a:t>认证 / 行程(含 chat 对话式 + from-template 模板 + duplicate 复制) / 审核 / 记忆(工单7) / 经典线路 / 智能问答 / 团建规划。</a:t>
             </a:r>
           </a:p>
         </p:txBody>
@@ -8962,7 +8963,7 @@
                 <a:latin typeface="微软雅黑"/>
                 <a:ea typeface="微软雅黑"/>
               </a:rPr>
-              <a:t>前端 10 页面</a:t>
+              <a:t>前端 12 页面</a:t>
             </a:r>
           </a:p>
         </p:txBody>
@@ -9005,7 +9006,7 @@
                 <a:latin typeface="微软雅黑"/>
                 <a:ea typeface="微软雅黑"/>
               </a:rPr>
-              <a:t>登录注册 / 工作台 / 行程列表 / 行程详情 / 审核台 / 记忆图谱 / 系统说明 / 语音创建 / 对话式创建。</a:t>
+              <a:t>登录注册 / 工作台 / 行程列表 / 行程详情 / 审核台 / 记忆图谱(可视化) / 系统说明 / 语音创建 / 对话式创建 / 经典线路 / 智能问答 / 团建规划。</a:t>
             </a:r>
           </a:p>
         </p:txBody>
@@ -9310,7 +9311,7 @@
                 <a:latin typeface="微软雅黑"/>
                 <a:ea typeface="微软雅黑"/>
               </a:rPr>
-              <a:t>创建表单亮点</a:t>
+              <a:t>四种创建方式</a:t>
             </a:r>
           </a:p>
         </p:txBody>
@@ -9353,7 +9354,7 @@
                 <a:latin typeface="微软雅黑"/>
                 <a:ea typeface="微软雅黑"/>
               </a:rPr>
-              <a:t>成人关系 + 老人信息(年龄+性别+状态) + 儿童信息(年龄+身高+占座) + 学生学历 + 购票/酒店方式。</a:t>
+              <a:t>新建表单 + 语音创建(浏览器语音识别) + 对话式创建(AI 引导) + 经典线路模板(秒出)。</a:t>
             </a:r>
           </a:p>
         </p:txBody>
@@ -9484,7 +9485,7 @@
                 <a:latin typeface="微软雅黑"/>
                 <a:ea typeface="微软雅黑"/>
               </a:rPr>
-              <a:t>三种创建方式</a:t>
+              <a:t>短时规划</a:t>
             </a:r>
           </a:p>
         </p:txBody>
@@ -9527,7 +9528,7 @@
                 <a:latin typeface="微软雅黑"/>
                 <a:ea typeface="微软雅黑"/>
               </a:rPr>
-              <a:t>新建表单 + 语音创建(浏览器语音识别) + 对话式创建(AI 主动引导，像 DeepSeek 一样聊天)。</a:t>
+              <a:t>支持精确到小时（时长字段），半天/几小时团建式短途游，不住宿。</a:t>
             </a:r>
           </a:p>
         </p:txBody>
@@ -9570,7 +9571,7 @@
                 <a:latin typeface="微软雅黑"/>
                 <a:ea typeface="微软雅黑"/>
               </a:rPr>
-              <a:t>14/22</a:t>
+              <a:t>14/23</a:t>
             </a:r>
           </a:p>
         </p:txBody>
@@ -10857,7 +10858,7 @@
                 <a:latin typeface="微软雅黑"/>
                 <a:ea typeface="微软雅黑"/>
               </a:rPr>
-              <a:t>15/22</a:t>
+              <a:t>15/23</a:t>
             </a:r>
           </a:p>
         </p:txBody>
@@ -12318,7 +12319,7 @@
                 <a:latin typeface="微软雅黑"/>
                 <a:ea typeface="微软雅黑"/>
               </a:rPr>
-              <a:t>16/22</a:t>
+              <a:t>16/23</a:t>
             </a:r>
           </a:p>
         </p:txBody>
@@ -13605,7 +13606,7 @@
                 <a:latin typeface="微软雅黑"/>
                 <a:ea typeface="微软雅黑"/>
               </a:rPr>
-              <a:t>17/22</a:t>
+              <a:t>17/23</a:t>
             </a:r>
           </a:p>
         </p:txBody>
@@ -15066,7 +15067,7 @@
                 <a:latin typeface="微软雅黑"/>
                 <a:ea typeface="微软雅黑"/>
               </a:rPr>
-              <a:t>18/22</a:t>
+              <a:t>18/23</a:t>
             </a:r>
           </a:p>
         </p:txBody>
@@ -16353,7 +16354,7 @@
                 <a:latin typeface="微软雅黑"/>
                 <a:ea typeface="微软雅黑"/>
               </a:rPr>
-              <a:t>19/22</a:t>
+              <a:t>19/23</a:t>
             </a:r>
           </a:p>
         </p:txBody>
@@ -17284,7 +17285,7 @@
                 <a:latin typeface="微软雅黑"/>
                 <a:ea typeface="微软雅黑"/>
               </a:rPr>
-              <a:t>17  总结</a:t>
+              <a:t>17  团建与短时规划</a:t>
             </a:r>
           </a:p>
         </p:txBody>
@@ -17292,6 +17293,49 @@
       <p:sp>
         <p:nvSpPr>
           <p:cNvPr id="22" name="TextBox 21"/>
+          <p:cNvSpPr txBox="1"/>
+          <p:nvPr/>
+        </p:nvSpPr>
+        <p:spPr>
+          <a:xfrm>
+            <a:off x="6492240" y="6089904"/>
+            <a:ext cx="5120640" cy="457200"/>
+          </a:xfrm>
+          <a:prstGeom prst="rect">
+            <a:avLst/>
+          </a:prstGeom>
+          <a:noFill/>
+        </p:spPr>
+        <p:txBody>
+          <a:bodyPr wrap="square" anchor="t">
+            <a:spAutoFit/>
+          </a:bodyPr>
+          <a:lstStyle/>
+          <a:p>
+            <a:pPr algn="l">
+              <a:lnSpc>
+                <a:spcPct val="100000"/>
+              </a:lnSpc>
+              <a:spcAft>
+                <a:spcPts val="300"/>
+              </a:spcAft>
+            </a:pPr>
+            <a:r>
+              <a:rPr sz="1500" b="0">
+                <a:solidFill>
+                  <a:srgbClr val="1F2D3D"/>
+                </a:solidFill>
+                <a:latin typeface="微软雅黑"/>
+                <a:ea typeface="微软雅黑"/>
+              </a:rPr>
+              <a:t>18  总结</a:t>
+            </a:r>
+          </a:p>
+        </p:txBody>
+      </p:sp>
+      <p:sp>
+        <p:nvSpPr>
+          <p:cNvPr id="23" name="TextBox 22"/>
           <p:cNvSpPr txBox="1"/>
           <p:nvPr/>
         </p:nvSpPr>
@@ -17327,14 +17371,14 @@
                 <a:latin typeface="微软雅黑"/>
                 <a:ea typeface="微软雅黑"/>
               </a:rPr>
-              <a:t>2/22</a:t>
-            </a:r>
-          </a:p>
-        </p:txBody>
-      </p:sp>
-      <p:sp>
-        <p:nvSpPr>
-          <p:cNvPr id="23" name="TextBox 22"/>
+              <a:t>2/23</a:t>
+            </a:r>
+          </a:p>
+        </p:txBody>
+      </p:sp>
+      <p:sp>
+        <p:nvSpPr>
+          <p:cNvPr id="24" name="TextBox 23"/>
           <p:cNvSpPr txBox="1"/>
           <p:nvPr/>
         </p:nvSpPr>
@@ -18266,7 +18310,7 @@
                 <a:latin typeface="微软雅黑"/>
                 <a:ea typeface="微软雅黑"/>
               </a:rPr>
-              <a:t>20/22</a:t>
+              <a:t>20/23</a:t>
             </a:r>
           </a:p>
         </p:txBody>
@@ -19379,7 +19423,7 @@
                 <a:latin typeface="微软雅黑"/>
                 <a:ea typeface="微软雅黑"/>
               </a:rPr>
-              <a:t>21/22</a:t>
+              <a:t>21/23</a:t>
             </a:r>
           </a:p>
         </p:txBody>
@@ -19436,6 +19480,1119 @@
 </file>
 
 <file path=ppt/slides/slide22.xml><?xml version="1.0" encoding="utf-8"?>
+<p:sld xmlns:a="http://schemas.openxmlformats.org/drawingml/2006/main" xmlns:p="http://schemas.openxmlformats.org/presentationml/2006/main" xmlns:r="http://schemas.openxmlformats.org/officeDocument/2006/relationships">
+  <p:cSld>
+    <p:bg>
+      <p:bgPr>
+        <a:solidFill>
+          <a:srgbClr val="FFFFFF"/>
+        </a:solidFill>
+        <a:effectLst/>
+      </p:bgPr>
+    </p:bg>
+    <p:spTree>
+      <p:nvGrpSpPr>
+        <p:cNvPr id="1" name=""/>
+        <p:cNvGrpSpPr/>
+        <p:nvPr/>
+      </p:nvGrpSpPr>
+      <p:grpSpPr/>
+      <p:sp>
+        <p:nvSpPr>
+          <p:cNvPr id="2" name="Rectangle 1"/>
+          <p:cNvSpPr/>
+          <p:nvPr/>
+        </p:nvSpPr>
+        <p:spPr>
+          <a:xfrm>
+            <a:off x="0" y="0"/>
+            <a:ext cx="12191695" cy="164592"/>
+          </a:xfrm>
+          <a:prstGeom prst="rect">
+            <a:avLst/>
+          </a:prstGeom>
+          <a:solidFill>
+            <a:srgbClr val="1677FF"/>
+          </a:solidFill>
+          <a:ln>
+            <a:noFill/>
+          </a:ln>
+          <a:effectLst/>
+        </p:spPr>
+        <p:style>
+          <a:lnRef idx="1">
+            <a:schemeClr val="accent1"/>
+          </a:lnRef>
+          <a:fillRef idx="3">
+            <a:schemeClr val="accent1"/>
+          </a:fillRef>
+          <a:effectRef idx="2">
+            <a:schemeClr val="accent1"/>
+          </a:effectRef>
+          <a:fontRef idx="minor">
+            <a:schemeClr val="lt1"/>
+          </a:fontRef>
+        </p:style>
+        <p:txBody>
+          <a:bodyPr rtlCol="0" anchor="ctr"/>
+          <a:lstStyle/>
+          <a:p>
+            <a:pPr algn="ctr"/>
+          </a:p>
+        </p:txBody>
+      </p:sp>
+      <p:sp>
+        <p:nvSpPr>
+          <p:cNvPr id="3" name="TextBox 2"/>
+          <p:cNvSpPr txBox="1"/>
+          <p:nvPr/>
+        </p:nvSpPr>
+        <p:spPr>
+          <a:xfrm>
+            <a:off x="457200" y="292608"/>
+            <a:ext cx="10058400" cy="548640"/>
+          </a:xfrm>
+          <a:prstGeom prst="rect">
+            <a:avLst/>
+          </a:prstGeom>
+          <a:noFill/>
+        </p:spPr>
+        <p:txBody>
+          <a:bodyPr wrap="square" anchor="t">
+            <a:spAutoFit/>
+          </a:bodyPr>
+          <a:lstStyle/>
+          <a:p>
+            <a:pPr algn="l">
+              <a:lnSpc>
+                <a:spcPct val="100000"/>
+              </a:lnSpc>
+              <a:spcAft>
+                <a:spcPts val="300"/>
+              </a:spcAft>
+            </a:pPr>
+            <a:r>
+              <a:rPr sz="2500" b="1">
+                <a:solidFill>
+                  <a:srgbClr val="1F2D3D"/>
+                </a:solidFill>
+                <a:latin typeface="微软雅黑"/>
+                <a:ea typeface="微软雅黑"/>
+              </a:rPr>
+              <a:t>团建规划与短时规划（独立模式）</a:t>
+            </a:r>
+          </a:p>
+        </p:txBody>
+      </p:sp>
+      <p:sp>
+        <p:nvSpPr>
+          <p:cNvPr id="4" name="Rectangle 3"/>
+          <p:cNvSpPr/>
+          <p:nvPr/>
+        </p:nvSpPr>
+        <p:spPr>
+          <a:xfrm>
+            <a:off x="457200" y="1188720"/>
+            <a:ext cx="2011680" cy="41148"/>
+          </a:xfrm>
+          <a:prstGeom prst="rect">
+            <a:avLst/>
+          </a:prstGeom>
+          <a:solidFill>
+            <a:srgbClr val="1677FF"/>
+          </a:solidFill>
+          <a:ln>
+            <a:noFill/>
+          </a:ln>
+          <a:effectLst/>
+        </p:spPr>
+        <p:style>
+          <a:lnRef idx="1">
+            <a:schemeClr val="accent1"/>
+          </a:lnRef>
+          <a:fillRef idx="3">
+            <a:schemeClr val="accent1"/>
+          </a:fillRef>
+          <a:effectRef idx="2">
+            <a:schemeClr val="accent1"/>
+          </a:effectRef>
+          <a:fontRef idx="minor">
+            <a:schemeClr val="lt1"/>
+          </a:fontRef>
+        </p:style>
+        <p:txBody>
+          <a:bodyPr rtlCol="0" anchor="ctr"/>
+          <a:lstStyle/>
+          <a:p>
+            <a:pPr algn="ctr"/>
+          </a:p>
+        </p:txBody>
+      </p:sp>
+      <p:sp>
+        <p:nvSpPr>
+          <p:cNvPr id="5" name="Rectangle 4"/>
+          <p:cNvSpPr/>
+          <p:nvPr/>
+        </p:nvSpPr>
+        <p:spPr>
+          <a:xfrm>
+            <a:off x="457200" y="1417320"/>
+            <a:ext cx="11247120" cy="919886"/>
+          </a:xfrm>
+          <a:prstGeom prst="rect">
+            <a:avLst/>
+          </a:prstGeom>
+          <a:solidFill>
+            <a:srgbClr val="F7FAFC"/>
+          </a:solidFill>
+          <a:ln>
+            <a:noFill/>
+          </a:ln>
+          <a:effectLst/>
+        </p:spPr>
+        <p:style>
+          <a:lnRef idx="1">
+            <a:schemeClr val="accent1"/>
+          </a:lnRef>
+          <a:fillRef idx="3">
+            <a:schemeClr val="accent1"/>
+          </a:fillRef>
+          <a:effectRef idx="2">
+            <a:schemeClr val="accent1"/>
+          </a:effectRef>
+          <a:fontRef idx="minor">
+            <a:schemeClr val="lt1"/>
+          </a:fontRef>
+        </p:style>
+        <p:txBody>
+          <a:bodyPr rtlCol="0" anchor="ctr"/>
+          <a:lstStyle/>
+          <a:p>
+            <a:pPr algn="ctr"/>
+          </a:p>
+        </p:txBody>
+      </p:sp>
+      <p:sp>
+        <p:nvSpPr>
+          <p:cNvPr id="6" name="Rectangle 5"/>
+          <p:cNvSpPr/>
+          <p:nvPr/>
+        </p:nvSpPr>
+        <p:spPr>
+          <a:xfrm>
+            <a:off x="457200" y="1417320"/>
+            <a:ext cx="73152" cy="919886"/>
+          </a:xfrm>
+          <a:prstGeom prst="rect">
+            <a:avLst/>
+          </a:prstGeom>
+          <a:solidFill>
+            <a:srgbClr val="1677FF"/>
+          </a:solidFill>
+          <a:ln>
+            <a:noFill/>
+          </a:ln>
+          <a:effectLst/>
+        </p:spPr>
+        <p:style>
+          <a:lnRef idx="1">
+            <a:schemeClr val="accent1"/>
+          </a:lnRef>
+          <a:fillRef idx="3">
+            <a:schemeClr val="accent1"/>
+          </a:fillRef>
+          <a:effectRef idx="2">
+            <a:schemeClr val="accent1"/>
+          </a:effectRef>
+          <a:fontRef idx="minor">
+            <a:schemeClr val="lt1"/>
+          </a:fontRef>
+        </p:style>
+        <p:txBody>
+          <a:bodyPr rtlCol="0" anchor="ctr"/>
+          <a:lstStyle/>
+          <a:p>
+            <a:pPr algn="ctr"/>
+          </a:p>
+        </p:txBody>
+      </p:sp>
+      <p:sp>
+        <p:nvSpPr>
+          <p:cNvPr id="7" name="TextBox 6"/>
+          <p:cNvSpPr txBox="1"/>
+          <p:nvPr/>
+        </p:nvSpPr>
+        <p:spPr>
+          <a:xfrm>
+            <a:off x="777240" y="1508760"/>
+            <a:ext cx="10789920" cy="365760"/>
+          </a:xfrm>
+          <a:prstGeom prst="rect">
+            <a:avLst/>
+          </a:prstGeom>
+          <a:noFill/>
+        </p:spPr>
+        <p:txBody>
+          <a:bodyPr wrap="square" anchor="t">
+            <a:spAutoFit/>
+          </a:bodyPr>
+          <a:lstStyle/>
+          <a:p>
+            <a:pPr algn="l">
+              <a:lnSpc>
+                <a:spcPct val="100000"/>
+              </a:lnSpc>
+              <a:spcAft>
+                <a:spcPts val="300"/>
+              </a:spcAft>
+            </a:pPr>
+            <a:r>
+              <a:rPr sz="1400" b="1">
+                <a:solidFill>
+                  <a:srgbClr val="0A3D91"/>
+                </a:solidFill>
+                <a:latin typeface="微软雅黑"/>
+                <a:ea typeface="微软雅黑"/>
+              </a:rPr>
+              <a:t>团建规划</a:t>
+            </a:r>
+          </a:p>
+        </p:txBody>
+      </p:sp>
+      <p:sp>
+        <p:nvSpPr>
+          <p:cNvPr id="8" name="TextBox 7"/>
+          <p:cNvSpPr txBox="1"/>
+          <p:nvPr/>
+        </p:nvSpPr>
+        <p:spPr>
+          <a:xfrm>
+            <a:off x="777240" y="1874520"/>
+            <a:ext cx="10789920" cy="381273710400"/>
+          </a:xfrm>
+          <a:prstGeom prst="rect">
+            <a:avLst/>
+          </a:prstGeom>
+          <a:noFill/>
+        </p:spPr>
+        <p:txBody>
+          <a:bodyPr wrap="square" anchor="t">
+            <a:spAutoFit/>
+          </a:bodyPr>
+          <a:lstStyle/>
+          <a:p>
+            <a:pPr algn="l">
+              <a:lnSpc>
+                <a:spcPct val="105000"/>
+              </a:lnSpc>
+              <a:spcAft>
+                <a:spcPts val="300"/>
+              </a:spcAft>
+            </a:pPr>
+            <a:r>
+              <a:rPr sz="1200" b="0">
+                <a:solidFill>
+                  <a:srgbClr val="1F2D3D"/>
+                </a:solidFill>
+                <a:latin typeface="微软雅黑"/>
+                <a:ea typeface="微软雅黑"/>
+              </a:rPr>
+              <a:t>独立于旅游的模式，核心是「场地+活动+餐饮+人均预算」，不是景点/门票。</a:t>
+            </a:r>
+          </a:p>
+        </p:txBody>
+      </p:sp>
+      <p:sp>
+        <p:nvSpPr>
+          <p:cNvPr id="9" name="Rectangle 8"/>
+          <p:cNvSpPr/>
+          <p:nvPr/>
+        </p:nvSpPr>
+        <p:spPr>
+          <a:xfrm>
+            <a:off x="457200" y="2410358"/>
+            <a:ext cx="11247120" cy="919886"/>
+          </a:xfrm>
+          <a:prstGeom prst="rect">
+            <a:avLst/>
+          </a:prstGeom>
+          <a:solidFill>
+            <a:srgbClr val="F7FAFC"/>
+          </a:solidFill>
+          <a:ln>
+            <a:noFill/>
+          </a:ln>
+          <a:effectLst/>
+        </p:spPr>
+        <p:style>
+          <a:lnRef idx="1">
+            <a:schemeClr val="accent1"/>
+          </a:lnRef>
+          <a:fillRef idx="3">
+            <a:schemeClr val="accent1"/>
+          </a:fillRef>
+          <a:effectRef idx="2">
+            <a:schemeClr val="accent1"/>
+          </a:effectRef>
+          <a:fontRef idx="minor">
+            <a:schemeClr val="lt1"/>
+          </a:fontRef>
+        </p:style>
+        <p:txBody>
+          <a:bodyPr rtlCol="0" anchor="ctr"/>
+          <a:lstStyle/>
+          <a:p>
+            <a:pPr algn="ctr"/>
+          </a:p>
+        </p:txBody>
+      </p:sp>
+      <p:sp>
+        <p:nvSpPr>
+          <p:cNvPr id="10" name="Rectangle 9"/>
+          <p:cNvSpPr/>
+          <p:nvPr/>
+        </p:nvSpPr>
+        <p:spPr>
+          <a:xfrm>
+            <a:off x="457200" y="2410358"/>
+            <a:ext cx="73152" cy="919886"/>
+          </a:xfrm>
+          <a:prstGeom prst="rect">
+            <a:avLst/>
+          </a:prstGeom>
+          <a:solidFill>
+            <a:srgbClr val="1677FF"/>
+          </a:solidFill>
+          <a:ln>
+            <a:noFill/>
+          </a:ln>
+          <a:effectLst/>
+        </p:spPr>
+        <p:style>
+          <a:lnRef idx="1">
+            <a:schemeClr val="accent1"/>
+          </a:lnRef>
+          <a:fillRef idx="3">
+            <a:schemeClr val="accent1"/>
+          </a:fillRef>
+          <a:effectRef idx="2">
+            <a:schemeClr val="accent1"/>
+          </a:effectRef>
+          <a:fontRef idx="minor">
+            <a:schemeClr val="lt1"/>
+          </a:fontRef>
+        </p:style>
+        <p:txBody>
+          <a:bodyPr rtlCol="0" anchor="ctr"/>
+          <a:lstStyle/>
+          <a:p>
+            <a:pPr algn="ctr"/>
+          </a:p>
+        </p:txBody>
+      </p:sp>
+      <p:sp>
+        <p:nvSpPr>
+          <p:cNvPr id="11" name="TextBox 10"/>
+          <p:cNvSpPr txBox="1"/>
+          <p:nvPr/>
+        </p:nvSpPr>
+        <p:spPr>
+          <a:xfrm>
+            <a:off x="777240" y="2501798"/>
+            <a:ext cx="10789920" cy="365760"/>
+          </a:xfrm>
+          <a:prstGeom prst="rect">
+            <a:avLst/>
+          </a:prstGeom>
+          <a:noFill/>
+        </p:spPr>
+        <p:txBody>
+          <a:bodyPr wrap="square" anchor="t">
+            <a:spAutoFit/>
+          </a:bodyPr>
+          <a:lstStyle/>
+          <a:p>
+            <a:pPr algn="l">
+              <a:lnSpc>
+                <a:spcPct val="100000"/>
+              </a:lnSpc>
+              <a:spcAft>
+                <a:spcPts val="300"/>
+              </a:spcAft>
+            </a:pPr>
+            <a:r>
+              <a:rPr sz="1400" b="1">
+                <a:solidFill>
+                  <a:srgbClr val="0A3D91"/>
+                </a:solidFill>
+                <a:latin typeface="微软雅黑"/>
+                <a:ea typeface="微软雅黑"/>
+              </a:rPr>
+              <a:t>6 类团建类型</a:t>
+            </a:r>
+          </a:p>
+        </p:txBody>
+      </p:sp>
+      <p:sp>
+        <p:nvSpPr>
+          <p:cNvPr id="12" name="TextBox 11"/>
+          <p:cNvSpPr txBox="1"/>
+          <p:nvPr/>
+        </p:nvSpPr>
+        <p:spPr>
+          <a:xfrm>
+            <a:off x="777240" y="2867558"/>
+            <a:ext cx="10789920" cy="381273710400"/>
+          </a:xfrm>
+          <a:prstGeom prst="rect">
+            <a:avLst/>
+          </a:prstGeom>
+          <a:noFill/>
+        </p:spPr>
+        <p:txBody>
+          <a:bodyPr wrap="square" anchor="t">
+            <a:spAutoFit/>
+          </a:bodyPr>
+          <a:lstStyle/>
+          <a:p>
+            <a:pPr algn="l">
+              <a:lnSpc>
+                <a:spcPct val="105000"/>
+              </a:lnSpc>
+              <a:spcAft>
+                <a:spcPts val="300"/>
+              </a:spcAft>
+            </a:pPr>
+            <a:r>
+              <a:rPr sz="1200" b="0">
+                <a:solidFill>
+                  <a:srgbClr val="1F2D3D"/>
+                </a:solidFill>
+                <a:latin typeface="微软雅黑"/>
+                <a:ea typeface="微软雅黑"/>
+              </a:rPr>
+              <a:t>聚餐 / 桌游轰趴 / 烧烤 / 拓展 / 郊游 / 会议，每种预置场地+活动+餐饮模板。</a:t>
+            </a:r>
+          </a:p>
+        </p:txBody>
+      </p:sp>
+      <p:sp>
+        <p:nvSpPr>
+          <p:cNvPr id="13" name="Rectangle 12"/>
+          <p:cNvSpPr/>
+          <p:nvPr/>
+        </p:nvSpPr>
+        <p:spPr>
+          <a:xfrm>
+            <a:off x="457200" y="3403396"/>
+            <a:ext cx="11247120" cy="919886"/>
+          </a:xfrm>
+          <a:prstGeom prst="rect">
+            <a:avLst/>
+          </a:prstGeom>
+          <a:solidFill>
+            <a:srgbClr val="F7FAFC"/>
+          </a:solidFill>
+          <a:ln>
+            <a:noFill/>
+          </a:ln>
+          <a:effectLst/>
+        </p:spPr>
+        <p:style>
+          <a:lnRef idx="1">
+            <a:schemeClr val="accent1"/>
+          </a:lnRef>
+          <a:fillRef idx="3">
+            <a:schemeClr val="accent1"/>
+          </a:fillRef>
+          <a:effectRef idx="2">
+            <a:schemeClr val="accent1"/>
+          </a:effectRef>
+          <a:fontRef idx="minor">
+            <a:schemeClr val="lt1"/>
+          </a:fontRef>
+        </p:style>
+        <p:txBody>
+          <a:bodyPr rtlCol="0" anchor="ctr"/>
+          <a:lstStyle/>
+          <a:p>
+            <a:pPr algn="ctr"/>
+          </a:p>
+        </p:txBody>
+      </p:sp>
+      <p:sp>
+        <p:nvSpPr>
+          <p:cNvPr id="14" name="Rectangle 13"/>
+          <p:cNvSpPr/>
+          <p:nvPr/>
+        </p:nvSpPr>
+        <p:spPr>
+          <a:xfrm>
+            <a:off x="457200" y="3403396"/>
+            <a:ext cx="73152" cy="919886"/>
+          </a:xfrm>
+          <a:prstGeom prst="rect">
+            <a:avLst/>
+          </a:prstGeom>
+          <a:solidFill>
+            <a:srgbClr val="1677FF"/>
+          </a:solidFill>
+          <a:ln>
+            <a:noFill/>
+          </a:ln>
+          <a:effectLst/>
+        </p:spPr>
+        <p:style>
+          <a:lnRef idx="1">
+            <a:schemeClr val="accent1"/>
+          </a:lnRef>
+          <a:fillRef idx="3">
+            <a:schemeClr val="accent1"/>
+          </a:fillRef>
+          <a:effectRef idx="2">
+            <a:schemeClr val="accent1"/>
+          </a:effectRef>
+          <a:fontRef idx="minor">
+            <a:schemeClr val="lt1"/>
+          </a:fontRef>
+        </p:style>
+        <p:txBody>
+          <a:bodyPr rtlCol="0" anchor="ctr"/>
+          <a:lstStyle/>
+          <a:p>
+            <a:pPr algn="ctr"/>
+          </a:p>
+        </p:txBody>
+      </p:sp>
+      <p:sp>
+        <p:nvSpPr>
+          <p:cNvPr id="15" name="TextBox 14"/>
+          <p:cNvSpPr txBox="1"/>
+          <p:nvPr/>
+        </p:nvSpPr>
+        <p:spPr>
+          <a:xfrm>
+            <a:off x="777240" y="3494836"/>
+            <a:ext cx="10789920" cy="365760"/>
+          </a:xfrm>
+          <a:prstGeom prst="rect">
+            <a:avLst/>
+          </a:prstGeom>
+          <a:noFill/>
+        </p:spPr>
+        <p:txBody>
+          <a:bodyPr wrap="square" anchor="t">
+            <a:spAutoFit/>
+          </a:bodyPr>
+          <a:lstStyle/>
+          <a:p>
+            <a:pPr algn="l">
+              <a:lnSpc>
+                <a:spcPct val="100000"/>
+              </a:lnSpc>
+              <a:spcAft>
+                <a:spcPts val="300"/>
+              </a:spcAft>
+            </a:pPr>
+            <a:r>
+              <a:rPr sz="1400" b="1">
+                <a:solidFill>
+                  <a:srgbClr val="0A3D91"/>
+                </a:solidFill>
+                <a:latin typeface="微软雅黑"/>
+                <a:ea typeface="微软雅黑"/>
+              </a:rPr>
+              <a:t>输入与输出</a:t>
+            </a:r>
+          </a:p>
+        </p:txBody>
+      </p:sp>
+      <p:sp>
+        <p:nvSpPr>
+          <p:cNvPr id="16" name="TextBox 15"/>
+          <p:cNvSpPr txBox="1"/>
+          <p:nvPr/>
+        </p:nvSpPr>
+        <p:spPr>
+          <a:xfrm>
+            <a:off x="777240" y="3860596"/>
+            <a:ext cx="10789920" cy="381273710400"/>
+          </a:xfrm>
+          <a:prstGeom prst="rect">
+            <a:avLst/>
+          </a:prstGeom>
+          <a:noFill/>
+        </p:spPr>
+        <p:txBody>
+          <a:bodyPr wrap="square" anchor="t">
+            <a:spAutoFit/>
+          </a:bodyPr>
+          <a:lstStyle/>
+          <a:p>
+            <a:pPr algn="l">
+              <a:lnSpc>
+                <a:spcPct val="105000"/>
+              </a:lnSpc>
+              <a:spcAft>
+                <a:spcPts val="300"/>
+              </a:spcAft>
+            </a:pPr>
+            <a:r>
+              <a:rPr sz="1200" b="0">
+                <a:solidFill>
+                  <a:srgbClr val="1F2D3D"/>
+                </a:solidFill>
+                <a:latin typeface="微软雅黑"/>
+                <a:ea typeface="微软雅黑"/>
+              </a:rPr>
+              <a:t>输入：类型+人数+时长+预算；输出：推荐场地 + 活动项目 + 餐饮方案 + 时间安排 + 人均预算明细。</a:t>
+            </a:r>
+          </a:p>
+        </p:txBody>
+      </p:sp>
+      <p:sp>
+        <p:nvSpPr>
+          <p:cNvPr id="17" name="Rectangle 16"/>
+          <p:cNvSpPr/>
+          <p:nvPr/>
+        </p:nvSpPr>
+        <p:spPr>
+          <a:xfrm>
+            <a:off x="457200" y="4396434"/>
+            <a:ext cx="11247120" cy="919886"/>
+          </a:xfrm>
+          <a:prstGeom prst="rect">
+            <a:avLst/>
+          </a:prstGeom>
+          <a:solidFill>
+            <a:srgbClr val="F7FAFC"/>
+          </a:solidFill>
+          <a:ln>
+            <a:noFill/>
+          </a:ln>
+          <a:effectLst/>
+        </p:spPr>
+        <p:style>
+          <a:lnRef idx="1">
+            <a:schemeClr val="accent1"/>
+          </a:lnRef>
+          <a:fillRef idx="3">
+            <a:schemeClr val="accent1"/>
+          </a:fillRef>
+          <a:effectRef idx="2">
+            <a:schemeClr val="accent1"/>
+          </a:effectRef>
+          <a:fontRef idx="minor">
+            <a:schemeClr val="lt1"/>
+          </a:fontRef>
+        </p:style>
+        <p:txBody>
+          <a:bodyPr rtlCol="0" anchor="ctr"/>
+          <a:lstStyle/>
+          <a:p>
+            <a:pPr algn="ctr"/>
+          </a:p>
+        </p:txBody>
+      </p:sp>
+      <p:sp>
+        <p:nvSpPr>
+          <p:cNvPr id="18" name="Rectangle 17"/>
+          <p:cNvSpPr/>
+          <p:nvPr/>
+        </p:nvSpPr>
+        <p:spPr>
+          <a:xfrm>
+            <a:off x="457200" y="4396434"/>
+            <a:ext cx="73152" cy="919886"/>
+          </a:xfrm>
+          <a:prstGeom prst="rect">
+            <a:avLst/>
+          </a:prstGeom>
+          <a:solidFill>
+            <a:srgbClr val="1677FF"/>
+          </a:solidFill>
+          <a:ln>
+            <a:noFill/>
+          </a:ln>
+          <a:effectLst/>
+        </p:spPr>
+        <p:style>
+          <a:lnRef idx="1">
+            <a:schemeClr val="accent1"/>
+          </a:lnRef>
+          <a:fillRef idx="3">
+            <a:schemeClr val="accent1"/>
+          </a:fillRef>
+          <a:effectRef idx="2">
+            <a:schemeClr val="accent1"/>
+          </a:effectRef>
+          <a:fontRef idx="minor">
+            <a:schemeClr val="lt1"/>
+          </a:fontRef>
+        </p:style>
+        <p:txBody>
+          <a:bodyPr rtlCol="0" anchor="ctr"/>
+          <a:lstStyle/>
+          <a:p>
+            <a:pPr algn="ctr"/>
+          </a:p>
+        </p:txBody>
+      </p:sp>
+      <p:sp>
+        <p:nvSpPr>
+          <p:cNvPr id="19" name="TextBox 18"/>
+          <p:cNvSpPr txBox="1"/>
+          <p:nvPr/>
+        </p:nvSpPr>
+        <p:spPr>
+          <a:xfrm>
+            <a:off x="777240" y="4487874"/>
+            <a:ext cx="10789920" cy="365760"/>
+          </a:xfrm>
+          <a:prstGeom prst="rect">
+            <a:avLst/>
+          </a:prstGeom>
+          <a:noFill/>
+        </p:spPr>
+        <p:txBody>
+          <a:bodyPr wrap="square" anchor="t">
+            <a:spAutoFit/>
+          </a:bodyPr>
+          <a:lstStyle/>
+          <a:p>
+            <a:pPr algn="l">
+              <a:lnSpc>
+                <a:spcPct val="100000"/>
+              </a:lnSpc>
+              <a:spcAft>
+                <a:spcPts val="300"/>
+              </a:spcAft>
+            </a:pPr>
+            <a:r>
+              <a:rPr sz="1400" b="1">
+                <a:solidFill>
+                  <a:srgbClr val="0A3D91"/>
+                </a:solidFill>
+                <a:latin typeface="微软雅黑"/>
+                <a:ea typeface="微软雅黑"/>
+              </a:rPr>
+              <a:t>短时规划</a:t>
+            </a:r>
+          </a:p>
+        </p:txBody>
+      </p:sp>
+      <p:sp>
+        <p:nvSpPr>
+          <p:cNvPr id="20" name="TextBox 19"/>
+          <p:cNvSpPr txBox="1"/>
+          <p:nvPr/>
+        </p:nvSpPr>
+        <p:spPr>
+          <a:xfrm>
+            <a:off x="777240" y="4853634"/>
+            <a:ext cx="10789920" cy="381273710400"/>
+          </a:xfrm>
+          <a:prstGeom prst="rect">
+            <a:avLst/>
+          </a:prstGeom>
+          <a:noFill/>
+        </p:spPr>
+        <p:txBody>
+          <a:bodyPr wrap="square" anchor="t">
+            <a:spAutoFit/>
+          </a:bodyPr>
+          <a:lstStyle/>
+          <a:p>
+            <a:pPr algn="l">
+              <a:lnSpc>
+                <a:spcPct val="105000"/>
+              </a:lnSpc>
+              <a:spcAft>
+                <a:spcPts val="300"/>
+              </a:spcAft>
+            </a:pPr>
+            <a:r>
+              <a:rPr sz="1200" b="0">
+                <a:solidFill>
+                  <a:srgbClr val="1F2D3D"/>
+                </a:solidFill>
+                <a:latin typeface="微软雅黑"/>
+                <a:ea typeface="微软雅黑"/>
+              </a:rPr>
+              <a:t>支持精确到小时（时长字段），半天/几小时短途游，不住宿，门票餐饮按小时折算。</a:t>
+            </a:r>
+          </a:p>
+        </p:txBody>
+      </p:sp>
+      <p:sp>
+        <p:nvSpPr>
+          <p:cNvPr id="21" name="Rectangle 20"/>
+          <p:cNvSpPr/>
+          <p:nvPr/>
+        </p:nvSpPr>
+        <p:spPr>
+          <a:xfrm>
+            <a:off x="457200" y="5389472"/>
+            <a:ext cx="11247120" cy="919886"/>
+          </a:xfrm>
+          <a:prstGeom prst="rect">
+            <a:avLst/>
+          </a:prstGeom>
+          <a:solidFill>
+            <a:srgbClr val="F7FAFC"/>
+          </a:solidFill>
+          <a:ln>
+            <a:noFill/>
+          </a:ln>
+          <a:effectLst/>
+        </p:spPr>
+        <p:style>
+          <a:lnRef idx="1">
+            <a:schemeClr val="accent1"/>
+          </a:lnRef>
+          <a:fillRef idx="3">
+            <a:schemeClr val="accent1"/>
+          </a:fillRef>
+          <a:effectRef idx="2">
+            <a:schemeClr val="accent1"/>
+          </a:effectRef>
+          <a:fontRef idx="minor">
+            <a:schemeClr val="lt1"/>
+          </a:fontRef>
+        </p:style>
+        <p:txBody>
+          <a:bodyPr rtlCol="0" anchor="ctr"/>
+          <a:lstStyle/>
+          <a:p>
+            <a:pPr algn="ctr"/>
+          </a:p>
+        </p:txBody>
+      </p:sp>
+      <p:sp>
+        <p:nvSpPr>
+          <p:cNvPr id="22" name="Rectangle 21"/>
+          <p:cNvSpPr/>
+          <p:nvPr/>
+        </p:nvSpPr>
+        <p:spPr>
+          <a:xfrm>
+            <a:off x="457200" y="5389472"/>
+            <a:ext cx="73152" cy="919886"/>
+          </a:xfrm>
+          <a:prstGeom prst="rect">
+            <a:avLst/>
+          </a:prstGeom>
+          <a:solidFill>
+            <a:srgbClr val="1677FF"/>
+          </a:solidFill>
+          <a:ln>
+            <a:noFill/>
+          </a:ln>
+          <a:effectLst/>
+        </p:spPr>
+        <p:style>
+          <a:lnRef idx="1">
+            <a:schemeClr val="accent1"/>
+          </a:lnRef>
+          <a:fillRef idx="3">
+            <a:schemeClr val="accent1"/>
+          </a:fillRef>
+          <a:effectRef idx="2">
+            <a:schemeClr val="accent1"/>
+          </a:effectRef>
+          <a:fontRef idx="minor">
+            <a:schemeClr val="lt1"/>
+          </a:fontRef>
+        </p:style>
+        <p:txBody>
+          <a:bodyPr rtlCol="0" anchor="ctr"/>
+          <a:lstStyle/>
+          <a:p>
+            <a:pPr algn="ctr"/>
+          </a:p>
+        </p:txBody>
+      </p:sp>
+      <p:sp>
+        <p:nvSpPr>
+          <p:cNvPr id="23" name="TextBox 22"/>
+          <p:cNvSpPr txBox="1"/>
+          <p:nvPr/>
+        </p:nvSpPr>
+        <p:spPr>
+          <a:xfrm>
+            <a:off x="777240" y="5480912"/>
+            <a:ext cx="10789920" cy="365760"/>
+          </a:xfrm>
+          <a:prstGeom prst="rect">
+            <a:avLst/>
+          </a:prstGeom>
+          <a:noFill/>
+        </p:spPr>
+        <p:txBody>
+          <a:bodyPr wrap="square" anchor="t">
+            <a:spAutoFit/>
+          </a:bodyPr>
+          <a:lstStyle/>
+          <a:p>
+            <a:pPr algn="l">
+              <a:lnSpc>
+                <a:spcPct val="100000"/>
+              </a:lnSpc>
+              <a:spcAft>
+                <a:spcPts val="300"/>
+              </a:spcAft>
+            </a:pPr>
+            <a:r>
+              <a:rPr sz="1400" b="1">
+                <a:solidFill>
+                  <a:srgbClr val="0A3D91"/>
+                </a:solidFill>
+                <a:latin typeface="微软雅黑"/>
+                <a:ea typeface="微软雅黑"/>
+              </a:rPr>
+              <a:t>与旅游的区别</a:t>
+            </a:r>
+          </a:p>
+        </p:txBody>
+      </p:sp>
+      <p:sp>
+        <p:nvSpPr>
+          <p:cNvPr id="24" name="TextBox 23"/>
+          <p:cNvSpPr txBox="1"/>
+          <p:nvPr/>
+        </p:nvSpPr>
+        <p:spPr>
+          <a:xfrm>
+            <a:off x="777240" y="5846672"/>
+            <a:ext cx="10789920" cy="381273710400"/>
+          </a:xfrm>
+          <a:prstGeom prst="rect">
+            <a:avLst/>
+          </a:prstGeom>
+          <a:noFill/>
+        </p:spPr>
+        <p:txBody>
+          <a:bodyPr wrap="square" anchor="t">
+            <a:spAutoFit/>
+          </a:bodyPr>
+          <a:lstStyle/>
+          <a:p>
+            <a:pPr algn="l">
+              <a:lnSpc>
+                <a:spcPct val="105000"/>
+              </a:lnSpc>
+              <a:spcAft>
+                <a:spcPts val="300"/>
+              </a:spcAft>
+            </a:pPr>
+            <a:r>
+              <a:rPr sz="1200" b="0">
+                <a:solidFill>
+                  <a:srgbClr val="1F2D3D"/>
+                </a:solidFill>
+                <a:latin typeface="微软雅黑"/>
+                <a:ea typeface="微软雅黑"/>
+              </a:rPr>
+              <a:t>旅游=景点调研+门票分档+住宿；团建=场地匹配+活动+聚餐分摊，两者业务模型完全不同。</a:t>
+            </a:r>
+          </a:p>
+        </p:txBody>
+      </p:sp>
+      <p:sp>
+        <p:nvSpPr>
+          <p:cNvPr id="25" name="TextBox 24"/>
+          <p:cNvSpPr txBox="1"/>
+          <p:nvPr/>
+        </p:nvSpPr>
+        <p:spPr>
+          <a:xfrm>
+            <a:off x="10972800" y="6446520"/>
+            <a:ext cx="914400" cy="365760"/>
+          </a:xfrm>
+          <a:prstGeom prst="rect">
+            <a:avLst/>
+          </a:prstGeom>
+          <a:noFill/>
+        </p:spPr>
+        <p:txBody>
+          <a:bodyPr wrap="square" anchor="t">
+            <a:spAutoFit/>
+          </a:bodyPr>
+          <a:lstStyle/>
+          <a:p>
+            <a:pPr algn="r">
+              <a:lnSpc>
+                <a:spcPct val="100000"/>
+              </a:lnSpc>
+              <a:spcAft>
+                <a:spcPts val="300"/>
+              </a:spcAft>
+            </a:pPr>
+            <a:r>
+              <a:rPr sz="1000" b="0">
+                <a:solidFill>
+                  <a:srgbClr val="8C8C8C"/>
+                </a:solidFill>
+                <a:latin typeface="微软雅黑"/>
+                <a:ea typeface="微软雅黑"/>
+              </a:rPr>
+              <a:t>22/23</a:t>
+            </a:r>
+          </a:p>
+        </p:txBody>
+      </p:sp>
+      <p:sp>
+        <p:nvSpPr>
+          <p:cNvPr id="26" name="TextBox 25"/>
+          <p:cNvSpPr txBox="1"/>
+          <p:nvPr/>
+        </p:nvSpPr>
+        <p:spPr>
+          <a:xfrm>
+            <a:off x="457200" y="6446520"/>
+            <a:ext cx="5486400" cy="365760"/>
+          </a:xfrm>
+          <a:prstGeom prst="rect">
+            <a:avLst/>
+          </a:prstGeom>
+          <a:noFill/>
+        </p:spPr>
+        <p:txBody>
+          <a:bodyPr wrap="square" anchor="t">
+            <a:spAutoFit/>
+          </a:bodyPr>
+          <a:lstStyle/>
+          <a:p>
+            <a:pPr algn="l">
+              <a:lnSpc>
+                <a:spcPct val="100000"/>
+              </a:lnSpc>
+              <a:spcAft>
+                <a:spcPts val="300"/>
+              </a:spcAft>
+            </a:pPr>
+            <a:r>
+              <a:rPr sz="1000" b="0">
+                <a:solidFill>
+                  <a:srgbClr val="8C8C8C"/>
+                </a:solidFill>
+                <a:latin typeface="微软雅黑"/>
+                <a:ea typeface="微软雅黑"/>
+              </a:rPr>
+              <a:t>山海行 · 文旅多 Agent 行程规划系统</a:t>
+            </a:r>
+          </a:p>
+        </p:txBody>
+      </p:sp>
+    </p:spTree>
+  </p:cSld>
+  <p:clrMapOvr>
+    <a:masterClrMapping/>
+  </p:clrMapOvr>
+</p:sld>
+</file>
+
+<file path=ppt/slides/slide23.xml><?xml version="1.0" encoding="utf-8"?>
 <p:sld xmlns:a="http://schemas.openxmlformats.org/drawingml/2006/main" xmlns:p="http://schemas.openxmlformats.org/presentationml/2006/main" xmlns:r="http://schemas.openxmlformats.org/officeDocument/2006/relationships">
   <p:cSld>
     <p:bg>
@@ -19549,7 +20706,7 @@
         <p:spPr>
           <a:xfrm>
             <a:off x="822960" y="2560320"/>
-            <a:ext cx="10515600" cy="502920"/>
+            <a:ext cx="10515600" cy="484632"/>
           </a:xfrm>
           <a:prstGeom prst="rect">
             <a:avLst/>
@@ -19593,7 +20750,7 @@
         <p:spPr>
           <a:xfrm>
             <a:off x="822960" y="2560320"/>
-            <a:ext cx="73152" cy="502920"/>
+            <a:ext cx="73152" cy="484632"/>
           </a:xfrm>
           <a:prstGeom prst="rect">
             <a:avLst/>
@@ -19659,7 +20816,7 @@
               </a:spcAft>
             </a:pPr>
             <a:r>
-              <a:rPr sz="1200" b="1">
+              <a:rPr sz="1150" b="1">
                 <a:solidFill>
                   <a:srgbClr val="0A3D91"/>
                 </a:solidFill>
@@ -19702,14 +20859,14 @@
               </a:spcAft>
             </a:pPr>
             <a:r>
-              <a:rPr sz="1050" b="0">
+              <a:rPr sz="1000" b="0">
                 <a:solidFill>
                   <a:srgbClr val="1F2D3D"/>
                 </a:solidFill>
                 <a:latin typeface="微软雅黑"/>
                 <a:ea typeface="微软雅黑"/>
               </a:rPr>
-              <a:t>原始需求(多Agent-2) + 工单7(图记忆+强干预) + 人群适配 + RAG 检索增强 全部落地，验收级完整。</a:t>
+              <a:t>原始需求(多Agent-2) + 工单7(图记忆+强干预) + 人群适配 + RAG 检索增强 + 团建/短时规划 全部落地。</a:t>
             </a:r>
           </a:p>
         </p:txBody>
@@ -19722,8 +20879,8 @@
         </p:nvSpPr>
         <p:spPr>
           <a:xfrm>
-            <a:off x="822960" y="3127248"/>
-            <a:ext cx="10515600" cy="502920"/>
+            <a:off x="822960" y="3108960"/>
+            <a:ext cx="10515600" cy="484632"/>
           </a:xfrm>
           <a:prstGeom prst="rect">
             <a:avLst/>
@@ -19766,8 +20923,8 @@
         </p:nvSpPr>
         <p:spPr>
           <a:xfrm>
-            <a:off x="822960" y="3127248"/>
-            <a:ext cx="73152" cy="502920"/>
+            <a:off x="822960" y="3108960"/>
+            <a:ext cx="73152" cy="484632"/>
           </a:xfrm>
           <a:prstGeom prst="rect">
             <a:avLst/>
@@ -19810,7 +20967,7 @@
         </p:nvSpPr>
         <p:spPr>
           <a:xfrm>
-            <a:off x="1097280" y="3172968"/>
+            <a:off x="1097280" y="3154680"/>
             <a:ext cx="1828800" cy="457200"/>
           </a:xfrm>
           <a:prstGeom prst="rect">
@@ -19833,7 +20990,7 @@
               </a:spcAft>
             </a:pPr>
             <a:r>
-              <a:rPr sz="1200" b="1">
+              <a:rPr sz="1150" b="1">
                 <a:solidFill>
                   <a:srgbClr val="0A3D91"/>
                 </a:solidFill>
@@ -19853,7 +21010,7 @@
         </p:nvSpPr>
         <p:spPr>
           <a:xfrm>
-            <a:off x="2926080" y="3172968"/>
+            <a:off x="2926080" y="3154680"/>
             <a:ext cx="8229600" cy="457200"/>
           </a:xfrm>
           <a:prstGeom prst="rect">
@@ -19876,7 +21033,7 @@
               </a:spcAft>
             </a:pPr>
             <a:r>
-              <a:rPr sz="1050" b="0">
+              <a:rPr sz="1000" b="0">
                 <a:solidFill>
                   <a:srgbClr val="1F2D3D"/>
                 </a:solidFill>
@@ -19896,8 +21053,8 @@
         </p:nvSpPr>
         <p:spPr>
           <a:xfrm>
-            <a:off x="822960" y="3694176"/>
-            <a:ext cx="10515600" cy="502920"/>
+            <a:off x="822960" y="3657600"/>
+            <a:ext cx="10515600" cy="484632"/>
           </a:xfrm>
           <a:prstGeom prst="rect">
             <a:avLst/>
@@ -19940,8 +21097,8 @@
         </p:nvSpPr>
         <p:spPr>
           <a:xfrm>
-            <a:off x="822960" y="3694176"/>
-            <a:ext cx="73152" cy="502920"/>
+            <a:off x="822960" y="3657600"/>
+            <a:ext cx="73152" cy="484632"/>
           </a:xfrm>
           <a:prstGeom prst="rect">
             <a:avLst/>
@@ -19984,7 +21141,7 @@
         </p:nvSpPr>
         <p:spPr>
           <a:xfrm>
-            <a:off x="1097280" y="3739896"/>
+            <a:off x="1097280" y="3703320"/>
             <a:ext cx="1828800" cy="457200"/>
           </a:xfrm>
           <a:prstGeom prst="rect">
@@ -20007,7 +21164,7 @@
               </a:spcAft>
             </a:pPr>
             <a:r>
-              <a:rPr sz="1200" b="1">
+              <a:rPr sz="1150" b="1">
                 <a:solidFill>
                   <a:srgbClr val="0A3D91"/>
                 </a:solidFill>
@@ -20027,7 +21184,7 @@
         </p:nvSpPr>
         <p:spPr>
           <a:xfrm>
-            <a:off x="2926080" y="3739896"/>
+            <a:off x="2926080" y="3703320"/>
             <a:ext cx="8229600" cy="457200"/>
           </a:xfrm>
           <a:prstGeom prst="rect">
@@ -20050,7 +21207,7 @@
               </a:spcAft>
             </a:pPr>
             <a:r>
-              <a:rPr sz="1050" b="0">
+              <a:rPr sz="1000" b="0">
                 <a:solidFill>
                   <a:srgbClr val="1F2D3D"/>
                 </a:solidFill>
@@ -20070,8 +21227,8 @@
         </p:nvSpPr>
         <p:spPr>
           <a:xfrm>
-            <a:off x="822960" y="4261104"/>
-            <a:ext cx="10515600" cy="502920"/>
+            <a:off x="822960" y="4206240"/>
+            <a:ext cx="10515600" cy="484632"/>
           </a:xfrm>
           <a:prstGeom prst="rect">
             <a:avLst/>
@@ -20114,8 +21271,8 @@
         </p:nvSpPr>
         <p:spPr>
           <a:xfrm>
-            <a:off x="822960" y="4261104"/>
-            <a:ext cx="73152" cy="502920"/>
+            <a:off x="822960" y="4206240"/>
+            <a:ext cx="73152" cy="484632"/>
           </a:xfrm>
           <a:prstGeom prst="rect">
             <a:avLst/>
@@ -20158,7 +21315,7 @@
         </p:nvSpPr>
         <p:spPr>
           <a:xfrm>
-            <a:off x="1097280" y="4306824"/>
+            <a:off x="1097280" y="4251960"/>
             <a:ext cx="1828800" cy="457200"/>
           </a:xfrm>
           <a:prstGeom prst="rect">
@@ -20181,7 +21338,7 @@
               </a:spcAft>
             </a:pPr>
             <a:r>
-              <a:rPr sz="1200" b="1">
+              <a:rPr sz="1150" b="1">
                 <a:solidFill>
                   <a:srgbClr val="0A3D91"/>
                 </a:solidFill>
@@ -20201,7 +21358,7 @@
         </p:nvSpPr>
         <p:spPr>
           <a:xfrm>
-            <a:off x="2926080" y="4306824"/>
+            <a:off x="2926080" y="4251960"/>
             <a:ext cx="8229600" cy="457200"/>
           </a:xfrm>
           <a:prstGeom prst="rect">
@@ -20224,14 +21381,14 @@
               </a:spcAft>
             </a:pPr>
             <a:r>
-              <a:rPr sz="1050" b="0">
+              <a:rPr sz="1000" b="0">
                 <a:solidFill>
                   <a:srgbClr val="1F2D3D"/>
                 </a:solidFill>
                 <a:latin typeface="微软雅黑"/>
                 <a:ea typeface="微软雅黑"/>
               </a:rPr>
-              <a:t>pgvector + 混合检索(BM25+向量) + 引用溯源 + 知识库(61 chunk) + 评估(Hit@5=95%) 完整闭环。</a:t>
+              <a:t>pgvector + 混合检索(BM25+向量) + 引用溯源 + 多轮对话 + 知识库(125 chunk) + 评估(Hit@5=95%) 完整闭环。</a:t>
             </a:r>
           </a:p>
         </p:txBody>
@@ -20244,8 +21401,8 @@
         </p:nvSpPr>
         <p:spPr>
           <a:xfrm>
-            <a:off x="822960" y="4828032"/>
-            <a:ext cx="10515600" cy="502920"/>
+            <a:off x="822960" y="4754880"/>
+            <a:ext cx="10515600" cy="484632"/>
           </a:xfrm>
           <a:prstGeom prst="rect">
             <a:avLst/>
@@ -20288,8 +21445,8 @@
         </p:nvSpPr>
         <p:spPr>
           <a:xfrm>
-            <a:off x="822960" y="4828032"/>
-            <a:ext cx="73152" cy="502920"/>
+            <a:off x="822960" y="4754880"/>
+            <a:ext cx="73152" cy="484632"/>
           </a:xfrm>
           <a:prstGeom prst="rect">
             <a:avLst/>
@@ -20332,7 +21489,7 @@
         </p:nvSpPr>
         <p:spPr>
           <a:xfrm>
-            <a:off x="1097280" y="4873752"/>
+            <a:off x="1097280" y="4800600"/>
             <a:ext cx="1828800" cy="457200"/>
           </a:xfrm>
           <a:prstGeom prst="rect">
@@ -20355,14 +21512,14 @@
               </a:spcAft>
             </a:pPr>
             <a:r>
-              <a:rPr sz="1200" b="1">
+              <a:rPr sz="1150" b="1">
                 <a:solidFill>
                   <a:srgbClr val="0A3D91"/>
                 </a:solidFill>
                 <a:latin typeface="微软雅黑"/>
                 <a:ea typeface="微软雅黑"/>
               </a:rPr>
-              <a:t>交互体验</a:t>
+              <a:t>业务覆盖</a:t>
             </a:r>
           </a:p>
         </p:txBody>
@@ -20375,7 +21532,7 @@
         </p:nvSpPr>
         <p:spPr>
           <a:xfrm>
-            <a:off x="2926080" y="4873752"/>
+            <a:off x="2926080" y="4800600"/>
             <a:ext cx="8229600" cy="457200"/>
           </a:xfrm>
           <a:prstGeom prst="rect">
@@ -20398,14 +21555,14 @@
               </a:spcAft>
             </a:pPr>
             <a:r>
-              <a:rPr sz="1050" b="0">
+              <a:rPr sz="1000" b="0">
                 <a:solidFill>
                   <a:srgbClr val="1F2D3D"/>
                 </a:solidFill>
                 <a:latin typeface="微软雅黑"/>
                 <a:ea typeface="微软雅黑"/>
               </a:rPr>
-              <a:t>三种创建方式(表单/语音/对话) + 高德地图总览(按天分组+路线连线) + 11 国语言。</a:t>
+              <a:t>旅游(4种创建方式) + 团建(6类) + 智能问答 + 经典线路模板 + 行程复制复用，覆盖旅行社全场景。</a:t>
             </a:r>
           </a:p>
         </p:txBody>
@@ -20418,8 +21575,8 @@
         </p:nvSpPr>
         <p:spPr>
           <a:xfrm>
-            <a:off x="822960" y="5394960"/>
-            <a:ext cx="10515600" cy="502920"/>
+            <a:off x="822960" y="5303520"/>
+            <a:ext cx="10515600" cy="484632"/>
           </a:xfrm>
           <a:prstGeom prst="rect">
             <a:avLst/>
@@ -20462,8 +21619,8 @@
         </p:nvSpPr>
         <p:spPr>
           <a:xfrm>
-            <a:off x="822960" y="5394960"/>
-            <a:ext cx="73152" cy="502920"/>
+            <a:off x="822960" y="5303520"/>
+            <a:ext cx="73152" cy="484632"/>
           </a:xfrm>
           <a:prstGeom prst="rect">
             <a:avLst/>
@@ -20506,7 +21663,7 @@
         </p:nvSpPr>
         <p:spPr>
           <a:xfrm>
-            <a:off x="1097280" y="5440680"/>
+            <a:off x="1097280" y="5349240"/>
             <a:ext cx="1828800" cy="457200"/>
           </a:xfrm>
           <a:prstGeom prst="rect">
@@ -20529,7 +21686,7 @@
               </a:spcAft>
             </a:pPr>
             <a:r>
-              <a:rPr sz="1200" b="1">
+              <a:rPr sz="1150" b="1">
                 <a:solidFill>
                   <a:srgbClr val="0A3D91"/>
                 </a:solidFill>
@@ -20549,7 +21706,7 @@
         </p:nvSpPr>
         <p:spPr>
           <a:xfrm>
-            <a:off x="2926080" y="5440680"/>
+            <a:off x="2926080" y="5349240"/>
             <a:ext cx="8229600" cy="457200"/>
           </a:xfrm>
           <a:prstGeom prst="rect">
@@ -20572,7 +21729,7 @@
               </a:spcAft>
             </a:pPr>
             <a:r>
-              <a:rPr sz="1050" b="0">
+              <a:rPr sz="1000" b="0">
                 <a:solidFill>
                   <a:srgbClr val="1F2D3D"/>
                 </a:solidFill>
@@ -20592,8 +21749,8 @@
         </p:nvSpPr>
         <p:spPr>
           <a:xfrm>
-            <a:off x="822960" y="5961888"/>
-            <a:ext cx="10515600" cy="502920"/>
+            <a:off x="822960" y="5852160"/>
+            <a:ext cx="10515600" cy="484632"/>
           </a:xfrm>
           <a:prstGeom prst="rect">
             <a:avLst/>
@@ -20636,8 +21793,8 @@
         </p:nvSpPr>
         <p:spPr>
           <a:xfrm>
-            <a:off x="822960" y="5961888"/>
-            <a:ext cx="73152" cy="502920"/>
+            <a:off x="822960" y="5852160"/>
+            <a:ext cx="73152" cy="484632"/>
           </a:xfrm>
           <a:prstGeom prst="rect">
             <a:avLst/>
@@ -20680,7 +21837,7 @@
         </p:nvSpPr>
         <p:spPr>
           <a:xfrm>
-            <a:off x="1097280" y="6007608"/>
+            <a:off x="1097280" y="5897880"/>
             <a:ext cx="1828800" cy="457200"/>
           </a:xfrm>
           <a:prstGeom prst="rect">
@@ -20703,7 +21860,7 @@
               </a:spcAft>
             </a:pPr>
             <a:r>
-              <a:rPr sz="1200" b="1">
+              <a:rPr sz="1150" b="1">
                 <a:solidFill>
                   <a:srgbClr val="0A3D91"/>
                 </a:solidFill>
@@ -20723,7 +21880,7 @@
         </p:nvSpPr>
         <p:spPr>
           <a:xfrm>
-            <a:off x="2926080" y="6007608"/>
+            <a:off x="2926080" y="5897880"/>
             <a:ext cx="8229600" cy="457200"/>
           </a:xfrm>
           <a:prstGeom prst="rect">
@@ -20746,14 +21903,14 @@
               </a:spcAft>
             </a:pPr>
             <a:r>
-              <a:rPr sz="1050" b="0">
+              <a:rPr sz="1000" b="0">
                 <a:solidFill>
                   <a:srgbClr val="1F2D3D"/>
                 </a:solidFill>
                 <a:latin typeface="微软雅黑"/>
                 <a:ea typeface="微软雅黑"/>
               </a:rPr>
-              <a:t>断点续传 + HITL + 图记忆 + 强干预 + 安全 + 人群适配 + RAG，七维完整。</a:t>
+              <a:t>断点续传 + HITL + 图记忆 + 强干预 + 安全 + 人群适配 + RAG + 团建，八维完整。</a:t>
             </a:r>
           </a:p>
         </p:txBody>
@@ -20796,7 +21953,7 @@
                 <a:latin typeface="微软雅黑"/>
                 <a:ea typeface="微软雅黑"/>
               </a:rPr>
-              <a:t>22/22</a:t>
+              <a:t>23/23</a:t>
             </a:r>
           </a:p>
         </p:txBody>
@@ -21735,7 +22892,7 @@
                 <a:latin typeface="微软雅黑"/>
                 <a:ea typeface="微软雅黑"/>
               </a:rPr>
-              <a:t>3/22</a:t>
+              <a:t>3/23</a:t>
             </a:r>
           </a:p>
         </p:txBody>
@@ -23196,7 +24353,7 @@
                 <a:latin typeface="微软雅黑"/>
                 <a:ea typeface="微软雅黑"/>
               </a:rPr>
-              <a:t>4/22</a:t>
+              <a:t>4/23</a:t>
             </a:r>
           </a:p>
         </p:txBody>
@@ -24483,7 +25640,7 @@
                 <a:latin typeface="微软雅黑"/>
                 <a:ea typeface="微软雅黑"/>
               </a:rPr>
-              <a:t>5/22</a:t>
+              <a:t>5/23</a:t>
             </a:r>
           </a:p>
         </p:txBody>
@@ -25422,7 +26579,7 @@
                 <a:latin typeface="微软雅黑"/>
                 <a:ea typeface="微软雅黑"/>
               </a:rPr>
-              <a:t>6/22</a:t>
+              <a:t>6/23</a:t>
             </a:r>
           </a:p>
         </p:txBody>
@@ -26187,7 +27344,7 @@
                 <a:latin typeface="微软雅黑"/>
                 <a:ea typeface="微软雅黑"/>
               </a:rPr>
-              <a:t>7/22</a:t>
+              <a:t>7/23</a:t>
             </a:r>
           </a:p>
         </p:txBody>
@@ -27822,7 +28979,7 @@
                 <a:latin typeface="微软雅黑"/>
                 <a:ea typeface="微软雅黑"/>
               </a:rPr>
-              <a:t>8/22</a:t>
+              <a:t>8/23</a:t>
             </a:r>
           </a:p>
         </p:txBody>
@@ -29109,7 +30266,7 @@
                 <a:latin typeface="微软雅黑"/>
                 <a:ea typeface="微软雅黑"/>
               </a:rPr>
-              <a:t>9/22</a:t>
+              <a:t>9/23</a:t>
             </a:r>
           </a:p>
         </p:txBody>

--- a/docs/项目讲解.pptx
+++ b/docs/项目讲解.pptx
@@ -3118,33 +3118,9 @@
         <p:nvPr/>
       </p:nvGrpSpPr>
       <p:grpSpPr/>
-      <p:pic>
-        <p:nvPicPr>
-          <p:cNvPr id="2" name="Picture 1" descr="login-bg.png"/>
-          <p:cNvPicPr>
-            <a:picLocks noChangeAspect="1"/>
-          </p:cNvPicPr>
-          <p:nvPr/>
-        </p:nvPicPr>
-        <p:blipFill>
-          <a:blip r:embed="rId2"/>
-          <a:stretch>
-            <a:fillRect/>
-          </a:stretch>
-        </p:blipFill>
-        <p:spPr>
-          <a:xfrm>
-            <a:off x="0" y="0"/>
-            <a:ext cx="12191695" cy="6858000"/>
-          </a:xfrm>
-          <a:prstGeom prst="rect">
-            <a:avLst/>
-          </a:prstGeom>
-        </p:spPr>
-      </p:pic>
-      <p:sp>
-        <p:nvSpPr>
-          <p:cNvPr id="3" name="Rectangle 2"/>
+      <p:sp>
+        <p:nvSpPr>
+          <p:cNvPr id="2" name="Rectangle 1"/>
           <p:cNvSpPr/>
           <p:nvPr/>
         </p:nvSpPr>
@@ -3188,7 +3164,7 @@
       </p:sp>
       <p:sp>
         <p:nvSpPr>
-          <p:cNvPr id="4" name="TextBox 3"/>
+          <p:cNvPr id="3" name="TextBox 2"/>
           <p:cNvSpPr txBox="1"/>
           <p:nvPr/>
         </p:nvSpPr>
@@ -3231,7 +3207,7 @@
       </p:sp>
       <p:sp>
         <p:nvSpPr>
-          <p:cNvPr id="5" name="TextBox 4"/>
+          <p:cNvPr id="4" name="TextBox 3"/>
           <p:cNvSpPr txBox="1"/>
           <p:nvPr/>
         </p:nvSpPr>
@@ -3274,7 +3250,7 @@
       </p:sp>
       <p:sp>
         <p:nvSpPr>
-          <p:cNvPr id="6" name="TextBox 5"/>
+          <p:cNvPr id="5" name="TextBox 4"/>
           <p:cNvSpPr txBox="1"/>
           <p:nvPr/>
         </p:nvSpPr>
@@ -3317,7 +3293,7 @@
       </p:sp>
       <p:sp>
         <p:nvSpPr>
-          <p:cNvPr id="7" name="TextBox 6"/>
+          <p:cNvPr id="6" name="TextBox 5"/>
           <p:cNvSpPr txBox="1"/>
           <p:nvPr/>
         </p:nvSpPr>
@@ -13563,7 +13539,7 @@
                 <a:latin typeface="微软雅黑"/>
                 <a:ea typeface="微软雅黑"/>
               </a:rPr>
-              <a:t>eval_retrieval.py 跑 20 条测试集：Hit@5=95%、MRR=0.792（系统化评估，非口头宣称）。</a:t>
+              <a:t>eval_retrieval.py 跑 52 条测试集（覆盖 24 篇语料，含语义换问法）：Hit@5=98.1%、MRR=0.905（系统化评估，非口头宣称）。</a:t>
             </a:r>
           </a:p>
         </p:txBody>
@@ -19032,7 +19008,7 @@
                 <a:latin typeface="微软雅黑"/>
                 <a:ea typeface="微软雅黑"/>
               </a:rPr>
-              <a:t>eval_retrieval.py 跑 20 条测试集，计算 Hit@k/MRR：Hit@5=95%、MRR=0.792，系统化可复现，非口头宣称。</a:t>
+              <a:t>eval_retrieval.py 跑 52 条测试集，计算 Hit@k/MRR：Hit@5=98.1%、MRR=0.905，系统化可复现，非口头宣称。</a:t>
             </a:r>
           </a:p>
         </p:txBody>
@@ -21388,7 +21364,7 @@
                 <a:latin typeface="微软雅黑"/>
                 <a:ea typeface="微软雅黑"/>
               </a:rPr>
-              <a:t>pgvector + 混合检索(BM25+向量) + 引用溯源 + 多轮对话 + 知识库(125 chunk) + 评估(Hit@5=95%) 完整闭环。</a:t>
+              <a:t>pgvector + 混合检索(BM25+向量) + 引用溯源 + 多轮对话 + 知识库(24篇/181 chunk) + 评估(Hit@5=98.1%) 完整闭环。</a:t>
             </a:r>
           </a:p>
         </p:txBody>

--- a/docs/项目讲解.pptx
+++ b/docs/项目讲解.pptx
@@ -8217,7 +8217,7 @@
                 <a:latin typeface="微软雅黑"/>
                 <a:ea typeface="微软雅黑"/>
               </a:rPr>
-              <a:t>document_chunks（10篇语料，61 chunk，Vector 768，含景点/美食/政策/季节/交通/住宿/注意事项）。</a:t>
+              <a:t>document_chunks（30篇语料，513 chunk，Vector 768，含城市速览/景点/美食/政策/季节/交通/住宿/注意事项）。</a:t>
             </a:r>
           </a:p>
         </p:txBody>
@@ -13539,7 +13539,7 @@
                 <a:latin typeface="微软雅黑"/>
                 <a:ea typeface="微软雅黑"/>
               </a:rPr>
-              <a:t>eval_retrieval.py 跑 52 条测试集（覆盖 24 篇语料，含语义换问法）：Hit@5=98.1%、MRR=0.905（系统化评估，非口头宣称）。</a:t>
+              <a:t>eval_retrieval.py 跑 58 条测试集（覆盖 30 篇语料，含语义换问法）：Hit@5=100%、MRR=0.892（系统化评估，非口头宣称）。</a:t>
             </a:r>
           </a:p>
         </p:txBody>
@@ -18243,7 +18243,7 @@
                 <a:latin typeface="微软雅黑"/>
                 <a:ea typeface="微软雅黑"/>
               </a:rPr>
-              <a:t>document_chunks 表存 10 篇语料、61 个分块、7 类(景点/美食/政策/季节/交通/住宿/注意事项)，全部 768 维真向量。</a:t>
+              <a:t>document_chunks 表存 30 篇语料、513 个分块（全国地级市 353 城速览 + 7 类主题语料），全部 768 维真向量。</a:t>
             </a:r>
           </a:p>
         </p:txBody>
@@ -19008,7 +19008,7 @@
                 <a:latin typeface="微软雅黑"/>
                 <a:ea typeface="微软雅黑"/>
               </a:rPr>
-              <a:t>eval_retrieval.py 跑 52 条测试集，计算 Hit@k/MRR：Hit@5=98.1%、MRR=0.905，系统化可复现，非口头宣称。</a:t>
+              <a:t>eval_retrieval.py 跑 58 条测试集，计算 Hit@k/MRR：Hit@5=100%、MRR=0.892，系统化可复现，非口头宣称。</a:t>
             </a:r>
           </a:p>
         </p:txBody>
@@ -21364,7 +21364,7 @@
                 <a:latin typeface="微软雅黑"/>
                 <a:ea typeface="微软雅黑"/>
               </a:rPr>
-              <a:t>pgvector + 混合检索(BM25+向量) + 引用溯源 + 多轮对话 + 知识库(24篇/181 chunk) + 评估(Hit@5=98.1%) 完整闭环。</a:t>
+              <a:t>pgvector + 混合检索(BM25+向量) + 引用溯源 + 多轮对话 + 知识库(30篇/513 chunk，全国地级市353城) + 评估(Hit@5=100%) 完整闭环。</a:t>
             </a:r>
           </a:p>
         </p:txBody>
